--- a/slides/4_statistical_inference.pptx
+++ b/slides/4_statistical_inference.pptx
@@ -6,36 +6,31 @@
     <p:sldMasterId id="2147483660" r:id="rId2"/>
   </p:sldMasterIdLst>
   <p:notesMasterIdLst>
-    <p:notesMasterId r:id="rId30"/>
+    <p:notesMasterId r:id="rId25"/>
   </p:notesMasterIdLst>
   <p:sldIdLst>
     <p:sldId id="256" r:id="rId3"/>
     <p:sldId id="265" r:id="rId4"/>
     <p:sldId id="678" r:id="rId5"/>
-    <p:sldId id="679" r:id="rId6"/>
-    <p:sldId id="680" r:id="rId7"/>
-    <p:sldId id="681" r:id="rId8"/>
-    <p:sldId id="682" r:id="rId9"/>
-    <p:sldId id="683" r:id="rId10"/>
-    <p:sldId id="684" r:id="rId11"/>
-    <p:sldId id="263" r:id="rId12"/>
-    <p:sldId id="662" r:id="rId13"/>
-    <p:sldId id="654" r:id="rId14"/>
-    <p:sldId id="264" r:id="rId15"/>
-    <p:sldId id="272" r:id="rId16"/>
-    <p:sldId id="685" r:id="rId17"/>
-    <p:sldId id="686" r:id="rId18"/>
+    <p:sldId id="681" r:id="rId6"/>
+    <p:sldId id="682" r:id="rId7"/>
+    <p:sldId id="683" r:id="rId8"/>
+    <p:sldId id="684" r:id="rId9"/>
+    <p:sldId id="263" r:id="rId10"/>
+    <p:sldId id="662" r:id="rId11"/>
+    <p:sldId id="654" r:id="rId12"/>
+    <p:sldId id="264" r:id="rId13"/>
+    <p:sldId id="272" r:id="rId14"/>
+    <p:sldId id="686" r:id="rId15"/>
+    <p:sldId id="670" r:id="rId16"/>
+    <p:sldId id="669" r:id="rId17"/>
+    <p:sldId id="284" r:id="rId18"/>
     <p:sldId id="633" r:id="rId19"/>
     <p:sldId id="687" r:id="rId20"/>
     <p:sldId id="688" r:id="rId21"/>
-    <p:sldId id="689" r:id="rId22"/>
-    <p:sldId id="690" r:id="rId23"/>
-    <p:sldId id="691" r:id="rId24"/>
-    <p:sldId id="692" r:id="rId25"/>
-    <p:sldId id="693" r:id="rId26"/>
-    <p:sldId id="694" r:id="rId27"/>
-    <p:sldId id="695" r:id="rId28"/>
-    <p:sldId id="696" r:id="rId29"/>
+    <p:sldId id="693" r:id="rId22"/>
+    <p:sldId id="694" r:id="rId23"/>
+    <p:sldId id="695" r:id="rId24"/>
   </p:sldIdLst>
   <p:sldSz cx="12192000" cy="6858000"/>
   <p:notesSz cx="6858000" cy="9144000"/>
@@ -224,7 +219,7 @@
           <a:p>
             <a:fld id="{FA7C66C9-5AC4-D143-AC41-EFC203E0D535}" type="datetimeFigureOut">
               <a:rPr lang="en-DE" smtClean="0"/>
-              <a:t>3/8/26</a:t>
+              <a:t>4/16/26</a:t>
             </a:fld>
             <a:endParaRPr lang="en-DE"/>
           </a:p>
@@ -641,7 +636,7 @@
           <a:p>
             <a:fld id="{79012DCE-6557-4F4C-9EF2-71954FC5C5C0}" type="datetime1">
               <a:rPr lang="de-DE" smtClean="0"/>
-              <a:t>08.03.26</a:t>
+              <a:t>16.04.26</a:t>
             </a:fld>
             <a:endParaRPr lang="en-DE"/>
           </a:p>
@@ -841,7 +836,7 @@
           <a:p>
             <a:fld id="{61E0504E-081E-2244-82EF-59857EECA44C}" type="datetime1">
               <a:rPr lang="de-DE" smtClean="0"/>
-              <a:t>08.03.26</a:t>
+              <a:t>16.04.26</a:t>
             </a:fld>
             <a:endParaRPr lang="en-DE"/>
           </a:p>
@@ -1051,7 +1046,7 @@
           <a:p>
             <a:fld id="{F05F15A8-F6C0-3340-9E29-5B7EE8A425EE}" type="datetime1">
               <a:rPr lang="de-DE" smtClean="0"/>
-              <a:t>08.03.26</a:t>
+              <a:t>16.04.26</a:t>
             </a:fld>
             <a:endParaRPr lang="en-DE"/>
           </a:p>
@@ -1273,7 +1268,7 @@
           <a:p>
             <a:fld id="{7128456D-5ACD-4673-BCE9-52505EC32CEF}" type="datetime1">
               <a:rPr lang="en-GB" smtClean="0"/>
-              <a:t>08/03/2026</a:t>
+              <a:t>16/04/2026</a:t>
             </a:fld>
             <a:endParaRPr lang="en-GB"/>
           </a:p>
@@ -1473,7 +1468,7 @@
           <a:p>
             <a:fld id="{0B763083-041D-491F-A9FE-D51D99E0B41E}" type="datetime1">
               <a:rPr lang="en-GB" smtClean="0"/>
-              <a:t>08/03/2026</a:t>
+              <a:t>16/04/2026</a:t>
             </a:fld>
             <a:endParaRPr lang="en-GB"/>
           </a:p>
@@ -1749,7 +1744,7 @@
           <a:p>
             <a:fld id="{409455E6-A1CA-4CB6-9964-88D5086DA5CA}" type="datetime1">
               <a:rPr lang="en-GB" smtClean="0"/>
-              <a:t>08/03/2026</a:t>
+              <a:t>16/04/2026</a:t>
             </a:fld>
             <a:endParaRPr lang="en-GB"/>
           </a:p>
@@ -2017,7 +2012,7 @@
           <a:p>
             <a:fld id="{FAD82E38-24C1-4A8F-B916-1E714FC129DD}" type="datetime1">
               <a:rPr lang="en-GB" smtClean="0"/>
-              <a:t>08/03/2026</a:t>
+              <a:t>16/04/2026</a:t>
             </a:fld>
             <a:endParaRPr lang="en-GB"/>
           </a:p>
@@ -2432,7 +2427,7 @@
           <a:p>
             <a:fld id="{BC17BCDC-BAA6-44B5-B642-6F28D623ABB1}" type="datetime1">
               <a:rPr lang="en-GB" smtClean="0"/>
-              <a:t>08/03/2026</a:t>
+              <a:t>16/04/2026</a:t>
             </a:fld>
             <a:endParaRPr lang="en-GB"/>
           </a:p>
@@ -2574,7 +2569,7 @@
           <a:p>
             <a:fld id="{01D4BEC3-2CF9-4B19-A0A5-E70A0675B677}" type="datetime1">
               <a:rPr lang="en-GB" smtClean="0"/>
-              <a:t>08/03/2026</a:t>
+              <a:t>16/04/2026</a:t>
             </a:fld>
             <a:endParaRPr lang="en-GB"/>
           </a:p>
@@ -2687,7 +2682,7 @@
           <a:p>
             <a:fld id="{98E28BFD-B06D-4A45-8453-724AC7BA29C5}" type="datetime1">
               <a:rPr lang="en-GB" smtClean="0"/>
-              <a:t>08/03/2026</a:t>
+              <a:t>16/04/2026</a:t>
             </a:fld>
             <a:endParaRPr lang="en-GB"/>
           </a:p>
@@ -3000,7 +2995,7 @@
           <a:p>
             <a:fld id="{A14D99B0-2926-4194-B668-6A0D6123824C}" type="datetime1">
               <a:rPr lang="en-GB" smtClean="0"/>
-              <a:t>08/03/2026</a:t>
+              <a:t>16/04/2026</a:t>
             </a:fld>
             <a:endParaRPr lang="en-GB"/>
           </a:p>
@@ -3200,7 +3195,7 @@
           <a:p>
             <a:fld id="{8CB0C701-1A57-C948-B28D-AF931FF78AF3}" type="datetime1">
               <a:rPr lang="de-DE" smtClean="0"/>
-              <a:t>08.03.26</a:t>
+              <a:t>16.04.26</a:t>
             </a:fld>
             <a:endParaRPr lang="en-DE"/>
           </a:p>
@@ -3489,7 +3484,7 @@
           <a:p>
             <a:fld id="{29F03426-21FD-40F4-9F0B-AD19F2317DCA}" type="datetime1">
               <a:rPr lang="en-GB" smtClean="0"/>
-              <a:t>08/03/2026</a:t>
+              <a:t>16/04/2026</a:t>
             </a:fld>
             <a:endParaRPr lang="en-GB"/>
           </a:p>
@@ -3689,7 +3684,7 @@
           <a:p>
             <a:fld id="{D99A2639-5270-4811-807B-89D4AE95E7ED}" type="datetime1">
               <a:rPr lang="en-GB" smtClean="0"/>
-              <a:t>08/03/2026</a:t>
+              <a:t>16/04/2026</a:t>
             </a:fld>
             <a:endParaRPr lang="en-GB"/>
           </a:p>
@@ -3899,7 +3894,7 @@
           <a:p>
             <a:fld id="{B552976C-D408-4E27-8D02-D7795F6D8A01}" type="datetime1">
               <a:rPr lang="en-GB" smtClean="0"/>
-              <a:t>08/03/2026</a:t>
+              <a:t>16/04/2026</a:t>
             </a:fld>
             <a:endParaRPr lang="en-GB"/>
           </a:p>
@@ -4175,7 +4170,7 @@
           <a:p>
             <a:fld id="{8FBF2D68-AC2E-EA4A-974C-16395F5BD9DD}" type="datetime1">
               <a:rPr lang="de-DE" smtClean="0"/>
-              <a:t>08.03.26</a:t>
+              <a:t>16.04.26</a:t>
             </a:fld>
             <a:endParaRPr lang="en-DE"/>
           </a:p>
@@ -4443,7 +4438,7 @@
           <a:p>
             <a:fld id="{CB7C9811-4ACB-234E-BFAA-6F05033E0D52}" type="datetime1">
               <a:rPr lang="de-DE" smtClean="0"/>
-              <a:t>08.03.26</a:t>
+              <a:t>16.04.26</a:t>
             </a:fld>
             <a:endParaRPr lang="en-DE"/>
           </a:p>
@@ -4858,7 +4853,7 @@
           <a:p>
             <a:fld id="{F98A557C-09A3-C548-BB01-1F0212DED143}" type="datetime1">
               <a:rPr lang="de-DE" smtClean="0"/>
-              <a:t>08.03.26</a:t>
+              <a:t>16.04.26</a:t>
             </a:fld>
             <a:endParaRPr lang="en-DE"/>
           </a:p>
@@ -5000,7 +4995,7 @@
           <a:p>
             <a:fld id="{60486379-B67D-864C-959F-C9FC3FCCE377}" type="datetime1">
               <a:rPr lang="de-DE" smtClean="0"/>
-              <a:t>08.03.26</a:t>
+              <a:t>16.04.26</a:t>
             </a:fld>
             <a:endParaRPr lang="en-DE"/>
           </a:p>
@@ -5113,7 +5108,7 @@
           <a:p>
             <a:fld id="{062DF66D-D36A-554E-ABAF-BAB3214E8E46}" type="datetime1">
               <a:rPr lang="de-DE" smtClean="0"/>
-              <a:t>08.03.26</a:t>
+              <a:t>16.04.26</a:t>
             </a:fld>
             <a:endParaRPr lang="en-DE"/>
           </a:p>
@@ -5426,7 +5421,7 @@
           <a:p>
             <a:fld id="{638488A7-13F1-C747-8421-8AD2AC70E301}" type="datetime1">
               <a:rPr lang="de-DE" smtClean="0"/>
-              <a:t>08.03.26</a:t>
+              <a:t>16.04.26</a:t>
             </a:fld>
             <a:endParaRPr lang="en-DE"/>
           </a:p>
@@ -5715,7 +5710,7 @@
           <a:p>
             <a:fld id="{2EDFD949-D71E-274F-984C-986551850ABF}" type="datetime1">
               <a:rPr lang="de-DE" smtClean="0"/>
-              <a:t>08.03.26</a:t>
+              <a:t>16.04.26</a:t>
             </a:fld>
             <a:endParaRPr lang="en-DE"/>
           </a:p>
@@ -5958,7 +5953,7 @@
           <a:p>
             <a:fld id="{2FAC0196-C149-3543-A854-7AE4E991F7BB}" type="datetime1">
               <a:rPr lang="de-DE" smtClean="0"/>
-              <a:t>08.03.26</a:t>
+              <a:t>16.04.26</a:t>
             </a:fld>
             <a:endParaRPr lang="en-DE"/>
           </a:p>
@@ -6529,7 +6524,7 @@
           <a:p>
             <a:fld id="{0369896D-5D36-4D31-A0CE-0C2BFB17B225}" type="datetime1">
               <a:rPr lang="en-GB" smtClean="0"/>
-              <a:t>08/03/2026</a:t>
+              <a:t>16/04/2026</a:t>
             </a:fld>
             <a:endParaRPr lang="en-GB"/>
           </a:p>
@@ -7019,1457 +7014,6 @@
 </file>
 
 <file path=ppt/slides/slide10.xml><?xml version="1.0" encoding="utf-8"?>
-<p:sld xmlns:a="http://schemas.openxmlformats.org/drawingml/2006/main" xmlns:r="http://schemas.openxmlformats.org/officeDocument/2006/relationships" xmlns:p="http://schemas.openxmlformats.org/presentationml/2006/main">
-  <p:cSld>
-    <p:spTree>
-      <p:nvGrpSpPr>
-        <p:cNvPr id="1" name=""/>
-        <p:cNvGrpSpPr/>
-        <p:nvPr/>
-      </p:nvGrpSpPr>
-      <p:grpSpPr>
-        <a:xfrm>
-          <a:off x="0" y="0"/>
-          <a:ext cx="0" cy="0"/>
-          <a:chOff x="0" y="0"/>
-          <a:chExt cx="0" cy="0"/>
-        </a:xfrm>
-      </p:grpSpPr>
-      <p:sp>
-        <p:nvSpPr>
-          <p:cNvPr id="2" name="Title 1">
-            <a:extLst>
-              <a:ext uri="{FF2B5EF4-FFF2-40B4-BE49-F238E27FC236}">
-                <a16:creationId xmlns:a16="http://schemas.microsoft.com/office/drawing/2014/main" id="{E2B90FB9-91D6-8173-1C05-1E9C1494AC01}"/>
-              </a:ext>
-            </a:extLst>
-          </p:cNvPr>
-          <p:cNvSpPr>
-            <a:spLocks noGrp="1"/>
-          </p:cNvSpPr>
-          <p:nvPr>
-            <p:ph type="title"/>
-          </p:nvPr>
-        </p:nvSpPr>
-        <p:spPr/>
-        <p:txBody>
-          <a:bodyPr/>
-          <a:lstStyle/>
-          <a:p>
-            <a:r>
-              <a:rPr lang="en-DE" dirty="0"/>
-              <a:t>Likelihood</a:t>
-            </a:r>
-          </a:p>
-        </p:txBody>
-      </p:sp>
-      <mc:AlternateContent xmlns:mc="http://schemas.openxmlformats.org/markup-compatibility/2006" xmlns:a14="http://schemas.microsoft.com/office/drawing/2010/main">
-        <mc:Choice Requires="a14">
-          <p:sp>
-            <p:nvSpPr>
-              <p:cNvPr id="3" name="Content Placeholder 2">
-                <a:extLst>
-                  <a:ext uri="{FF2B5EF4-FFF2-40B4-BE49-F238E27FC236}">
-                    <a16:creationId xmlns:a16="http://schemas.microsoft.com/office/drawing/2014/main" id="{341C44CC-E2D9-26AA-724C-69454C0871A5}"/>
-                  </a:ext>
-                </a:extLst>
-              </p:cNvPr>
-              <p:cNvSpPr>
-                <a:spLocks noGrp="1"/>
-              </p:cNvSpPr>
-              <p:nvPr>
-                <p:ph idx="1"/>
-              </p:nvPr>
-            </p:nvSpPr>
-            <p:spPr/>
-            <p:txBody>
-              <a:bodyPr>
-                <a:normAutofit/>
-              </a:bodyPr>
-              <a:lstStyle/>
-              <a:p>
-                <a:pPr marL="0" indent="0">
-                  <a:buNone/>
-                </a:pPr>
-                <a:r>
-                  <a:rPr lang="en-GB" sz="2600" dirty="0"/>
-                  <a:t>special objective function: likelihood function </a:t>
-                </a:r>
-                <a14:m>
-                  <m:oMath xmlns:m="http://schemas.openxmlformats.org/officeDocument/2006/math">
-                    <m:r>
-                      <a:rPr lang="en-GB" sz="2600" i="1" smtClean="0">
-                        <a:latin typeface="Cambria Math" panose="02040503050406030204" pitchFamily="18" charset="0"/>
-                        <a:ea typeface="Cambria Math" panose="02040503050406030204" pitchFamily="18" charset="0"/>
-                      </a:rPr>
-                      <m:t>ℒ</m:t>
-                    </m:r>
-                  </m:oMath>
-                </a14:m>
-                <a:endParaRPr lang="en-GB" sz="2600" dirty="0"/>
-              </a:p>
-              <a:p>
-                <a:r>
-                  <a:rPr lang="en-GB" sz="2600" dirty="0"/>
-                  <a:t>value of predicted probability density function (model) at observed target</a:t>
-                </a:r>
-              </a:p>
-              <a:p>
-                <a:r>
-                  <a:rPr lang="en-GB" sz="2600" dirty="0"/>
-                  <a:t>as function of model parameters </a:t>
-                </a:r>
-                <a14:m>
-                  <m:oMath xmlns:m="http://schemas.openxmlformats.org/officeDocument/2006/math">
-                    <m:acc>
-                      <m:accPr>
-                        <m:chr m:val="̂"/>
-                        <m:ctrlPr>
-                          <a:rPr lang="en-GB" sz="2600" b="1" i="1" smtClean="0">
-                            <a:latin typeface="Cambria Math" panose="02040503050406030204" pitchFamily="18" charset="0"/>
-                            <a:ea typeface="Cambria Math" panose="02040503050406030204" pitchFamily="18" charset="0"/>
-                          </a:rPr>
-                        </m:ctrlPr>
-                      </m:accPr>
-                      <m:e>
-                        <m:r>
-                          <a:rPr lang="en-GB" sz="2600" b="1" i="1">
-                            <a:latin typeface="Cambria Math" panose="02040503050406030204" pitchFamily="18" charset="0"/>
-                            <a:ea typeface="Cambria Math" panose="02040503050406030204" pitchFamily="18" charset="0"/>
-                          </a:rPr>
-                          <m:t>𝜽</m:t>
-                        </m:r>
-                      </m:e>
-                    </m:acc>
-                  </m:oMath>
-                </a14:m>
-                <a:endParaRPr lang="en-GB" sz="2600" dirty="0"/>
-              </a:p>
-              <a:p>
-                <a:pPr marL="0" indent="0">
-                  <a:buNone/>
-                </a:pPr>
-                <a:endParaRPr lang="en-US" sz="2600" i="1" dirty="0">
-                  <a:latin typeface="Cambria Math" panose="02040503050406030204" pitchFamily="18" charset="0"/>
-                </a:endParaRPr>
-              </a:p>
-              <a:p>
-                <a:pPr marL="0" indent="0">
-                  <a:buNone/>
-                </a:pPr>
-                <a14:m>
-                  <m:oMathPara xmlns:m="http://schemas.openxmlformats.org/officeDocument/2006/math">
-                    <m:oMathParaPr>
-                      <m:jc m:val="left"/>
-                    </m:oMathParaPr>
-                    <m:oMath xmlns:m="http://schemas.openxmlformats.org/officeDocument/2006/math">
-                      <m:r>
-                        <a:rPr lang="en-GB" sz="2600" i="1">
-                          <a:latin typeface="Cambria Math" panose="02040503050406030204" pitchFamily="18" charset="0"/>
-                          <a:ea typeface="Cambria Math" panose="02040503050406030204" pitchFamily="18" charset="0"/>
-                        </a:rPr>
-                        <m:t>ℒ</m:t>
-                      </m:r>
-                      <m:d>
-                        <m:dPr>
-                          <m:ctrlPr>
-                            <a:rPr lang="en-GB" sz="2600" i="1">
-                              <a:latin typeface="Cambria Math" panose="02040503050406030204" pitchFamily="18" charset="0"/>
-                              <a:ea typeface="Cambria Math" panose="02040503050406030204" pitchFamily="18" charset="0"/>
-                            </a:rPr>
-                          </m:ctrlPr>
-                        </m:dPr>
-                        <m:e>
-                          <m:acc>
-                            <m:accPr>
-                              <m:chr m:val="̂"/>
-                              <m:ctrlPr>
-                                <a:rPr lang="en-GB" sz="2600" i="1" smtClean="0">
-                                  <a:latin typeface="Cambria Math" panose="02040503050406030204" pitchFamily="18" charset="0"/>
-                                  <a:ea typeface="Cambria Math" panose="02040503050406030204" pitchFamily="18" charset="0"/>
-                                </a:rPr>
-                              </m:ctrlPr>
-                            </m:accPr>
-                            <m:e>
-                              <m:r>
-                                <a:rPr lang="en-GB" sz="2600" b="1" i="1">
-                                  <a:latin typeface="Cambria Math" panose="02040503050406030204" pitchFamily="18" charset="0"/>
-                                  <a:ea typeface="Cambria Math" panose="02040503050406030204" pitchFamily="18" charset="0"/>
-                                </a:rPr>
-                                <m:t>𝜽</m:t>
-                              </m:r>
-                            </m:e>
-                          </m:acc>
-                          <m:r>
-                            <a:rPr lang="en-US" sz="2600" i="1">
-                              <a:latin typeface="Cambria Math" panose="02040503050406030204" pitchFamily="18" charset="0"/>
-                              <a:ea typeface="Cambria Math" panose="02040503050406030204" pitchFamily="18" charset="0"/>
-                            </a:rPr>
-                            <m:t>;</m:t>
-                          </m:r>
-                          <m:r>
-                            <a:rPr lang="en-US" sz="2600" b="1" i="1">
-                              <a:latin typeface="Cambria Math" panose="02040503050406030204" pitchFamily="18" charset="0"/>
-                              <a:ea typeface="Cambria Math" panose="02040503050406030204" pitchFamily="18" charset="0"/>
-                            </a:rPr>
-                            <m:t>𝒚</m:t>
-                          </m:r>
-                          <m:r>
-                            <a:rPr lang="en-US" sz="2600" i="1">
-                              <a:latin typeface="Cambria Math" panose="02040503050406030204" pitchFamily="18" charset="0"/>
-                              <a:ea typeface="Cambria Math" panose="02040503050406030204" pitchFamily="18" charset="0"/>
-                            </a:rPr>
-                            <m:t>|</m:t>
-                          </m:r>
-                          <m:r>
-                            <a:rPr lang="en-US" sz="2600" b="1" i="1">
-                              <a:latin typeface="Cambria Math" panose="02040503050406030204" pitchFamily="18" charset="0"/>
-                              <a:ea typeface="Cambria Math" panose="02040503050406030204" pitchFamily="18" charset="0"/>
-                            </a:rPr>
-                            <m:t>𝒙</m:t>
-                          </m:r>
-                        </m:e>
-                      </m:d>
-                      <m:r>
-                        <a:rPr lang="en-US" sz="2600" b="0" i="1" smtClean="0">
-                          <a:latin typeface="Cambria Math" panose="02040503050406030204" pitchFamily="18" charset="0"/>
-                          <a:ea typeface="Cambria Math" panose="02040503050406030204" pitchFamily="18" charset="0"/>
-                        </a:rPr>
-                        <m:t>=</m:t>
-                      </m:r>
-                      <m:r>
-                        <a:rPr lang="en-US" sz="2600" b="0" i="1" smtClean="0">
-                          <a:latin typeface="Cambria Math" panose="02040503050406030204" pitchFamily="18" charset="0"/>
-                        </a:rPr>
-                        <m:t>𝑝</m:t>
-                      </m:r>
-                      <m:d>
-                        <m:dPr>
-                          <m:ctrlPr>
-                            <a:rPr lang="en-US" sz="2600" i="1">
-                              <a:latin typeface="Cambria Math" panose="02040503050406030204" pitchFamily="18" charset="0"/>
-                            </a:rPr>
-                          </m:ctrlPr>
-                        </m:dPr>
-                        <m:e>
-                          <m:r>
-                            <a:rPr lang="en-US" sz="2600" b="1" i="1" smtClean="0">
-                              <a:latin typeface="Cambria Math" panose="02040503050406030204" pitchFamily="18" charset="0"/>
-                            </a:rPr>
-                            <m:t>𝒚</m:t>
-                          </m:r>
-                          <m:r>
-                            <a:rPr lang="en-US" sz="2600" i="1">
-                              <a:latin typeface="Cambria Math" panose="02040503050406030204" pitchFamily="18" charset="0"/>
-                            </a:rPr>
-                            <m:t>|</m:t>
-                          </m:r>
-                          <m:r>
-                            <a:rPr lang="en-US" sz="2600" b="1" i="1" smtClean="0">
-                              <a:latin typeface="Cambria Math" panose="02040503050406030204" pitchFamily="18" charset="0"/>
-                            </a:rPr>
-                            <m:t>𝒙</m:t>
-                          </m:r>
-                          <m:r>
-                            <a:rPr lang="en-US" sz="2600" b="0" i="1" smtClean="0">
-                              <a:latin typeface="Cambria Math" panose="02040503050406030204" pitchFamily="18" charset="0"/>
-                            </a:rPr>
-                            <m:t>;</m:t>
-                          </m:r>
-                          <m:acc>
-                            <m:accPr>
-                              <m:chr m:val="̂"/>
-                              <m:ctrlPr>
-                                <a:rPr lang="en-US" sz="2600" b="1" i="1" smtClean="0">
-                                  <a:latin typeface="Cambria Math" panose="02040503050406030204" pitchFamily="18" charset="0"/>
-                                  <a:ea typeface="Cambria Math" panose="02040503050406030204" pitchFamily="18" charset="0"/>
-                                </a:rPr>
-                              </m:ctrlPr>
-                            </m:accPr>
-                            <m:e>
-                              <m:r>
-                                <a:rPr lang="en-GB" sz="2600" b="1" i="1">
-                                  <a:latin typeface="Cambria Math" panose="02040503050406030204" pitchFamily="18" charset="0"/>
-                                  <a:ea typeface="Cambria Math" panose="02040503050406030204" pitchFamily="18" charset="0"/>
-                                </a:rPr>
-                                <m:t>𝜽</m:t>
-                              </m:r>
-                            </m:e>
-                          </m:acc>
-                        </m:e>
-                      </m:d>
-                    </m:oMath>
-                  </m:oMathPara>
-                </a14:m>
-                <a:endParaRPr lang="en-GB" sz="2600" dirty="0"/>
-              </a:p>
-              <a:p>
-                <a:pPr marL="0" indent="0">
-                  <a:buNone/>
-                </a:pPr>
-                <a:endParaRPr lang="en-GB" sz="2600" dirty="0"/>
-              </a:p>
-              <a:p>
-                <a:pPr marL="0" indent="0">
-                  <a:buNone/>
-                </a:pPr>
-                <a:r>
-                  <a:rPr lang="en-GB" sz="2600" dirty="0"/>
-                  <a:t>a little bit confusing:</a:t>
-                </a:r>
-                <a:endParaRPr lang="en-US" sz="2600" i="1" dirty="0">
-                  <a:latin typeface="Cambria Math" panose="02040503050406030204" pitchFamily="18" charset="0"/>
-                </a:endParaRPr>
-              </a:p>
-              <a:p>
-                <a:pPr marL="0" indent="0">
-                  <a:buNone/>
-                </a:pPr>
-                <a14:m>
-                  <m:oMath xmlns:m="http://schemas.openxmlformats.org/officeDocument/2006/math">
-                    <m:r>
-                      <a:rPr lang="en-US" sz="2600" b="0" i="1" smtClean="0">
-                        <a:latin typeface="Cambria Math" panose="02040503050406030204" pitchFamily="18" charset="0"/>
-                      </a:rPr>
-                      <m:t>𝑝</m:t>
-                    </m:r>
-                    <m:d>
-                      <m:dPr>
-                        <m:ctrlPr>
-                          <a:rPr lang="en-US" sz="2600" i="1">
-                            <a:latin typeface="Cambria Math" panose="02040503050406030204" pitchFamily="18" charset="0"/>
-                          </a:rPr>
-                        </m:ctrlPr>
-                      </m:dPr>
-                      <m:e>
-                        <m:r>
-                          <a:rPr lang="en-US" sz="2600" i="1">
-                            <a:latin typeface="Cambria Math" panose="02040503050406030204" pitchFamily="18" charset="0"/>
-                          </a:rPr>
-                          <m:t>𝑦</m:t>
-                        </m:r>
-                        <m:r>
-                          <a:rPr lang="en-US" sz="2600" i="1">
-                            <a:latin typeface="Cambria Math" panose="02040503050406030204" pitchFamily="18" charset="0"/>
-                          </a:rPr>
-                          <m:t>|</m:t>
-                        </m:r>
-                        <m:r>
-                          <a:rPr lang="en-US" sz="2600" b="1" i="1">
-                            <a:latin typeface="Cambria Math" panose="02040503050406030204" pitchFamily="18" charset="0"/>
-                          </a:rPr>
-                          <m:t>𝒙</m:t>
-                        </m:r>
-                        <m:r>
-                          <a:rPr lang="en-US" sz="2600" b="0" i="1">
-                            <a:latin typeface="Cambria Math" panose="02040503050406030204" pitchFamily="18" charset="0"/>
-                          </a:rPr>
-                          <m:t>;</m:t>
-                        </m:r>
-                        <m:acc>
-                          <m:accPr>
-                            <m:chr m:val="̂"/>
-                            <m:ctrlPr>
-                              <a:rPr lang="en-US" sz="2600" b="1" i="1" smtClean="0">
-                                <a:latin typeface="Cambria Math" panose="02040503050406030204" pitchFamily="18" charset="0"/>
-                                <a:ea typeface="Cambria Math" panose="02040503050406030204" pitchFamily="18" charset="0"/>
-                              </a:rPr>
-                            </m:ctrlPr>
-                          </m:accPr>
-                          <m:e>
-                            <m:r>
-                              <a:rPr lang="en-GB" sz="2600" b="1" i="1">
-                                <a:latin typeface="Cambria Math" panose="02040503050406030204" pitchFamily="18" charset="0"/>
-                                <a:ea typeface="Cambria Math" panose="02040503050406030204" pitchFamily="18" charset="0"/>
-                              </a:rPr>
-                              <m:t>𝜽</m:t>
-                            </m:r>
-                          </m:e>
-                        </m:acc>
-                      </m:e>
-                    </m:d>
-                  </m:oMath>
-                </a14:m>
-                <a:r>
-                  <a:rPr lang="en-GB" sz="2600" dirty="0"/>
-                  <a:t> is conditional density function if function of data with </a:t>
-                </a:r>
-                <a14:m>
-                  <m:oMath xmlns:m="http://schemas.openxmlformats.org/officeDocument/2006/math">
-                    <m:acc>
-                      <m:accPr>
-                        <m:chr m:val="̂"/>
-                        <m:ctrlPr>
-                          <a:rPr lang="en-GB" sz="2600" b="1" i="1" smtClean="0">
-                            <a:latin typeface="Cambria Math" panose="02040503050406030204" pitchFamily="18" charset="0"/>
-                            <a:ea typeface="Cambria Math" panose="02040503050406030204" pitchFamily="18" charset="0"/>
-                          </a:rPr>
-                        </m:ctrlPr>
-                      </m:accPr>
-                      <m:e>
-                        <m:r>
-                          <a:rPr lang="en-GB" sz="2600" b="1" i="1">
-                            <a:latin typeface="Cambria Math" panose="02040503050406030204" pitchFamily="18" charset="0"/>
-                            <a:ea typeface="Cambria Math" panose="02040503050406030204" pitchFamily="18" charset="0"/>
-                          </a:rPr>
-                          <m:t>𝜽</m:t>
-                        </m:r>
-                      </m:e>
-                    </m:acc>
-                  </m:oMath>
-                </a14:m>
-                <a:r>
-                  <a:rPr lang="en-GB" sz="2600" dirty="0"/>
-                  <a:t> fixed</a:t>
-                </a:r>
-              </a:p>
-              <a:p>
-                <a:pPr marL="0" indent="0">
-                  <a:buNone/>
-                </a:pPr>
-                <a14:m>
-                  <m:oMath xmlns:m="http://schemas.openxmlformats.org/officeDocument/2006/math">
-                    <m:r>
-                      <a:rPr lang="en-US" sz="2600" b="0" i="1" smtClean="0">
-                        <a:latin typeface="Cambria Math" panose="02040503050406030204" pitchFamily="18" charset="0"/>
-                      </a:rPr>
-                      <m:t>𝑝</m:t>
-                    </m:r>
-                    <m:d>
-                      <m:dPr>
-                        <m:ctrlPr>
-                          <a:rPr lang="en-US" sz="2600" i="1">
-                            <a:latin typeface="Cambria Math" panose="02040503050406030204" pitchFamily="18" charset="0"/>
-                          </a:rPr>
-                        </m:ctrlPr>
-                      </m:dPr>
-                      <m:e>
-                        <m:r>
-                          <a:rPr lang="en-US" sz="2600" i="1">
-                            <a:latin typeface="Cambria Math" panose="02040503050406030204" pitchFamily="18" charset="0"/>
-                          </a:rPr>
-                          <m:t>𝑦</m:t>
-                        </m:r>
-                        <m:r>
-                          <a:rPr lang="en-US" sz="2600" i="1">
-                            <a:latin typeface="Cambria Math" panose="02040503050406030204" pitchFamily="18" charset="0"/>
-                          </a:rPr>
-                          <m:t>|</m:t>
-                        </m:r>
-                        <m:r>
-                          <a:rPr lang="en-US" sz="2600" b="1" i="1">
-                            <a:latin typeface="Cambria Math" panose="02040503050406030204" pitchFamily="18" charset="0"/>
-                          </a:rPr>
-                          <m:t>𝒙</m:t>
-                        </m:r>
-                        <m:r>
-                          <a:rPr lang="en-US" sz="2600" b="0" i="1">
-                            <a:latin typeface="Cambria Math" panose="02040503050406030204" pitchFamily="18" charset="0"/>
-                          </a:rPr>
-                          <m:t>;</m:t>
-                        </m:r>
-                        <m:acc>
-                          <m:accPr>
-                            <m:chr m:val="̂"/>
-                            <m:ctrlPr>
-                              <a:rPr lang="en-US" sz="2600" b="1" i="1" smtClean="0">
-                                <a:latin typeface="Cambria Math" panose="02040503050406030204" pitchFamily="18" charset="0"/>
-                                <a:ea typeface="Cambria Math" panose="02040503050406030204" pitchFamily="18" charset="0"/>
-                              </a:rPr>
-                            </m:ctrlPr>
-                          </m:accPr>
-                          <m:e>
-                            <m:r>
-                              <a:rPr lang="en-GB" sz="2600" b="1" i="1">
-                                <a:latin typeface="Cambria Math" panose="02040503050406030204" pitchFamily="18" charset="0"/>
-                                <a:ea typeface="Cambria Math" panose="02040503050406030204" pitchFamily="18" charset="0"/>
-                              </a:rPr>
-                              <m:t>𝜽</m:t>
-                            </m:r>
-                          </m:e>
-                        </m:acc>
-                      </m:e>
-                    </m:d>
-                  </m:oMath>
-                </a14:m>
-                <a:r>
-                  <a:rPr lang="en-GB" sz="2600" dirty="0"/>
-                  <a:t> is conditional likelihood function if function of </a:t>
-                </a:r>
-                <a14:m>
-                  <m:oMath xmlns:m="http://schemas.openxmlformats.org/officeDocument/2006/math">
-                    <m:acc>
-                      <m:accPr>
-                        <m:chr m:val="̂"/>
-                        <m:ctrlPr>
-                          <a:rPr lang="en-GB" sz="2600" b="1" i="1" smtClean="0">
-                            <a:latin typeface="Cambria Math" panose="02040503050406030204" pitchFamily="18" charset="0"/>
-                            <a:ea typeface="Cambria Math" panose="02040503050406030204" pitchFamily="18" charset="0"/>
-                          </a:rPr>
-                        </m:ctrlPr>
-                      </m:accPr>
-                      <m:e>
-                        <m:r>
-                          <a:rPr lang="en-GB" sz="2600" b="1" i="1">
-                            <a:latin typeface="Cambria Math" panose="02040503050406030204" pitchFamily="18" charset="0"/>
-                            <a:ea typeface="Cambria Math" panose="02040503050406030204" pitchFamily="18" charset="0"/>
-                          </a:rPr>
-                          <m:t>𝜽</m:t>
-                        </m:r>
-                      </m:e>
-                    </m:acc>
-                  </m:oMath>
-                </a14:m>
-                <a:r>
-                  <a:rPr lang="en-GB" sz="2600" dirty="0"/>
-                  <a:t> with data fixed</a:t>
-                </a:r>
-              </a:p>
-            </p:txBody>
-          </p:sp>
-        </mc:Choice>
-        <mc:Fallback xmlns="">
-          <p:sp>
-            <p:nvSpPr>
-              <p:cNvPr id="3" name="Content Placeholder 2">
-                <a:extLst>
-                  <a:ext uri="{FF2B5EF4-FFF2-40B4-BE49-F238E27FC236}">
-                    <a16:creationId xmlns:a16="http://schemas.microsoft.com/office/drawing/2014/main" id="{341C44CC-E2D9-26AA-724C-69454C0871A5}"/>
-                  </a:ext>
-                </a:extLst>
-              </p:cNvPr>
-              <p:cNvSpPr>
-                <a:spLocks noGrp="1" noRot="1" noChangeAspect="1" noMove="1" noResize="1" noEditPoints="1" noAdjustHandles="1" noChangeArrowheads="1" noChangeShapeType="1" noTextEdit="1"/>
-              </p:cNvSpPr>
-              <p:nvPr>
-                <p:ph idx="1"/>
-              </p:nvPr>
-            </p:nvSpPr>
-            <p:spPr>
-              <a:blipFill>
-                <a:blip r:embed="rId2"/>
-                <a:stretch>
-                  <a:fillRect l="-1043" t="-2101" b="-3221"/>
-                </a:stretch>
-              </a:blipFill>
-            </p:spPr>
-            <p:txBody>
-              <a:bodyPr/>
-              <a:lstStyle/>
-              <a:p>
-                <a:r>
-                  <a:rPr lang="en-GB">
-                    <a:noFill/>
-                  </a:rPr>
-                  <a:t> </a:t>
-                </a:r>
-              </a:p>
-            </p:txBody>
-          </p:sp>
-        </mc:Fallback>
-      </mc:AlternateContent>
-      <p:sp>
-        <p:nvSpPr>
-          <p:cNvPr id="4" name="Slide Number Placeholder 3">
-            <a:extLst>
-              <a:ext uri="{FF2B5EF4-FFF2-40B4-BE49-F238E27FC236}">
-                <a16:creationId xmlns:a16="http://schemas.microsoft.com/office/drawing/2014/main" id="{6CB7468D-B2C2-583F-71EF-170C4D7F2A0F}"/>
-              </a:ext>
-            </a:extLst>
-          </p:cNvPr>
-          <p:cNvSpPr>
-            <a:spLocks noGrp="1"/>
-          </p:cNvSpPr>
-          <p:nvPr>
-            <p:ph type="sldNum" sz="quarter" idx="12"/>
-          </p:nvPr>
-        </p:nvSpPr>
-        <p:spPr/>
-        <p:txBody>
-          <a:bodyPr/>
-          <a:lstStyle/>
-          <a:p>
-            <a:fld id="{77E1BB0D-8AD4-A14C-8FD5-F1619D1A43A2}" type="slidenum">
-              <a:rPr lang="en-DE" smtClean="0"/>
-              <a:t>10</a:t>
-            </a:fld>
-            <a:endParaRPr lang="en-DE"/>
-          </a:p>
-        </p:txBody>
-      </p:sp>
-    </p:spTree>
-    <p:extLst>
-      <p:ext uri="{BB962C8B-B14F-4D97-AF65-F5344CB8AC3E}">
-        <p14:creationId xmlns:p14="http://schemas.microsoft.com/office/powerpoint/2010/main" val="3557448707"/>
-      </p:ext>
-    </p:extLst>
-  </p:cSld>
-  <p:clrMapOvr>
-    <a:masterClrMapping/>
-  </p:clrMapOvr>
-</p:sld>
-</file>
-
-<file path=ppt/slides/slide11.xml><?xml version="1.0" encoding="utf-8"?>
-<p:sld xmlns:a="http://schemas.openxmlformats.org/drawingml/2006/main" xmlns:r="http://schemas.openxmlformats.org/officeDocument/2006/relationships" xmlns:p="http://schemas.openxmlformats.org/presentationml/2006/main">
-  <p:cSld>
-    <p:spTree>
-      <p:nvGrpSpPr>
-        <p:cNvPr id="1" name=""/>
-        <p:cNvGrpSpPr/>
-        <p:nvPr/>
-      </p:nvGrpSpPr>
-      <p:grpSpPr>
-        <a:xfrm>
-          <a:off x="0" y="0"/>
-          <a:ext cx="0" cy="0"/>
-          <a:chOff x="0" y="0"/>
-          <a:chExt cx="0" cy="0"/>
-        </a:xfrm>
-      </p:grpSpPr>
-      <p:sp>
-        <p:nvSpPr>
-          <p:cNvPr id="2" name="Title 1">
-            <a:extLst>
-              <a:ext uri="{FF2B5EF4-FFF2-40B4-BE49-F238E27FC236}">
-                <a16:creationId xmlns:a16="http://schemas.microsoft.com/office/drawing/2014/main" id="{51AC8190-0F29-736C-02B0-E67BDDE58686}"/>
-              </a:ext>
-            </a:extLst>
-          </p:cNvPr>
-          <p:cNvSpPr>
-            <a:spLocks noGrp="1"/>
-          </p:cNvSpPr>
-          <p:nvPr>
-            <p:ph type="title"/>
-          </p:nvPr>
-        </p:nvSpPr>
-        <p:spPr/>
-        <p:txBody>
-          <a:bodyPr/>
-          <a:lstStyle/>
-          <a:p>
-            <a:r>
-              <a:rPr lang="en-DE" dirty="0"/>
-              <a:t>Independence Assumption</a:t>
-            </a:r>
-          </a:p>
-        </p:txBody>
-      </p:sp>
-      <mc:AlternateContent xmlns:mc="http://schemas.openxmlformats.org/markup-compatibility/2006" xmlns:a14="http://schemas.microsoft.com/office/drawing/2010/main">
-        <mc:Choice Requires="a14">
-          <p:sp>
-            <p:nvSpPr>
-              <p:cNvPr id="3" name="Content Placeholder 2">
-                <a:extLst>
-                  <a:ext uri="{FF2B5EF4-FFF2-40B4-BE49-F238E27FC236}">
-                    <a16:creationId xmlns:a16="http://schemas.microsoft.com/office/drawing/2014/main" id="{A2FDDA55-280D-23EA-F172-A72AACD4FB80}"/>
-                  </a:ext>
-                </a:extLst>
-              </p:cNvPr>
-              <p:cNvSpPr>
-                <a:spLocks noGrp="1"/>
-              </p:cNvSpPr>
-              <p:nvPr>
-                <p:ph idx="1"/>
-              </p:nvPr>
-            </p:nvSpPr>
-            <p:spPr/>
-            <p:txBody>
-              <a:bodyPr>
-                <a:noAutofit/>
-              </a:bodyPr>
-              <a:lstStyle/>
-              <a:p>
-                <a:pPr marL="0" indent="0">
-                  <a:buNone/>
-                </a:pPr>
-                <a:r>
-                  <a:rPr lang="en-GB" sz="2200" dirty="0">
-                    <a:sym typeface="Wingdings" pitchFamily="2" charset="2"/>
-                  </a:rPr>
-                  <a:t>c</a:t>
-                </a:r>
-                <a:r>
-                  <a:rPr lang="en-DE" sz="2200" dirty="0">
-                    <a:sym typeface="Wingdings" pitchFamily="2" charset="2"/>
-                  </a:rPr>
-                  <a:t>onsider training data set (of size </a:t>
-                </a:r>
-                <a14:m>
-                  <m:oMath xmlns:m="http://schemas.openxmlformats.org/officeDocument/2006/math">
-                    <m:r>
-                      <a:rPr lang="en-US" sz="2200" b="0" i="1" smtClean="0">
-                        <a:latin typeface="Cambria Math" panose="02040503050406030204" pitchFamily="18" charset="0"/>
-                        <a:sym typeface="Wingdings" pitchFamily="2" charset="2"/>
-                      </a:rPr>
-                      <m:t>𝑛</m:t>
-                    </m:r>
-                  </m:oMath>
-                </a14:m>
-                <a:r>
-                  <a:rPr lang="en-DE" sz="2200" dirty="0">
-                    <a:sym typeface="Wingdings" pitchFamily="2" charset="2"/>
-                  </a:rPr>
-                  <a:t>) as one sample from unknown joint probability distribution of </a:t>
-                </a:r>
-                <a14:m>
-                  <m:oMath xmlns:m="http://schemas.openxmlformats.org/officeDocument/2006/math">
-                    <m:r>
-                      <a:rPr lang="en-US" sz="2200" i="1">
-                        <a:latin typeface="Cambria Math" panose="02040503050406030204" pitchFamily="18" charset="0"/>
-                        <a:sym typeface="Wingdings" pitchFamily="2" charset="2"/>
-                      </a:rPr>
-                      <m:t>𝑛</m:t>
-                    </m:r>
-                    <m:r>
-                      <a:rPr lang="en-US" sz="2200" i="1">
-                        <a:latin typeface="Cambria Math" panose="02040503050406030204" pitchFamily="18" charset="0"/>
-                        <a:sym typeface="Wingdings" pitchFamily="2" charset="2"/>
-                      </a:rPr>
-                      <m:t> </m:t>
-                    </m:r>
-                  </m:oMath>
-                </a14:m>
-                <a:r>
-                  <a:rPr lang="en-DE" sz="2200" dirty="0">
-                    <a:sym typeface="Wingdings" pitchFamily="2" charset="2"/>
-                  </a:rPr>
-                  <a:t>independent </a:t>
-                </a:r>
-                <a:r>
-                  <a:rPr lang="en-DE" sz="2200" dirty="0"/>
-                  <a:t>(i.i.d.) </a:t>
-                </a:r>
-                <a:r>
-                  <a:rPr lang="en-DE" sz="2200" dirty="0">
-                    <a:sym typeface="Wingdings" pitchFamily="2" charset="2"/>
-                  </a:rPr>
-                  <a:t>sets of random variables </a:t>
-                </a:r>
-                <a14:m>
-                  <m:oMath xmlns:m="http://schemas.openxmlformats.org/officeDocument/2006/math">
-                    <m:d>
-                      <m:dPr>
-                        <m:ctrlPr>
-                          <a:rPr lang="en-DE" sz="2200" i="1">
-                            <a:latin typeface="Cambria Math" panose="02040503050406030204" pitchFamily="18" charset="0"/>
-                            <a:sym typeface="Wingdings" pitchFamily="2" charset="2"/>
-                          </a:rPr>
-                        </m:ctrlPr>
-                      </m:dPr>
-                      <m:e>
-                        <m:sSub>
-                          <m:sSubPr>
-                            <m:ctrlPr>
-                              <a:rPr lang="en-DE" sz="2200" i="1">
-                                <a:latin typeface="Cambria Math" panose="02040503050406030204" pitchFamily="18" charset="0"/>
-                                <a:sym typeface="Wingdings" pitchFamily="2" charset="2"/>
-                              </a:rPr>
-                            </m:ctrlPr>
-                          </m:sSubPr>
-                          <m:e>
-                            <m:r>
-                              <a:rPr lang="en-US" sz="2200" i="1">
-                                <a:latin typeface="Cambria Math" panose="02040503050406030204" pitchFamily="18" charset="0"/>
-                                <a:sym typeface="Wingdings" pitchFamily="2" charset="2"/>
-                              </a:rPr>
-                              <m:t>𝑌</m:t>
-                            </m:r>
-                          </m:e>
-                          <m:sub>
-                            <m:r>
-                              <a:rPr lang="en-US" sz="2200" i="1">
-                                <a:latin typeface="Cambria Math" panose="02040503050406030204" pitchFamily="18" charset="0"/>
-                                <a:sym typeface="Wingdings" pitchFamily="2" charset="2"/>
-                              </a:rPr>
-                              <m:t>1</m:t>
-                            </m:r>
-                          </m:sub>
-                        </m:sSub>
-                        <m:r>
-                          <a:rPr lang="en-US" sz="2200" i="1">
-                            <a:latin typeface="Cambria Math" panose="02040503050406030204" pitchFamily="18" charset="0"/>
-                            <a:sym typeface="Wingdings" pitchFamily="2" charset="2"/>
-                          </a:rPr>
-                          <m:t>,</m:t>
-                        </m:r>
-                        <m:sSub>
-                          <m:sSubPr>
-                            <m:ctrlPr>
-                              <a:rPr lang="en-US" sz="2200" i="1">
-                                <a:latin typeface="Cambria Math" panose="02040503050406030204" pitchFamily="18" charset="0"/>
-                                <a:sym typeface="Wingdings" pitchFamily="2" charset="2"/>
-                              </a:rPr>
-                            </m:ctrlPr>
-                          </m:sSubPr>
-                          <m:e>
-                            <m:r>
-                              <a:rPr lang="en-US" sz="2200" b="1" i="1">
-                                <a:latin typeface="Cambria Math" panose="02040503050406030204" pitchFamily="18" charset="0"/>
-                                <a:sym typeface="Wingdings" pitchFamily="2" charset="2"/>
-                              </a:rPr>
-                              <m:t>𝑿</m:t>
-                            </m:r>
-                          </m:e>
-                          <m:sub>
-                            <m:r>
-                              <a:rPr lang="en-US" sz="2200" i="1">
-                                <a:latin typeface="Cambria Math" panose="02040503050406030204" pitchFamily="18" charset="0"/>
-                                <a:sym typeface="Wingdings" pitchFamily="2" charset="2"/>
-                              </a:rPr>
-                              <m:t>1</m:t>
-                            </m:r>
-                          </m:sub>
-                        </m:sSub>
-                      </m:e>
-                    </m:d>
-                    <m:r>
-                      <a:rPr lang="en-US" sz="2200" i="1">
-                        <a:latin typeface="Cambria Math" panose="02040503050406030204" pitchFamily="18" charset="0"/>
-                        <a:sym typeface="Wingdings" pitchFamily="2" charset="2"/>
-                      </a:rPr>
-                      <m:t>,</m:t>
-                    </m:r>
-                    <m:d>
-                      <m:dPr>
-                        <m:ctrlPr>
-                          <a:rPr lang="en-DE" sz="2200" i="1">
-                            <a:latin typeface="Cambria Math" panose="02040503050406030204" pitchFamily="18" charset="0"/>
-                            <a:sym typeface="Wingdings" pitchFamily="2" charset="2"/>
-                          </a:rPr>
-                        </m:ctrlPr>
-                      </m:dPr>
-                      <m:e>
-                        <m:sSub>
-                          <m:sSubPr>
-                            <m:ctrlPr>
-                              <a:rPr lang="en-DE" sz="2200" i="1">
-                                <a:latin typeface="Cambria Math" panose="02040503050406030204" pitchFamily="18" charset="0"/>
-                                <a:sym typeface="Wingdings" pitchFamily="2" charset="2"/>
-                              </a:rPr>
-                            </m:ctrlPr>
-                          </m:sSubPr>
-                          <m:e>
-                            <m:r>
-                              <a:rPr lang="en-US" sz="2200" i="1">
-                                <a:latin typeface="Cambria Math" panose="02040503050406030204" pitchFamily="18" charset="0"/>
-                                <a:sym typeface="Wingdings" pitchFamily="2" charset="2"/>
-                              </a:rPr>
-                              <m:t>𝑌</m:t>
-                            </m:r>
-                          </m:e>
-                          <m:sub>
-                            <m:r>
-                              <a:rPr lang="en-US" sz="2200" i="1">
-                                <a:latin typeface="Cambria Math" panose="02040503050406030204" pitchFamily="18" charset="0"/>
-                                <a:sym typeface="Wingdings" pitchFamily="2" charset="2"/>
-                              </a:rPr>
-                              <m:t>2</m:t>
-                            </m:r>
-                          </m:sub>
-                        </m:sSub>
-                        <m:r>
-                          <a:rPr lang="en-US" sz="2200" i="1">
-                            <a:latin typeface="Cambria Math" panose="02040503050406030204" pitchFamily="18" charset="0"/>
-                            <a:sym typeface="Wingdings" pitchFamily="2" charset="2"/>
-                          </a:rPr>
-                          <m:t>,</m:t>
-                        </m:r>
-                        <m:sSub>
-                          <m:sSubPr>
-                            <m:ctrlPr>
-                              <a:rPr lang="en-US" sz="2200" i="1">
-                                <a:latin typeface="Cambria Math" panose="02040503050406030204" pitchFamily="18" charset="0"/>
-                                <a:sym typeface="Wingdings" pitchFamily="2" charset="2"/>
-                              </a:rPr>
-                            </m:ctrlPr>
-                          </m:sSubPr>
-                          <m:e>
-                            <m:r>
-                              <a:rPr lang="en-US" sz="2200" b="1" i="1">
-                                <a:latin typeface="Cambria Math" panose="02040503050406030204" pitchFamily="18" charset="0"/>
-                                <a:sym typeface="Wingdings" pitchFamily="2" charset="2"/>
-                              </a:rPr>
-                              <m:t>𝑿</m:t>
-                            </m:r>
-                          </m:e>
-                          <m:sub>
-                            <m:r>
-                              <a:rPr lang="en-US" sz="2200" i="1">
-                                <a:latin typeface="Cambria Math" panose="02040503050406030204" pitchFamily="18" charset="0"/>
-                                <a:sym typeface="Wingdings" pitchFamily="2" charset="2"/>
-                              </a:rPr>
-                              <m:t>2</m:t>
-                            </m:r>
-                          </m:sub>
-                        </m:sSub>
-                      </m:e>
-                    </m:d>
-                    <m:r>
-                      <a:rPr lang="en-US" sz="2200" i="1">
-                        <a:latin typeface="Cambria Math" panose="02040503050406030204" pitchFamily="18" charset="0"/>
-                        <a:sym typeface="Wingdings" pitchFamily="2" charset="2"/>
-                      </a:rPr>
-                      <m:t>,…, </m:t>
-                    </m:r>
-                    <m:d>
-                      <m:dPr>
-                        <m:ctrlPr>
-                          <a:rPr lang="en-DE" sz="2200" i="1">
-                            <a:latin typeface="Cambria Math" panose="02040503050406030204" pitchFamily="18" charset="0"/>
-                            <a:sym typeface="Wingdings" pitchFamily="2" charset="2"/>
-                          </a:rPr>
-                        </m:ctrlPr>
-                      </m:dPr>
-                      <m:e>
-                        <m:sSub>
-                          <m:sSubPr>
-                            <m:ctrlPr>
-                              <a:rPr lang="en-DE" sz="2200" i="1">
-                                <a:latin typeface="Cambria Math" panose="02040503050406030204" pitchFamily="18" charset="0"/>
-                                <a:sym typeface="Wingdings" pitchFamily="2" charset="2"/>
-                              </a:rPr>
-                            </m:ctrlPr>
-                          </m:sSubPr>
-                          <m:e>
-                            <m:r>
-                              <a:rPr lang="en-US" sz="2200" i="1">
-                                <a:latin typeface="Cambria Math" panose="02040503050406030204" pitchFamily="18" charset="0"/>
-                                <a:sym typeface="Wingdings" pitchFamily="2" charset="2"/>
-                              </a:rPr>
-                              <m:t>𝑌</m:t>
-                            </m:r>
-                          </m:e>
-                          <m:sub>
-                            <m:r>
-                              <a:rPr lang="en-US" sz="2200" i="1">
-                                <a:latin typeface="Cambria Math" panose="02040503050406030204" pitchFamily="18" charset="0"/>
-                                <a:sym typeface="Wingdings" pitchFamily="2" charset="2"/>
-                              </a:rPr>
-                              <m:t>𝑛</m:t>
-                            </m:r>
-                          </m:sub>
-                        </m:sSub>
-                        <m:r>
-                          <a:rPr lang="en-US" sz="2200" i="1">
-                            <a:latin typeface="Cambria Math" panose="02040503050406030204" pitchFamily="18" charset="0"/>
-                            <a:sym typeface="Wingdings" pitchFamily="2" charset="2"/>
-                          </a:rPr>
-                          <m:t>,</m:t>
-                        </m:r>
-                        <m:sSub>
-                          <m:sSubPr>
-                            <m:ctrlPr>
-                              <a:rPr lang="en-US" sz="2200" i="1">
-                                <a:latin typeface="Cambria Math" panose="02040503050406030204" pitchFamily="18" charset="0"/>
-                                <a:sym typeface="Wingdings" pitchFamily="2" charset="2"/>
-                              </a:rPr>
-                            </m:ctrlPr>
-                          </m:sSubPr>
-                          <m:e>
-                            <m:r>
-                              <a:rPr lang="en-US" sz="2200" b="1" i="1">
-                                <a:latin typeface="Cambria Math" panose="02040503050406030204" pitchFamily="18" charset="0"/>
-                                <a:sym typeface="Wingdings" pitchFamily="2" charset="2"/>
-                              </a:rPr>
-                              <m:t>𝑿</m:t>
-                            </m:r>
-                          </m:e>
-                          <m:sub>
-                            <m:r>
-                              <a:rPr lang="en-US" sz="2200" i="1">
-                                <a:latin typeface="Cambria Math" panose="02040503050406030204" pitchFamily="18" charset="0"/>
-                                <a:sym typeface="Wingdings" pitchFamily="2" charset="2"/>
-                              </a:rPr>
-                              <m:t>𝑛</m:t>
-                            </m:r>
-                          </m:sub>
-                        </m:sSub>
-                      </m:e>
-                    </m:d>
-                  </m:oMath>
-                </a14:m>
-                <a:endParaRPr lang="en-DE" sz="2200" dirty="0">
-                  <a:sym typeface="Wingdings" pitchFamily="2" charset="2"/>
-                </a:endParaRPr>
-              </a:p>
-              <a:p>
-                <a:pPr marL="0" indent="0">
-                  <a:buNone/>
-                </a:pPr>
-                <a:r>
-                  <a:rPr lang="en-DE" sz="2200" dirty="0">
-                    <a:sym typeface="Wingdings" pitchFamily="2" charset="2"/>
-                  </a:rPr>
-                  <a:t>(same thing as random sampling </a:t>
-                </a:r>
-                <a14:m>
-                  <m:oMath xmlns:m="http://schemas.openxmlformats.org/officeDocument/2006/math">
-                    <m:r>
-                      <a:rPr lang="en-US" sz="2200" i="1">
-                        <a:latin typeface="Cambria Math" panose="02040503050406030204" pitchFamily="18" charset="0"/>
-                        <a:sym typeface="Wingdings" pitchFamily="2" charset="2"/>
-                      </a:rPr>
-                      <m:t>𝑛</m:t>
-                    </m:r>
-                  </m:oMath>
-                </a14:m>
-                <a:r>
-                  <a:rPr lang="en-DE" sz="2200" dirty="0">
-                    <a:sym typeface="Wingdings" pitchFamily="2" charset="2"/>
-                  </a:rPr>
-                  <a:t> times from </a:t>
-                </a:r>
-                <a14:m>
-                  <m:oMath xmlns:m="http://schemas.openxmlformats.org/officeDocument/2006/math">
-                    <m:d>
-                      <m:dPr>
-                        <m:ctrlPr>
-                          <a:rPr lang="en-US" sz="2200" b="0" i="1" smtClean="0">
-                            <a:latin typeface="Cambria Math" panose="02040503050406030204" pitchFamily="18" charset="0"/>
-                            <a:sym typeface="Wingdings" pitchFamily="2" charset="2"/>
-                          </a:rPr>
-                        </m:ctrlPr>
-                      </m:dPr>
-                      <m:e>
-                        <m:r>
-                          <a:rPr lang="en-US" sz="2200" b="0" i="1" smtClean="0">
-                            <a:latin typeface="Cambria Math" panose="02040503050406030204" pitchFamily="18" charset="0"/>
-                            <a:sym typeface="Wingdings" pitchFamily="2" charset="2"/>
-                          </a:rPr>
-                          <m:t>𝑌</m:t>
-                        </m:r>
-                        <m:r>
-                          <a:rPr lang="en-US" sz="2200" b="0" i="1" smtClean="0">
-                            <a:latin typeface="Cambria Math" panose="02040503050406030204" pitchFamily="18" charset="0"/>
-                            <a:sym typeface="Wingdings" pitchFamily="2" charset="2"/>
-                          </a:rPr>
-                          <m:t>,</m:t>
-                        </m:r>
-                        <m:r>
-                          <a:rPr lang="en-US" sz="2200" b="1" i="1" smtClean="0">
-                            <a:latin typeface="Cambria Math" panose="02040503050406030204" pitchFamily="18" charset="0"/>
-                            <a:sym typeface="Wingdings" pitchFamily="2" charset="2"/>
-                          </a:rPr>
-                          <m:t>𝑿</m:t>
-                        </m:r>
-                      </m:e>
-                    </m:d>
-                  </m:oMath>
-                </a14:m>
-                <a:r>
-                  <a:rPr lang="en-DE" sz="2200" dirty="0">
-                    <a:sym typeface="Wingdings" pitchFamily="2" charset="2"/>
-                  </a:rPr>
-                  <a:t>)</a:t>
-                </a:r>
-              </a:p>
-              <a:p>
-                <a:pPr marL="0" indent="0">
-                  <a:buNone/>
-                </a:pPr>
-                <a:endParaRPr lang="en-DE" sz="2200" dirty="0">
-                  <a:sym typeface="Wingdings" pitchFamily="2" charset="2"/>
-                </a:endParaRPr>
-              </a:p>
-              <a:p>
-                <a:pPr marL="0" indent="0">
-                  <a:buNone/>
-                </a:pPr>
-                <a:r>
-                  <a:rPr lang="en-DE" sz="2200" dirty="0">
-                    <a:sym typeface="Wingdings" pitchFamily="2" charset="2"/>
-                  </a:rPr>
-                  <a:t> </a:t>
-                </a:r>
-                <a:r>
-                  <a:rPr lang="en-GB" sz="2200" dirty="0">
-                    <a:sym typeface="Wingdings" pitchFamily="2" charset="2"/>
-                  </a:rPr>
-                  <a:t>l</a:t>
-                </a:r>
-                <a:r>
-                  <a:rPr lang="en-DE" sz="2200" dirty="0">
-                    <a:sym typeface="Wingdings" pitchFamily="2" charset="2"/>
-                  </a:rPr>
-                  <a:t>ikelihood as product of univariate probability density functions:</a:t>
-                </a:r>
-              </a:p>
-              <a:p>
-                <a:pPr marL="0" indent="0">
-                  <a:buNone/>
-                </a:pPr>
-                <a:endParaRPr lang="en-DE" sz="2200" dirty="0">
-                  <a:sym typeface="Wingdings" pitchFamily="2" charset="2"/>
-                </a:endParaRPr>
-              </a:p>
-              <a:p>
-                <a:pPr marL="0" indent="0">
-                  <a:buNone/>
-                </a:pPr>
-                <a14:m>
-                  <m:oMathPara xmlns:m="http://schemas.openxmlformats.org/officeDocument/2006/math">
-                    <m:oMathParaPr>
-                      <m:jc m:val="centerGroup"/>
-                    </m:oMathParaPr>
-                    <m:oMath xmlns:m="http://schemas.openxmlformats.org/officeDocument/2006/math">
-                      <m:r>
-                        <a:rPr lang="en-GB" sz="2200" i="1">
-                          <a:latin typeface="Cambria Math" panose="02040503050406030204" pitchFamily="18" charset="0"/>
-                          <a:ea typeface="Cambria Math" panose="02040503050406030204" pitchFamily="18" charset="0"/>
-                        </a:rPr>
-                        <m:t>ℒ</m:t>
-                      </m:r>
-                      <m:d>
-                        <m:dPr>
-                          <m:ctrlPr>
-                            <a:rPr lang="en-GB" sz="2200" i="1">
-                              <a:latin typeface="Cambria Math" panose="02040503050406030204" pitchFamily="18" charset="0"/>
-                              <a:ea typeface="Cambria Math" panose="02040503050406030204" pitchFamily="18" charset="0"/>
-                            </a:rPr>
-                          </m:ctrlPr>
-                        </m:dPr>
-                        <m:e>
-                          <m:acc>
-                            <m:accPr>
-                              <m:chr m:val="̂"/>
-                              <m:ctrlPr>
-                                <a:rPr lang="en-GB" sz="2200" b="1" i="1" smtClean="0">
-                                  <a:latin typeface="Cambria Math" panose="02040503050406030204" pitchFamily="18" charset="0"/>
-                                  <a:ea typeface="Cambria Math" panose="02040503050406030204" pitchFamily="18" charset="0"/>
-                                </a:rPr>
-                              </m:ctrlPr>
-                            </m:accPr>
-                            <m:e>
-                              <m:r>
-                                <a:rPr lang="en-GB" sz="2200" b="1" i="1">
-                                  <a:latin typeface="Cambria Math" panose="02040503050406030204" pitchFamily="18" charset="0"/>
-                                  <a:ea typeface="Cambria Math" panose="02040503050406030204" pitchFamily="18" charset="0"/>
-                                </a:rPr>
-                                <m:t>𝜽</m:t>
-                              </m:r>
-                            </m:e>
-                          </m:acc>
-                          <m:r>
-                            <a:rPr lang="en-US" sz="2200" i="1">
-                              <a:latin typeface="Cambria Math" panose="02040503050406030204" pitchFamily="18" charset="0"/>
-                              <a:ea typeface="Cambria Math" panose="02040503050406030204" pitchFamily="18" charset="0"/>
-                            </a:rPr>
-                            <m:t>;</m:t>
-                          </m:r>
-                          <m:r>
-                            <a:rPr lang="en-US" sz="2200" b="1" i="1">
-                              <a:latin typeface="Cambria Math" panose="02040503050406030204" pitchFamily="18" charset="0"/>
-                              <a:ea typeface="Cambria Math" panose="02040503050406030204" pitchFamily="18" charset="0"/>
-                            </a:rPr>
-                            <m:t>𝒚</m:t>
-                          </m:r>
-                          <m:r>
-                            <a:rPr lang="en-US" sz="2200" i="1">
-                              <a:latin typeface="Cambria Math" panose="02040503050406030204" pitchFamily="18" charset="0"/>
-                              <a:ea typeface="Cambria Math" panose="02040503050406030204" pitchFamily="18" charset="0"/>
-                            </a:rPr>
-                            <m:t>|</m:t>
-                          </m:r>
-                          <m:r>
-                            <a:rPr lang="en-US" sz="2200" b="1" i="1">
-                              <a:latin typeface="Cambria Math" panose="02040503050406030204" pitchFamily="18" charset="0"/>
-                              <a:ea typeface="Cambria Math" panose="02040503050406030204" pitchFamily="18" charset="0"/>
-                            </a:rPr>
-                            <m:t>𝒙</m:t>
-                          </m:r>
-                        </m:e>
-                      </m:d>
-                      <m:r>
-                        <a:rPr lang="en-US" sz="2200" i="1">
-                          <a:latin typeface="Cambria Math" panose="02040503050406030204" pitchFamily="18" charset="0"/>
-                          <a:ea typeface="Cambria Math" panose="02040503050406030204" pitchFamily="18" charset="0"/>
-                        </a:rPr>
-                        <m:t>=</m:t>
-                      </m:r>
-                      <m:nary>
-                        <m:naryPr>
-                          <m:chr m:val="∏"/>
-                          <m:ctrlPr>
-                            <a:rPr lang="en-US" sz="2200" i="1">
-                              <a:latin typeface="Cambria Math" panose="02040503050406030204" pitchFamily="18" charset="0"/>
-                              <a:ea typeface="Cambria Math" panose="02040503050406030204" pitchFamily="18" charset="0"/>
-                            </a:rPr>
-                          </m:ctrlPr>
-                        </m:naryPr>
-                        <m:sub>
-                          <m:r>
-                            <m:rPr>
-                              <m:brk m:alnAt="23"/>
-                            </m:rPr>
-                            <a:rPr lang="en-US" sz="2200" i="1">
-                              <a:latin typeface="Cambria Math" panose="02040503050406030204" pitchFamily="18" charset="0"/>
-                              <a:ea typeface="Cambria Math" panose="02040503050406030204" pitchFamily="18" charset="0"/>
-                            </a:rPr>
-                            <m:t>𝑖</m:t>
-                          </m:r>
-                          <m:r>
-                            <a:rPr lang="en-US" sz="2200" i="1">
-                              <a:latin typeface="Cambria Math" panose="02040503050406030204" pitchFamily="18" charset="0"/>
-                              <a:ea typeface="Cambria Math" panose="02040503050406030204" pitchFamily="18" charset="0"/>
-                            </a:rPr>
-                            <m:t>=1</m:t>
-                          </m:r>
-                        </m:sub>
-                        <m:sup>
-                          <m:r>
-                            <a:rPr lang="en-US" sz="2200" i="1">
-                              <a:latin typeface="Cambria Math" panose="02040503050406030204" pitchFamily="18" charset="0"/>
-                              <a:ea typeface="Cambria Math" panose="02040503050406030204" pitchFamily="18" charset="0"/>
-                            </a:rPr>
-                            <m:t>𝑛</m:t>
-                          </m:r>
-                        </m:sup>
-                        <m:e>
-                          <m:r>
-                            <a:rPr lang="en-US" sz="2200" b="0" i="1" smtClean="0">
-                              <a:latin typeface="Cambria Math" panose="02040503050406030204" pitchFamily="18" charset="0"/>
-                              <a:ea typeface="Cambria Math" panose="02040503050406030204" pitchFamily="18" charset="0"/>
-                            </a:rPr>
-                            <m:t>𝑝</m:t>
-                          </m:r>
-                          <m:d>
-                            <m:dPr>
-                              <m:ctrlPr>
-                                <a:rPr lang="en-US" sz="2200" i="1">
-                                  <a:latin typeface="Cambria Math" panose="02040503050406030204" pitchFamily="18" charset="0"/>
-                                </a:rPr>
-                              </m:ctrlPr>
-                            </m:dPr>
-                            <m:e>
-                              <m:sSub>
-                                <m:sSubPr>
-                                  <m:ctrlPr>
-                                    <a:rPr lang="en-US" sz="2200" i="1">
-                                      <a:latin typeface="Cambria Math" panose="02040503050406030204" pitchFamily="18" charset="0"/>
-                                    </a:rPr>
-                                  </m:ctrlPr>
-                                </m:sSubPr>
-                                <m:e>
-                                  <m:r>
-                                    <a:rPr lang="en-US" sz="2200" i="1">
-                                      <a:latin typeface="Cambria Math" panose="02040503050406030204" pitchFamily="18" charset="0"/>
-                                    </a:rPr>
-                                    <m:t>𝑦</m:t>
-                                  </m:r>
-                                </m:e>
-                                <m:sub>
-                                  <m:r>
-                                    <a:rPr lang="en-US" sz="2200" i="1">
-                                      <a:latin typeface="Cambria Math" panose="02040503050406030204" pitchFamily="18" charset="0"/>
-                                    </a:rPr>
-                                    <m:t>𝑖</m:t>
-                                  </m:r>
-                                </m:sub>
-                              </m:sSub>
-                              <m:r>
-                                <a:rPr lang="en-US" sz="2200" i="1">
-                                  <a:latin typeface="Cambria Math" panose="02040503050406030204" pitchFamily="18" charset="0"/>
-                                </a:rPr>
-                                <m:t>|</m:t>
-                              </m:r>
-                              <m:sSub>
-                                <m:sSubPr>
-                                  <m:ctrlPr>
-                                    <a:rPr lang="en-US" sz="2200" b="1" i="1">
-                                      <a:latin typeface="Cambria Math" panose="02040503050406030204" pitchFamily="18" charset="0"/>
-                                    </a:rPr>
-                                  </m:ctrlPr>
-                                </m:sSubPr>
-                                <m:e>
-                                  <m:r>
-                                    <a:rPr lang="en-US" sz="2200" b="1" i="1">
-                                      <a:latin typeface="Cambria Math" panose="02040503050406030204" pitchFamily="18" charset="0"/>
-                                    </a:rPr>
-                                    <m:t>𝒙</m:t>
-                                  </m:r>
-                                </m:e>
-                                <m:sub>
-                                  <m:r>
-                                    <a:rPr lang="en-US" sz="2200" i="1">
-                                      <a:latin typeface="Cambria Math" panose="02040503050406030204" pitchFamily="18" charset="0"/>
-                                    </a:rPr>
-                                    <m:t>𝑖</m:t>
-                                  </m:r>
-                                </m:sub>
-                              </m:sSub>
-                              <m:r>
-                                <a:rPr lang="en-US" sz="2200" b="0" i="1">
-                                  <a:latin typeface="Cambria Math" panose="02040503050406030204" pitchFamily="18" charset="0"/>
-                                </a:rPr>
-                                <m:t>;</m:t>
-                              </m:r>
-                              <m:acc>
-                                <m:accPr>
-                                  <m:chr m:val="̂"/>
-                                  <m:ctrlPr>
-                                    <a:rPr lang="en-US" sz="2200" b="1" i="1" smtClean="0">
-                                      <a:latin typeface="Cambria Math" panose="02040503050406030204" pitchFamily="18" charset="0"/>
-                                      <a:ea typeface="Cambria Math" panose="02040503050406030204" pitchFamily="18" charset="0"/>
-                                    </a:rPr>
-                                  </m:ctrlPr>
-                                </m:accPr>
-                                <m:e>
-                                  <m:r>
-                                    <a:rPr lang="en-GB" sz="2200" b="1" i="1">
-                                      <a:latin typeface="Cambria Math" panose="02040503050406030204" pitchFamily="18" charset="0"/>
-                                      <a:ea typeface="Cambria Math" panose="02040503050406030204" pitchFamily="18" charset="0"/>
-                                    </a:rPr>
-                                    <m:t>𝜽</m:t>
-                                  </m:r>
-                                </m:e>
-                              </m:acc>
-                            </m:e>
-                          </m:d>
-                        </m:e>
-                      </m:nary>
-                    </m:oMath>
-                  </m:oMathPara>
-                </a14:m>
-                <a:endParaRPr lang="en-DE" sz="2200" dirty="0"/>
-              </a:p>
-              <a:p>
-                <a:pPr marL="0" indent="0">
-                  <a:buNone/>
-                </a:pPr>
-                <a:endParaRPr lang="en-DE" sz="2200" dirty="0"/>
-              </a:p>
-              <a:p>
-                <a:pPr marL="0" indent="0">
-                  <a:buNone/>
-                </a:pPr>
-                <a:r>
-                  <a:rPr lang="en-DE" sz="2200" dirty="0"/>
-                  <a:t>… to be maximized according to estimated model parameters </a:t>
-                </a:r>
-                <a14:m>
-                  <m:oMath xmlns:m="http://schemas.openxmlformats.org/officeDocument/2006/math">
-                    <m:acc>
-                      <m:accPr>
-                        <m:chr m:val="̂"/>
-                        <m:ctrlPr>
-                          <a:rPr lang="en-GB" sz="2200" b="1" i="1" smtClean="0">
-                            <a:latin typeface="Cambria Math" panose="02040503050406030204" pitchFamily="18" charset="0"/>
-                            <a:ea typeface="Cambria Math" panose="02040503050406030204" pitchFamily="18" charset="0"/>
-                          </a:rPr>
-                        </m:ctrlPr>
-                      </m:accPr>
-                      <m:e>
-                        <m:r>
-                          <a:rPr lang="en-GB" sz="2200" b="1" i="1">
-                            <a:latin typeface="Cambria Math" panose="02040503050406030204" pitchFamily="18" charset="0"/>
-                            <a:ea typeface="Cambria Math" panose="02040503050406030204" pitchFamily="18" charset="0"/>
-                          </a:rPr>
-                          <m:t>𝜽</m:t>
-                        </m:r>
-                      </m:e>
-                    </m:acc>
-                  </m:oMath>
-                </a14:m>
-                <a:endParaRPr lang="en-US" sz="2200" b="1" dirty="0">
-                  <a:ea typeface="Cambria Math" panose="02040503050406030204" pitchFamily="18" charset="0"/>
-                </a:endParaRPr>
-              </a:p>
-              <a:p>
-                <a:pPr marL="0" indent="0">
-                  <a:buNone/>
-                </a:pPr>
-                <a:r>
-                  <a:rPr lang="en-DE" sz="2200" dirty="0"/>
-                  <a:t>(known as maximum likelihood estimation)</a:t>
-                </a:r>
-              </a:p>
-            </p:txBody>
-          </p:sp>
-        </mc:Choice>
-        <mc:Fallback xmlns="">
-          <p:sp>
-            <p:nvSpPr>
-              <p:cNvPr id="3" name="Content Placeholder 2">
-                <a:extLst>
-                  <a:ext uri="{FF2B5EF4-FFF2-40B4-BE49-F238E27FC236}">
-                    <a16:creationId xmlns:a16="http://schemas.microsoft.com/office/drawing/2014/main" id="{A2FDDA55-280D-23EA-F172-A72AACD4FB80}"/>
-                  </a:ext>
-                </a:extLst>
-              </p:cNvPr>
-              <p:cNvSpPr>
-                <a:spLocks noGrp="1" noRot="1" noChangeAspect="1" noMove="1" noResize="1" noEditPoints="1" noAdjustHandles="1" noChangeArrowheads="1" noChangeShapeType="1" noTextEdit="1"/>
-              </p:cNvSpPr>
-              <p:nvPr>
-                <p:ph idx="1"/>
-              </p:nvPr>
-            </p:nvSpPr>
-            <p:spPr>
-              <a:blipFill>
-                <a:blip r:embed="rId2"/>
-                <a:stretch>
-                  <a:fillRect l="-724" t="-1744" b="-12791"/>
-                </a:stretch>
-              </a:blipFill>
-            </p:spPr>
-            <p:txBody>
-              <a:bodyPr/>
-              <a:lstStyle/>
-              <a:p>
-                <a:r>
-                  <a:rPr lang="en-DE">
-                    <a:noFill/>
-                  </a:rPr>
-                  <a:t> </a:t>
-                </a:r>
-              </a:p>
-            </p:txBody>
-          </p:sp>
-        </mc:Fallback>
-      </mc:AlternateContent>
-      <p:sp>
-        <p:nvSpPr>
-          <p:cNvPr id="4" name="Slide Number Placeholder 3">
-            <a:extLst>
-              <a:ext uri="{FF2B5EF4-FFF2-40B4-BE49-F238E27FC236}">
-                <a16:creationId xmlns:a16="http://schemas.microsoft.com/office/drawing/2014/main" id="{5E51884E-FC06-2625-8D8E-4C79602F8C36}"/>
-              </a:ext>
-            </a:extLst>
-          </p:cNvPr>
-          <p:cNvSpPr>
-            <a:spLocks noGrp="1"/>
-          </p:cNvSpPr>
-          <p:nvPr>
-            <p:ph type="sldNum" sz="quarter" idx="12"/>
-          </p:nvPr>
-        </p:nvSpPr>
-        <p:spPr/>
-        <p:txBody>
-          <a:bodyPr/>
-          <a:lstStyle/>
-          <a:p>
-            <a:fld id="{77E1BB0D-8AD4-A14C-8FD5-F1619D1A43A2}" type="slidenum">
-              <a:rPr lang="en-DE" smtClean="0"/>
-              <a:t>11</a:t>
-            </a:fld>
-            <a:endParaRPr lang="en-DE"/>
-          </a:p>
-        </p:txBody>
-      </p:sp>
-    </p:spTree>
-    <p:extLst>
-      <p:ext uri="{BB962C8B-B14F-4D97-AF65-F5344CB8AC3E}">
-        <p14:creationId xmlns:p14="http://schemas.microsoft.com/office/powerpoint/2010/main" val="923827092"/>
-      </p:ext>
-    </p:extLst>
-  </p:cSld>
-  <p:clrMapOvr>
-    <a:masterClrMapping/>
-  </p:clrMapOvr>
-</p:sld>
-</file>
-
-<file path=ppt/slides/slide12.xml><?xml version="1.0" encoding="utf-8"?>
 <p:sld xmlns:a="http://schemas.openxmlformats.org/drawingml/2006/main" xmlns:r="http://schemas.openxmlformats.org/officeDocument/2006/relationships" xmlns:p="http://schemas.openxmlformats.org/presentationml/2006/main">
   <p:cSld>
     <p:spTree>
@@ -9435,7 +7979,7 @@
           <a:p>
             <a:fld id="{77E1BB0D-8AD4-A14C-8FD5-F1619D1A43A2}" type="slidenum">
               <a:rPr lang="en-DE" smtClean="0"/>
-              <a:t>12</a:t>
+              <a:t>10</a:t>
             </a:fld>
             <a:endParaRPr lang="en-DE"/>
           </a:p>
@@ -10085,7 +8629,7 @@
 </p:sld>
 </file>
 
-<file path=ppt/slides/slide13.xml><?xml version="1.0" encoding="utf-8"?>
+<file path=ppt/slides/slide11.xml><?xml version="1.0" encoding="utf-8"?>
 <p:sld xmlns:a="http://schemas.openxmlformats.org/drawingml/2006/main" xmlns:r="http://schemas.openxmlformats.org/officeDocument/2006/relationships" xmlns:p="http://schemas.openxmlformats.org/presentationml/2006/main">
   <p:cSld>
     <p:spTree>
@@ -11043,7 +9587,7 @@
           <a:p>
             <a:fld id="{77E1BB0D-8AD4-A14C-8FD5-F1619D1A43A2}" type="slidenum">
               <a:rPr lang="en-DE" smtClean="0"/>
-              <a:t>13</a:t>
+              <a:t>11</a:t>
             </a:fld>
             <a:endParaRPr lang="en-DE"/>
           </a:p>
@@ -11372,7 +9916,7 @@
 </p:sld>
 </file>
 
-<file path=ppt/slides/slide14.xml><?xml version="1.0" encoding="utf-8"?>
+<file path=ppt/slides/slide12.xml><?xml version="1.0" encoding="utf-8"?>
 <p:sld xmlns:a="http://schemas.openxmlformats.org/drawingml/2006/main" xmlns:r="http://schemas.openxmlformats.org/officeDocument/2006/relationships" xmlns:p="http://schemas.openxmlformats.org/presentationml/2006/main">
   <p:cSld>
     <p:spTree>
@@ -13070,7 +11614,7 @@
           <a:p>
             <a:fld id="{77E1BB0D-8AD4-A14C-8FD5-F1619D1A43A2}" type="slidenum">
               <a:rPr lang="en-DE" smtClean="0"/>
-              <a:t>14</a:t>
+              <a:t>12</a:t>
             </a:fld>
             <a:endParaRPr lang="en-DE"/>
           </a:p>
@@ -13496,6 +12040,983 @@
 </p:sld>
 </file>
 
+<file path=ppt/slides/slide13.xml><?xml version="1.0" encoding="utf-8"?>
+<p:sld xmlns:a="http://schemas.openxmlformats.org/drawingml/2006/main" xmlns:r="http://schemas.openxmlformats.org/officeDocument/2006/relationships" xmlns:p="http://schemas.openxmlformats.org/presentationml/2006/main">
+  <p:cSld>
+    <p:spTree>
+      <p:nvGrpSpPr>
+        <p:cNvPr id="1" name=""/>
+        <p:cNvGrpSpPr/>
+        <p:nvPr/>
+      </p:nvGrpSpPr>
+      <p:grpSpPr>
+        <a:xfrm>
+          <a:off x="0" y="0"/>
+          <a:ext cx="0" cy="0"/>
+          <a:chOff x="0" y="0"/>
+          <a:chExt cx="0" cy="0"/>
+        </a:xfrm>
+      </p:grpSpPr>
+      <p:sp>
+        <p:nvSpPr>
+          <p:cNvPr id="2" name="Titel 1">
+            <a:extLst>
+              <a:ext uri="{FF2B5EF4-FFF2-40B4-BE49-F238E27FC236}">
+                <a16:creationId xmlns:a16="http://schemas.microsoft.com/office/drawing/2014/main" id="{0A5960BF-0696-F646-3D20-9C943273D5A6}"/>
+              </a:ext>
+            </a:extLst>
+          </p:cNvPr>
+          <p:cNvSpPr>
+            <a:spLocks noGrp="1"/>
+          </p:cNvSpPr>
+          <p:nvPr>
+            <p:ph type="title"/>
+          </p:nvPr>
+        </p:nvSpPr>
+        <p:spPr/>
+        <p:txBody>
+          <a:bodyPr/>
+          <a:lstStyle/>
+          <a:p>
+            <a:r>
+              <a:rPr lang="de-DE" dirty="0"/>
+              <a:t>Maximum A Posteriori (MAP) </a:t>
+            </a:r>
+            <a:r>
+              <a:rPr lang="de-DE" dirty="0" err="1"/>
+              <a:t>Estimation</a:t>
+            </a:r>
+            <a:endParaRPr lang="de-DE" dirty="0"/>
+          </a:p>
+        </p:txBody>
+      </p:sp>
+      <p:sp>
+        <p:nvSpPr>
+          <p:cNvPr id="3" name="Inhaltsplatzhalter 2">
+            <a:extLst>
+              <a:ext uri="{FF2B5EF4-FFF2-40B4-BE49-F238E27FC236}">
+                <a16:creationId xmlns:a16="http://schemas.microsoft.com/office/drawing/2014/main" id="{CD387CDE-B64C-E3C9-30E5-80EAB23FC9AF}"/>
+              </a:ext>
+            </a:extLst>
+          </p:cNvPr>
+          <p:cNvSpPr>
+            <a:spLocks noGrp="1"/>
+          </p:cNvSpPr>
+          <p:nvPr>
+            <p:ph idx="1"/>
+          </p:nvPr>
+        </p:nvSpPr>
+        <p:spPr/>
+        <p:txBody>
+          <a:bodyPr/>
+          <a:lstStyle/>
+          <a:p>
+            <a:endParaRPr lang="de-DE"/>
+          </a:p>
+        </p:txBody>
+      </p:sp>
+      <p:sp>
+        <p:nvSpPr>
+          <p:cNvPr id="4" name="Foliennummernplatzhalter 3">
+            <a:extLst>
+              <a:ext uri="{FF2B5EF4-FFF2-40B4-BE49-F238E27FC236}">
+                <a16:creationId xmlns:a16="http://schemas.microsoft.com/office/drawing/2014/main" id="{76ACAD2C-B2CC-ABCA-436B-383FF917D0F7}"/>
+              </a:ext>
+            </a:extLst>
+          </p:cNvPr>
+          <p:cNvSpPr>
+            <a:spLocks noGrp="1"/>
+          </p:cNvSpPr>
+          <p:nvPr>
+            <p:ph type="sldNum" sz="quarter" idx="12"/>
+          </p:nvPr>
+        </p:nvSpPr>
+        <p:spPr/>
+        <p:txBody>
+          <a:bodyPr/>
+          <a:lstStyle/>
+          <a:p>
+            <a:fld id="{3D4C94FE-FF23-4504-88E9-14D481113291}" type="slidenum">
+              <a:rPr lang="en-GB" smtClean="0"/>
+              <a:t>13</a:t>
+            </a:fld>
+            <a:endParaRPr lang="en-GB"/>
+          </a:p>
+        </p:txBody>
+      </p:sp>
+    </p:spTree>
+    <p:extLst>
+      <p:ext uri="{BB962C8B-B14F-4D97-AF65-F5344CB8AC3E}">
+        <p14:creationId xmlns:p14="http://schemas.microsoft.com/office/powerpoint/2010/main" val="204182399"/>
+      </p:ext>
+    </p:extLst>
+  </p:cSld>
+  <p:clrMapOvr>
+    <a:masterClrMapping/>
+  </p:clrMapOvr>
+</p:sld>
+</file>
+
+<file path=ppt/slides/slide14.xml><?xml version="1.0" encoding="utf-8"?>
+<p:sld xmlns:a="http://schemas.openxmlformats.org/drawingml/2006/main" xmlns:r="http://schemas.openxmlformats.org/officeDocument/2006/relationships" xmlns:p="http://schemas.openxmlformats.org/presentationml/2006/main">
+  <p:cSld>
+    <p:spTree>
+      <p:nvGrpSpPr>
+        <p:cNvPr id="1" name=""/>
+        <p:cNvGrpSpPr/>
+        <p:nvPr/>
+      </p:nvGrpSpPr>
+      <p:grpSpPr>
+        <a:xfrm>
+          <a:off x="0" y="0"/>
+          <a:ext cx="0" cy="0"/>
+          <a:chOff x="0" y="0"/>
+          <a:chExt cx="0" cy="0"/>
+        </a:xfrm>
+      </p:grpSpPr>
+      <p:sp>
+        <p:nvSpPr>
+          <p:cNvPr id="2" name="Title 1">
+            <a:extLst>
+              <a:ext uri="{FF2B5EF4-FFF2-40B4-BE49-F238E27FC236}">
+                <a16:creationId xmlns:a16="http://schemas.microsoft.com/office/drawing/2014/main" id="{0A76D083-3809-B3F2-5290-947907844F31}"/>
+              </a:ext>
+            </a:extLst>
+          </p:cNvPr>
+          <p:cNvSpPr>
+            <a:spLocks noGrp="1"/>
+          </p:cNvSpPr>
+          <p:nvPr>
+            <p:ph type="title"/>
+          </p:nvPr>
+        </p:nvSpPr>
+        <p:spPr/>
+        <p:txBody>
+          <a:bodyPr/>
+          <a:lstStyle/>
+          <a:p>
+            <a:r>
+              <a:rPr lang="en-DE" dirty="0"/>
+              <a:t>Bayes Theorem</a:t>
+            </a:r>
+          </a:p>
+        </p:txBody>
+      </p:sp>
+      <p:sp>
+        <p:nvSpPr>
+          <p:cNvPr id="4" name="Slide Number Placeholder 3">
+            <a:extLst>
+              <a:ext uri="{FF2B5EF4-FFF2-40B4-BE49-F238E27FC236}">
+                <a16:creationId xmlns:a16="http://schemas.microsoft.com/office/drawing/2014/main" id="{AAE9EF95-A3CC-50C2-FC92-FF2E0B859AF0}"/>
+              </a:ext>
+            </a:extLst>
+          </p:cNvPr>
+          <p:cNvSpPr>
+            <a:spLocks noGrp="1"/>
+          </p:cNvSpPr>
+          <p:nvPr>
+            <p:ph type="sldNum" sz="quarter" idx="12"/>
+          </p:nvPr>
+        </p:nvSpPr>
+        <p:spPr/>
+        <p:txBody>
+          <a:bodyPr/>
+          <a:lstStyle/>
+          <a:p>
+            <a:fld id="{77E1BB0D-8AD4-A14C-8FD5-F1619D1A43A2}" type="slidenum">
+              <a:rPr lang="en-DE" smtClean="0"/>
+              <a:t>14</a:t>
+            </a:fld>
+            <a:endParaRPr lang="en-DE"/>
+          </a:p>
+        </p:txBody>
+      </p:sp>
+      <mc:AlternateContent xmlns:mc="http://schemas.openxmlformats.org/markup-compatibility/2006" xmlns:a14="http://schemas.microsoft.com/office/drawing/2010/main">
+        <mc:Choice Requires="a14">
+          <p:sp>
+            <p:nvSpPr>
+              <p:cNvPr id="5" name="TextBox 4">
+                <a:extLst>
+                  <a:ext uri="{FF2B5EF4-FFF2-40B4-BE49-F238E27FC236}">
+                    <a16:creationId xmlns:a16="http://schemas.microsoft.com/office/drawing/2014/main" id="{939C2805-7BBC-38B8-8256-ACF3DC7799F4}"/>
+                  </a:ext>
+                </a:extLst>
+              </p:cNvPr>
+              <p:cNvSpPr txBox="1"/>
+              <p:nvPr/>
+            </p:nvSpPr>
+            <p:spPr>
+              <a:xfrm>
+                <a:off x="3857631" y="2916327"/>
+                <a:ext cx="4476738" cy="1025345"/>
+              </a:xfrm>
+              <a:prstGeom prst="rect">
+                <a:avLst/>
+              </a:prstGeom>
+              <a:noFill/>
+              <a:ln>
+                <a:solidFill>
+                  <a:schemeClr val="tx1"/>
+                </a:solidFill>
+              </a:ln>
+            </p:spPr>
+            <p:txBody>
+              <a:bodyPr wrap="none" lIns="0" tIns="0" rIns="0" bIns="0" rtlCol="0">
+                <a:spAutoFit/>
+              </a:bodyPr>
+              <a:lstStyle/>
+              <a:p>
+                <a:pPr/>
+                <a14:m>
+                  <m:oMathPara xmlns:m="http://schemas.openxmlformats.org/officeDocument/2006/math">
+                    <m:oMathParaPr>
+                      <m:jc m:val="centerGroup"/>
+                    </m:oMathParaPr>
+                    <m:oMath xmlns:m="http://schemas.openxmlformats.org/officeDocument/2006/math">
+                      <m:r>
+                        <a:rPr lang="en-US" sz="3200" b="0" i="1" smtClean="0">
+                          <a:latin typeface="Cambria Math" panose="02040503050406030204" pitchFamily="18" charset="0"/>
+                        </a:rPr>
+                        <m:t>𝑃</m:t>
+                      </m:r>
+                      <m:d>
+                        <m:dPr>
+                          <m:ctrlPr>
+                            <a:rPr lang="en-US" sz="3200" b="0" i="1" smtClean="0">
+                              <a:latin typeface="Cambria Math" panose="02040503050406030204" pitchFamily="18" charset="0"/>
+                            </a:rPr>
+                          </m:ctrlPr>
+                        </m:dPr>
+                        <m:e>
+                          <m:r>
+                            <a:rPr lang="en-US" sz="3200" b="0" i="1" smtClean="0">
+                              <a:latin typeface="Cambria Math" panose="02040503050406030204" pitchFamily="18" charset="0"/>
+                            </a:rPr>
+                            <m:t>𝐻</m:t>
+                          </m:r>
+                          <m:r>
+                            <a:rPr lang="en-US" sz="3200" b="0" i="1" smtClean="0">
+                              <a:latin typeface="Cambria Math" panose="02040503050406030204" pitchFamily="18" charset="0"/>
+                            </a:rPr>
+                            <m:t>|</m:t>
+                          </m:r>
+                          <m:r>
+                            <a:rPr lang="en-US" sz="3200" b="0" i="1" smtClean="0">
+                              <a:latin typeface="Cambria Math" panose="02040503050406030204" pitchFamily="18" charset="0"/>
+                            </a:rPr>
+                            <m:t>𝐸</m:t>
+                          </m:r>
+                        </m:e>
+                      </m:d>
+                      <m:r>
+                        <a:rPr lang="en-US" sz="3200" b="0" i="1" smtClean="0">
+                          <a:latin typeface="Cambria Math" panose="02040503050406030204" pitchFamily="18" charset="0"/>
+                        </a:rPr>
+                        <m:t>=</m:t>
+                      </m:r>
+                      <m:f>
+                        <m:fPr>
+                          <m:ctrlPr>
+                            <a:rPr lang="en-US" sz="3200" b="0" i="1" smtClean="0">
+                              <a:latin typeface="Cambria Math" panose="02040503050406030204" pitchFamily="18" charset="0"/>
+                            </a:rPr>
+                          </m:ctrlPr>
+                        </m:fPr>
+                        <m:num>
+                          <m:r>
+                            <a:rPr lang="en-US" sz="3200" b="0" i="1" smtClean="0">
+                              <a:latin typeface="Cambria Math" panose="02040503050406030204" pitchFamily="18" charset="0"/>
+                            </a:rPr>
+                            <m:t>𝑃</m:t>
+                          </m:r>
+                          <m:d>
+                            <m:dPr>
+                              <m:ctrlPr>
+                                <a:rPr lang="en-US" sz="3200" b="0" i="1" smtClean="0">
+                                  <a:latin typeface="Cambria Math" panose="02040503050406030204" pitchFamily="18" charset="0"/>
+                                </a:rPr>
+                              </m:ctrlPr>
+                            </m:dPr>
+                            <m:e>
+                              <m:r>
+                                <a:rPr lang="en-US" sz="3200" b="0" i="1" smtClean="0">
+                                  <a:latin typeface="Cambria Math" panose="02040503050406030204" pitchFamily="18" charset="0"/>
+                                </a:rPr>
+                                <m:t>𝐸</m:t>
+                              </m:r>
+                              <m:r>
+                                <a:rPr lang="en-US" sz="3200" b="0" i="1" smtClean="0">
+                                  <a:latin typeface="Cambria Math" panose="02040503050406030204" pitchFamily="18" charset="0"/>
+                                </a:rPr>
+                                <m:t>|</m:t>
+                              </m:r>
+                              <m:r>
+                                <a:rPr lang="en-US" sz="3200" b="0" i="1" smtClean="0">
+                                  <a:latin typeface="Cambria Math" panose="02040503050406030204" pitchFamily="18" charset="0"/>
+                                </a:rPr>
+                                <m:t>𝐻</m:t>
+                              </m:r>
+                            </m:e>
+                          </m:d>
+                          <m:r>
+                            <a:rPr lang="en-US" sz="3200" b="0" i="1" smtClean="0">
+                              <a:latin typeface="Cambria Math" panose="02040503050406030204" pitchFamily="18" charset="0"/>
+                              <a:ea typeface="Cambria Math" panose="02040503050406030204" pitchFamily="18" charset="0"/>
+                            </a:rPr>
+                            <m:t>∙</m:t>
+                          </m:r>
+                          <m:r>
+                            <a:rPr lang="en-US" sz="3200" b="0" i="1" smtClean="0">
+                              <a:latin typeface="Cambria Math" panose="02040503050406030204" pitchFamily="18" charset="0"/>
+                              <a:ea typeface="Cambria Math" panose="02040503050406030204" pitchFamily="18" charset="0"/>
+                            </a:rPr>
+                            <m:t>𝑃</m:t>
+                          </m:r>
+                          <m:d>
+                            <m:dPr>
+                              <m:ctrlPr>
+                                <a:rPr lang="en-US" sz="3200" b="0" i="1" smtClean="0">
+                                  <a:latin typeface="Cambria Math" panose="02040503050406030204" pitchFamily="18" charset="0"/>
+                                  <a:ea typeface="Cambria Math" panose="02040503050406030204" pitchFamily="18" charset="0"/>
+                                </a:rPr>
+                              </m:ctrlPr>
+                            </m:dPr>
+                            <m:e>
+                              <m:r>
+                                <a:rPr lang="en-US" sz="3200" b="0" i="1" smtClean="0">
+                                  <a:latin typeface="Cambria Math" panose="02040503050406030204" pitchFamily="18" charset="0"/>
+                                  <a:ea typeface="Cambria Math" panose="02040503050406030204" pitchFamily="18" charset="0"/>
+                                </a:rPr>
+                                <m:t>𝐻</m:t>
+                              </m:r>
+                            </m:e>
+                          </m:d>
+                        </m:num>
+                        <m:den>
+                          <m:r>
+                            <a:rPr lang="en-US" sz="3200" b="0" i="1" smtClean="0">
+                              <a:latin typeface="Cambria Math" panose="02040503050406030204" pitchFamily="18" charset="0"/>
+                            </a:rPr>
+                            <m:t>𝑃</m:t>
+                          </m:r>
+                          <m:d>
+                            <m:dPr>
+                              <m:ctrlPr>
+                                <a:rPr lang="en-US" sz="3200" b="0" i="1" smtClean="0">
+                                  <a:latin typeface="Cambria Math" panose="02040503050406030204" pitchFamily="18" charset="0"/>
+                                </a:rPr>
+                              </m:ctrlPr>
+                            </m:dPr>
+                            <m:e>
+                              <m:r>
+                                <a:rPr lang="en-US" sz="3200" b="0" i="1" smtClean="0">
+                                  <a:latin typeface="Cambria Math" panose="02040503050406030204" pitchFamily="18" charset="0"/>
+                                </a:rPr>
+                                <m:t>𝐸</m:t>
+                              </m:r>
+                            </m:e>
+                          </m:d>
+                        </m:den>
+                      </m:f>
+                    </m:oMath>
+                  </m:oMathPara>
+                </a14:m>
+                <a:endParaRPr lang="en-DE" sz="3200" dirty="0"/>
+              </a:p>
+            </p:txBody>
+          </p:sp>
+        </mc:Choice>
+        <mc:Fallback xmlns="">
+          <p:sp>
+            <p:nvSpPr>
+              <p:cNvPr id="5" name="TextBox 4">
+                <a:extLst>
+                  <a:ext uri="{FF2B5EF4-FFF2-40B4-BE49-F238E27FC236}">
+                    <a16:creationId xmlns:a16="http://schemas.microsoft.com/office/drawing/2014/main" id="{939C2805-7BBC-38B8-8256-ACF3DC7799F4}"/>
+                  </a:ext>
+                </a:extLst>
+              </p:cNvPr>
+              <p:cNvSpPr txBox="1">
+                <a:spLocks noRot="1" noChangeAspect="1" noMove="1" noResize="1" noEditPoints="1" noAdjustHandles="1" noChangeArrowheads="1" noChangeShapeType="1" noTextEdit="1"/>
+              </p:cNvSpPr>
+              <p:nvPr/>
+            </p:nvSpPr>
+            <p:spPr>
+              <a:xfrm>
+                <a:off x="3857631" y="2916327"/>
+                <a:ext cx="4476738" cy="1025345"/>
+              </a:xfrm>
+              <a:prstGeom prst="rect">
+                <a:avLst/>
+              </a:prstGeom>
+              <a:blipFill>
+                <a:blip r:embed="rId2"/>
+                <a:stretch>
+                  <a:fillRect l="-1412" b="-4762"/>
+                </a:stretch>
+              </a:blipFill>
+              <a:ln>
+                <a:solidFill>
+                  <a:schemeClr val="tx1"/>
+                </a:solidFill>
+              </a:ln>
+            </p:spPr>
+            <p:txBody>
+              <a:bodyPr/>
+              <a:lstStyle/>
+              <a:p>
+                <a:r>
+                  <a:rPr lang="en-DE">
+                    <a:noFill/>
+                  </a:rPr>
+                  <a:t> </a:t>
+                </a:r>
+              </a:p>
+            </p:txBody>
+          </p:sp>
+        </mc:Fallback>
+      </mc:AlternateContent>
+      <mc:AlternateContent xmlns:mc="http://schemas.openxmlformats.org/markup-compatibility/2006" xmlns:a14="http://schemas.microsoft.com/office/drawing/2010/main">
+        <mc:Choice Requires="a14">
+          <p:sp>
+            <p:nvSpPr>
+              <p:cNvPr id="6" name="TextBox 5">
+                <a:extLst>
+                  <a:ext uri="{FF2B5EF4-FFF2-40B4-BE49-F238E27FC236}">
+                    <a16:creationId xmlns:a16="http://schemas.microsoft.com/office/drawing/2014/main" id="{C14059E9-36C1-0C63-DCC8-3ED5BD95595E}"/>
+                  </a:ext>
+                </a:extLst>
+              </p:cNvPr>
+              <p:cNvSpPr txBox="1"/>
+              <p:nvPr/>
+            </p:nvSpPr>
+            <p:spPr>
+              <a:xfrm>
+                <a:off x="7895675" y="4515613"/>
+                <a:ext cx="2383291" cy="1200329"/>
+              </a:xfrm>
+              <a:prstGeom prst="rect">
+                <a:avLst/>
+              </a:prstGeom>
+              <a:solidFill>
+                <a:schemeClr val="bg2"/>
+              </a:solidFill>
+            </p:spPr>
+            <p:txBody>
+              <a:bodyPr wrap="square" rtlCol="0">
+                <a:spAutoFit/>
+              </a:bodyPr>
+              <a:lstStyle/>
+              <a:p>
+                <a:r>
+                  <a:rPr lang="en-GB" sz="2400" dirty="0"/>
+                  <a:t>p</a:t>
+                </a:r>
+                <a:r>
+                  <a:rPr lang="en-DE" sz="2400" dirty="0"/>
+                  <a:t>rior probability (belief in </a:t>
+                </a:r>
+                <a14:m>
+                  <m:oMath xmlns:m="http://schemas.openxmlformats.org/officeDocument/2006/math">
+                    <m:r>
+                      <a:rPr lang="en-US" sz="2400" i="1">
+                        <a:latin typeface="Cambria Math" panose="02040503050406030204" pitchFamily="18" charset="0"/>
+                      </a:rPr>
+                      <m:t>𝐻</m:t>
+                    </m:r>
+                  </m:oMath>
+                </a14:m>
+                <a:r>
+                  <a:rPr lang="en-DE" sz="2400" dirty="0"/>
+                  <a:t> before evidence)</a:t>
+                </a:r>
+              </a:p>
+            </p:txBody>
+          </p:sp>
+        </mc:Choice>
+        <mc:Fallback xmlns="">
+          <p:sp>
+            <p:nvSpPr>
+              <p:cNvPr id="6" name="TextBox 5">
+                <a:extLst>
+                  <a:ext uri="{FF2B5EF4-FFF2-40B4-BE49-F238E27FC236}">
+                    <a16:creationId xmlns:a16="http://schemas.microsoft.com/office/drawing/2014/main" id="{C14059E9-36C1-0C63-DCC8-3ED5BD95595E}"/>
+                  </a:ext>
+                </a:extLst>
+              </p:cNvPr>
+              <p:cNvSpPr txBox="1">
+                <a:spLocks noRot="1" noChangeAspect="1" noMove="1" noResize="1" noEditPoints="1" noAdjustHandles="1" noChangeArrowheads="1" noChangeShapeType="1" noTextEdit="1"/>
+              </p:cNvSpPr>
+              <p:nvPr/>
+            </p:nvSpPr>
+            <p:spPr>
+              <a:xfrm>
+                <a:off x="7895675" y="4515613"/>
+                <a:ext cx="2383291" cy="1200329"/>
+              </a:xfrm>
+              <a:prstGeom prst="rect">
+                <a:avLst/>
+              </a:prstGeom>
+              <a:blipFill>
+                <a:blip r:embed="rId3"/>
+                <a:stretch>
+                  <a:fillRect l="-3704" t="-4167" r="-3704" b="-10417"/>
+                </a:stretch>
+              </a:blipFill>
+            </p:spPr>
+            <p:txBody>
+              <a:bodyPr/>
+              <a:lstStyle/>
+              <a:p>
+                <a:r>
+                  <a:rPr lang="de-DE">
+                    <a:noFill/>
+                  </a:rPr>
+                  <a:t> </a:t>
+                </a:r>
+              </a:p>
+            </p:txBody>
+          </p:sp>
+        </mc:Fallback>
+      </mc:AlternateContent>
+      <p:sp>
+        <p:nvSpPr>
+          <p:cNvPr id="7" name="TextBox 6">
+            <a:extLst>
+              <a:ext uri="{FF2B5EF4-FFF2-40B4-BE49-F238E27FC236}">
+                <a16:creationId xmlns:a16="http://schemas.microsoft.com/office/drawing/2014/main" id="{C3FF3577-4A01-1DEC-E4B4-75723E488AE3}"/>
+              </a:ext>
+            </a:extLst>
+          </p:cNvPr>
+          <p:cNvSpPr txBox="1"/>
+          <p:nvPr/>
+        </p:nvSpPr>
+        <p:spPr>
+          <a:xfrm>
+            <a:off x="4953001" y="1534005"/>
+            <a:ext cx="3763616" cy="830997"/>
+          </a:xfrm>
+          <a:prstGeom prst="rect">
+            <a:avLst/>
+          </a:prstGeom>
+          <a:solidFill>
+            <a:schemeClr val="bg2"/>
+          </a:solidFill>
+        </p:spPr>
+        <p:txBody>
+          <a:bodyPr wrap="square" rtlCol="0">
+            <a:spAutoFit/>
+          </a:bodyPr>
+          <a:lstStyle/>
+          <a:p>
+            <a:r>
+              <a:rPr lang="en-DE" sz="2400" dirty="0"/>
+              <a:t>likelihood function (</a:t>
+            </a:r>
+            <a:r>
+              <a:rPr lang="en-GB" sz="2400" dirty="0"/>
+              <a:t>d</a:t>
+            </a:r>
+            <a:r>
+              <a:rPr lang="en-DE" sz="2400" dirty="0"/>
+              <a:t>erived from statistical model)</a:t>
+            </a:r>
+          </a:p>
+        </p:txBody>
+      </p:sp>
+      <p:sp>
+        <p:nvSpPr>
+          <p:cNvPr id="8" name="TextBox 7">
+            <a:extLst>
+              <a:ext uri="{FF2B5EF4-FFF2-40B4-BE49-F238E27FC236}">
+                <a16:creationId xmlns:a16="http://schemas.microsoft.com/office/drawing/2014/main" id="{73DB1AEB-5B92-AF7F-8213-0C80AC548A6E}"/>
+              </a:ext>
+            </a:extLst>
+          </p:cNvPr>
+          <p:cNvSpPr txBox="1"/>
+          <p:nvPr/>
+        </p:nvSpPr>
+        <p:spPr>
+          <a:xfrm>
+            <a:off x="1361662" y="4515613"/>
+            <a:ext cx="2845420" cy="1200329"/>
+          </a:xfrm>
+          <a:prstGeom prst="rect">
+            <a:avLst/>
+          </a:prstGeom>
+          <a:solidFill>
+            <a:schemeClr val="bg2"/>
+          </a:solidFill>
+        </p:spPr>
+        <p:txBody>
+          <a:bodyPr wrap="square" rtlCol="0">
+            <a:spAutoFit/>
+          </a:bodyPr>
+          <a:lstStyle/>
+          <a:p>
+            <a:r>
+              <a:rPr lang="en-GB" sz="2400" dirty="0"/>
+              <a:t>p</a:t>
+            </a:r>
+            <a:r>
+              <a:rPr lang="en-DE" sz="2400" dirty="0"/>
+              <a:t>osterior probability (belief updated with observed evidence)</a:t>
+            </a:r>
+          </a:p>
+        </p:txBody>
+      </p:sp>
+      <p:cxnSp>
+        <p:nvCxnSpPr>
+          <p:cNvPr id="9" name="Straight Arrow Connector 8">
+            <a:extLst>
+              <a:ext uri="{FF2B5EF4-FFF2-40B4-BE49-F238E27FC236}">
+                <a16:creationId xmlns:a16="http://schemas.microsoft.com/office/drawing/2014/main" id="{530F36AA-B964-BEBF-8893-D8AE7C77D47B}"/>
+              </a:ext>
+            </a:extLst>
+          </p:cNvPr>
+          <p:cNvCxnSpPr>
+            <a:cxnSpLocks/>
+            <a:stCxn id="8" idx="0"/>
+          </p:cNvCxnSpPr>
+          <p:nvPr/>
+        </p:nvCxnSpPr>
+        <p:spPr>
+          <a:xfrm flipV="1">
+            <a:off x="2784372" y="3710152"/>
+            <a:ext cx="1373943" cy="805461"/>
+          </a:xfrm>
+          <a:prstGeom prst="straightConnector1">
+            <a:avLst/>
+          </a:prstGeom>
+          <a:ln>
+            <a:tailEnd type="triangle"/>
+          </a:ln>
+        </p:spPr>
+        <p:style>
+          <a:lnRef idx="1">
+            <a:schemeClr val="accent1"/>
+          </a:lnRef>
+          <a:fillRef idx="0">
+            <a:schemeClr val="accent1"/>
+          </a:fillRef>
+          <a:effectRef idx="0">
+            <a:schemeClr val="accent1"/>
+          </a:effectRef>
+          <a:fontRef idx="minor">
+            <a:schemeClr val="tx1"/>
+          </a:fontRef>
+        </p:style>
+      </p:cxnSp>
+      <p:cxnSp>
+        <p:nvCxnSpPr>
+          <p:cNvPr id="10" name="Straight Arrow Connector 9">
+            <a:extLst>
+              <a:ext uri="{FF2B5EF4-FFF2-40B4-BE49-F238E27FC236}">
+                <a16:creationId xmlns:a16="http://schemas.microsoft.com/office/drawing/2014/main" id="{E9B6A5EC-D8D8-2627-1F0B-C09E9824887E}"/>
+              </a:ext>
+            </a:extLst>
+          </p:cNvPr>
+          <p:cNvCxnSpPr>
+            <a:cxnSpLocks/>
+            <a:stCxn id="7" idx="2"/>
+          </p:cNvCxnSpPr>
+          <p:nvPr/>
+        </p:nvCxnSpPr>
+        <p:spPr>
+          <a:xfrm flipH="1">
+            <a:off x="6316717" y="2365002"/>
+            <a:ext cx="518092" cy="551325"/>
+          </a:xfrm>
+          <a:prstGeom prst="straightConnector1">
+            <a:avLst/>
+          </a:prstGeom>
+          <a:ln>
+            <a:tailEnd type="triangle"/>
+          </a:ln>
+        </p:spPr>
+        <p:style>
+          <a:lnRef idx="1">
+            <a:schemeClr val="accent1"/>
+          </a:lnRef>
+          <a:fillRef idx="0">
+            <a:schemeClr val="accent1"/>
+          </a:fillRef>
+          <a:effectRef idx="0">
+            <a:schemeClr val="accent1"/>
+          </a:effectRef>
+          <a:fontRef idx="minor">
+            <a:schemeClr val="tx1"/>
+          </a:fontRef>
+        </p:style>
+      </p:cxnSp>
+      <p:cxnSp>
+        <p:nvCxnSpPr>
+          <p:cNvPr id="13" name="Straight Arrow Connector 12">
+            <a:extLst>
+              <a:ext uri="{FF2B5EF4-FFF2-40B4-BE49-F238E27FC236}">
+                <a16:creationId xmlns:a16="http://schemas.microsoft.com/office/drawing/2014/main" id="{D2FCC376-1AB2-5E5F-C5E8-C82BBEF5FAF4}"/>
+              </a:ext>
+            </a:extLst>
+          </p:cNvPr>
+          <p:cNvCxnSpPr>
+            <a:cxnSpLocks/>
+          </p:cNvCxnSpPr>
+          <p:nvPr/>
+        </p:nvCxnSpPr>
+        <p:spPr>
+          <a:xfrm flipH="1" flipV="1">
+            <a:off x="7655481" y="3364343"/>
+            <a:ext cx="1691999" cy="1162813"/>
+          </a:xfrm>
+          <a:prstGeom prst="straightConnector1">
+            <a:avLst/>
+          </a:prstGeom>
+          <a:ln>
+            <a:tailEnd type="triangle"/>
+          </a:ln>
+        </p:spPr>
+        <p:style>
+          <a:lnRef idx="1">
+            <a:schemeClr val="accent1"/>
+          </a:lnRef>
+          <a:fillRef idx="0">
+            <a:schemeClr val="accent1"/>
+          </a:fillRef>
+          <a:effectRef idx="0">
+            <a:schemeClr val="accent1"/>
+          </a:effectRef>
+          <a:fontRef idx="minor">
+            <a:schemeClr val="tx1"/>
+          </a:fontRef>
+        </p:style>
+      </p:cxnSp>
+      <p:sp>
+        <p:nvSpPr>
+          <p:cNvPr id="18" name="TextBox 17">
+            <a:extLst>
+              <a:ext uri="{FF2B5EF4-FFF2-40B4-BE49-F238E27FC236}">
+                <a16:creationId xmlns:a16="http://schemas.microsoft.com/office/drawing/2014/main" id="{D29414B7-24A4-506D-E649-FF8975144AED}"/>
+              </a:ext>
+            </a:extLst>
+          </p:cNvPr>
+          <p:cNvSpPr txBox="1"/>
+          <p:nvPr/>
+        </p:nvSpPr>
+        <p:spPr>
+          <a:xfrm>
+            <a:off x="4851674" y="4522288"/>
+            <a:ext cx="2533100" cy="1200329"/>
+          </a:xfrm>
+          <a:prstGeom prst="rect">
+            <a:avLst/>
+          </a:prstGeom>
+          <a:solidFill>
+            <a:schemeClr val="bg2"/>
+          </a:solidFill>
+        </p:spPr>
+        <p:txBody>
+          <a:bodyPr wrap="square" rtlCol="0">
+            <a:spAutoFit/>
+          </a:bodyPr>
+          <a:lstStyle/>
+          <a:p>
+            <a:r>
+              <a:rPr lang="en-GB" sz="2400" dirty="0"/>
+              <a:t>new data</a:t>
+            </a:r>
+            <a:r>
+              <a:rPr lang="en-DE" sz="2400" dirty="0"/>
+              <a:t> (same for all hypotheses </a:t>
+            </a:r>
+            <a:r>
+              <a:rPr lang="en-DE" sz="2400" dirty="0">
+                <a:sym typeface="Wingdings" pitchFamily="2" charset="2"/>
+              </a:rPr>
+              <a:t> uninteresting</a:t>
+            </a:r>
+            <a:r>
+              <a:rPr lang="en-DE" sz="2400" dirty="0"/>
+              <a:t>)</a:t>
+            </a:r>
+          </a:p>
+        </p:txBody>
+      </p:sp>
+      <p:cxnSp>
+        <p:nvCxnSpPr>
+          <p:cNvPr id="21" name="Straight Arrow Connector 20">
+            <a:extLst>
+              <a:ext uri="{FF2B5EF4-FFF2-40B4-BE49-F238E27FC236}">
+                <a16:creationId xmlns:a16="http://schemas.microsoft.com/office/drawing/2014/main" id="{39B76951-6349-FEB7-9787-2CE26595D181}"/>
+              </a:ext>
+            </a:extLst>
+          </p:cNvPr>
+          <p:cNvCxnSpPr>
+            <a:cxnSpLocks/>
+            <a:stCxn id="18" idx="0"/>
+          </p:cNvCxnSpPr>
+          <p:nvPr/>
+        </p:nvCxnSpPr>
+        <p:spPr>
+          <a:xfrm flipV="1">
+            <a:off x="6118224" y="3941672"/>
+            <a:ext cx="663577" cy="580616"/>
+          </a:xfrm>
+          <a:prstGeom prst="straightConnector1">
+            <a:avLst/>
+          </a:prstGeom>
+          <a:ln>
+            <a:tailEnd type="triangle"/>
+          </a:ln>
+        </p:spPr>
+        <p:style>
+          <a:lnRef idx="1">
+            <a:schemeClr val="accent1"/>
+          </a:lnRef>
+          <a:fillRef idx="0">
+            <a:schemeClr val="accent1"/>
+          </a:fillRef>
+          <a:effectRef idx="0">
+            <a:schemeClr val="accent1"/>
+          </a:effectRef>
+          <a:fontRef idx="minor">
+            <a:schemeClr val="tx1"/>
+          </a:fontRef>
+        </p:style>
+      </p:cxnSp>
+      <mc:AlternateContent xmlns:mc="http://schemas.openxmlformats.org/markup-compatibility/2006" xmlns:a14="http://schemas.microsoft.com/office/drawing/2010/main">
+        <mc:Choice Requires="a14">
+          <p:sp>
+            <p:nvSpPr>
+              <p:cNvPr id="22" name="TextBox 21">
+                <a:extLst>
+                  <a:ext uri="{FF2B5EF4-FFF2-40B4-BE49-F238E27FC236}">
+                    <a16:creationId xmlns:a16="http://schemas.microsoft.com/office/drawing/2014/main" id="{21C24B1E-3649-640C-30E1-D8472BCE486C}"/>
+                  </a:ext>
+                </a:extLst>
+              </p:cNvPr>
+              <p:cNvSpPr txBox="1"/>
+              <p:nvPr/>
+            </p:nvSpPr>
+            <p:spPr>
+              <a:xfrm>
+                <a:off x="537178" y="1926888"/>
+                <a:ext cx="3033331" cy="830997"/>
+              </a:xfrm>
+              <a:prstGeom prst="rect">
+                <a:avLst/>
+              </a:prstGeom>
+              <a:noFill/>
+            </p:spPr>
+            <p:txBody>
+              <a:bodyPr wrap="none" rtlCol="0">
+                <a:spAutoFit/>
+              </a:bodyPr>
+              <a:lstStyle/>
+              <a:p>
+                <a14:m>
+                  <m:oMath xmlns:m="http://schemas.openxmlformats.org/officeDocument/2006/math">
+                    <m:r>
+                      <a:rPr lang="en-US" sz="2400" i="1">
+                        <a:latin typeface="Cambria Math" panose="02040503050406030204" pitchFamily="18" charset="0"/>
+                      </a:rPr>
+                      <m:t>𝐻</m:t>
+                    </m:r>
+                    <m:r>
+                      <a:rPr lang="en-US" sz="2400" i="1">
+                        <a:latin typeface="Cambria Math" panose="02040503050406030204" pitchFamily="18" charset="0"/>
+                      </a:rPr>
+                      <m:t> </m:t>
+                    </m:r>
+                  </m:oMath>
+                </a14:m>
+                <a:r>
+                  <a:rPr lang="en-DE" sz="2400" dirty="0"/>
+                  <a:t>: hypothesis (model)</a:t>
+                </a:r>
+              </a:p>
+              <a:p>
+                <a14:m>
+                  <m:oMath xmlns:m="http://schemas.openxmlformats.org/officeDocument/2006/math">
+                    <m:r>
+                      <a:rPr lang="en-US" sz="2400" i="1">
+                        <a:latin typeface="Cambria Math" panose="02040503050406030204" pitchFamily="18" charset="0"/>
+                      </a:rPr>
+                      <m:t>𝐸</m:t>
+                    </m:r>
+                    <m:r>
+                      <a:rPr lang="en-US" sz="2400" i="1">
+                        <a:latin typeface="Cambria Math" panose="02040503050406030204" pitchFamily="18" charset="0"/>
+                      </a:rPr>
+                      <m:t> </m:t>
+                    </m:r>
+                  </m:oMath>
+                </a14:m>
+                <a:r>
+                  <a:rPr lang="en-DE" sz="2400" dirty="0"/>
+                  <a:t>: evidence (data)</a:t>
+                </a:r>
+              </a:p>
+            </p:txBody>
+          </p:sp>
+        </mc:Choice>
+        <mc:Fallback xmlns="">
+          <p:sp>
+            <p:nvSpPr>
+              <p:cNvPr id="22" name="TextBox 21">
+                <a:extLst>
+                  <a:ext uri="{FF2B5EF4-FFF2-40B4-BE49-F238E27FC236}">
+                    <a16:creationId xmlns:a16="http://schemas.microsoft.com/office/drawing/2014/main" id="{21C24B1E-3649-640C-30E1-D8472BCE486C}"/>
+                  </a:ext>
+                </a:extLst>
+              </p:cNvPr>
+              <p:cNvSpPr txBox="1">
+                <a:spLocks noRot="1" noChangeAspect="1" noMove="1" noResize="1" noEditPoints="1" noAdjustHandles="1" noChangeArrowheads="1" noChangeShapeType="1" noTextEdit="1"/>
+              </p:cNvSpPr>
+              <p:nvPr/>
+            </p:nvSpPr>
+            <p:spPr>
+              <a:xfrm>
+                <a:off x="537178" y="1926888"/>
+                <a:ext cx="3033331" cy="830997"/>
+              </a:xfrm>
+              <a:prstGeom prst="rect">
+                <a:avLst/>
+              </a:prstGeom>
+              <a:blipFill>
+                <a:blip r:embed="rId4"/>
+                <a:stretch>
+                  <a:fillRect l="-417" t="-4545" r="-2083" b="-16667"/>
+                </a:stretch>
+              </a:blipFill>
+            </p:spPr>
+            <p:txBody>
+              <a:bodyPr/>
+              <a:lstStyle/>
+              <a:p>
+                <a:r>
+                  <a:rPr lang="en-DE">
+                    <a:noFill/>
+                  </a:rPr>
+                  <a:t> </a:t>
+                </a:r>
+              </a:p>
+            </p:txBody>
+          </p:sp>
+        </mc:Fallback>
+      </mc:AlternateContent>
+    </p:spTree>
+    <p:extLst>
+      <p:ext uri="{BB962C8B-B14F-4D97-AF65-F5344CB8AC3E}">
+        <p14:creationId xmlns:p14="http://schemas.microsoft.com/office/powerpoint/2010/main" val="1700701973"/>
+      </p:ext>
+    </p:extLst>
+  </p:cSld>
+  <p:clrMapOvr>
+    <a:masterClrMapping/>
+  </p:clrMapOvr>
+</p:sld>
+</file>
+
 <file path=ppt/slides/slide15.xml><?xml version="1.0" encoding="utf-8"?>
 <p:sld xmlns:a="http://schemas.openxmlformats.org/drawingml/2006/main" xmlns:r="http://schemas.openxmlformats.org/officeDocument/2006/relationships" xmlns:p="http://schemas.openxmlformats.org/presentationml/2006/main">
   <p:cSld>
@@ -13515,10 +13036,10 @@
       </p:grpSpPr>
       <p:sp>
         <p:nvSpPr>
-          <p:cNvPr id="2" name="Titel 1">
-            <a:extLst>
-              <a:ext uri="{FF2B5EF4-FFF2-40B4-BE49-F238E27FC236}">
-                <a16:creationId xmlns:a16="http://schemas.microsoft.com/office/drawing/2014/main" id="{ACA0027E-BD58-51A0-07B6-8650B6348A8A}"/>
+          <p:cNvPr id="2" name="Title 1">
+            <a:extLst>
+              <a:ext uri="{FF2B5EF4-FFF2-40B4-BE49-F238E27FC236}">
+                <a16:creationId xmlns:a16="http://schemas.microsoft.com/office/drawing/2014/main" id="{BC53E2E1-F339-3C33-E4A0-683C3217624F}"/>
               </a:ext>
             </a:extLst>
           </p:cNvPr>
@@ -13535,51 +13056,18 @@
           <a:lstStyle/>
           <a:p>
             <a:r>
-              <a:rPr lang="de-DE" dirty="0"/>
-              <a:t>Properties </a:t>
-            </a:r>
-            <a:r>
-              <a:rPr lang="de-DE" dirty="0" err="1"/>
-              <a:t>of</a:t>
-            </a:r>
-            <a:r>
-              <a:rPr lang="de-DE" dirty="0"/>
-              <a:t> MLE</a:t>
-            </a:r>
-          </a:p>
-        </p:txBody>
-      </p:sp>
-      <p:sp>
-        <p:nvSpPr>
-          <p:cNvPr id="3" name="Inhaltsplatzhalter 2">
-            <a:extLst>
-              <a:ext uri="{FF2B5EF4-FFF2-40B4-BE49-F238E27FC236}">
-                <a16:creationId xmlns:a16="http://schemas.microsoft.com/office/drawing/2014/main" id="{94013623-9751-3A73-718B-D8B86CF56D53}"/>
-              </a:ext>
-            </a:extLst>
-          </p:cNvPr>
-          <p:cNvSpPr>
-            <a:spLocks noGrp="1"/>
-          </p:cNvSpPr>
-          <p:nvPr>
-            <p:ph idx="1"/>
-          </p:nvPr>
-        </p:nvSpPr>
-        <p:spPr/>
-        <p:txBody>
-          <a:bodyPr/>
-          <a:lstStyle/>
-          <a:p>
-            <a:endParaRPr lang="de-DE"/>
-          </a:p>
-        </p:txBody>
-      </p:sp>
-      <p:sp>
-        <p:nvSpPr>
-          <p:cNvPr id="4" name="Foliennummernplatzhalter 3">
-            <a:extLst>
-              <a:ext uri="{FF2B5EF4-FFF2-40B4-BE49-F238E27FC236}">
-                <a16:creationId xmlns:a16="http://schemas.microsoft.com/office/drawing/2014/main" id="{EA69368C-8B19-1116-E86A-4F23EA845F19}"/>
+              <a:rPr lang="en-DE" dirty="0"/>
+              <a:t>Bayes Theorem for Parameter Estimation</a:t>
+            </a:r>
+          </a:p>
+        </p:txBody>
+      </p:sp>
+      <p:sp>
+        <p:nvSpPr>
+          <p:cNvPr id="4" name="Slide Number Placeholder 3">
+            <a:extLst>
+              <a:ext uri="{FF2B5EF4-FFF2-40B4-BE49-F238E27FC236}">
+                <a16:creationId xmlns:a16="http://schemas.microsoft.com/office/drawing/2014/main" id="{E2AC5BFA-CF2B-7911-694F-414613AAA242}"/>
               </a:ext>
             </a:extLst>
           </p:cNvPr>
@@ -13595,18 +13083,899 @@
           <a:bodyPr/>
           <a:lstStyle/>
           <a:p>
-            <a:fld id="{3D4C94FE-FF23-4504-88E9-14D481113291}" type="slidenum">
-              <a:rPr lang="en-GB" smtClean="0"/>
+            <a:fld id="{77E1BB0D-8AD4-A14C-8FD5-F1619D1A43A2}" type="slidenum">
+              <a:rPr lang="en-DE" smtClean="0"/>
               <a:t>15</a:t>
             </a:fld>
-            <a:endParaRPr lang="en-GB"/>
+            <a:endParaRPr lang="en-DE"/>
+          </a:p>
+        </p:txBody>
+      </p:sp>
+      <p:sp>
+        <p:nvSpPr>
+          <p:cNvPr id="5" name="TextBox 4">
+            <a:extLst>
+              <a:ext uri="{FF2B5EF4-FFF2-40B4-BE49-F238E27FC236}">
+                <a16:creationId xmlns:a16="http://schemas.microsoft.com/office/drawing/2014/main" id="{80AC3602-ADE5-3B79-4950-D589D25138B6}"/>
+              </a:ext>
+            </a:extLst>
+          </p:cNvPr>
+          <p:cNvSpPr txBox="1"/>
+          <p:nvPr/>
+        </p:nvSpPr>
+        <p:spPr>
+          <a:xfrm>
+            <a:off x="7751379" y="4070992"/>
+            <a:ext cx="4280338" cy="1938992"/>
+          </a:xfrm>
+          <a:prstGeom prst="rect">
+            <a:avLst/>
+          </a:prstGeom>
+          <a:solidFill>
+            <a:schemeClr val="bg2"/>
+          </a:solidFill>
+        </p:spPr>
+        <p:txBody>
+          <a:bodyPr wrap="square" rtlCol="0">
+            <a:spAutoFit/>
+          </a:bodyPr>
+          <a:lstStyle/>
+          <a:p>
+            <a:r>
+              <a:rPr lang="en-GB" sz="2400" dirty="0"/>
+              <a:t>p</a:t>
+            </a:r>
+            <a:r>
+              <a:rPr lang="en-DE" sz="2400" dirty="0"/>
+              <a:t>rior (e.g., broad Gaussian):</a:t>
+            </a:r>
+          </a:p>
+          <a:p>
+            <a:r>
+              <a:rPr lang="en-GB" sz="2400" dirty="0"/>
+              <a:t>p</a:t>
+            </a:r>
+            <a:r>
+              <a:rPr lang="en-DE" sz="2400" dirty="0"/>
+              <a:t>robability distribution reflecting initial belief about uncertain parameters (</a:t>
+            </a:r>
+            <a:r>
+              <a:rPr lang="en-GB" sz="2400" dirty="0"/>
+              <a:t>helps to reduce variance with few data)</a:t>
+            </a:r>
+            <a:endParaRPr lang="en-DE" sz="2400" dirty="0"/>
+          </a:p>
+        </p:txBody>
+      </p:sp>
+      <mc:AlternateContent xmlns:mc="http://schemas.openxmlformats.org/markup-compatibility/2006" xmlns:a14="http://schemas.microsoft.com/office/drawing/2010/main">
+        <mc:Choice Requires="a14">
+          <p:sp>
+            <p:nvSpPr>
+              <p:cNvPr id="6" name="TextBox 5">
+                <a:extLst>
+                  <a:ext uri="{FF2B5EF4-FFF2-40B4-BE49-F238E27FC236}">
+                    <a16:creationId xmlns:a16="http://schemas.microsoft.com/office/drawing/2014/main" id="{6AC9204A-4D87-9839-B209-4A7B55591244}"/>
+                  </a:ext>
+                </a:extLst>
+              </p:cNvPr>
+              <p:cNvSpPr txBox="1"/>
+              <p:nvPr/>
+            </p:nvSpPr>
+            <p:spPr>
+              <a:xfrm>
+                <a:off x="3280320" y="1543667"/>
+                <a:ext cx="5631360" cy="1200329"/>
+              </a:xfrm>
+              <a:prstGeom prst="rect">
+                <a:avLst/>
+              </a:prstGeom>
+              <a:solidFill>
+                <a:schemeClr val="bg2"/>
+              </a:solidFill>
+            </p:spPr>
+            <p:txBody>
+              <a:bodyPr wrap="square" rtlCol="0">
+                <a:spAutoFit/>
+              </a:bodyPr>
+              <a:lstStyle/>
+              <a:p>
+                <a:r>
+                  <a:rPr lang="en-GB" sz="2400" dirty="0"/>
+                  <a:t>d</a:t>
+                </a:r>
+                <a:r>
+                  <a:rPr lang="en-DE" sz="2400" dirty="0"/>
+                  <a:t>ata likelihood:</a:t>
+                </a:r>
+              </a:p>
+              <a:p>
+                <a:r>
+                  <a:rPr lang="en-GB" sz="2400" dirty="0"/>
+                  <a:t>m</a:t>
+                </a:r>
+                <a:r>
+                  <a:rPr lang="en-DE" sz="2400" dirty="0"/>
+                  <a:t>odel (function of </a:t>
+                </a:r>
+                <a14:m>
+                  <m:oMath xmlns:m="http://schemas.openxmlformats.org/officeDocument/2006/math">
+                    <m:r>
+                      <a:rPr lang="en-US" sz="2400" b="1" i="1">
+                        <a:latin typeface="Cambria Math" panose="02040503050406030204" pitchFamily="18" charset="0"/>
+                        <a:ea typeface="Cambria Math" panose="02040503050406030204" pitchFamily="18" charset="0"/>
+                      </a:rPr>
+                      <m:t>𝜽</m:t>
+                    </m:r>
+                  </m:oMath>
+                </a14:m>
+                <a:r>
+                  <a:rPr lang="en-DE" sz="2400" dirty="0"/>
+                  <a:t> with data fixed), e.g., for linear regression: </a:t>
+                </a:r>
+                <a14:m>
+                  <m:oMath xmlns:m="http://schemas.openxmlformats.org/officeDocument/2006/math">
+                    <m:r>
+                      <a:rPr lang="en-US" sz="2400" i="1">
+                        <a:latin typeface="Cambria Math" panose="02040503050406030204" pitchFamily="18" charset="0"/>
+                        <a:ea typeface="Cambria Math" panose="02040503050406030204" pitchFamily="18" charset="0"/>
+                      </a:rPr>
+                      <m:t>𝒩</m:t>
+                    </m:r>
+                    <m:d>
+                      <m:dPr>
+                        <m:ctrlPr>
+                          <a:rPr lang="en-US" sz="2400" i="1">
+                            <a:latin typeface="Cambria Math" panose="02040503050406030204" pitchFamily="18" charset="0"/>
+                          </a:rPr>
+                        </m:ctrlPr>
+                      </m:dPr>
+                      <m:e>
+                        <m:r>
+                          <a:rPr lang="en-US" sz="2400" i="1">
+                            <a:latin typeface="Cambria Math" panose="02040503050406030204" pitchFamily="18" charset="0"/>
+                          </a:rPr>
+                          <m:t>𝑦</m:t>
+                        </m:r>
+                        <m:r>
+                          <a:rPr lang="en-US" sz="2400" i="1">
+                            <a:latin typeface="Cambria Math" panose="02040503050406030204" pitchFamily="18" charset="0"/>
+                          </a:rPr>
+                          <m:t>;</m:t>
+                        </m:r>
+                        <m:r>
+                          <a:rPr lang="en-US" sz="2400" i="1">
+                            <a:latin typeface="Cambria Math" panose="02040503050406030204" pitchFamily="18" charset="0"/>
+                            <a:ea typeface="Cambria Math" panose="02040503050406030204" pitchFamily="18" charset="0"/>
+                          </a:rPr>
+                          <m:t>𝛼</m:t>
+                        </m:r>
+                        <m:r>
+                          <a:rPr lang="en-US" sz="2400" i="1">
+                            <a:latin typeface="Cambria Math" panose="02040503050406030204" pitchFamily="18" charset="0"/>
+                            <a:ea typeface="Cambria Math" panose="02040503050406030204" pitchFamily="18" charset="0"/>
+                          </a:rPr>
+                          <m:t>+</m:t>
+                        </m:r>
+                        <m:r>
+                          <a:rPr lang="en-US" sz="2400" b="1" i="1" smtClean="0">
+                            <a:latin typeface="Cambria Math" panose="02040503050406030204" pitchFamily="18" charset="0"/>
+                            <a:ea typeface="Cambria Math" panose="02040503050406030204" pitchFamily="18" charset="0"/>
+                          </a:rPr>
+                          <m:t>𝒙</m:t>
+                        </m:r>
+                        <m:r>
+                          <a:rPr lang="en-US" sz="2400" b="1" i="1" smtClean="0">
+                            <a:latin typeface="Cambria Math" panose="02040503050406030204" pitchFamily="18" charset="0"/>
+                            <a:ea typeface="Cambria Math" panose="02040503050406030204" pitchFamily="18" charset="0"/>
+                          </a:rPr>
+                          <m:t> </m:t>
+                        </m:r>
+                        <m:r>
+                          <a:rPr lang="en-US" sz="2400" b="1" i="1">
+                            <a:latin typeface="Cambria Math" panose="02040503050406030204" pitchFamily="18" charset="0"/>
+                            <a:ea typeface="Cambria Math" panose="02040503050406030204" pitchFamily="18" charset="0"/>
+                          </a:rPr>
+                          <m:t>𝜷</m:t>
+                        </m:r>
+                        <m:r>
+                          <a:rPr lang="en-US" sz="2400" i="1">
+                            <a:latin typeface="Cambria Math" panose="02040503050406030204" pitchFamily="18" charset="0"/>
+                            <a:ea typeface="Cambria Math" panose="02040503050406030204" pitchFamily="18" charset="0"/>
+                          </a:rPr>
+                          <m:t>,</m:t>
+                        </m:r>
+                        <m:sSup>
+                          <m:sSupPr>
+                            <m:ctrlPr>
+                              <a:rPr lang="en-US" sz="2400" i="1">
+                                <a:latin typeface="Cambria Math" panose="02040503050406030204" pitchFamily="18" charset="0"/>
+                              </a:rPr>
+                            </m:ctrlPr>
+                          </m:sSupPr>
+                          <m:e>
+                            <m:r>
+                              <a:rPr lang="en-US" sz="2400" i="1">
+                                <a:latin typeface="Cambria Math" panose="02040503050406030204" pitchFamily="18" charset="0"/>
+                                <a:ea typeface="Cambria Math" panose="02040503050406030204" pitchFamily="18" charset="0"/>
+                              </a:rPr>
+                              <m:t>𝜎</m:t>
+                            </m:r>
+                          </m:e>
+                          <m:sup>
+                            <m:r>
+                              <a:rPr lang="en-US" sz="2400" i="1">
+                                <a:latin typeface="Cambria Math" panose="02040503050406030204" pitchFamily="18" charset="0"/>
+                              </a:rPr>
+                              <m:t>2</m:t>
+                            </m:r>
+                          </m:sup>
+                        </m:sSup>
+                      </m:e>
+                    </m:d>
+                  </m:oMath>
+                </a14:m>
+                <a:endParaRPr lang="en-DE" sz="2400" dirty="0"/>
+              </a:p>
+            </p:txBody>
+          </p:sp>
+        </mc:Choice>
+        <mc:Fallback xmlns="">
+          <p:sp>
+            <p:nvSpPr>
+              <p:cNvPr id="6" name="TextBox 5">
+                <a:extLst>
+                  <a:ext uri="{FF2B5EF4-FFF2-40B4-BE49-F238E27FC236}">
+                    <a16:creationId xmlns:a16="http://schemas.microsoft.com/office/drawing/2014/main" id="{6AC9204A-4D87-9839-B209-4A7B55591244}"/>
+                  </a:ext>
+                </a:extLst>
+              </p:cNvPr>
+              <p:cNvSpPr txBox="1">
+                <a:spLocks noRot="1" noChangeAspect="1" noMove="1" noResize="1" noEditPoints="1" noAdjustHandles="1" noChangeArrowheads="1" noChangeShapeType="1" noTextEdit="1"/>
+              </p:cNvSpPr>
+              <p:nvPr/>
+            </p:nvSpPr>
+            <p:spPr>
+              <a:xfrm>
+                <a:off x="3280320" y="1543667"/>
+                <a:ext cx="5631360" cy="1200329"/>
+              </a:xfrm>
+              <a:prstGeom prst="rect">
+                <a:avLst/>
+              </a:prstGeom>
+              <a:blipFill>
+                <a:blip r:embed="rId2"/>
+                <a:stretch>
+                  <a:fillRect l="-1802" t="-4167" r="-2477" b="-11458"/>
+                </a:stretch>
+              </a:blipFill>
+            </p:spPr>
+            <p:txBody>
+              <a:bodyPr/>
+              <a:lstStyle/>
+              <a:p>
+                <a:r>
+                  <a:rPr lang="de-DE">
+                    <a:noFill/>
+                  </a:rPr>
+                  <a:t> </a:t>
+                </a:r>
+              </a:p>
+            </p:txBody>
+          </p:sp>
+        </mc:Fallback>
+      </mc:AlternateContent>
+      <p:sp>
+        <p:nvSpPr>
+          <p:cNvPr id="7" name="TextBox 6">
+            <a:extLst>
+              <a:ext uri="{FF2B5EF4-FFF2-40B4-BE49-F238E27FC236}">
+                <a16:creationId xmlns:a16="http://schemas.microsoft.com/office/drawing/2014/main" id="{54F47A30-ABFA-32C4-0285-3FEE6345CF30}"/>
+              </a:ext>
+            </a:extLst>
+          </p:cNvPr>
+          <p:cNvSpPr txBox="1"/>
+          <p:nvPr/>
+        </p:nvSpPr>
+        <p:spPr>
+          <a:xfrm>
+            <a:off x="160282" y="4070992"/>
+            <a:ext cx="4501170" cy="1938992"/>
+          </a:xfrm>
+          <a:prstGeom prst="rect">
+            <a:avLst/>
+          </a:prstGeom>
+          <a:solidFill>
+            <a:schemeClr val="bg2"/>
+          </a:solidFill>
+        </p:spPr>
+        <p:txBody>
+          <a:bodyPr wrap="square" rtlCol="0">
+            <a:spAutoFit/>
+          </a:bodyPr>
+          <a:lstStyle/>
+          <a:p>
+            <a:r>
+              <a:rPr lang="en-GB" sz="2400" dirty="0"/>
+              <a:t>p</a:t>
+            </a:r>
+            <a:r>
+              <a:rPr lang="en-DE" sz="2400" dirty="0"/>
+              <a:t>osterior:</a:t>
+            </a:r>
+          </a:p>
+          <a:p>
+            <a:r>
+              <a:rPr lang="en-GB" sz="2400" dirty="0"/>
+              <a:t>p</a:t>
+            </a:r>
+            <a:r>
+              <a:rPr lang="en-DE" sz="2400" dirty="0"/>
+              <a:t>robability distribution reflecting the effect of data on prior belief about parameters </a:t>
+            </a:r>
+            <a:r>
+              <a:rPr lang="en-GB" sz="2400" dirty="0"/>
+              <a:t>(increasing certainty with new evidence</a:t>
+            </a:r>
+            <a:r>
+              <a:rPr lang="en-DE" sz="2400" dirty="0"/>
+              <a:t>)</a:t>
+            </a:r>
+            <a:endParaRPr lang="en-GB" sz="2400" dirty="0"/>
+          </a:p>
+        </p:txBody>
+      </p:sp>
+      <p:cxnSp>
+        <p:nvCxnSpPr>
+          <p:cNvPr id="8" name="Straight Arrow Connector 7">
+            <a:extLst>
+              <a:ext uri="{FF2B5EF4-FFF2-40B4-BE49-F238E27FC236}">
+                <a16:creationId xmlns:a16="http://schemas.microsoft.com/office/drawing/2014/main" id="{2B4FF4A4-E971-123F-6E1C-A1FDAB52118A}"/>
+              </a:ext>
+            </a:extLst>
+          </p:cNvPr>
+          <p:cNvCxnSpPr>
+            <a:cxnSpLocks/>
+            <a:stCxn id="7" idx="0"/>
+            <a:endCxn id="20" idx="1"/>
+          </p:cNvCxnSpPr>
+          <p:nvPr/>
+        </p:nvCxnSpPr>
+        <p:spPr>
+          <a:xfrm flipV="1">
+            <a:off x="2410867" y="3626371"/>
+            <a:ext cx="1052292" cy="444621"/>
+          </a:xfrm>
+          <a:prstGeom prst="straightConnector1">
+            <a:avLst/>
+          </a:prstGeom>
+          <a:ln>
+            <a:tailEnd type="triangle"/>
+          </a:ln>
+        </p:spPr>
+        <p:style>
+          <a:lnRef idx="1">
+            <a:schemeClr val="accent1"/>
+          </a:lnRef>
+          <a:fillRef idx="0">
+            <a:schemeClr val="accent1"/>
+          </a:fillRef>
+          <a:effectRef idx="0">
+            <a:schemeClr val="accent1"/>
+          </a:effectRef>
+          <a:fontRef idx="minor">
+            <a:schemeClr val="tx1"/>
+          </a:fontRef>
+        </p:style>
+      </p:cxnSp>
+      <p:cxnSp>
+        <p:nvCxnSpPr>
+          <p:cNvPr id="9" name="Straight Arrow Connector 8">
+            <a:extLst>
+              <a:ext uri="{FF2B5EF4-FFF2-40B4-BE49-F238E27FC236}">
+                <a16:creationId xmlns:a16="http://schemas.microsoft.com/office/drawing/2014/main" id="{22E49E3D-A61D-1FE6-3F30-8C499197543F}"/>
+              </a:ext>
+            </a:extLst>
+          </p:cNvPr>
+          <p:cNvCxnSpPr>
+            <a:cxnSpLocks/>
+            <a:stCxn id="6" idx="2"/>
+            <a:endCxn id="20" idx="0"/>
+          </p:cNvCxnSpPr>
+          <p:nvPr/>
+        </p:nvCxnSpPr>
+        <p:spPr>
+          <a:xfrm>
+            <a:off x="6096000" y="2743996"/>
+            <a:ext cx="0" cy="589987"/>
+          </a:xfrm>
+          <a:prstGeom prst="straightConnector1">
+            <a:avLst/>
+          </a:prstGeom>
+          <a:ln>
+            <a:tailEnd type="triangle"/>
+          </a:ln>
+        </p:spPr>
+        <p:style>
+          <a:lnRef idx="1">
+            <a:schemeClr val="accent1"/>
+          </a:lnRef>
+          <a:fillRef idx="0">
+            <a:schemeClr val="accent1"/>
+          </a:fillRef>
+          <a:effectRef idx="0">
+            <a:schemeClr val="accent1"/>
+          </a:effectRef>
+          <a:fontRef idx="minor">
+            <a:schemeClr val="tx1"/>
+          </a:fontRef>
+        </p:style>
+      </p:cxnSp>
+      <p:cxnSp>
+        <p:nvCxnSpPr>
+          <p:cNvPr id="10" name="Straight Arrow Connector 9">
+            <a:extLst>
+              <a:ext uri="{FF2B5EF4-FFF2-40B4-BE49-F238E27FC236}">
+                <a16:creationId xmlns:a16="http://schemas.microsoft.com/office/drawing/2014/main" id="{9D08D47F-ADC3-C1B6-C958-BCE0FCAD0EDA}"/>
+              </a:ext>
+            </a:extLst>
+          </p:cNvPr>
+          <p:cNvCxnSpPr>
+            <a:cxnSpLocks/>
+            <a:stCxn id="5" idx="0"/>
+            <a:endCxn id="20" idx="3"/>
+          </p:cNvCxnSpPr>
+          <p:nvPr/>
+        </p:nvCxnSpPr>
+        <p:spPr>
+          <a:xfrm flipH="1" flipV="1">
+            <a:off x="8728841" y="3626371"/>
+            <a:ext cx="1162707" cy="444621"/>
+          </a:xfrm>
+          <a:prstGeom prst="straightConnector1">
+            <a:avLst/>
+          </a:prstGeom>
+          <a:ln>
+            <a:tailEnd type="triangle"/>
+          </a:ln>
+        </p:spPr>
+        <p:style>
+          <a:lnRef idx="1">
+            <a:schemeClr val="accent1"/>
+          </a:lnRef>
+          <a:fillRef idx="0">
+            <a:schemeClr val="accent1"/>
+          </a:fillRef>
+          <a:effectRef idx="0">
+            <a:schemeClr val="accent1"/>
+          </a:effectRef>
+          <a:fontRef idx="minor">
+            <a:schemeClr val="tx1"/>
+          </a:fontRef>
+        </p:style>
+      </p:cxnSp>
+      <mc:AlternateContent xmlns:mc="http://schemas.openxmlformats.org/markup-compatibility/2006" xmlns:a14="http://schemas.microsoft.com/office/drawing/2010/main">
+        <mc:Choice Requires="a14">
+          <p:sp>
+            <p:nvSpPr>
+              <p:cNvPr id="20" name="TextBox 19">
+                <a:extLst>
+                  <a:ext uri="{FF2B5EF4-FFF2-40B4-BE49-F238E27FC236}">
+                    <a16:creationId xmlns:a16="http://schemas.microsoft.com/office/drawing/2014/main" id="{E96B289F-AEA2-8D88-BBA5-D51F72AA053A}"/>
+                  </a:ext>
+                </a:extLst>
+              </p:cNvPr>
+              <p:cNvSpPr txBox="1"/>
+              <p:nvPr/>
+            </p:nvSpPr>
+            <p:spPr>
+              <a:xfrm>
+                <a:off x="3463159" y="3333983"/>
+                <a:ext cx="5265682" cy="584775"/>
+              </a:xfrm>
+              <a:prstGeom prst="rect">
+                <a:avLst/>
+              </a:prstGeom>
+              <a:noFill/>
+              <a:ln>
+                <a:solidFill>
+                  <a:schemeClr val="tx1"/>
+                </a:solidFill>
+              </a:ln>
+            </p:spPr>
+            <p:txBody>
+              <a:bodyPr wrap="square">
+                <a:spAutoFit/>
+              </a:bodyPr>
+              <a:lstStyle/>
+              <a:p>
+                <a:pPr/>
+                <a14:m>
+                  <m:oMathPara xmlns:m="http://schemas.openxmlformats.org/officeDocument/2006/math">
+                    <m:oMathParaPr>
+                      <m:jc m:val="centerGroup"/>
+                    </m:oMathParaPr>
+                    <m:oMath xmlns:m="http://schemas.openxmlformats.org/officeDocument/2006/math">
+                      <m:r>
+                        <a:rPr lang="en-US" sz="3200" b="0" i="1" smtClean="0">
+                          <a:latin typeface="Cambria Math" panose="02040503050406030204" pitchFamily="18" charset="0"/>
+                          <a:ea typeface="Cambria Math" panose="02040503050406030204" pitchFamily="18" charset="0"/>
+                        </a:rPr>
+                        <m:t>𝑝</m:t>
+                      </m:r>
+                      <m:d>
+                        <m:dPr>
+                          <m:ctrlPr>
+                            <a:rPr lang="en-US" sz="3200" i="1" smtClean="0">
+                              <a:latin typeface="Cambria Math" panose="02040503050406030204" pitchFamily="18" charset="0"/>
+                              <a:ea typeface="Cambria Math" panose="02040503050406030204" pitchFamily="18" charset="0"/>
+                            </a:rPr>
+                          </m:ctrlPr>
+                        </m:dPr>
+                        <m:e>
+                          <m:r>
+                            <a:rPr lang="en-US" sz="3200" b="1" i="1">
+                              <a:latin typeface="Cambria Math" panose="02040503050406030204" pitchFamily="18" charset="0"/>
+                              <a:ea typeface="Cambria Math" panose="02040503050406030204" pitchFamily="18" charset="0"/>
+                            </a:rPr>
+                            <m:t>𝜽</m:t>
+                          </m:r>
+                          <m:r>
+                            <a:rPr lang="en-US" sz="3200" i="1">
+                              <a:latin typeface="Cambria Math" panose="02040503050406030204" pitchFamily="18" charset="0"/>
+                              <a:ea typeface="Cambria Math" panose="02040503050406030204" pitchFamily="18" charset="0"/>
+                            </a:rPr>
+                            <m:t>|</m:t>
+                          </m:r>
+                          <m:r>
+                            <a:rPr lang="en-US" sz="3200" b="0" i="1" smtClean="0">
+                              <a:latin typeface="Cambria Math" panose="02040503050406030204" pitchFamily="18" charset="0"/>
+                              <a:ea typeface="Cambria Math" panose="02040503050406030204" pitchFamily="18" charset="0"/>
+                            </a:rPr>
+                            <m:t>𝑦</m:t>
+                          </m:r>
+                          <m:r>
+                            <a:rPr lang="en-US" sz="3200" b="0" i="1" smtClean="0">
+                              <a:latin typeface="Cambria Math" panose="02040503050406030204" pitchFamily="18" charset="0"/>
+                              <a:ea typeface="Cambria Math" panose="02040503050406030204" pitchFamily="18" charset="0"/>
+                            </a:rPr>
+                            <m:t>, </m:t>
+                          </m:r>
+                          <m:r>
+                            <a:rPr lang="en-US" sz="3200" b="1" i="1" smtClean="0">
+                              <a:latin typeface="Cambria Math" panose="02040503050406030204" pitchFamily="18" charset="0"/>
+                              <a:ea typeface="Cambria Math" panose="02040503050406030204" pitchFamily="18" charset="0"/>
+                            </a:rPr>
+                            <m:t>𝒙</m:t>
+                          </m:r>
+                        </m:e>
+                      </m:d>
+                      <m:r>
+                        <a:rPr lang="en-US" sz="3200" i="1">
+                          <a:latin typeface="Cambria Math" panose="02040503050406030204" pitchFamily="18" charset="0"/>
+                          <a:ea typeface="Cambria Math" panose="02040503050406030204" pitchFamily="18" charset="0"/>
+                        </a:rPr>
+                        <m:t>∝</m:t>
+                      </m:r>
+                      <m:r>
+                        <a:rPr lang="en-US" sz="3200" b="0" i="1" smtClean="0">
+                          <a:latin typeface="Cambria Math" panose="02040503050406030204" pitchFamily="18" charset="0"/>
+                          <a:ea typeface="Cambria Math" panose="02040503050406030204" pitchFamily="18" charset="0"/>
+                        </a:rPr>
+                        <m:t>𝑝</m:t>
+                      </m:r>
+                      <m:d>
+                        <m:dPr>
+                          <m:ctrlPr>
+                            <a:rPr lang="en-US" sz="3200" i="1">
+                              <a:latin typeface="Cambria Math" panose="02040503050406030204" pitchFamily="18" charset="0"/>
+                              <a:ea typeface="Cambria Math" panose="02040503050406030204" pitchFamily="18" charset="0"/>
+                            </a:rPr>
+                          </m:ctrlPr>
+                        </m:dPr>
+                        <m:e>
+                          <m:r>
+                            <a:rPr lang="en-US" sz="3200" i="1">
+                              <a:latin typeface="Cambria Math" panose="02040503050406030204" pitchFamily="18" charset="0"/>
+                              <a:ea typeface="Cambria Math" panose="02040503050406030204" pitchFamily="18" charset="0"/>
+                            </a:rPr>
+                            <m:t>𝑦</m:t>
+                          </m:r>
+                          <m:r>
+                            <a:rPr lang="en-US" sz="3200" i="1">
+                              <a:latin typeface="Cambria Math" panose="02040503050406030204" pitchFamily="18" charset="0"/>
+                              <a:ea typeface="Cambria Math" panose="02040503050406030204" pitchFamily="18" charset="0"/>
+                            </a:rPr>
+                            <m:t>|</m:t>
+                          </m:r>
+                          <m:r>
+                            <a:rPr lang="en-US" sz="3200" b="1" i="1">
+                              <a:latin typeface="Cambria Math" panose="02040503050406030204" pitchFamily="18" charset="0"/>
+                              <a:ea typeface="Cambria Math" panose="02040503050406030204" pitchFamily="18" charset="0"/>
+                            </a:rPr>
+                            <m:t>𝒙</m:t>
+                          </m:r>
+                          <m:r>
+                            <a:rPr lang="en-US" sz="3200" i="1">
+                              <a:latin typeface="Cambria Math" panose="02040503050406030204" pitchFamily="18" charset="0"/>
+                              <a:ea typeface="Cambria Math" panose="02040503050406030204" pitchFamily="18" charset="0"/>
+                            </a:rPr>
+                            <m:t>,</m:t>
+                          </m:r>
+                          <m:r>
+                            <a:rPr lang="en-US" sz="3200" b="1" i="1">
+                              <a:latin typeface="Cambria Math" panose="02040503050406030204" pitchFamily="18" charset="0"/>
+                              <a:ea typeface="Cambria Math" panose="02040503050406030204" pitchFamily="18" charset="0"/>
+                            </a:rPr>
+                            <m:t>𝜽</m:t>
+                          </m:r>
+                        </m:e>
+                      </m:d>
+                      <m:r>
+                        <a:rPr lang="en-US" sz="3200" i="1">
+                          <a:latin typeface="Cambria Math" panose="02040503050406030204" pitchFamily="18" charset="0"/>
+                          <a:ea typeface="Cambria Math" panose="02040503050406030204" pitchFamily="18" charset="0"/>
+                        </a:rPr>
+                        <m:t> ∙</m:t>
+                      </m:r>
+                      <m:r>
+                        <a:rPr lang="en-US" sz="3200" b="0" i="1" smtClean="0">
+                          <a:latin typeface="Cambria Math" panose="02040503050406030204" pitchFamily="18" charset="0"/>
+                          <a:ea typeface="Cambria Math" panose="02040503050406030204" pitchFamily="18" charset="0"/>
+                        </a:rPr>
+                        <m:t>𝑝</m:t>
+                      </m:r>
+                      <m:d>
+                        <m:dPr>
+                          <m:ctrlPr>
+                            <a:rPr lang="en-US" sz="3200" i="1">
+                              <a:latin typeface="Cambria Math" panose="02040503050406030204" pitchFamily="18" charset="0"/>
+                              <a:ea typeface="Cambria Math" panose="02040503050406030204" pitchFamily="18" charset="0"/>
+                            </a:rPr>
+                          </m:ctrlPr>
+                        </m:dPr>
+                        <m:e>
+                          <m:r>
+                            <a:rPr lang="en-US" sz="3200" b="1" i="1">
+                              <a:latin typeface="Cambria Math" panose="02040503050406030204" pitchFamily="18" charset="0"/>
+                              <a:ea typeface="Cambria Math" panose="02040503050406030204" pitchFamily="18" charset="0"/>
+                            </a:rPr>
+                            <m:t>𝜽</m:t>
+                          </m:r>
+                        </m:e>
+                      </m:d>
+                    </m:oMath>
+                  </m:oMathPara>
+                </a14:m>
+                <a:endParaRPr lang="en-DE" sz="3200" dirty="0"/>
+              </a:p>
+            </p:txBody>
+          </p:sp>
+        </mc:Choice>
+        <mc:Fallback xmlns="">
+          <p:sp>
+            <p:nvSpPr>
+              <p:cNvPr id="20" name="TextBox 19">
+                <a:extLst>
+                  <a:ext uri="{FF2B5EF4-FFF2-40B4-BE49-F238E27FC236}">
+                    <a16:creationId xmlns:a16="http://schemas.microsoft.com/office/drawing/2014/main" id="{E96B289F-AEA2-8D88-BBA5-D51F72AA053A}"/>
+                  </a:ext>
+                </a:extLst>
+              </p:cNvPr>
+              <p:cNvSpPr txBox="1">
+                <a:spLocks noRot="1" noChangeAspect="1" noMove="1" noResize="1" noEditPoints="1" noAdjustHandles="1" noChangeArrowheads="1" noChangeShapeType="1" noTextEdit="1"/>
+              </p:cNvSpPr>
+              <p:nvPr/>
+            </p:nvSpPr>
+            <p:spPr>
+              <a:xfrm>
+                <a:off x="3463159" y="3333983"/>
+                <a:ext cx="5265682" cy="584775"/>
+              </a:xfrm>
+              <a:prstGeom prst="rect">
+                <a:avLst/>
+              </a:prstGeom>
+              <a:blipFill>
+                <a:blip r:embed="rId3"/>
+                <a:stretch>
+                  <a:fillRect b="-20833"/>
+                </a:stretch>
+              </a:blipFill>
+              <a:ln>
+                <a:solidFill>
+                  <a:schemeClr val="tx1"/>
+                </a:solidFill>
+              </a:ln>
+            </p:spPr>
+            <p:txBody>
+              <a:bodyPr/>
+              <a:lstStyle/>
+              <a:p>
+                <a:r>
+                  <a:rPr lang="en-DE">
+                    <a:noFill/>
+                  </a:rPr>
+                  <a:t> </a:t>
+                </a:r>
+              </a:p>
+            </p:txBody>
+          </p:sp>
+        </mc:Fallback>
+      </mc:AlternateContent>
+      <mc:AlternateContent xmlns:mc="http://schemas.openxmlformats.org/markup-compatibility/2006" xmlns:a14="http://schemas.microsoft.com/office/drawing/2010/main">
+        <mc:Choice Requires="a14">
+          <p:sp>
+            <p:nvSpPr>
+              <p:cNvPr id="61" name="TextBox 60">
+                <a:extLst>
+                  <a:ext uri="{FF2B5EF4-FFF2-40B4-BE49-F238E27FC236}">
+                    <a16:creationId xmlns:a16="http://schemas.microsoft.com/office/drawing/2014/main" id="{5A0A4C12-CCAF-751F-2A33-5A56DC547F8E}"/>
+                  </a:ext>
+                </a:extLst>
+              </p:cNvPr>
+              <p:cNvSpPr txBox="1"/>
+              <p:nvPr/>
+            </p:nvSpPr>
+            <p:spPr>
+              <a:xfrm>
+                <a:off x="4999439" y="5040488"/>
+                <a:ext cx="2413952" cy="1139864"/>
+              </a:xfrm>
+              <a:prstGeom prst="rect">
+                <a:avLst/>
+              </a:prstGeom>
+              <a:noFill/>
+              <a:ln>
+                <a:solidFill>
+                  <a:schemeClr val="tx1"/>
+                </a:solidFill>
+              </a:ln>
+            </p:spPr>
+            <p:txBody>
+              <a:bodyPr wrap="square" rtlCol="0">
+                <a:spAutoFit/>
+              </a:bodyPr>
+              <a:lstStyle/>
+              <a:p>
+                <a:r>
+                  <a:rPr lang="en-GB" sz="2200" dirty="0"/>
+                  <a:t>to be compared to f</a:t>
+                </a:r>
+                <a:r>
+                  <a:rPr lang="en-DE" sz="2200" dirty="0"/>
+                  <a:t>requentist point estimates </a:t>
+                </a:r>
+                <a14:m>
+                  <m:oMath xmlns:m="http://schemas.openxmlformats.org/officeDocument/2006/math">
+                    <m:acc>
+                      <m:accPr>
+                        <m:chr m:val="̂"/>
+                        <m:ctrlPr>
+                          <a:rPr lang="en-DE" sz="2200" i="1" smtClean="0">
+                            <a:latin typeface="Cambria Math" panose="02040503050406030204" pitchFamily="18" charset="0"/>
+                          </a:rPr>
+                        </m:ctrlPr>
+                      </m:accPr>
+                      <m:e>
+                        <m:r>
+                          <a:rPr lang="en-US" sz="2400" b="1" i="1">
+                            <a:latin typeface="Cambria Math" panose="02040503050406030204" pitchFamily="18" charset="0"/>
+                            <a:ea typeface="Cambria Math" panose="02040503050406030204" pitchFamily="18" charset="0"/>
+                          </a:rPr>
+                          <m:t>𝜽</m:t>
+                        </m:r>
+                      </m:e>
+                    </m:acc>
+                  </m:oMath>
+                </a14:m>
+                <a:endParaRPr lang="en-DE" sz="2200" dirty="0"/>
+              </a:p>
+            </p:txBody>
+          </p:sp>
+        </mc:Choice>
+        <mc:Fallback xmlns="">
+          <p:sp>
+            <p:nvSpPr>
+              <p:cNvPr id="61" name="TextBox 60">
+                <a:extLst>
+                  <a:ext uri="{FF2B5EF4-FFF2-40B4-BE49-F238E27FC236}">
+                    <a16:creationId xmlns:a16="http://schemas.microsoft.com/office/drawing/2014/main" id="{5A0A4C12-CCAF-751F-2A33-5A56DC547F8E}"/>
+                  </a:ext>
+                </a:extLst>
+              </p:cNvPr>
+              <p:cNvSpPr txBox="1">
+                <a:spLocks noRot="1" noChangeAspect="1" noMove="1" noResize="1" noEditPoints="1" noAdjustHandles="1" noChangeArrowheads="1" noChangeShapeType="1" noTextEdit="1"/>
+              </p:cNvSpPr>
+              <p:nvPr/>
+            </p:nvSpPr>
+            <p:spPr>
+              <a:xfrm>
+                <a:off x="4999439" y="5040488"/>
+                <a:ext cx="2413952" cy="1139864"/>
+              </a:xfrm>
+              <a:prstGeom prst="rect">
+                <a:avLst/>
+              </a:prstGeom>
+              <a:blipFill>
+                <a:blip r:embed="rId4"/>
+                <a:stretch>
+                  <a:fillRect l="-3125" t="-3261" r="-3646" b="-7609"/>
+                </a:stretch>
+              </a:blipFill>
+              <a:ln>
+                <a:solidFill>
+                  <a:schemeClr val="tx1"/>
+                </a:solidFill>
+              </a:ln>
+            </p:spPr>
+            <p:txBody>
+              <a:bodyPr/>
+              <a:lstStyle/>
+              <a:p>
+                <a:r>
+                  <a:rPr lang="de-DE">
+                    <a:noFill/>
+                  </a:rPr>
+                  <a:t> </a:t>
+                </a:r>
+              </a:p>
+            </p:txBody>
+          </p:sp>
+        </mc:Fallback>
+      </mc:AlternateContent>
+      <p:sp>
+        <p:nvSpPr>
+          <p:cNvPr id="11" name="Textfeld 10">
+            <a:extLst>
+              <a:ext uri="{FF2B5EF4-FFF2-40B4-BE49-F238E27FC236}">
+                <a16:creationId xmlns:a16="http://schemas.microsoft.com/office/drawing/2014/main" id="{DEF0F421-DCCA-25DE-84E8-5D7AF51C10C1}"/>
+              </a:ext>
+            </a:extLst>
+          </p:cNvPr>
+          <p:cNvSpPr txBox="1"/>
+          <p:nvPr/>
+        </p:nvSpPr>
+        <p:spPr>
+          <a:xfrm>
+            <a:off x="838200" y="6245232"/>
+            <a:ext cx="3823252" cy="461665"/>
+          </a:xfrm>
+          <a:prstGeom prst="rect">
+            <a:avLst/>
+          </a:prstGeom>
+          <a:noFill/>
+        </p:spPr>
+        <p:txBody>
+          <a:bodyPr wrap="square">
+            <a:spAutoFit/>
+          </a:bodyPr>
+          <a:lstStyle/>
+          <a:p>
+            <a:r>
+              <a:rPr lang="de-DE" sz="2400" dirty="0">
+                <a:sym typeface="Wingdings" pitchFamily="2" charset="2"/>
+              </a:rPr>
+              <a:t> </a:t>
+            </a:r>
+            <a:r>
+              <a:rPr lang="de-DE" sz="2400" b="1" dirty="0" err="1"/>
+              <a:t>Bayesian</a:t>
+            </a:r>
+            <a:r>
+              <a:rPr lang="de-DE" sz="2400" b="1" dirty="0"/>
+              <a:t> </a:t>
+            </a:r>
+            <a:r>
+              <a:rPr lang="de-DE" sz="2400" b="1" dirty="0" err="1"/>
+              <a:t>updating</a:t>
+            </a:r>
+            <a:endParaRPr lang="de-DE" sz="2400" b="1" dirty="0"/>
           </a:p>
         </p:txBody>
       </p:sp>
     </p:spTree>
     <p:extLst>
       <p:ext uri="{BB962C8B-B14F-4D97-AF65-F5344CB8AC3E}">
-        <p14:creationId xmlns:p14="http://schemas.microsoft.com/office/powerpoint/2010/main" val="4288015795"/>
+        <p14:creationId xmlns:p14="http://schemas.microsoft.com/office/powerpoint/2010/main" val="1127102956"/>
       </p:ext>
     </p:extLst>
   </p:cSld>
@@ -13635,10 +14004,10 @@
       </p:grpSpPr>
       <p:sp>
         <p:nvSpPr>
-          <p:cNvPr id="2" name="Titel 1">
-            <a:extLst>
-              <a:ext uri="{FF2B5EF4-FFF2-40B4-BE49-F238E27FC236}">
-                <a16:creationId xmlns:a16="http://schemas.microsoft.com/office/drawing/2014/main" id="{0A5960BF-0696-F646-3D20-9C943273D5A6}"/>
+          <p:cNvPr id="2" name="Title 1">
+            <a:extLst>
+              <a:ext uri="{FF2B5EF4-FFF2-40B4-BE49-F238E27FC236}">
+                <a16:creationId xmlns:a16="http://schemas.microsoft.com/office/drawing/2014/main" id="{69F53B02-B7DF-1814-9149-5779531BF0FB}"/>
               </a:ext>
             </a:extLst>
           </p:cNvPr>
@@ -13655,48 +14024,230 @@
           <a:lstStyle/>
           <a:p>
             <a:r>
+              <a:rPr lang="de-DE" dirty="0" err="1"/>
+              <a:t>Bayesian</a:t>
+            </a:r>
+            <a:r>
               <a:rPr lang="de-DE" dirty="0"/>
-              <a:t>Maximum A Posteriori (MAP) </a:t>
+              <a:t> </a:t>
             </a:r>
             <a:r>
               <a:rPr lang="de-DE" dirty="0" err="1"/>
-              <a:t>Estimation</a:t>
-            </a:r>
-            <a:endParaRPr lang="de-DE" dirty="0"/>
-          </a:p>
-        </p:txBody>
-      </p:sp>
-      <p:sp>
-        <p:nvSpPr>
-          <p:cNvPr id="3" name="Inhaltsplatzhalter 2">
-            <a:extLst>
-              <a:ext uri="{FF2B5EF4-FFF2-40B4-BE49-F238E27FC236}">
-                <a16:creationId xmlns:a16="http://schemas.microsoft.com/office/drawing/2014/main" id="{CD387CDE-B64C-E3C9-30E5-80EAB23FC9AF}"/>
-              </a:ext>
-            </a:extLst>
-          </p:cNvPr>
-          <p:cNvSpPr>
-            <a:spLocks noGrp="1"/>
-          </p:cNvSpPr>
-          <p:nvPr>
-            <p:ph idx="1"/>
-          </p:nvPr>
-        </p:nvSpPr>
-        <p:spPr/>
-        <p:txBody>
-          <a:bodyPr/>
-          <a:lstStyle/>
-          <a:p>
-            <a:endParaRPr lang="de-DE"/>
-          </a:p>
-        </p:txBody>
-      </p:sp>
-      <p:sp>
-        <p:nvSpPr>
-          <p:cNvPr id="4" name="Foliennummernplatzhalter 3">
-            <a:extLst>
-              <a:ext uri="{FF2B5EF4-FFF2-40B4-BE49-F238E27FC236}">
-                <a16:creationId xmlns:a16="http://schemas.microsoft.com/office/drawing/2014/main" id="{76ACAD2C-B2CC-ABCA-436B-383FF917D0F7}"/>
+              <a:t>vs</a:t>
+            </a:r>
+            <a:r>
+              <a:rPr lang="de-DE" dirty="0"/>
+              <a:t> </a:t>
+            </a:r>
+            <a:r>
+              <a:rPr lang="de-DE" dirty="0" err="1"/>
+              <a:t>Frequentist</a:t>
+            </a:r>
+            <a:r>
+              <a:rPr lang="de-DE" dirty="0"/>
+              <a:t> View</a:t>
+            </a:r>
+            <a:endParaRPr lang="en-DE" dirty="0"/>
+          </a:p>
+        </p:txBody>
+      </p:sp>
+      <mc:AlternateContent xmlns:mc="http://schemas.openxmlformats.org/markup-compatibility/2006" xmlns:a14="http://schemas.microsoft.com/office/drawing/2010/main">
+        <mc:Choice Requires="a14">
+          <p:sp>
+            <p:nvSpPr>
+              <p:cNvPr id="3" name="Content Placeholder 2">
+                <a:extLst>
+                  <a:ext uri="{FF2B5EF4-FFF2-40B4-BE49-F238E27FC236}">
+                    <a16:creationId xmlns:a16="http://schemas.microsoft.com/office/drawing/2014/main" id="{03E03EFA-AED7-F3D0-B414-D286C6236452}"/>
+                  </a:ext>
+                </a:extLst>
+              </p:cNvPr>
+              <p:cNvSpPr>
+                <a:spLocks noGrp="1"/>
+              </p:cNvSpPr>
+              <p:nvPr>
+                <p:ph idx="1"/>
+              </p:nvPr>
+            </p:nvSpPr>
+            <p:spPr/>
+            <p:txBody>
+              <a:bodyPr>
+                <a:normAutofit/>
+              </a:bodyPr>
+              <a:lstStyle/>
+              <a:p>
+                <a:pPr marL="0" indent="0">
+                  <a:buNone/>
+                </a:pPr>
+                <a:r>
+                  <a:rPr lang="en-GB" sz="2300" dirty="0"/>
+                  <a:t>f</a:t>
+                </a:r>
+                <a:r>
+                  <a:rPr lang="en-DE" sz="2300" dirty="0"/>
+                  <a:t>requentist perspective:</a:t>
+                </a:r>
+              </a:p>
+              <a:p>
+                <a:r>
+                  <a:rPr lang="en-GB" sz="2300" dirty="0"/>
+                  <a:t>true model parameters </a:t>
+                </a:r>
+                <a14:m>
+                  <m:oMath xmlns:m="http://schemas.openxmlformats.org/officeDocument/2006/math">
+                    <m:r>
+                      <a:rPr lang="en-US" sz="2300" b="1" i="1">
+                        <a:latin typeface="Cambria Math" panose="02040503050406030204" pitchFamily="18" charset="0"/>
+                        <a:ea typeface="Cambria Math" panose="02040503050406030204" pitchFamily="18" charset="0"/>
+                      </a:rPr>
+                      <m:t>𝜽</m:t>
+                    </m:r>
+                  </m:oMath>
+                </a14:m>
+                <a:r>
+                  <a:rPr lang="en-GB" sz="2300" dirty="0"/>
+                  <a:t> fixed (but unknown </a:t>
+                </a:r>
+                <a:r>
+                  <a:rPr lang="en-GB" sz="2300" dirty="0">
+                    <a:sym typeface="Wingdings" pitchFamily="2" charset="2"/>
+                  </a:rPr>
+                  <a:t> </a:t>
+                </a:r>
+                <a:r>
+                  <a:rPr lang="en-GB" sz="2300" dirty="0"/>
+                  <a:t>uncertain point estimates </a:t>
+                </a:r>
+                <a14:m>
+                  <m:oMath xmlns:m="http://schemas.openxmlformats.org/officeDocument/2006/math">
+                    <m:acc>
+                      <m:accPr>
+                        <m:chr m:val="̂"/>
+                        <m:ctrlPr>
+                          <a:rPr lang="en-US" sz="2300" b="1" i="1" smtClean="0">
+                            <a:latin typeface="Cambria Math" panose="02040503050406030204" pitchFamily="18" charset="0"/>
+                            <a:ea typeface="Cambria Math" panose="02040503050406030204" pitchFamily="18" charset="0"/>
+                          </a:rPr>
+                        </m:ctrlPr>
+                      </m:accPr>
+                      <m:e>
+                        <m:r>
+                          <a:rPr lang="en-US" sz="2300" b="1" i="1">
+                            <a:latin typeface="Cambria Math" panose="02040503050406030204" pitchFamily="18" charset="0"/>
+                            <a:ea typeface="Cambria Math" panose="02040503050406030204" pitchFamily="18" charset="0"/>
+                          </a:rPr>
+                          <m:t>𝜽</m:t>
+                        </m:r>
+                      </m:e>
+                    </m:acc>
+                  </m:oMath>
+                </a14:m>
+                <a:r>
+                  <a:rPr lang="en-GB" sz="2300" dirty="0"/>
+                  <a:t>)</a:t>
+                </a:r>
+                <a:endParaRPr lang="en-DE" sz="2300" dirty="0"/>
+              </a:p>
+              <a:p>
+                <a:r>
+                  <a:rPr lang="en-GB" sz="2300" dirty="0"/>
+                  <a:t>data set from random sampling</a:t>
+                </a:r>
+                <a:endParaRPr lang="en-DE" sz="2300" dirty="0"/>
+              </a:p>
+              <a:p>
+                <a:pPr marL="0" indent="0">
+                  <a:buNone/>
+                </a:pPr>
+                <a:endParaRPr lang="en-DE" sz="2300" dirty="0"/>
+              </a:p>
+              <a:p>
+                <a:pPr marL="0" indent="0">
+                  <a:buNone/>
+                </a:pPr>
+                <a:r>
+                  <a:rPr lang="en-DE" sz="2300" dirty="0"/>
+                  <a:t>Bayesian perspective:</a:t>
+                </a:r>
+              </a:p>
+              <a:p>
+                <a:r>
+                  <a:rPr lang="en-GB" sz="2300" dirty="0"/>
+                  <a:t>true model parameters </a:t>
+                </a:r>
+                <a14:m>
+                  <m:oMath xmlns:m="http://schemas.openxmlformats.org/officeDocument/2006/math">
+                    <m:r>
+                      <a:rPr lang="en-US" sz="2300" b="1" i="1">
+                        <a:latin typeface="Cambria Math" panose="02040503050406030204" pitchFamily="18" charset="0"/>
+                        <a:ea typeface="Cambria Math" panose="02040503050406030204" pitchFamily="18" charset="0"/>
+                      </a:rPr>
+                      <m:t>𝜽</m:t>
+                    </m:r>
+                  </m:oMath>
+                </a14:m>
+                <a:r>
+                  <a:rPr lang="en-GB" sz="2300" dirty="0"/>
+                  <a:t> random (estimation of full distributions over parameters)</a:t>
+                </a:r>
+                <a:endParaRPr lang="en-DE" sz="2300" dirty="0"/>
+              </a:p>
+              <a:p>
+                <a:r>
+                  <a:rPr lang="en-GB" sz="2300" dirty="0"/>
+                  <a:t>data not random (observed)</a:t>
+                </a:r>
+                <a:endParaRPr lang="en-DE" sz="2300" dirty="0"/>
+              </a:p>
+            </p:txBody>
+          </p:sp>
+        </mc:Choice>
+        <mc:Fallback xmlns="">
+          <p:sp>
+            <p:nvSpPr>
+              <p:cNvPr id="3" name="Content Placeholder 2">
+                <a:extLst>
+                  <a:ext uri="{FF2B5EF4-FFF2-40B4-BE49-F238E27FC236}">
+                    <a16:creationId xmlns:a16="http://schemas.microsoft.com/office/drawing/2014/main" id="{03E03EFA-AED7-F3D0-B414-D286C6236452}"/>
+                  </a:ext>
+                </a:extLst>
+              </p:cNvPr>
+              <p:cNvSpPr>
+                <a:spLocks noGrp="1" noRot="1" noChangeAspect="1" noMove="1" noResize="1" noEditPoints="1" noAdjustHandles="1" noChangeArrowheads="1" noChangeShapeType="1" noTextEdit="1"/>
+              </p:cNvSpPr>
+              <p:nvPr>
+                <p:ph idx="1"/>
+              </p:nvPr>
+            </p:nvSpPr>
+            <p:spPr>
+              <a:blipFill>
+                <a:blip r:embed="rId2"/>
+                <a:stretch>
+                  <a:fillRect l="-844" t="-1744"/>
+                </a:stretch>
+              </a:blipFill>
+            </p:spPr>
+            <p:txBody>
+              <a:bodyPr/>
+              <a:lstStyle/>
+              <a:p>
+                <a:r>
+                  <a:rPr lang="en-DE">
+                    <a:noFill/>
+                  </a:rPr>
+                  <a:t> </a:t>
+                </a:r>
+              </a:p>
+            </p:txBody>
+          </p:sp>
+        </mc:Fallback>
+      </mc:AlternateContent>
+      <p:sp>
+        <p:nvSpPr>
+          <p:cNvPr id="4" name="Slide Number Placeholder 3">
+            <a:extLst>
+              <a:ext uri="{FF2B5EF4-FFF2-40B4-BE49-F238E27FC236}">
+                <a16:creationId xmlns:a16="http://schemas.microsoft.com/office/drawing/2014/main" id="{195C8E45-50AA-84E3-44A4-C716186BFDA4}"/>
               </a:ext>
             </a:extLst>
           </p:cNvPr>
@@ -13712,18 +14263,18 @@
           <a:bodyPr/>
           <a:lstStyle/>
           <a:p>
-            <a:fld id="{3D4C94FE-FF23-4504-88E9-14D481113291}" type="slidenum">
-              <a:rPr lang="en-GB" smtClean="0"/>
+            <a:fld id="{77E1BB0D-8AD4-A14C-8FD5-F1619D1A43A2}" type="slidenum">
+              <a:rPr lang="en-DE" smtClean="0"/>
               <a:t>16</a:t>
             </a:fld>
-            <a:endParaRPr lang="en-GB"/>
+            <a:endParaRPr lang="en-DE"/>
           </a:p>
         </p:txBody>
       </p:sp>
     </p:spTree>
     <p:extLst>
       <p:ext uri="{BB962C8B-B14F-4D97-AF65-F5344CB8AC3E}">
-        <p14:creationId xmlns:p14="http://schemas.microsoft.com/office/powerpoint/2010/main" val="204182399"/>
+        <p14:creationId xmlns:p14="http://schemas.microsoft.com/office/powerpoint/2010/main" val="3881321412"/>
       </p:ext>
     </p:extLst>
   </p:cSld>
@@ -15817,7 +16368,7 @@
           <p:cNvPr id="2" name="Titel 1">
             <a:extLst>
               <a:ext uri="{FF2B5EF4-FFF2-40B4-BE49-F238E27FC236}">
-                <a16:creationId xmlns:a16="http://schemas.microsoft.com/office/drawing/2014/main" id="{918A0AE2-40C3-9643-C77F-4D83BC705CF0}"/>
+                <a16:creationId xmlns:a16="http://schemas.microsoft.com/office/drawing/2014/main" id="{A2EF6B0E-748E-0880-8525-9D657C0759D8}"/>
               </a:ext>
             </a:extLst>
           </p:cNvPr>
@@ -15834,12 +16385,24 @@
           <a:lstStyle/>
           <a:p>
             <a:r>
+              <a:rPr lang="de-DE" dirty="0" err="1"/>
+              <a:t>Introduction</a:t>
+            </a:r>
+            <a:r>
               <a:rPr lang="de-DE" dirty="0"/>
-              <a:t>Null and Alternative </a:t>
+              <a:t> </a:t>
             </a:r>
             <a:r>
               <a:rPr lang="de-DE" dirty="0" err="1"/>
-              <a:t>Hypotheses</a:t>
+              <a:t>to</a:t>
+            </a:r>
+            <a:r>
+              <a:rPr lang="de-DE" dirty="0"/>
+              <a:t> </a:t>
+            </a:r>
+            <a:r>
+              <a:rPr lang="de-DE" dirty="0" err="1"/>
+              <a:t>statsmodels</a:t>
             </a:r>
             <a:endParaRPr lang="de-DE" dirty="0"/>
           </a:p>
@@ -15850,7 +16413,7 @@
           <p:cNvPr id="3" name="Inhaltsplatzhalter 2">
             <a:extLst>
               <a:ext uri="{FF2B5EF4-FFF2-40B4-BE49-F238E27FC236}">
-                <a16:creationId xmlns:a16="http://schemas.microsoft.com/office/drawing/2014/main" id="{BB8E5AA0-0F3D-29FA-6092-A7D2E8A25310}"/>
+                <a16:creationId xmlns:a16="http://schemas.microsoft.com/office/drawing/2014/main" id="{B89C05E0-BB28-CDA4-FA7A-F3680EA2EE7F}"/>
               </a:ext>
             </a:extLst>
           </p:cNvPr>
@@ -15875,7 +16438,7 @@
           <p:cNvPr id="4" name="Foliennummernplatzhalter 3">
             <a:extLst>
               <a:ext uri="{FF2B5EF4-FFF2-40B4-BE49-F238E27FC236}">
-                <a16:creationId xmlns:a16="http://schemas.microsoft.com/office/drawing/2014/main" id="{4D257153-961F-C25E-C102-89EACAE1B65D}"/>
+                <a16:creationId xmlns:a16="http://schemas.microsoft.com/office/drawing/2014/main" id="{906482F9-135D-36BE-286D-CCF26BB398E9}"/>
               </a:ext>
             </a:extLst>
           </p:cNvPr>
@@ -15902,7 +16465,7 @@
     </p:spTree>
     <p:extLst>
       <p:ext uri="{BB962C8B-B14F-4D97-AF65-F5344CB8AC3E}">
-        <p14:creationId xmlns:p14="http://schemas.microsoft.com/office/powerpoint/2010/main" val="1408243109"/>
+        <p14:creationId xmlns:p14="http://schemas.microsoft.com/office/powerpoint/2010/main" val="1072469410"/>
       </p:ext>
     </p:extLst>
   </p:cSld>
@@ -15934,7 +16497,7 @@
           <p:cNvPr id="2" name="Titel 1">
             <a:extLst>
               <a:ext uri="{FF2B5EF4-FFF2-40B4-BE49-F238E27FC236}">
-                <a16:creationId xmlns:a16="http://schemas.microsoft.com/office/drawing/2014/main" id="{96B14013-F14F-F867-B8E2-4B856E69684D}"/>
+                <a16:creationId xmlns:a16="http://schemas.microsoft.com/office/drawing/2014/main" id="{6B6DEDC3-EB7D-D99E-1932-637E0645F5AC}"/>
               </a:ext>
             </a:extLst>
           </p:cNvPr>
@@ -15952,16 +16515,13 @@
           <a:p>
             <a:r>
               <a:rPr lang="de-DE" dirty="0"/>
-              <a:t>Test </a:t>
+              <a:t>Linear Models in </a:t>
             </a:r>
             <a:r>
               <a:rPr lang="de-DE" dirty="0" err="1"/>
-              <a:t>Statistics</a:t>
-            </a:r>
-            <a:r>
-              <a:rPr lang="de-DE" dirty="0"/>
-              <a:t> and p-Values</a:t>
-            </a:r>
+              <a:t>statsmodels</a:t>
+            </a:r>
+            <a:endParaRPr lang="de-DE" dirty="0"/>
           </a:p>
         </p:txBody>
       </p:sp>
@@ -15970,7 +16530,7 @@
           <p:cNvPr id="3" name="Inhaltsplatzhalter 2">
             <a:extLst>
               <a:ext uri="{FF2B5EF4-FFF2-40B4-BE49-F238E27FC236}">
-                <a16:creationId xmlns:a16="http://schemas.microsoft.com/office/drawing/2014/main" id="{CFD1B14E-F8AC-42C0-5D94-BA99BBCC7C3F}"/>
+                <a16:creationId xmlns:a16="http://schemas.microsoft.com/office/drawing/2014/main" id="{09B787FA-9090-8915-5CE1-332A4B3F1C15}"/>
               </a:ext>
             </a:extLst>
           </p:cNvPr>
@@ -15995,7 +16555,7 @@
           <p:cNvPr id="4" name="Foliennummernplatzhalter 3">
             <a:extLst>
               <a:ext uri="{FF2B5EF4-FFF2-40B4-BE49-F238E27FC236}">
-                <a16:creationId xmlns:a16="http://schemas.microsoft.com/office/drawing/2014/main" id="{27F99324-97D6-2AE9-DBF6-D2458792164E}"/>
+                <a16:creationId xmlns:a16="http://schemas.microsoft.com/office/drawing/2014/main" id="{511EF5CC-3BAC-B082-7191-A8A5B9D589B4}"/>
               </a:ext>
             </a:extLst>
           </p:cNvPr>
@@ -16022,7 +16582,7 @@
     </p:spTree>
     <p:extLst>
       <p:ext uri="{BB962C8B-B14F-4D97-AF65-F5344CB8AC3E}">
-        <p14:creationId xmlns:p14="http://schemas.microsoft.com/office/powerpoint/2010/main" val="1345727295"/>
+        <p14:creationId xmlns:p14="http://schemas.microsoft.com/office/powerpoint/2010/main" val="40098425"/>
       </p:ext>
     </p:extLst>
   </p:cSld>
@@ -16054,7 +16614,7 @@
           <p:cNvPr id="2" name="Titel 1">
             <a:extLst>
               <a:ext uri="{FF2B5EF4-FFF2-40B4-BE49-F238E27FC236}">
-                <a16:creationId xmlns:a16="http://schemas.microsoft.com/office/drawing/2014/main" id="{61F8AD61-EBD3-10FE-91BC-085DA482ED2D}"/>
+                <a16:creationId xmlns:a16="http://schemas.microsoft.com/office/drawing/2014/main" id="{5EC9EB93-7610-B16A-1031-FB86BF1C6668}"/>
               </a:ext>
             </a:extLst>
           </p:cNvPr>
@@ -16071,8 +16631,12 @@
           <a:lstStyle/>
           <a:p>
             <a:r>
+              <a:rPr lang="de-DE" dirty="0" err="1"/>
+              <a:t>Interpreting</a:t>
+            </a:r>
+            <a:r>
               <a:rPr lang="de-DE" dirty="0"/>
-              <a:t>Common Statistical Tests</a:t>
+              <a:t> Statistical Output</a:t>
             </a:r>
           </a:p>
         </p:txBody>
@@ -16082,7 +16646,7 @@
           <p:cNvPr id="3" name="Inhaltsplatzhalter 2">
             <a:extLst>
               <a:ext uri="{FF2B5EF4-FFF2-40B4-BE49-F238E27FC236}">
-                <a16:creationId xmlns:a16="http://schemas.microsoft.com/office/drawing/2014/main" id="{6572E253-636C-A81F-A67C-E190C569E6B4}"/>
+                <a16:creationId xmlns:a16="http://schemas.microsoft.com/office/drawing/2014/main" id="{5FE1F2CE-8B9C-967D-E3F5-EBDEC2697634}"/>
               </a:ext>
             </a:extLst>
           </p:cNvPr>
@@ -16107,7 +16671,7 @@
           <p:cNvPr id="4" name="Foliennummernplatzhalter 3">
             <a:extLst>
               <a:ext uri="{FF2B5EF4-FFF2-40B4-BE49-F238E27FC236}">
-                <a16:creationId xmlns:a16="http://schemas.microsoft.com/office/drawing/2014/main" id="{B896C048-BCC4-CE0C-225B-4FF4A8FDC5B3}"/>
+                <a16:creationId xmlns:a16="http://schemas.microsoft.com/office/drawing/2014/main" id="{E22B1CB0-D86C-BFCC-4CDA-7933DECECD9C}"/>
               </a:ext>
             </a:extLst>
           </p:cNvPr>
@@ -16134,621 +16698,7 @@
     </p:spTree>
     <p:extLst>
       <p:ext uri="{BB962C8B-B14F-4D97-AF65-F5344CB8AC3E}">
-        <p14:creationId xmlns:p14="http://schemas.microsoft.com/office/powerpoint/2010/main" val="1592993138"/>
-      </p:ext>
-    </p:extLst>
-  </p:cSld>
-  <p:clrMapOvr>
-    <a:masterClrMapping/>
-  </p:clrMapOvr>
-</p:sld>
-</file>
-
-<file path=ppt/slides/slide23.xml><?xml version="1.0" encoding="utf-8"?>
-<p:sld xmlns:a="http://schemas.openxmlformats.org/drawingml/2006/main" xmlns:r="http://schemas.openxmlformats.org/officeDocument/2006/relationships" xmlns:p="http://schemas.openxmlformats.org/presentationml/2006/main">
-  <p:cSld>
-    <p:spTree>
-      <p:nvGrpSpPr>
-        <p:cNvPr id="1" name=""/>
-        <p:cNvGrpSpPr/>
-        <p:nvPr/>
-      </p:nvGrpSpPr>
-      <p:grpSpPr>
-        <a:xfrm>
-          <a:off x="0" y="0"/>
-          <a:ext cx="0" cy="0"/>
-          <a:chOff x="0" y="0"/>
-          <a:chExt cx="0" cy="0"/>
-        </a:xfrm>
-      </p:grpSpPr>
-      <p:sp>
-        <p:nvSpPr>
-          <p:cNvPr id="2" name="Titel 1">
-            <a:extLst>
-              <a:ext uri="{FF2B5EF4-FFF2-40B4-BE49-F238E27FC236}">
-                <a16:creationId xmlns:a16="http://schemas.microsoft.com/office/drawing/2014/main" id="{520E4950-998E-0C4A-0899-E09ECE0AAD08}"/>
-              </a:ext>
-            </a:extLst>
-          </p:cNvPr>
-          <p:cNvSpPr>
-            <a:spLocks noGrp="1"/>
-          </p:cNvSpPr>
-          <p:nvPr>
-            <p:ph type="title"/>
-          </p:nvPr>
-        </p:nvSpPr>
-        <p:spPr/>
-        <p:txBody>
-          <a:bodyPr/>
-          <a:lstStyle/>
-          <a:p>
-            <a:r>
-              <a:rPr lang="de-DE" dirty="0"/>
-              <a:t>Multiple </a:t>
-            </a:r>
-            <a:r>
-              <a:rPr lang="de-DE" dirty="0" err="1"/>
-              <a:t>Testing</a:t>
-            </a:r>
-            <a:r>
-              <a:rPr lang="de-DE" dirty="0"/>
-              <a:t> Problem</a:t>
-            </a:r>
-          </a:p>
-        </p:txBody>
-      </p:sp>
-      <p:sp>
-        <p:nvSpPr>
-          <p:cNvPr id="3" name="Inhaltsplatzhalter 2">
-            <a:extLst>
-              <a:ext uri="{FF2B5EF4-FFF2-40B4-BE49-F238E27FC236}">
-                <a16:creationId xmlns:a16="http://schemas.microsoft.com/office/drawing/2014/main" id="{231456CB-DA85-3C88-C519-B85CB2CA48B6}"/>
-              </a:ext>
-            </a:extLst>
-          </p:cNvPr>
-          <p:cNvSpPr>
-            <a:spLocks noGrp="1"/>
-          </p:cNvSpPr>
-          <p:nvPr>
-            <p:ph idx="1"/>
-          </p:nvPr>
-        </p:nvSpPr>
-        <p:spPr/>
-        <p:txBody>
-          <a:bodyPr/>
-          <a:lstStyle/>
-          <a:p>
-            <a:endParaRPr lang="de-DE"/>
-          </a:p>
-        </p:txBody>
-      </p:sp>
-      <p:sp>
-        <p:nvSpPr>
-          <p:cNvPr id="4" name="Foliennummernplatzhalter 3">
-            <a:extLst>
-              <a:ext uri="{FF2B5EF4-FFF2-40B4-BE49-F238E27FC236}">
-                <a16:creationId xmlns:a16="http://schemas.microsoft.com/office/drawing/2014/main" id="{935AD544-A216-88A7-CCD9-7E684692A6E4}"/>
-              </a:ext>
-            </a:extLst>
-          </p:cNvPr>
-          <p:cNvSpPr>
-            <a:spLocks noGrp="1"/>
-          </p:cNvSpPr>
-          <p:nvPr>
-            <p:ph type="sldNum" sz="quarter" idx="12"/>
-          </p:nvPr>
-        </p:nvSpPr>
-        <p:spPr/>
-        <p:txBody>
-          <a:bodyPr/>
-          <a:lstStyle/>
-          <a:p>
-            <a:fld id="{3D4C94FE-FF23-4504-88E9-14D481113291}" type="slidenum">
-              <a:rPr lang="en-GB" smtClean="0"/>
-              <a:t>23</a:t>
-            </a:fld>
-            <a:endParaRPr lang="en-GB"/>
-          </a:p>
-        </p:txBody>
-      </p:sp>
-    </p:spTree>
-    <p:extLst>
-      <p:ext uri="{BB962C8B-B14F-4D97-AF65-F5344CB8AC3E}">
-        <p14:creationId xmlns:p14="http://schemas.microsoft.com/office/powerpoint/2010/main" val="2970373129"/>
-      </p:ext>
-    </p:extLst>
-  </p:cSld>
-  <p:clrMapOvr>
-    <a:masterClrMapping/>
-  </p:clrMapOvr>
-</p:sld>
-</file>
-
-<file path=ppt/slides/slide24.xml><?xml version="1.0" encoding="utf-8"?>
-<p:sld xmlns:a="http://schemas.openxmlformats.org/drawingml/2006/main" xmlns:r="http://schemas.openxmlformats.org/officeDocument/2006/relationships" xmlns:p="http://schemas.openxmlformats.org/presentationml/2006/main">
-  <p:cSld>
-    <p:spTree>
-      <p:nvGrpSpPr>
-        <p:cNvPr id="1" name=""/>
-        <p:cNvGrpSpPr/>
-        <p:nvPr/>
-      </p:nvGrpSpPr>
-      <p:grpSpPr>
-        <a:xfrm>
-          <a:off x="0" y="0"/>
-          <a:ext cx="0" cy="0"/>
-          <a:chOff x="0" y="0"/>
-          <a:chExt cx="0" cy="0"/>
-        </a:xfrm>
-      </p:grpSpPr>
-      <p:sp>
-        <p:nvSpPr>
-          <p:cNvPr id="2" name="Titel 1">
-            <a:extLst>
-              <a:ext uri="{FF2B5EF4-FFF2-40B4-BE49-F238E27FC236}">
-                <a16:creationId xmlns:a16="http://schemas.microsoft.com/office/drawing/2014/main" id="{A2EF6B0E-748E-0880-8525-9D657C0759D8}"/>
-              </a:ext>
-            </a:extLst>
-          </p:cNvPr>
-          <p:cNvSpPr>
-            <a:spLocks noGrp="1"/>
-          </p:cNvSpPr>
-          <p:nvPr>
-            <p:ph type="title"/>
-          </p:nvPr>
-        </p:nvSpPr>
-        <p:spPr/>
-        <p:txBody>
-          <a:bodyPr/>
-          <a:lstStyle/>
-          <a:p>
-            <a:r>
-              <a:rPr lang="de-DE" dirty="0" err="1"/>
-              <a:t>Introduction</a:t>
-            </a:r>
-            <a:r>
-              <a:rPr lang="de-DE" dirty="0"/>
-              <a:t> </a:t>
-            </a:r>
-            <a:r>
-              <a:rPr lang="de-DE" dirty="0" err="1"/>
-              <a:t>to</a:t>
-            </a:r>
-            <a:r>
-              <a:rPr lang="de-DE" dirty="0"/>
-              <a:t> </a:t>
-            </a:r>
-            <a:r>
-              <a:rPr lang="de-DE" dirty="0" err="1"/>
-              <a:t>statsmodels</a:t>
-            </a:r>
-            <a:endParaRPr lang="de-DE" dirty="0"/>
-          </a:p>
-        </p:txBody>
-      </p:sp>
-      <p:sp>
-        <p:nvSpPr>
-          <p:cNvPr id="3" name="Inhaltsplatzhalter 2">
-            <a:extLst>
-              <a:ext uri="{FF2B5EF4-FFF2-40B4-BE49-F238E27FC236}">
-                <a16:creationId xmlns:a16="http://schemas.microsoft.com/office/drawing/2014/main" id="{B89C05E0-BB28-CDA4-FA7A-F3680EA2EE7F}"/>
-              </a:ext>
-            </a:extLst>
-          </p:cNvPr>
-          <p:cNvSpPr>
-            <a:spLocks noGrp="1"/>
-          </p:cNvSpPr>
-          <p:nvPr>
-            <p:ph idx="1"/>
-          </p:nvPr>
-        </p:nvSpPr>
-        <p:spPr/>
-        <p:txBody>
-          <a:bodyPr/>
-          <a:lstStyle/>
-          <a:p>
-            <a:endParaRPr lang="de-DE"/>
-          </a:p>
-        </p:txBody>
-      </p:sp>
-      <p:sp>
-        <p:nvSpPr>
-          <p:cNvPr id="4" name="Foliennummernplatzhalter 3">
-            <a:extLst>
-              <a:ext uri="{FF2B5EF4-FFF2-40B4-BE49-F238E27FC236}">
-                <a16:creationId xmlns:a16="http://schemas.microsoft.com/office/drawing/2014/main" id="{906482F9-135D-36BE-286D-CCF26BB398E9}"/>
-              </a:ext>
-            </a:extLst>
-          </p:cNvPr>
-          <p:cNvSpPr>
-            <a:spLocks noGrp="1"/>
-          </p:cNvSpPr>
-          <p:nvPr>
-            <p:ph type="sldNum" sz="quarter" idx="12"/>
-          </p:nvPr>
-        </p:nvSpPr>
-        <p:spPr/>
-        <p:txBody>
-          <a:bodyPr/>
-          <a:lstStyle/>
-          <a:p>
-            <a:fld id="{3D4C94FE-FF23-4504-88E9-14D481113291}" type="slidenum">
-              <a:rPr lang="en-GB" smtClean="0"/>
-              <a:t>24</a:t>
-            </a:fld>
-            <a:endParaRPr lang="en-GB"/>
-          </a:p>
-        </p:txBody>
-      </p:sp>
-    </p:spTree>
-    <p:extLst>
-      <p:ext uri="{BB962C8B-B14F-4D97-AF65-F5344CB8AC3E}">
-        <p14:creationId xmlns:p14="http://schemas.microsoft.com/office/powerpoint/2010/main" val="1072469410"/>
-      </p:ext>
-    </p:extLst>
-  </p:cSld>
-  <p:clrMapOvr>
-    <a:masterClrMapping/>
-  </p:clrMapOvr>
-</p:sld>
-</file>
-
-<file path=ppt/slides/slide25.xml><?xml version="1.0" encoding="utf-8"?>
-<p:sld xmlns:a="http://schemas.openxmlformats.org/drawingml/2006/main" xmlns:r="http://schemas.openxmlformats.org/officeDocument/2006/relationships" xmlns:p="http://schemas.openxmlformats.org/presentationml/2006/main">
-  <p:cSld>
-    <p:spTree>
-      <p:nvGrpSpPr>
-        <p:cNvPr id="1" name=""/>
-        <p:cNvGrpSpPr/>
-        <p:nvPr/>
-      </p:nvGrpSpPr>
-      <p:grpSpPr>
-        <a:xfrm>
-          <a:off x="0" y="0"/>
-          <a:ext cx="0" cy="0"/>
-          <a:chOff x="0" y="0"/>
-          <a:chExt cx="0" cy="0"/>
-        </a:xfrm>
-      </p:grpSpPr>
-      <p:sp>
-        <p:nvSpPr>
-          <p:cNvPr id="2" name="Titel 1">
-            <a:extLst>
-              <a:ext uri="{FF2B5EF4-FFF2-40B4-BE49-F238E27FC236}">
-                <a16:creationId xmlns:a16="http://schemas.microsoft.com/office/drawing/2014/main" id="{6B6DEDC3-EB7D-D99E-1932-637E0645F5AC}"/>
-              </a:ext>
-            </a:extLst>
-          </p:cNvPr>
-          <p:cNvSpPr>
-            <a:spLocks noGrp="1"/>
-          </p:cNvSpPr>
-          <p:nvPr>
-            <p:ph type="title"/>
-          </p:nvPr>
-        </p:nvSpPr>
-        <p:spPr/>
-        <p:txBody>
-          <a:bodyPr/>
-          <a:lstStyle/>
-          <a:p>
-            <a:r>
-              <a:rPr lang="de-DE" dirty="0"/>
-              <a:t>Linear Models in </a:t>
-            </a:r>
-            <a:r>
-              <a:rPr lang="de-DE" dirty="0" err="1"/>
-              <a:t>statsmodels</a:t>
-            </a:r>
-            <a:endParaRPr lang="de-DE" dirty="0"/>
-          </a:p>
-        </p:txBody>
-      </p:sp>
-      <p:sp>
-        <p:nvSpPr>
-          <p:cNvPr id="3" name="Inhaltsplatzhalter 2">
-            <a:extLst>
-              <a:ext uri="{FF2B5EF4-FFF2-40B4-BE49-F238E27FC236}">
-                <a16:creationId xmlns:a16="http://schemas.microsoft.com/office/drawing/2014/main" id="{09B787FA-9090-8915-5CE1-332A4B3F1C15}"/>
-              </a:ext>
-            </a:extLst>
-          </p:cNvPr>
-          <p:cNvSpPr>
-            <a:spLocks noGrp="1"/>
-          </p:cNvSpPr>
-          <p:nvPr>
-            <p:ph idx="1"/>
-          </p:nvPr>
-        </p:nvSpPr>
-        <p:spPr/>
-        <p:txBody>
-          <a:bodyPr/>
-          <a:lstStyle/>
-          <a:p>
-            <a:endParaRPr lang="de-DE"/>
-          </a:p>
-        </p:txBody>
-      </p:sp>
-      <p:sp>
-        <p:nvSpPr>
-          <p:cNvPr id="4" name="Foliennummernplatzhalter 3">
-            <a:extLst>
-              <a:ext uri="{FF2B5EF4-FFF2-40B4-BE49-F238E27FC236}">
-                <a16:creationId xmlns:a16="http://schemas.microsoft.com/office/drawing/2014/main" id="{511EF5CC-3BAC-B082-7191-A8A5B9D589B4}"/>
-              </a:ext>
-            </a:extLst>
-          </p:cNvPr>
-          <p:cNvSpPr>
-            <a:spLocks noGrp="1"/>
-          </p:cNvSpPr>
-          <p:nvPr>
-            <p:ph type="sldNum" sz="quarter" idx="12"/>
-          </p:nvPr>
-        </p:nvSpPr>
-        <p:spPr/>
-        <p:txBody>
-          <a:bodyPr/>
-          <a:lstStyle/>
-          <a:p>
-            <a:fld id="{3D4C94FE-FF23-4504-88E9-14D481113291}" type="slidenum">
-              <a:rPr lang="en-GB" smtClean="0"/>
-              <a:t>25</a:t>
-            </a:fld>
-            <a:endParaRPr lang="en-GB"/>
-          </a:p>
-        </p:txBody>
-      </p:sp>
-    </p:spTree>
-    <p:extLst>
-      <p:ext uri="{BB962C8B-B14F-4D97-AF65-F5344CB8AC3E}">
-        <p14:creationId xmlns:p14="http://schemas.microsoft.com/office/powerpoint/2010/main" val="40098425"/>
-      </p:ext>
-    </p:extLst>
-  </p:cSld>
-  <p:clrMapOvr>
-    <a:masterClrMapping/>
-  </p:clrMapOvr>
-</p:sld>
-</file>
-
-<file path=ppt/slides/slide26.xml><?xml version="1.0" encoding="utf-8"?>
-<p:sld xmlns:a="http://schemas.openxmlformats.org/drawingml/2006/main" xmlns:r="http://schemas.openxmlformats.org/officeDocument/2006/relationships" xmlns:p="http://schemas.openxmlformats.org/presentationml/2006/main">
-  <p:cSld>
-    <p:spTree>
-      <p:nvGrpSpPr>
-        <p:cNvPr id="1" name=""/>
-        <p:cNvGrpSpPr/>
-        <p:nvPr/>
-      </p:nvGrpSpPr>
-      <p:grpSpPr>
-        <a:xfrm>
-          <a:off x="0" y="0"/>
-          <a:ext cx="0" cy="0"/>
-          <a:chOff x="0" y="0"/>
-          <a:chExt cx="0" cy="0"/>
-        </a:xfrm>
-      </p:grpSpPr>
-      <p:sp>
-        <p:nvSpPr>
-          <p:cNvPr id="2" name="Titel 1">
-            <a:extLst>
-              <a:ext uri="{FF2B5EF4-FFF2-40B4-BE49-F238E27FC236}">
-                <a16:creationId xmlns:a16="http://schemas.microsoft.com/office/drawing/2014/main" id="{5EC9EB93-7610-B16A-1031-FB86BF1C6668}"/>
-              </a:ext>
-            </a:extLst>
-          </p:cNvPr>
-          <p:cNvSpPr>
-            <a:spLocks noGrp="1"/>
-          </p:cNvSpPr>
-          <p:nvPr>
-            <p:ph type="title"/>
-          </p:nvPr>
-        </p:nvSpPr>
-        <p:spPr/>
-        <p:txBody>
-          <a:bodyPr/>
-          <a:lstStyle/>
-          <a:p>
-            <a:r>
-              <a:rPr lang="de-DE" dirty="0" err="1"/>
-              <a:t>Interpreting</a:t>
-            </a:r>
-            <a:r>
-              <a:rPr lang="de-DE" dirty="0"/>
-              <a:t> Statistical Output</a:t>
-            </a:r>
-          </a:p>
-        </p:txBody>
-      </p:sp>
-      <p:sp>
-        <p:nvSpPr>
-          <p:cNvPr id="3" name="Inhaltsplatzhalter 2">
-            <a:extLst>
-              <a:ext uri="{FF2B5EF4-FFF2-40B4-BE49-F238E27FC236}">
-                <a16:creationId xmlns:a16="http://schemas.microsoft.com/office/drawing/2014/main" id="{5FE1F2CE-8B9C-967D-E3F5-EBDEC2697634}"/>
-              </a:ext>
-            </a:extLst>
-          </p:cNvPr>
-          <p:cNvSpPr>
-            <a:spLocks noGrp="1"/>
-          </p:cNvSpPr>
-          <p:nvPr>
-            <p:ph idx="1"/>
-          </p:nvPr>
-        </p:nvSpPr>
-        <p:spPr/>
-        <p:txBody>
-          <a:bodyPr/>
-          <a:lstStyle/>
-          <a:p>
-            <a:endParaRPr lang="de-DE"/>
-          </a:p>
-        </p:txBody>
-      </p:sp>
-      <p:sp>
-        <p:nvSpPr>
-          <p:cNvPr id="4" name="Foliennummernplatzhalter 3">
-            <a:extLst>
-              <a:ext uri="{FF2B5EF4-FFF2-40B4-BE49-F238E27FC236}">
-                <a16:creationId xmlns:a16="http://schemas.microsoft.com/office/drawing/2014/main" id="{E22B1CB0-D86C-BFCC-4CDA-7933DECECD9C}"/>
-              </a:ext>
-            </a:extLst>
-          </p:cNvPr>
-          <p:cNvSpPr>
-            <a:spLocks noGrp="1"/>
-          </p:cNvSpPr>
-          <p:nvPr>
-            <p:ph type="sldNum" sz="quarter" idx="12"/>
-          </p:nvPr>
-        </p:nvSpPr>
-        <p:spPr/>
-        <p:txBody>
-          <a:bodyPr/>
-          <a:lstStyle/>
-          <a:p>
-            <a:fld id="{3D4C94FE-FF23-4504-88E9-14D481113291}" type="slidenum">
-              <a:rPr lang="en-GB" smtClean="0"/>
-              <a:t>26</a:t>
-            </a:fld>
-            <a:endParaRPr lang="en-GB"/>
-          </a:p>
-        </p:txBody>
-      </p:sp>
-    </p:spTree>
-    <p:extLst>
-      <p:ext uri="{BB962C8B-B14F-4D97-AF65-F5344CB8AC3E}">
         <p14:creationId xmlns:p14="http://schemas.microsoft.com/office/powerpoint/2010/main" val="836944446"/>
-      </p:ext>
-    </p:extLst>
-  </p:cSld>
-  <p:clrMapOvr>
-    <a:masterClrMapping/>
-  </p:clrMapOvr>
-</p:sld>
-</file>
-
-<file path=ppt/slides/slide27.xml><?xml version="1.0" encoding="utf-8"?>
-<p:sld xmlns:a="http://schemas.openxmlformats.org/drawingml/2006/main" xmlns:r="http://schemas.openxmlformats.org/officeDocument/2006/relationships" xmlns:p="http://schemas.openxmlformats.org/presentationml/2006/main">
-  <p:cSld>
-    <p:spTree>
-      <p:nvGrpSpPr>
-        <p:cNvPr id="1" name=""/>
-        <p:cNvGrpSpPr/>
-        <p:nvPr/>
-      </p:nvGrpSpPr>
-      <p:grpSpPr>
-        <a:xfrm>
-          <a:off x="0" y="0"/>
-          <a:ext cx="0" cy="0"/>
-          <a:chOff x="0" y="0"/>
-          <a:chExt cx="0" cy="0"/>
-        </a:xfrm>
-      </p:grpSpPr>
-      <p:sp>
-        <p:nvSpPr>
-          <p:cNvPr id="2" name="Titel 1">
-            <a:extLst>
-              <a:ext uri="{FF2B5EF4-FFF2-40B4-BE49-F238E27FC236}">
-                <a16:creationId xmlns:a16="http://schemas.microsoft.com/office/drawing/2014/main" id="{7FC61DE6-6363-9CD9-0B0B-89983589A530}"/>
-              </a:ext>
-            </a:extLst>
-          </p:cNvPr>
-          <p:cNvSpPr>
-            <a:spLocks noGrp="1"/>
-          </p:cNvSpPr>
-          <p:nvPr>
-            <p:ph type="title"/>
-          </p:nvPr>
-        </p:nvSpPr>
-        <p:spPr/>
-        <p:txBody>
-          <a:bodyPr/>
-          <a:lstStyle/>
-          <a:p>
-            <a:r>
-              <a:rPr lang="de-DE" dirty="0" err="1"/>
-              <a:t>From</a:t>
-            </a:r>
-            <a:r>
-              <a:rPr lang="de-DE" dirty="0"/>
-              <a:t> </a:t>
-            </a:r>
-            <a:r>
-              <a:rPr lang="de-DE" dirty="0" err="1"/>
-              <a:t>Inference</a:t>
-            </a:r>
-            <a:r>
-              <a:rPr lang="de-DE" dirty="0"/>
-              <a:t> </a:t>
-            </a:r>
-            <a:r>
-              <a:rPr lang="de-DE" dirty="0" err="1"/>
-              <a:t>to</a:t>
-            </a:r>
-            <a:r>
-              <a:rPr lang="de-DE" dirty="0"/>
-              <a:t> Modeling</a:t>
-            </a:r>
-          </a:p>
-        </p:txBody>
-      </p:sp>
-      <p:sp>
-        <p:nvSpPr>
-          <p:cNvPr id="3" name="Inhaltsplatzhalter 2">
-            <a:extLst>
-              <a:ext uri="{FF2B5EF4-FFF2-40B4-BE49-F238E27FC236}">
-                <a16:creationId xmlns:a16="http://schemas.microsoft.com/office/drawing/2014/main" id="{D4B59C19-B77B-A1BD-C628-C37CE52CBC5E}"/>
-              </a:ext>
-            </a:extLst>
-          </p:cNvPr>
-          <p:cNvSpPr>
-            <a:spLocks noGrp="1"/>
-          </p:cNvSpPr>
-          <p:nvPr>
-            <p:ph idx="1"/>
-          </p:nvPr>
-        </p:nvSpPr>
-        <p:spPr/>
-        <p:txBody>
-          <a:bodyPr/>
-          <a:lstStyle/>
-          <a:p>
-            <a:endParaRPr lang="de-DE"/>
-          </a:p>
-        </p:txBody>
-      </p:sp>
-      <p:sp>
-        <p:nvSpPr>
-          <p:cNvPr id="4" name="Foliennummernplatzhalter 3">
-            <a:extLst>
-              <a:ext uri="{FF2B5EF4-FFF2-40B4-BE49-F238E27FC236}">
-                <a16:creationId xmlns:a16="http://schemas.microsoft.com/office/drawing/2014/main" id="{3DFC690A-F9A9-DA4C-AC3C-1534B4166BDB}"/>
-              </a:ext>
-            </a:extLst>
-          </p:cNvPr>
-          <p:cNvSpPr>
-            <a:spLocks noGrp="1"/>
-          </p:cNvSpPr>
-          <p:nvPr>
-            <p:ph type="sldNum" sz="quarter" idx="12"/>
-          </p:nvPr>
-        </p:nvSpPr>
-        <p:spPr/>
-        <p:txBody>
-          <a:bodyPr/>
-          <a:lstStyle/>
-          <a:p>
-            <a:fld id="{3D4C94FE-FF23-4504-88E9-14D481113291}" type="slidenum">
-              <a:rPr lang="en-GB" smtClean="0"/>
-              <a:t>27</a:t>
-            </a:fld>
-            <a:endParaRPr lang="en-GB"/>
-          </a:p>
-        </p:txBody>
-      </p:sp>
-    </p:spTree>
-    <p:extLst>
-      <p:ext uri="{BB962C8B-B14F-4D97-AF65-F5344CB8AC3E}">
-        <p14:creationId xmlns:p14="http://schemas.microsoft.com/office/powerpoint/2010/main" val="3501347209"/>
       </p:ext>
     </p:extLst>
   </p:cSld>
@@ -16961,7 +16911,7 @@
           <p:cNvPr id="2" name="Titel 1">
             <a:extLst>
               <a:ext uri="{FF2B5EF4-FFF2-40B4-BE49-F238E27FC236}">
-                <a16:creationId xmlns:a16="http://schemas.microsoft.com/office/drawing/2014/main" id="{3594800B-B9F7-36D5-E95C-BB85D5DF31F5}"/>
+                <a16:creationId xmlns:a16="http://schemas.microsoft.com/office/drawing/2014/main" id="{DA7E0819-F09F-219D-494D-C0676A4AFA48}"/>
               </a:ext>
             </a:extLst>
           </p:cNvPr>
@@ -16978,29 +16928,14 @@
           <a:lstStyle/>
           <a:p>
             <a:r>
+              <a:rPr lang="de-DE" dirty="0"/>
+              <a:t>Parameter </a:t>
+            </a:r>
+            <a:r>
               <a:rPr lang="de-DE" dirty="0" err="1"/>
-              <a:t>What</a:t>
-            </a:r>
-            <a:r>
-              <a:rPr lang="de-DE" dirty="0"/>
-              <a:t> </a:t>
-            </a:r>
-            <a:r>
-              <a:rPr lang="de-DE" dirty="0" err="1"/>
-              <a:t>Is</a:t>
-            </a:r>
-            <a:r>
-              <a:rPr lang="de-DE" dirty="0"/>
-              <a:t> Statistical </a:t>
-            </a:r>
-            <a:r>
-              <a:rPr lang="de-DE" dirty="0" err="1"/>
-              <a:t>Inference</a:t>
-            </a:r>
-            <a:r>
-              <a:rPr lang="de-DE" dirty="0"/>
-              <a:t>?</a:t>
-            </a:r>
+              <a:t>Estimation</a:t>
+            </a:r>
+            <a:endParaRPr lang="de-DE" dirty="0"/>
           </a:p>
         </p:txBody>
       </p:sp>
@@ -17009,7 +16944,7 @@
           <p:cNvPr id="3" name="Inhaltsplatzhalter 2">
             <a:extLst>
               <a:ext uri="{FF2B5EF4-FFF2-40B4-BE49-F238E27FC236}">
-                <a16:creationId xmlns:a16="http://schemas.microsoft.com/office/drawing/2014/main" id="{BDF5A3A2-4EB9-E23C-C313-18AA7E3BD4D2}"/>
+                <a16:creationId xmlns:a16="http://schemas.microsoft.com/office/drawing/2014/main" id="{7E99F8A3-CB23-5AD0-E2C5-CA9C2CC58130}"/>
               </a:ext>
             </a:extLst>
           </p:cNvPr>
@@ -17034,7 +16969,7 @@
           <p:cNvPr id="4" name="Foliennummernplatzhalter 3">
             <a:extLst>
               <a:ext uri="{FF2B5EF4-FFF2-40B4-BE49-F238E27FC236}">
-                <a16:creationId xmlns:a16="http://schemas.microsoft.com/office/drawing/2014/main" id="{A05A4913-51A4-7049-FF34-15DC1E845C53}"/>
+                <a16:creationId xmlns:a16="http://schemas.microsoft.com/office/drawing/2014/main" id="{2A5C04F6-8F49-62DE-9D9D-CAFE55D475FF}"/>
               </a:ext>
             </a:extLst>
           </p:cNvPr>
@@ -17061,7 +16996,7 @@
     </p:spTree>
     <p:extLst>
       <p:ext uri="{BB962C8B-B14F-4D97-AF65-F5344CB8AC3E}">
-        <p14:creationId xmlns:p14="http://schemas.microsoft.com/office/powerpoint/2010/main" val="2499135328"/>
+        <p14:creationId xmlns:p14="http://schemas.microsoft.com/office/powerpoint/2010/main" val="1222257082"/>
       </p:ext>
     </p:extLst>
   </p:cSld>
@@ -17093,7 +17028,7 @@
           <p:cNvPr id="2" name="Titel 1">
             <a:extLst>
               <a:ext uri="{FF2B5EF4-FFF2-40B4-BE49-F238E27FC236}">
-                <a16:creationId xmlns:a16="http://schemas.microsoft.com/office/drawing/2014/main" id="{4FAAF2FE-21B6-4D93-5A98-6C727A7030AC}"/>
+                <a16:creationId xmlns:a16="http://schemas.microsoft.com/office/drawing/2014/main" id="{D1BD2DB9-A134-FF7E-C8BA-64FE53A5B5E9}"/>
               </a:ext>
             </a:extLst>
           </p:cNvPr>
@@ -17110,25 +17045,13 @@
           <a:lstStyle/>
           <a:p>
             <a:r>
+              <a:rPr lang="de-DE" dirty="0"/>
+              <a:t>Least Squares </a:t>
+            </a:r>
+            <a:r>
               <a:rPr lang="de-DE" dirty="0" err="1"/>
               <a:t>Estimation</a:t>
             </a:r>
-            <a:r>
-              <a:rPr lang="de-DE" dirty="0"/>
-              <a:t> </a:t>
-            </a:r>
-            <a:r>
-              <a:rPr lang="de-DE" dirty="0" err="1"/>
-              <a:t>vs</a:t>
-            </a:r>
-            <a:r>
-              <a:rPr lang="de-DE" dirty="0"/>
-              <a:t> </a:t>
-            </a:r>
-            <a:r>
-              <a:rPr lang="de-DE" dirty="0" err="1"/>
-              <a:t>Prediction</a:t>
-            </a:r>
             <a:endParaRPr lang="de-DE" dirty="0"/>
           </a:p>
         </p:txBody>
@@ -17138,7 +17061,7 @@
           <p:cNvPr id="3" name="Inhaltsplatzhalter 2">
             <a:extLst>
               <a:ext uri="{FF2B5EF4-FFF2-40B4-BE49-F238E27FC236}">
-                <a16:creationId xmlns:a16="http://schemas.microsoft.com/office/drawing/2014/main" id="{3411D64C-EA57-1736-EB7D-B8741E2B0332}"/>
+                <a16:creationId xmlns:a16="http://schemas.microsoft.com/office/drawing/2014/main" id="{E3FD89AB-9049-BF80-08EB-4562A5C98927}"/>
               </a:ext>
             </a:extLst>
           </p:cNvPr>
@@ -17163,7 +17086,7 @@
           <p:cNvPr id="4" name="Foliennummernplatzhalter 3">
             <a:extLst>
               <a:ext uri="{FF2B5EF4-FFF2-40B4-BE49-F238E27FC236}">
-                <a16:creationId xmlns:a16="http://schemas.microsoft.com/office/drawing/2014/main" id="{E2F29F84-CC6D-C552-0195-88DC1DF15752}"/>
+                <a16:creationId xmlns:a16="http://schemas.microsoft.com/office/drawing/2014/main" id="{56B8C9E3-A4A1-62CE-7490-26C9E0C788BF}"/>
               </a:ext>
             </a:extLst>
           </p:cNvPr>
@@ -17190,7 +17113,7 @@
     </p:spTree>
     <p:extLst>
       <p:ext uri="{BB962C8B-B14F-4D97-AF65-F5344CB8AC3E}">
-        <p14:creationId xmlns:p14="http://schemas.microsoft.com/office/powerpoint/2010/main" val="1264415050"/>
+        <p14:creationId xmlns:p14="http://schemas.microsoft.com/office/powerpoint/2010/main" val="116196653"/>
       </p:ext>
     </p:extLst>
   </p:cSld>
@@ -17222,7 +17145,7 @@
           <p:cNvPr id="2" name="Titel 1">
             <a:extLst>
               <a:ext uri="{FF2B5EF4-FFF2-40B4-BE49-F238E27FC236}">
-                <a16:creationId xmlns:a16="http://schemas.microsoft.com/office/drawing/2014/main" id="{DA7E0819-F09F-219D-494D-C0676A4AFA48}"/>
+                <a16:creationId xmlns:a16="http://schemas.microsoft.com/office/drawing/2014/main" id="{B3CFD234-B2B0-8F19-1D5F-C84B9BF984F1}"/>
               </a:ext>
             </a:extLst>
           </p:cNvPr>
@@ -17240,11 +17163,19 @@
           <a:p>
             <a:r>
               <a:rPr lang="de-DE" dirty="0"/>
-              <a:t>Parameter </a:t>
+              <a:t>Loss </a:t>
             </a:r>
             <a:r>
               <a:rPr lang="de-DE" dirty="0" err="1"/>
-              <a:t>Estimation</a:t>
+              <a:t>Functions</a:t>
+            </a:r>
+            <a:r>
+              <a:rPr lang="de-DE" dirty="0"/>
+              <a:t> and </a:t>
+            </a:r>
+            <a:r>
+              <a:rPr lang="de-DE" dirty="0" err="1"/>
+              <a:t>Optimization</a:t>
             </a:r>
             <a:endParaRPr lang="de-DE" dirty="0"/>
           </a:p>
@@ -17255,7 +17186,7 @@
           <p:cNvPr id="3" name="Inhaltsplatzhalter 2">
             <a:extLst>
               <a:ext uri="{FF2B5EF4-FFF2-40B4-BE49-F238E27FC236}">
-                <a16:creationId xmlns:a16="http://schemas.microsoft.com/office/drawing/2014/main" id="{7E99F8A3-CB23-5AD0-E2C5-CA9C2CC58130}"/>
+                <a16:creationId xmlns:a16="http://schemas.microsoft.com/office/drawing/2014/main" id="{B0FB1DE5-55FB-B039-D4C1-82720EF56059}"/>
               </a:ext>
             </a:extLst>
           </p:cNvPr>
@@ -17280,7 +17211,7 @@
           <p:cNvPr id="4" name="Foliennummernplatzhalter 3">
             <a:extLst>
               <a:ext uri="{FF2B5EF4-FFF2-40B4-BE49-F238E27FC236}">
-                <a16:creationId xmlns:a16="http://schemas.microsoft.com/office/drawing/2014/main" id="{2A5C04F6-8F49-62DE-9D9D-CAFE55D475FF}"/>
+                <a16:creationId xmlns:a16="http://schemas.microsoft.com/office/drawing/2014/main" id="{14EBBF11-72D6-A819-6FEA-934A8EAAAE54}"/>
               </a:ext>
             </a:extLst>
           </p:cNvPr>
@@ -17307,7 +17238,7 @@
     </p:spTree>
     <p:extLst>
       <p:ext uri="{BB962C8B-B14F-4D97-AF65-F5344CB8AC3E}">
-        <p14:creationId xmlns:p14="http://schemas.microsoft.com/office/powerpoint/2010/main" val="1222257082"/>
+        <p14:creationId xmlns:p14="http://schemas.microsoft.com/office/powerpoint/2010/main" val="211540913"/>
       </p:ext>
     </p:extLst>
   </p:cSld>
@@ -17339,7 +17270,7 @@
           <p:cNvPr id="2" name="Titel 1">
             <a:extLst>
               <a:ext uri="{FF2B5EF4-FFF2-40B4-BE49-F238E27FC236}">
-                <a16:creationId xmlns:a16="http://schemas.microsoft.com/office/drawing/2014/main" id="{D1BD2DB9-A134-FF7E-C8BA-64FE53A5B5E9}"/>
+                <a16:creationId xmlns:a16="http://schemas.microsoft.com/office/drawing/2014/main" id="{854D96D1-0DFD-CDA0-2D1A-1A4269EE635A}"/>
               </a:ext>
             </a:extLst>
           </p:cNvPr>
@@ -17357,13 +17288,24 @@
           <a:p>
             <a:r>
               <a:rPr lang="de-DE" dirty="0"/>
-              <a:t>Least Squares </a:t>
+              <a:t>Maximum </a:t>
+            </a:r>
+            <a:r>
+              <a:rPr lang="de-DE" dirty="0" err="1"/>
+              <a:t>Likelihood</a:t>
+            </a:r>
+            <a:r>
+              <a:rPr lang="de-DE" dirty="0"/>
+              <a:t> </a:t>
             </a:r>
             <a:r>
               <a:rPr lang="de-DE" dirty="0" err="1"/>
               <a:t>Estimation</a:t>
             </a:r>
-            <a:endParaRPr lang="de-DE" dirty="0"/>
+            <a:r>
+              <a:rPr lang="de-DE" dirty="0"/>
+              <a:t> (MLE)</a:t>
+            </a:r>
           </a:p>
         </p:txBody>
       </p:sp>
@@ -17372,7 +17314,7 @@
           <p:cNvPr id="3" name="Inhaltsplatzhalter 2">
             <a:extLst>
               <a:ext uri="{FF2B5EF4-FFF2-40B4-BE49-F238E27FC236}">
-                <a16:creationId xmlns:a16="http://schemas.microsoft.com/office/drawing/2014/main" id="{E3FD89AB-9049-BF80-08EB-4562A5C98927}"/>
+                <a16:creationId xmlns:a16="http://schemas.microsoft.com/office/drawing/2014/main" id="{1F956010-9C28-F9EE-4A46-5F8A3B30F4AC}"/>
               </a:ext>
             </a:extLst>
           </p:cNvPr>
@@ -17397,7 +17339,7 @@
           <p:cNvPr id="4" name="Foliennummernplatzhalter 3">
             <a:extLst>
               <a:ext uri="{FF2B5EF4-FFF2-40B4-BE49-F238E27FC236}">
-                <a16:creationId xmlns:a16="http://schemas.microsoft.com/office/drawing/2014/main" id="{56B8C9E3-A4A1-62CE-7490-26C9E0C788BF}"/>
+                <a16:creationId xmlns:a16="http://schemas.microsoft.com/office/drawing/2014/main" id="{B07E4D77-FE8D-127B-EEEF-939F25A12A35}"/>
               </a:ext>
             </a:extLst>
           </p:cNvPr>
@@ -17424,7 +17366,7 @@
     </p:spTree>
     <p:extLst>
       <p:ext uri="{BB962C8B-B14F-4D97-AF65-F5344CB8AC3E}">
-        <p14:creationId xmlns:p14="http://schemas.microsoft.com/office/powerpoint/2010/main" val="116196653"/>
+        <p14:creationId xmlns:p14="http://schemas.microsoft.com/office/powerpoint/2010/main" val="505515844"/>
       </p:ext>
     </p:extLst>
   </p:cSld>
@@ -17453,10 +17395,10 @@
       </p:grpSpPr>
       <p:sp>
         <p:nvSpPr>
-          <p:cNvPr id="2" name="Titel 1">
-            <a:extLst>
-              <a:ext uri="{FF2B5EF4-FFF2-40B4-BE49-F238E27FC236}">
-                <a16:creationId xmlns:a16="http://schemas.microsoft.com/office/drawing/2014/main" id="{B3CFD234-B2B0-8F19-1D5F-C84B9BF984F1}"/>
+          <p:cNvPr id="2" name="Title 1">
+            <a:extLst>
+              <a:ext uri="{FF2B5EF4-FFF2-40B4-BE49-F238E27FC236}">
+                <a16:creationId xmlns:a16="http://schemas.microsoft.com/office/drawing/2014/main" id="{E2B90FB9-91D6-8173-1C05-1E9C1494AC01}"/>
               </a:ext>
             </a:extLst>
           </p:cNvPr>
@@ -17473,56 +17415,523 @@
           <a:lstStyle/>
           <a:p>
             <a:r>
-              <a:rPr lang="de-DE" dirty="0"/>
-              <a:t>Loss </a:t>
-            </a:r>
-            <a:r>
-              <a:rPr lang="de-DE" dirty="0" err="1"/>
-              <a:t>Functions</a:t>
-            </a:r>
-            <a:r>
-              <a:rPr lang="de-DE" dirty="0"/>
-              <a:t> and </a:t>
-            </a:r>
-            <a:r>
-              <a:rPr lang="de-DE" dirty="0" err="1"/>
-              <a:t>Optimization</a:t>
-            </a:r>
-            <a:endParaRPr lang="de-DE" dirty="0"/>
-          </a:p>
-        </p:txBody>
-      </p:sp>
-      <p:sp>
-        <p:nvSpPr>
-          <p:cNvPr id="3" name="Inhaltsplatzhalter 2">
-            <a:extLst>
-              <a:ext uri="{FF2B5EF4-FFF2-40B4-BE49-F238E27FC236}">
-                <a16:creationId xmlns:a16="http://schemas.microsoft.com/office/drawing/2014/main" id="{B0FB1DE5-55FB-B039-D4C1-82720EF56059}"/>
-              </a:ext>
-            </a:extLst>
-          </p:cNvPr>
-          <p:cNvSpPr>
-            <a:spLocks noGrp="1"/>
-          </p:cNvSpPr>
-          <p:nvPr>
-            <p:ph idx="1"/>
-          </p:nvPr>
-        </p:nvSpPr>
-        <p:spPr/>
-        <p:txBody>
-          <a:bodyPr/>
-          <a:lstStyle/>
-          <a:p>
-            <a:endParaRPr lang="de-DE"/>
-          </a:p>
-        </p:txBody>
-      </p:sp>
-      <p:sp>
-        <p:nvSpPr>
-          <p:cNvPr id="4" name="Foliennummernplatzhalter 3">
-            <a:extLst>
-              <a:ext uri="{FF2B5EF4-FFF2-40B4-BE49-F238E27FC236}">
-                <a16:creationId xmlns:a16="http://schemas.microsoft.com/office/drawing/2014/main" id="{14EBBF11-72D6-A819-6FEA-934A8EAAAE54}"/>
+              <a:rPr lang="en-DE" dirty="0"/>
+              <a:t>Likelihood</a:t>
+            </a:r>
+          </a:p>
+        </p:txBody>
+      </p:sp>
+      <mc:AlternateContent xmlns:mc="http://schemas.openxmlformats.org/markup-compatibility/2006" xmlns:a14="http://schemas.microsoft.com/office/drawing/2010/main">
+        <mc:Choice Requires="a14">
+          <p:sp>
+            <p:nvSpPr>
+              <p:cNvPr id="3" name="Content Placeholder 2">
+                <a:extLst>
+                  <a:ext uri="{FF2B5EF4-FFF2-40B4-BE49-F238E27FC236}">
+                    <a16:creationId xmlns:a16="http://schemas.microsoft.com/office/drawing/2014/main" id="{341C44CC-E2D9-26AA-724C-69454C0871A5}"/>
+                  </a:ext>
+                </a:extLst>
+              </p:cNvPr>
+              <p:cNvSpPr>
+                <a:spLocks noGrp="1"/>
+              </p:cNvSpPr>
+              <p:nvPr>
+                <p:ph idx="1"/>
+              </p:nvPr>
+            </p:nvSpPr>
+            <p:spPr/>
+            <p:txBody>
+              <a:bodyPr>
+                <a:normAutofit/>
+              </a:bodyPr>
+              <a:lstStyle/>
+              <a:p>
+                <a:pPr marL="0" indent="0">
+                  <a:buNone/>
+                </a:pPr>
+                <a:r>
+                  <a:rPr lang="en-GB" sz="2600" dirty="0"/>
+                  <a:t>special objective function: likelihood function </a:t>
+                </a:r>
+                <a14:m>
+                  <m:oMath xmlns:m="http://schemas.openxmlformats.org/officeDocument/2006/math">
+                    <m:r>
+                      <a:rPr lang="en-GB" sz="2600" i="1" smtClean="0">
+                        <a:latin typeface="Cambria Math" panose="02040503050406030204" pitchFamily="18" charset="0"/>
+                        <a:ea typeface="Cambria Math" panose="02040503050406030204" pitchFamily="18" charset="0"/>
+                      </a:rPr>
+                      <m:t>ℒ</m:t>
+                    </m:r>
+                  </m:oMath>
+                </a14:m>
+                <a:endParaRPr lang="en-GB" sz="2600" dirty="0"/>
+              </a:p>
+              <a:p>
+                <a:r>
+                  <a:rPr lang="en-GB" sz="2600" dirty="0"/>
+                  <a:t>value of predicted probability density function (model) at observed target</a:t>
+                </a:r>
+              </a:p>
+              <a:p>
+                <a:r>
+                  <a:rPr lang="en-GB" sz="2600" dirty="0"/>
+                  <a:t>as function of model parameters </a:t>
+                </a:r>
+                <a14:m>
+                  <m:oMath xmlns:m="http://schemas.openxmlformats.org/officeDocument/2006/math">
+                    <m:acc>
+                      <m:accPr>
+                        <m:chr m:val="̂"/>
+                        <m:ctrlPr>
+                          <a:rPr lang="en-GB" sz="2600" b="1" i="1" smtClean="0">
+                            <a:latin typeface="Cambria Math" panose="02040503050406030204" pitchFamily="18" charset="0"/>
+                            <a:ea typeface="Cambria Math" panose="02040503050406030204" pitchFamily="18" charset="0"/>
+                          </a:rPr>
+                        </m:ctrlPr>
+                      </m:accPr>
+                      <m:e>
+                        <m:r>
+                          <a:rPr lang="en-GB" sz="2600" b="1" i="1">
+                            <a:latin typeface="Cambria Math" panose="02040503050406030204" pitchFamily="18" charset="0"/>
+                            <a:ea typeface="Cambria Math" panose="02040503050406030204" pitchFamily="18" charset="0"/>
+                          </a:rPr>
+                          <m:t>𝜽</m:t>
+                        </m:r>
+                      </m:e>
+                    </m:acc>
+                  </m:oMath>
+                </a14:m>
+                <a:endParaRPr lang="en-GB" sz="2600" dirty="0"/>
+              </a:p>
+              <a:p>
+                <a:pPr marL="0" indent="0">
+                  <a:buNone/>
+                </a:pPr>
+                <a:endParaRPr lang="en-US" sz="2600" i="1" dirty="0">
+                  <a:latin typeface="Cambria Math" panose="02040503050406030204" pitchFamily="18" charset="0"/>
+                </a:endParaRPr>
+              </a:p>
+              <a:p>
+                <a:pPr marL="0" indent="0">
+                  <a:buNone/>
+                </a:pPr>
+                <a14:m>
+                  <m:oMathPara xmlns:m="http://schemas.openxmlformats.org/officeDocument/2006/math">
+                    <m:oMathParaPr>
+                      <m:jc m:val="left"/>
+                    </m:oMathParaPr>
+                    <m:oMath xmlns:m="http://schemas.openxmlformats.org/officeDocument/2006/math">
+                      <m:r>
+                        <a:rPr lang="en-GB" sz="2600" i="1">
+                          <a:latin typeface="Cambria Math" panose="02040503050406030204" pitchFamily="18" charset="0"/>
+                          <a:ea typeface="Cambria Math" panose="02040503050406030204" pitchFamily="18" charset="0"/>
+                        </a:rPr>
+                        <m:t>ℒ</m:t>
+                      </m:r>
+                      <m:d>
+                        <m:dPr>
+                          <m:ctrlPr>
+                            <a:rPr lang="en-GB" sz="2600" i="1">
+                              <a:latin typeface="Cambria Math" panose="02040503050406030204" pitchFamily="18" charset="0"/>
+                              <a:ea typeface="Cambria Math" panose="02040503050406030204" pitchFamily="18" charset="0"/>
+                            </a:rPr>
+                          </m:ctrlPr>
+                        </m:dPr>
+                        <m:e>
+                          <m:acc>
+                            <m:accPr>
+                              <m:chr m:val="̂"/>
+                              <m:ctrlPr>
+                                <a:rPr lang="en-GB" sz="2600" i="1" smtClean="0">
+                                  <a:latin typeface="Cambria Math" panose="02040503050406030204" pitchFamily="18" charset="0"/>
+                                  <a:ea typeface="Cambria Math" panose="02040503050406030204" pitchFamily="18" charset="0"/>
+                                </a:rPr>
+                              </m:ctrlPr>
+                            </m:accPr>
+                            <m:e>
+                              <m:r>
+                                <a:rPr lang="en-GB" sz="2600" b="1" i="1">
+                                  <a:latin typeface="Cambria Math" panose="02040503050406030204" pitchFamily="18" charset="0"/>
+                                  <a:ea typeface="Cambria Math" panose="02040503050406030204" pitchFamily="18" charset="0"/>
+                                </a:rPr>
+                                <m:t>𝜽</m:t>
+                              </m:r>
+                            </m:e>
+                          </m:acc>
+                          <m:r>
+                            <a:rPr lang="en-US" sz="2600" i="1">
+                              <a:latin typeface="Cambria Math" panose="02040503050406030204" pitchFamily="18" charset="0"/>
+                              <a:ea typeface="Cambria Math" panose="02040503050406030204" pitchFamily="18" charset="0"/>
+                            </a:rPr>
+                            <m:t>;</m:t>
+                          </m:r>
+                          <m:r>
+                            <a:rPr lang="en-US" sz="2600" b="1" i="1">
+                              <a:latin typeface="Cambria Math" panose="02040503050406030204" pitchFamily="18" charset="0"/>
+                              <a:ea typeface="Cambria Math" panose="02040503050406030204" pitchFamily="18" charset="0"/>
+                            </a:rPr>
+                            <m:t>𝒚</m:t>
+                          </m:r>
+                          <m:r>
+                            <a:rPr lang="en-US" sz="2600" i="1">
+                              <a:latin typeface="Cambria Math" panose="02040503050406030204" pitchFamily="18" charset="0"/>
+                              <a:ea typeface="Cambria Math" panose="02040503050406030204" pitchFamily="18" charset="0"/>
+                            </a:rPr>
+                            <m:t>|</m:t>
+                          </m:r>
+                          <m:r>
+                            <a:rPr lang="en-US" sz="2600" b="1" i="1">
+                              <a:latin typeface="Cambria Math" panose="02040503050406030204" pitchFamily="18" charset="0"/>
+                              <a:ea typeface="Cambria Math" panose="02040503050406030204" pitchFamily="18" charset="0"/>
+                            </a:rPr>
+                            <m:t>𝒙</m:t>
+                          </m:r>
+                        </m:e>
+                      </m:d>
+                      <m:r>
+                        <a:rPr lang="en-US" sz="2600" b="0" i="1" smtClean="0">
+                          <a:latin typeface="Cambria Math" panose="02040503050406030204" pitchFamily="18" charset="0"/>
+                          <a:ea typeface="Cambria Math" panose="02040503050406030204" pitchFamily="18" charset="0"/>
+                        </a:rPr>
+                        <m:t>=</m:t>
+                      </m:r>
+                      <m:r>
+                        <a:rPr lang="en-US" sz="2600" b="0" i="1" smtClean="0">
+                          <a:latin typeface="Cambria Math" panose="02040503050406030204" pitchFamily="18" charset="0"/>
+                        </a:rPr>
+                        <m:t>𝑝</m:t>
+                      </m:r>
+                      <m:d>
+                        <m:dPr>
+                          <m:ctrlPr>
+                            <a:rPr lang="en-US" sz="2600" i="1">
+                              <a:latin typeface="Cambria Math" panose="02040503050406030204" pitchFamily="18" charset="0"/>
+                            </a:rPr>
+                          </m:ctrlPr>
+                        </m:dPr>
+                        <m:e>
+                          <m:r>
+                            <a:rPr lang="en-US" sz="2600" b="1" i="1" smtClean="0">
+                              <a:latin typeface="Cambria Math" panose="02040503050406030204" pitchFamily="18" charset="0"/>
+                            </a:rPr>
+                            <m:t>𝒚</m:t>
+                          </m:r>
+                          <m:r>
+                            <a:rPr lang="en-US" sz="2600" i="1">
+                              <a:latin typeface="Cambria Math" panose="02040503050406030204" pitchFamily="18" charset="0"/>
+                            </a:rPr>
+                            <m:t>|</m:t>
+                          </m:r>
+                          <m:r>
+                            <a:rPr lang="en-US" sz="2600" b="1" i="1" smtClean="0">
+                              <a:latin typeface="Cambria Math" panose="02040503050406030204" pitchFamily="18" charset="0"/>
+                            </a:rPr>
+                            <m:t>𝒙</m:t>
+                          </m:r>
+                          <m:r>
+                            <a:rPr lang="en-US" sz="2600" b="0" i="1" smtClean="0">
+                              <a:latin typeface="Cambria Math" panose="02040503050406030204" pitchFamily="18" charset="0"/>
+                            </a:rPr>
+                            <m:t>;</m:t>
+                          </m:r>
+                          <m:acc>
+                            <m:accPr>
+                              <m:chr m:val="̂"/>
+                              <m:ctrlPr>
+                                <a:rPr lang="en-US" sz="2600" b="1" i="1" smtClean="0">
+                                  <a:latin typeface="Cambria Math" panose="02040503050406030204" pitchFamily="18" charset="0"/>
+                                  <a:ea typeface="Cambria Math" panose="02040503050406030204" pitchFamily="18" charset="0"/>
+                                </a:rPr>
+                              </m:ctrlPr>
+                            </m:accPr>
+                            <m:e>
+                              <m:r>
+                                <a:rPr lang="en-GB" sz="2600" b="1" i="1">
+                                  <a:latin typeface="Cambria Math" panose="02040503050406030204" pitchFamily="18" charset="0"/>
+                                  <a:ea typeface="Cambria Math" panose="02040503050406030204" pitchFamily="18" charset="0"/>
+                                </a:rPr>
+                                <m:t>𝜽</m:t>
+                              </m:r>
+                            </m:e>
+                          </m:acc>
+                        </m:e>
+                      </m:d>
+                    </m:oMath>
+                  </m:oMathPara>
+                </a14:m>
+                <a:endParaRPr lang="en-GB" sz="2600" dirty="0"/>
+              </a:p>
+              <a:p>
+                <a:pPr marL="0" indent="0">
+                  <a:buNone/>
+                </a:pPr>
+                <a:endParaRPr lang="en-GB" sz="2600" dirty="0"/>
+              </a:p>
+              <a:p>
+                <a:pPr marL="0" indent="0">
+                  <a:buNone/>
+                </a:pPr>
+                <a:r>
+                  <a:rPr lang="en-GB" sz="2600" dirty="0"/>
+                  <a:t>a little bit confusing:</a:t>
+                </a:r>
+                <a:endParaRPr lang="en-US" sz="2600" i="1" dirty="0">
+                  <a:latin typeface="Cambria Math" panose="02040503050406030204" pitchFamily="18" charset="0"/>
+                </a:endParaRPr>
+              </a:p>
+              <a:p>
+                <a:pPr marL="0" indent="0">
+                  <a:buNone/>
+                </a:pPr>
+                <a14:m>
+                  <m:oMath xmlns:m="http://schemas.openxmlformats.org/officeDocument/2006/math">
+                    <m:r>
+                      <a:rPr lang="en-US" sz="2600" b="0" i="1" smtClean="0">
+                        <a:latin typeface="Cambria Math" panose="02040503050406030204" pitchFamily="18" charset="0"/>
+                      </a:rPr>
+                      <m:t>𝑝</m:t>
+                    </m:r>
+                    <m:d>
+                      <m:dPr>
+                        <m:ctrlPr>
+                          <a:rPr lang="en-US" sz="2600" i="1">
+                            <a:latin typeface="Cambria Math" panose="02040503050406030204" pitchFamily="18" charset="0"/>
+                          </a:rPr>
+                        </m:ctrlPr>
+                      </m:dPr>
+                      <m:e>
+                        <m:r>
+                          <a:rPr lang="en-US" sz="2600" i="1">
+                            <a:latin typeface="Cambria Math" panose="02040503050406030204" pitchFamily="18" charset="0"/>
+                          </a:rPr>
+                          <m:t>𝑦</m:t>
+                        </m:r>
+                        <m:r>
+                          <a:rPr lang="en-US" sz="2600" i="1">
+                            <a:latin typeface="Cambria Math" panose="02040503050406030204" pitchFamily="18" charset="0"/>
+                          </a:rPr>
+                          <m:t>|</m:t>
+                        </m:r>
+                        <m:r>
+                          <a:rPr lang="en-US" sz="2600" b="1" i="1">
+                            <a:latin typeface="Cambria Math" panose="02040503050406030204" pitchFamily="18" charset="0"/>
+                          </a:rPr>
+                          <m:t>𝒙</m:t>
+                        </m:r>
+                        <m:r>
+                          <a:rPr lang="en-US" sz="2600" b="0" i="1">
+                            <a:latin typeface="Cambria Math" panose="02040503050406030204" pitchFamily="18" charset="0"/>
+                          </a:rPr>
+                          <m:t>;</m:t>
+                        </m:r>
+                        <m:acc>
+                          <m:accPr>
+                            <m:chr m:val="̂"/>
+                            <m:ctrlPr>
+                              <a:rPr lang="en-US" sz="2600" b="1" i="1" smtClean="0">
+                                <a:latin typeface="Cambria Math" panose="02040503050406030204" pitchFamily="18" charset="0"/>
+                                <a:ea typeface="Cambria Math" panose="02040503050406030204" pitchFamily="18" charset="0"/>
+                              </a:rPr>
+                            </m:ctrlPr>
+                          </m:accPr>
+                          <m:e>
+                            <m:r>
+                              <a:rPr lang="en-GB" sz="2600" b="1" i="1">
+                                <a:latin typeface="Cambria Math" panose="02040503050406030204" pitchFamily="18" charset="0"/>
+                                <a:ea typeface="Cambria Math" panose="02040503050406030204" pitchFamily="18" charset="0"/>
+                              </a:rPr>
+                              <m:t>𝜽</m:t>
+                            </m:r>
+                          </m:e>
+                        </m:acc>
+                      </m:e>
+                    </m:d>
+                  </m:oMath>
+                </a14:m>
+                <a:r>
+                  <a:rPr lang="en-GB" sz="2600" dirty="0"/>
+                  <a:t> is conditional density function if function of data with </a:t>
+                </a:r>
+                <a14:m>
+                  <m:oMath xmlns:m="http://schemas.openxmlformats.org/officeDocument/2006/math">
+                    <m:acc>
+                      <m:accPr>
+                        <m:chr m:val="̂"/>
+                        <m:ctrlPr>
+                          <a:rPr lang="en-GB" sz="2600" b="1" i="1" smtClean="0">
+                            <a:latin typeface="Cambria Math" panose="02040503050406030204" pitchFamily="18" charset="0"/>
+                            <a:ea typeface="Cambria Math" panose="02040503050406030204" pitchFamily="18" charset="0"/>
+                          </a:rPr>
+                        </m:ctrlPr>
+                      </m:accPr>
+                      <m:e>
+                        <m:r>
+                          <a:rPr lang="en-GB" sz="2600" b="1" i="1">
+                            <a:latin typeface="Cambria Math" panose="02040503050406030204" pitchFamily="18" charset="0"/>
+                            <a:ea typeface="Cambria Math" panose="02040503050406030204" pitchFamily="18" charset="0"/>
+                          </a:rPr>
+                          <m:t>𝜽</m:t>
+                        </m:r>
+                      </m:e>
+                    </m:acc>
+                  </m:oMath>
+                </a14:m>
+                <a:r>
+                  <a:rPr lang="en-GB" sz="2600" dirty="0"/>
+                  <a:t> fixed</a:t>
+                </a:r>
+              </a:p>
+              <a:p>
+                <a:pPr marL="0" indent="0">
+                  <a:buNone/>
+                </a:pPr>
+                <a14:m>
+                  <m:oMath xmlns:m="http://schemas.openxmlformats.org/officeDocument/2006/math">
+                    <m:r>
+                      <a:rPr lang="en-US" sz="2600" b="0" i="1" smtClean="0">
+                        <a:latin typeface="Cambria Math" panose="02040503050406030204" pitchFamily="18" charset="0"/>
+                      </a:rPr>
+                      <m:t>𝑝</m:t>
+                    </m:r>
+                    <m:d>
+                      <m:dPr>
+                        <m:ctrlPr>
+                          <a:rPr lang="en-US" sz="2600" i="1">
+                            <a:latin typeface="Cambria Math" panose="02040503050406030204" pitchFamily="18" charset="0"/>
+                          </a:rPr>
+                        </m:ctrlPr>
+                      </m:dPr>
+                      <m:e>
+                        <m:r>
+                          <a:rPr lang="en-US" sz="2600" i="1">
+                            <a:latin typeface="Cambria Math" panose="02040503050406030204" pitchFamily="18" charset="0"/>
+                          </a:rPr>
+                          <m:t>𝑦</m:t>
+                        </m:r>
+                        <m:r>
+                          <a:rPr lang="en-US" sz="2600" i="1">
+                            <a:latin typeface="Cambria Math" panose="02040503050406030204" pitchFamily="18" charset="0"/>
+                          </a:rPr>
+                          <m:t>|</m:t>
+                        </m:r>
+                        <m:r>
+                          <a:rPr lang="en-US" sz="2600" b="1" i="1">
+                            <a:latin typeface="Cambria Math" panose="02040503050406030204" pitchFamily="18" charset="0"/>
+                          </a:rPr>
+                          <m:t>𝒙</m:t>
+                        </m:r>
+                        <m:r>
+                          <a:rPr lang="en-US" sz="2600" b="0" i="1">
+                            <a:latin typeface="Cambria Math" panose="02040503050406030204" pitchFamily="18" charset="0"/>
+                          </a:rPr>
+                          <m:t>;</m:t>
+                        </m:r>
+                        <m:acc>
+                          <m:accPr>
+                            <m:chr m:val="̂"/>
+                            <m:ctrlPr>
+                              <a:rPr lang="en-US" sz="2600" b="1" i="1" smtClean="0">
+                                <a:latin typeface="Cambria Math" panose="02040503050406030204" pitchFamily="18" charset="0"/>
+                                <a:ea typeface="Cambria Math" panose="02040503050406030204" pitchFamily="18" charset="0"/>
+                              </a:rPr>
+                            </m:ctrlPr>
+                          </m:accPr>
+                          <m:e>
+                            <m:r>
+                              <a:rPr lang="en-GB" sz="2600" b="1" i="1">
+                                <a:latin typeface="Cambria Math" panose="02040503050406030204" pitchFamily="18" charset="0"/>
+                                <a:ea typeface="Cambria Math" panose="02040503050406030204" pitchFamily="18" charset="0"/>
+                              </a:rPr>
+                              <m:t>𝜽</m:t>
+                            </m:r>
+                          </m:e>
+                        </m:acc>
+                      </m:e>
+                    </m:d>
+                  </m:oMath>
+                </a14:m>
+                <a:r>
+                  <a:rPr lang="en-GB" sz="2600" dirty="0"/>
+                  <a:t> is conditional likelihood function if function of </a:t>
+                </a:r>
+                <a14:m>
+                  <m:oMath xmlns:m="http://schemas.openxmlformats.org/officeDocument/2006/math">
+                    <m:acc>
+                      <m:accPr>
+                        <m:chr m:val="̂"/>
+                        <m:ctrlPr>
+                          <a:rPr lang="en-GB" sz="2600" b="1" i="1" smtClean="0">
+                            <a:latin typeface="Cambria Math" panose="02040503050406030204" pitchFamily="18" charset="0"/>
+                            <a:ea typeface="Cambria Math" panose="02040503050406030204" pitchFamily="18" charset="0"/>
+                          </a:rPr>
+                        </m:ctrlPr>
+                      </m:accPr>
+                      <m:e>
+                        <m:r>
+                          <a:rPr lang="en-GB" sz="2600" b="1" i="1">
+                            <a:latin typeface="Cambria Math" panose="02040503050406030204" pitchFamily="18" charset="0"/>
+                            <a:ea typeface="Cambria Math" panose="02040503050406030204" pitchFamily="18" charset="0"/>
+                          </a:rPr>
+                          <m:t>𝜽</m:t>
+                        </m:r>
+                      </m:e>
+                    </m:acc>
+                  </m:oMath>
+                </a14:m>
+                <a:r>
+                  <a:rPr lang="en-GB" sz="2600" dirty="0"/>
+                  <a:t> with data fixed</a:t>
+                </a:r>
+              </a:p>
+            </p:txBody>
+          </p:sp>
+        </mc:Choice>
+        <mc:Fallback xmlns="">
+          <p:sp>
+            <p:nvSpPr>
+              <p:cNvPr id="3" name="Content Placeholder 2">
+                <a:extLst>
+                  <a:ext uri="{FF2B5EF4-FFF2-40B4-BE49-F238E27FC236}">
+                    <a16:creationId xmlns:a16="http://schemas.microsoft.com/office/drawing/2014/main" id="{341C44CC-E2D9-26AA-724C-69454C0871A5}"/>
+                  </a:ext>
+                </a:extLst>
+              </p:cNvPr>
+              <p:cNvSpPr>
+                <a:spLocks noGrp="1" noRot="1" noChangeAspect="1" noMove="1" noResize="1" noEditPoints="1" noAdjustHandles="1" noChangeArrowheads="1" noChangeShapeType="1" noTextEdit="1"/>
+              </p:cNvSpPr>
+              <p:nvPr>
+                <p:ph idx="1"/>
+              </p:nvPr>
+            </p:nvSpPr>
+            <p:spPr>
+              <a:blipFill>
+                <a:blip r:embed="rId2"/>
+                <a:stretch>
+                  <a:fillRect l="-1043" t="-2101" b="-3221"/>
+                </a:stretch>
+              </a:blipFill>
+            </p:spPr>
+            <p:txBody>
+              <a:bodyPr/>
+              <a:lstStyle/>
+              <a:p>
+                <a:r>
+                  <a:rPr lang="en-GB">
+                    <a:noFill/>
+                  </a:rPr>
+                  <a:t> </a:t>
+                </a:r>
+              </a:p>
+            </p:txBody>
+          </p:sp>
+        </mc:Fallback>
+      </mc:AlternateContent>
+      <p:sp>
+        <p:nvSpPr>
+          <p:cNvPr id="4" name="Slide Number Placeholder 3">
+            <a:extLst>
+              <a:ext uri="{FF2B5EF4-FFF2-40B4-BE49-F238E27FC236}">
+                <a16:creationId xmlns:a16="http://schemas.microsoft.com/office/drawing/2014/main" id="{6CB7468D-B2C2-583F-71EF-170C4D7F2A0F}"/>
               </a:ext>
             </a:extLst>
           </p:cNvPr>
@@ -17538,18 +17947,18 @@
           <a:bodyPr/>
           <a:lstStyle/>
           <a:p>
-            <a:fld id="{3D4C94FE-FF23-4504-88E9-14D481113291}" type="slidenum">
-              <a:rPr lang="en-GB" smtClean="0"/>
+            <a:fld id="{77E1BB0D-8AD4-A14C-8FD5-F1619D1A43A2}" type="slidenum">
+              <a:rPr lang="en-DE" smtClean="0"/>
               <a:t>8</a:t>
             </a:fld>
-            <a:endParaRPr lang="en-GB"/>
+            <a:endParaRPr lang="en-DE"/>
           </a:p>
         </p:txBody>
       </p:sp>
     </p:spTree>
     <p:extLst>
       <p:ext uri="{BB962C8B-B14F-4D97-AF65-F5344CB8AC3E}">
-        <p14:creationId xmlns:p14="http://schemas.microsoft.com/office/powerpoint/2010/main" val="211540913"/>
+        <p14:creationId xmlns:p14="http://schemas.microsoft.com/office/powerpoint/2010/main" val="3557448707"/>
       </p:ext>
     </p:extLst>
   </p:cSld>
@@ -17578,10 +17987,10 @@
       </p:grpSpPr>
       <p:sp>
         <p:nvSpPr>
-          <p:cNvPr id="2" name="Titel 1">
-            <a:extLst>
-              <a:ext uri="{FF2B5EF4-FFF2-40B4-BE49-F238E27FC236}">
-                <a16:creationId xmlns:a16="http://schemas.microsoft.com/office/drawing/2014/main" id="{854D96D1-0DFD-CDA0-2D1A-1A4269EE635A}"/>
+          <p:cNvPr id="2" name="Title 1">
+            <a:extLst>
+              <a:ext uri="{FF2B5EF4-FFF2-40B4-BE49-F238E27FC236}">
+                <a16:creationId xmlns:a16="http://schemas.microsoft.com/office/drawing/2014/main" id="{51AC8190-0F29-736C-02B0-E67BDDE58686}"/>
               </a:ext>
             </a:extLst>
           </p:cNvPr>
@@ -17598,59 +18007,790 @@
           <a:lstStyle/>
           <a:p>
             <a:r>
-              <a:rPr lang="de-DE" dirty="0"/>
-              <a:t>Maximum </a:t>
-            </a:r>
-            <a:r>
-              <a:rPr lang="de-DE" dirty="0" err="1"/>
-              <a:t>Likelihood</a:t>
-            </a:r>
-            <a:r>
-              <a:rPr lang="de-DE" dirty="0"/>
-              <a:t> </a:t>
-            </a:r>
-            <a:r>
-              <a:rPr lang="de-DE" dirty="0" err="1"/>
-              <a:t>Estimation</a:t>
-            </a:r>
-            <a:r>
-              <a:rPr lang="de-DE" dirty="0"/>
-              <a:t> (MLE)</a:t>
-            </a:r>
-          </a:p>
-        </p:txBody>
-      </p:sp>
-      <p:sp>
-        <p:nvSpPr>
-          <p:cNvPr id="3" name="Inhaltsplatzhalter 2">
-            <a:extLst>
-              <a:ext uri="{FF2B5EF4-FFF2-40B4-BE49-F238E27FC236}">
-                <a16:creationId xmlns:a16="http://schemas.microsoft.com/office/drawing/2014/main" id="{1F956010-9C28-F9EE-4A46-5F8A3B30F4AC}"/>
-              </a:ext>
-            </a:extLst>
-          </p:cNvPr>
-          <p:cNvSpPr>
-            <a:spLocks noGrp="1"/>
-          </p:cNvSpPr>
-          <p:nvPr>
-            <p:ph idx="1"/>
-          </p:nvPr>
-        </p:nvSpPr>
-        <p:spPr/>
-        <p:txBody>
-          <a:bodyPr/>
-          <a:lstStyle/>
-          <a:p>
-            <a:endParaRPr lang="de-DE"/>
-          </a:p>
-        </p:txBody>
-      </p:sp>
-      <p:sp>
-        <p:nvSpPr>
-          <p:cNvPr id="4" name="Foliennummernplatzhalter 3">
-            <a:extLst>
-              <a:ext uri="{FF2B5EF4-FFF2-40B4-BE49-F238E27FC236}">
-                <a16:creationId xmlns:a16="http://schemas.microsoft.com/office/drawing/2014/main" id="{B07E4D77-FE8D-127B-EEEF-939F25A12A35}"/>
+              <a:rPr lang="en-DE" dirty="0"/>
+              <a:t>Independence Assumption</a:t>
+            </a:r>
+          </a:p>
+        </p:txBody>
+      </p:sp>
+      <mc:AlternateContent xmlns:mc="http://schemas.openxmlformats.org/markup-compatibility/2006" xmlns:a14="http://schemas.microsoft.com/office/drawing/2010/main">
+        <mc:Choice Requires="a14">
+          <p:sp>
+            <p:nvSpPr>
+              <p:cNvPr id="3" name="Content Placeholder 2">
+                <a:extLst>
+                  <a:ext uri="{FF2B5EF4-FFF2-40B4-BE49-F238E27FC236}">
+                    <a16:creationId xmlns:a16="http://schemas.microsoft.com/office/drawing/2014/main" id="{A2FDDA55-280D-23EA-F172-A72AACD4FB80}"/>
+                  </a:ext>
+                </a:extLst>
+              </p:cNvPr>
+              <p:cNvSpPr>
+                <a:spLocks noGrp="1"/>
+              </p:cNvSpPr>
+              <p:nvPr>
+                <p:ph idx="1"/>
+              </p:nvPr>
+            </p:nvSpPr>
+            <p:spPr/>
+            <p:txBody>
+              <a:bodyPr>
+                <a:noAutofit/>
+              </a:bodyPr>
+              <a:lstStyle/>
+              <a:p>
+                <a:pPr marL="0" indent="0">
+                  <a:buNone/>
+                </a:pPr>
+                <a:r>
+                  <a:rPr lang="en-GB" sz="2200" dirty="0">
+                    <a:sym typeface="Wingdings" pitchFamily="2" charset="2"/>
+                  </a:rPr>
+                  <a:t>c</a:t>
+                </a:r>
+                <a:r>
+                  <a:rPr lang="en-DE" sz="2200" dirty="0">
+                    <a:sym typeface="Wingdings" pitchFamily="2" charset="2"/>
+                  </a:rPr>
+                  <a:t>onsider training data set (of size </a:t>
+                </a:r>
+                <a14:m>
+                  <m:oMath xmlns:m="http://schemas.openxmlformats.org/officeDocument/2006/math">
+                    <m:r>
+                      <a:rPr lang="en-US" sz="2200" b="0" i="1" smtClean="0">
+                        <a:latin typeface="Cambria Math" panose="02040503050406030204" pitchFamily="18" charset="0"/>
+                        <a:sym typeface="Wingdings" pitchFamily="2" charset="2"/>
+                      </a:rPr>
+                      <m:t>𝑛</m:t>
+                    </m:r>
+                  </m:oMath>
+                </a14:m>
+                <a:r>
+                  <a:rPr lang="en-DE" sz="2200" dirty="0">
+                    <a:sym typeface="Wingdings" pitchFamily="2" charset="2"/>
+                  </a:rPr>
+                  <a:t>) as one sample from unknown joint probability distribution of </a:t>
+                </a:r>
+                <a14:m>
+                  <m:oMath xmlns:m="http://schemas.openxmlformats.org/officeDocument/2006/math">
+                    <m:r>
+                      <a:rPr lang="en-US" sz="2200" i="1">
+                        <a:latin typeface="Cambria Math" panose="02040503050406030204" pitchFamily="18" charset="0"/>
+                        <a:sym typeface="Wingdings" pitchFamily="2" charset="2"/>
+                      </a:rPr>
+                      <m:t>𝑛</m:t>
+                    </m:r>
+                    <m:r>
+                      <a:rPr lang="en-US" sz="2200" i="1">
+                        <a:latin typeface="Cambria Math" panose="02040503050406030204" pitchFamily="18" charset="0"/>
+                        <a:sym typeface="Wingdings" pitchFamily="2" charset="2"/>
+                      </a:rPr>
+                      <m:t> </m:t>
+                    </m:r>
+                  </m:oMath>
+                </a14:m>
+                <a:r>
+                  <a:rPr lang="en-DE" sz="2200" dirty="0">
+                    <a:sym typeface="Wingdings" pitchFamily="2" charset="2"/>
+                  </a:rPr>
+                  <a:t>independent </a:t>
+                </a:r>
+                <a:r>
+                  <a:rPr lang="en-DE" sz="2200" dirty="0"/>
+                  <a:t>(i.i.d.) </a:t>
+                </a:r>
+                <a:r>
+                  <a:rPr lang="en-DE" sz="2200" dirty="0">
+                    <a:sym typeface="Wingdings" pitchFamily="2" charset="2"/>
+                  </a:rPr>
+                  <a:t>sets of random variables </a:t>
+                </a:r>
+                <a14:m>
+                  <m:oMath xmlns:m="http://schemas.openxmlformats.org/officeDocument/2006/math">
+                    <m:d>
+                      <m:dPr>
+                        <m:ctrlPr>
+                          <a:rPr lang="en-DE" sz="2200" i="1">
+                            <a:latin typeface="Cambria Math" panose="02040503050406030204" pitchFamily="18" charset="0"/>
+                            <a:sym typeface="Wingdings" pitchFamily="2" charset="2"/>
+                          </a:rPr>
+                        </m:ctrlPr>
+                      </m:dPr>
+                      <m:e>
+                        <m:sSub>
+                          <m:sSubPr>
+                            <m:ctrlPr>
+                              <a:rPr lang="en-DE" sz="2200" i="1">
+                                <a:latin typeface="Cambria Math" panose="02040503050406030204" pitchFamily="18" charset="0"/>
+                                <a:sym typeface="Wingdings" pitchFamily="2" charset="2"/>
+                              </a:rPr>
+                            </m:ctrlPr>
+                          </m:sSubPr>
+                          <m:e>
+                            <m:r>
+                              <a:rPr lang="en-US" sz="2200" i="1">
+                                <a:latin typeface="Cambria Math" panose="02040503050406030204" pitchFamily="18" charset="0"/>
+                                <a:sym typeface="Wingdings" pitchFamily="2" charset="2"/>
+                              </a:rPr>
+                              <m:t>𝑌</m:t>
+                            </m:r>
+                          </m:e>
+                          <m:sub>
+                            <m:r>
+                              <a:rPr lang="en-US" sz="2200" i="1">
+                                <a:latin typeface="Cambria Math" panose="02040503050406030204" pitchFamily="18" charset="0"/>
+                                <a:sym typeface="Wingdings" pitchFamily="2" charset="2"/>
+                              </a:rPr>
+                              <m:t>1</m:t>
+                            </m:r>
+                          </m:sub>
+                        </m:sSub>
+                        <m:r>
+                          <a:rPr lang="en-US" sz="2200" i="1">
+                            <a:latin typeface="Cambria Math" panose="02040503050406030204" pitchFamily="18" charset="0"/>
+                            <a:sym typeface="Wingdings" pitchFamily="2" charset="2"/>
+                          </a:rPr>
+                          <m:t>,</m:t>
+                        </m:r>
+                        <m:sSub>
+                          <m:sSubPr>
+                            <m:ctrlPr>
+                              <a:rPr lang="en-US" sz="2200" i="1">
+                                <a:latin typeface="Cambria Math" panose="02040503050406030204" pitchFamily="18" charset="0"/>
+                                <a:sym typeface="Wingdings" pitchFamily="2" charset="2"/>
+                              </a:rPr>
+                            </m:ctrlPr>
+                          </m:sSubPr>
+                          <m:e>
+                            <m:r>
+                              <a:rPr lang="en-US" sz="2200" b="1" i="1">
+                                <a:latin typeface="Cambria Math" panose="02040503050406030204" pitchFamily="18" charset="0"/>
+                                <a:sym typeface="Wingdings" pitchFamily="2" charset="2"/>
+                              </a:rPr>
+                              <m:t>𝑿</m:t>
+                            </m:r>
+                          </m:e>
+                          <m:sub>
+                            <m:r>
+                              <a:rPr lang="en-US" sz="2200" i="1">
+                                <a:latin typeface="Cambria Math" panose="02040503050406030204" pitchFamily="18" charset="0"/>
+                                <a:sym typeface="Wingdings" pitchFamily="2" charset="2"/>
+                              </a:rPr>
+                              <m:t>1</m:t>
+                            </m:r>
+                          </m:sub>
+                        </m:sSub>
+                      </m:e>
+                    </m:d>
+                    <m:r>
+                      <a:rPr lang="en-US" sz="2200" i="1">
+                        <a:latin typeface="Cambria Math" panose="02040503050406030204" pitchFamily="18" charset="0"/>
+                        <a:sym typeface="Wingdings" pitchFamily="2" charset="2"/>
+                      </a:rPr>
+                      <m:t>,</m:t>
+                    </m:r>
+                    <m:d>
+                      <m:dPr>
+                        <m:ctrlPr>
+                          <a:rPr lang="en-DE" sz="2200" i="1">
+                            <a:latin typeface="Cambria Math" panose="02040503050406030204" pitchFamily="18" charset="0"/>
+                            <a:sym typeface="Wingdings" pitchFamily="2" charset="2"/>
+                          </a:rPr>
+                        </m:ctrlPr>
+                      </m:dPr>
+                      <m:e>
+                        <m:sSub>
+                          <m:sSubPr>
+                            <m:ctrlPr>
+                              <a:rPr lang="en-DE" sz="2200" i="1">
+                                <a:latin typeface="Cambria Math" panose="02040503050406030204" pitchFamily="18" charset="0"/>
+                                <a:sym typeface="Wingdings" pitchFamily="2" charset="2"/>
+                              </a:rPr>
+                            </m:ctrlPr>
+                          </m:sSubPr>
+                          <m:e>
+                            <m:r>
+                              <a:rPr lang="en-US" sz="2200" i="1">
+                                <a:latin typeface="Cambria Math" panose="02040503050406030204" pitchFamily="18" charset="0"/>
+                                <a:sym typeface="Wingdings" pitchFamily="2" charset="2"/>
+                              </a:rPr>
+                              <m:t>𝑌</m:t>
+                            </m:r>
+                          </m:e>
+                          <m:sub>
+                            <m:r>
+                              <a:rPr lang="en-US" sz="2200" i="1">
+                                <a:latin typeface="Cambria Math" panose="02040503050406030204" pitchFamily="18" charset="0"/>
+                                <a:sym typeface="Wingdings" pitchFamily="2" charset="2"/>
+                              </a:rPr>
+                              <m:t>2</m:t>
+                            </m:r>
+                          </m:sub>
+                        </m:sSub>
+                        <m:r>
+                          <a:rPr lang="en-US" sz="2200" i="1">
+                            <a:latin typeface="Cambria Math" panose="02040503050406030204" pitchFamily="18" charset="0"/>
+                            <a:sym typeface="Wingdings" pitchFamily="2" charset="2"/>
+                          </a:rPr>
+                          <m:t>,</m:t>
+                        </m:r>
+                        <m:sSub>
+                          <m:sSubPr>
+                            <m:ctrlPr>
+                              <a:rPr lang="en-US" sz="2200" i="1">
+                                <a:latin typeface="Cambria Math" panose="02040503050406030204" pitchFamily="18" charset="0"/>
+                                <a:sym typeface="Wingdings" pitchFamily="2" charset="2"/>
+                              </a:rPr>
+                            </m:ctrlPr>
+                          </m:sSubPr>
+                          <m:e>
+                            <m:r>
+                              <a:rPr lang="en-US" sz="2200" b="1" i="1">
+                                <a:latin typeface="Cambria Math" panose="02040503050406030204" pitchFamily="18" charset="0"/>
+                                <a:sym typeface="Wingdings" pitchFamily="2" charset="2"/>
+                              </a:rPr>
+                              <m:t>𝑿</m:t>
+                            </m:r>
+                          </m:e>
+                          <m:sub>
+                            <m:r>
+                              <a:rPr lang="en-US" sz="2200" i="1">
+                                <a:latin typeface="Cambria Math" panose="02040503050406030204" pitchFamily="18" charset="0"/>
+                                <a:sym typeface="Wingdings" pitchFamily="2" charset="2"/>
+                              </a:rPr>
+                              <m:t>2</m:t>
+                            </m:r>
+                          </m:sub>
+                        </m:sSub>
+                      </m:e>
+                    </m:d>
+                    <m:r>
+                      <a:rPr lang="en-US" sz="2200" i="1">
+                        <a:latin typeface="Cambria Math" panose="02040503050406030204" pitchFamily="18" charset="0"/>
+                        <a:sym typeface="Wingdings" pitchFamily="2" charset="2"/>
+                      </a:rPr>
+                      <m:t>,…, </m:t>
+                    </m:r>
+                    <m:d>
+                      <m:dPr>
+                        <m:ctrlPr>
+                          <a:rPr lang="en-DE" sz="2200" i="1">
+                            <a:latin typeface="Cambria Math" panose="02040503050406030204" pitchFamily="18" charset="0"/>
+                            <a:sym typeface="Wingdings" pitchFamily="2" charset="2"/>
+                          </a:rPr>
+                        </m:ctrlPr>
+                      </m:dPr>
+                      <m:e>
+                        <m:sSub>
+                          <m:sSubPr>
+                            <m:ctrlPr>
+                              <a:rPr lang="en-DE" sz="2200" i="1">
+                                <a:latin typeface="Cambria Math" panose="02040503050406030204" pitchFamily="18" charset="0"/>
+                                <a:sym typeface="Wingdings" pitchFamily="2" charset="2"/>
+                              </a:rPr>
+                            </m:ctrlPr>
+                          </m:sSubPr>
+                          <m:e>
+                            <m:r>
+                              <a:rPr lang="en-US" sz="2200" i="1">
+                                <a:latin typeface="Cambria Math" panose="02040503050406030204" pitchFamily="18" charset="0"/>
+                                <a:sym typeface="Wingdings" pitchFamily="2" charset="2"/>
+                              </a:rPr>
+                              <m:t>𝑌</m:t>
+                            </m:r>
+                          </m:e>
+                          <m:sub>
+                            <m:r>
+                              <a:rPr lang="en-US" sz="2200" i="1">
+                                <a:latin typeface="Cambria Math" panose="02040503050406030204" pitchFamily="18" charset="0"/>
+                                <a:sym typeface="Wingdings" pitchFamily="2" charset="2"/>
+                              </a:rPr>
+                              <m:t>𝑛</m:t>
+                            </m:r>
+                          </m:sub>
+                        </m:sSub>
+                        <m:r>
+                          <a:rPr lang="en-US" sz="2200" i="1">
+                            <a:latin typeface="Cambria Math" panose="02040503050406030204" pitchFamily="18" charset="0"/>
+                            <a:sym typeface="Wingdings" pitchFamily="2" charset="2"/>
+                          </a:rPr>
+                          <m:t>,</m:t>
+                        </m:r>
+                        <m:sSub>
+                          <m:sSubPr>
+                            <m:ctrlPr>
+                              <a:rPr lang="en-US" sz="2200" i="1">
+                                <a:latin typeface="Cambria Math" panose="02040503050406030204" pitchFamily="18" charset="0"/>
+                                <a:sym typeface="Wingdings" pitchFamily="2" charset="2"/>
+                              </a:rPr>
+                            </m:ctrlPr>
+                          </m:sSubPr>
+                          <m:e>
+                            <m:r>
+                              <a:rPr lang="en-US" sz="2200" b="1" i="1">
+                                <a:latin typeface="Cambria Math" panose="02040503050406030204" pitchFamily="18" charset="0"/>
+                                <a:sym typeface="Wingdings" pitchFamily="2" charset="2"/>
+                              </a:rPr>
+                              <m:t>𝑿</m:t>
+                            </m:r>
+                          </m:e>
+                          <m:sub>
+                            <m:r>
+                              <a:rPr lang="en-US" sz="2200" i="1">
+                                <a:latin typeface="Cambria Math" panose="02040503050406030204" pitchFamily="18" charset="0"/>
+                                <a:sym typeface="Wingdings" pitchFamily="2" charset="2"/>
+                              </a:rPr>
+                              <m:t>𝑛</m:t>
+                            </m:r>
+                          </m:sub>
+                        </m:sSub>
+                      </m:e>
+                    </m:d>
+                  </m:oMath>
+                </a14:m>
+                <a:endParaRPr lang="en-DE" sz="2200" dirty="0">
+                  <a:sym typeface="Wingdings" pitchFamily="2" charset="2"/>
+                </a:endParaRPr>
+              </a:p>
+              <a:p>
+                <a:pPr marL="0" indent="0">
+                  <a:buNone/>
+                </a:pPr>
+                <a:r>
+                  <a:rPr lang="en-DE" sz="2200" dirty="0">
+                    <a:sym typeface="Wingdings" pitchFamily="2" charset="2"/>
+                  </a:rPr>
+                  <a:t>(same thing as random sampling </a:t>
+                </a:r>
+                <a14:m>
+                  <m:oMath xmlns:m="http://schemas.openxmlformats.org/officeDocument/2006/math">
+                    <m:r>
+                      <a:rPr lang="en-US" sz="2200" i="1">
+                        <a:latin typeface="Cambria Math" panose="02040503050406030204" pitchFamily="18" charset="0"/>
+                        <a:sym typeface="Wingdings" pitchFamily="2" charset="2"/>
+                      </a:rPr>
+                      <m:t>𝑛</m:t>
+                    </m:r>
+                  </m:oMath>
+                </a14:m>
+                <a:r>
+                  <a:rPr lang="en-DE" sz="2200" dirty="0">
+                    <a:sym typeface="Wingdings" pitchFamily="2" charset="2"/>
+                  </a:rPr>
+                  <a:t> times from </a:t>
+                </a:r>
+                <a14:m>
+                  <m:oMath xmlns:m="http://schemas.openxmlformats.org/officeDocument/2006/math">
+                    <m:d>
+                      <m:dPr>
+                        <m:ctrlPr>
+                          <a:rPr lang="en-US" sz="2200" b="0" i="1" smtClean="0">
+                            <a:latin typeface="Cambria Math" panose="02040503050406030204" pitchFamily="18" charset="0"/>
+                            <a:sym typeface="Wingdings" pitchFamily="2" charset="2"/>
+                          </a:rPr>
+                        </m:ctrlPr>
+                      </m:dPr>
+                      <m:e>
+                        <m:r>
+                          <a:rPr lang="en-US" sz="2200" b="0" i="1" smtClean="0">
+                            <a:latin typeface="Cambria Math" panose="02040503050406030204" pitchFamily="18" charset="0"/>
+                            <a:sym typeface="Wingdings" pitchFamily="2" charset="2"/>
+                          </a:rPr>
+                          <m:t>𝑌</m:t>
+                        </m:r>
+                        <m:r>
+                          <a:rPr lang="en-US" sz="2200" b="0" i="1" smtClean="0">
+                            <a:latin typeface="Cambria Math" panose="02040503050406030204" pitchFamily="18" charset="0"/>
+                            <a:sym typeface="Wingdings" pitchFamily="2" charset="2"/>
+                          </a:rPr>
+                          <m:t>,</m:t>
+                        </m:r>
+                        <m:r>
+                          <a:rPr lang="en-US" sz="2200" b="1" i="1" smtClean="0">
+                            <a:latin typeface="Cambria Math" panose="02040503050406030204" pitchFamily="18" charset="0"/>
+                            <a:sym typeface="Wingdings" pitchFamily="2" charset="2"/>
+                          </a:rPr>
+                          <m:t>𝑿</m:t>
+                        </m:r>
+                      </m:e>
+                    </m:d>
+                  </m:oMath>
+                </a14:m>
+                <a:r>
+                  <a:rPr lang="en-DE" sz="2200" dirty="0">
+                    <a:sym typeface="Wingdings" pitchFamily="2" charset="2"/>
+                  </a:rPr>
+                  <a:t>)</a:t>
+                </a:r>
+              </a:p>
+              <a:p>
+                <a:pPr marL="0" indent="0">
+                  <a:buNone/>
+                </a:pPr>
+                <a:endParaRPr lang="en-DE" sz="2200" dirty="0">
+                  <a:sym typeface="Wingdings" pitchFamily="2" charset="2"/>
+                </a:endParaRPr>
+              </a:p>
+              <a:p>
+                <a:pPr marL="0" indent="0">
+                  <a:buNone/>
+                </a:pPr>
+                <a:r>
+                  <a:rPr lang="en-DE" sz="2200" dirty="0">
+                    <a:sym typeface="Wingdings" pitchFamily="2" charset="2"/>
+                  </a:rPr>
+                  <a:t> </a:t>
+                </a:r>
+                <a:r>
+                  <a:rPr lang="en-GB" sz="2200" dirty="0">
+                    <a:sym typeface="Wingdings" pitchFamily="2" charset="2"/>
+                  </a:rPr>
+                  <a:t>l</a:t>
+                </a:r>
+                <a:r>
+                  <a:rPr lang="en-DE" sz="2200" dirty="0">
+                    <a:sym typeface="Wingdings" pitchFamily="2" charset="2"/>
+                  </a:rPr>
+                  <a:t>ikelihood as product of univariate probability density functions:</a:t>
+                </a:r>
+              </a:p>
+              <a:p>
+                <a:pPr marL="0" indent="0">
+                  <a:buNone/>
+                </a:pPr>
+                <a:endParaRPr lang="en-DE" sz="2200" dirty="0">
+                  <a:sym typeface="Wingdings" pitchFamily="2" charset="2"/>
+                </a:endParaRPr>
+              </a:p>
+              <a:p>
+                <a:pPr marL="0" indent="0">
+                  <a:buNone/>
+                </a:pPr>
+                <a14:m>
+                  <m:oMathPara xmlns:m="http://schemas.openxmlformats.org/officeDocument/2006/math">
+                    <m:oMathParaPr>
+                      <m:jc m:val="centerGroup"/>
+                    </m:oMathParaPr>
+                    <m:oMath xmlns:m="http://schemas.openxmlformats.org/officeDocument/2006/math">
+                      <m:r>
+                        <a:rPr lang="en-GB" sz="2200" i="1">
+                          <a:latin typeface="Cambria Math" panose="02040503050406030204" pitchFamily="18" charset="0"/>
+                          <a:ea typeface="Cambria Math" panose="02040503050406030204" pitchFamily="18" charset="0"/>
+                        </a:rPr>
+                        <m:t>ℒ</m:t>
+                      </m:r>
+                      <m:d>
+                        <m:dPr>
+                          <m:ctrlPr>
+                            <a:rPr lang="en-GB" sz="2200" i="1">
+                              <a:latin typeface="Cambria Math" panose="02040503050406030204" pitchFamily="18" charset="0"/>
+                              <a:ea typeface="Cambria Math" panose="02040503050406030204" pitchFamily="18" charset="0"/>
+                            </a:rPr>
+                          </m:ctrlPr>
+                        </m:dPr>
+                        <m:e>
+                          <m:acc>
+                            <m:accPr>
+                              <m:chr m:val="̂"/>
+                              <m:ctrlPr>
+                                <a:rPr lang="en-GB" sz="2200" b="1" i="1" smtClean="0">
+                                  <a:latin typeface="Cambria Math" panose="02040503050406030204" pitchFamily="18" charset="0"/>
+                                  <a:ea typeface="Cambria Math" panose="02040503050406030204" pitchFamily="18" charset="0"/>
+                                </a:rPr>
+                              </m:ctrlPr>
+                            </m:accPr>
+                            <m:e>
+                              <m:r>
+                                <a:rPr lang="en-GB" sz="2200" b="1" i="1">
+                                  <a:latin typeface="Cambria Math" panose="02040503050406030204" pitchFamily="18" charset="0"/>
+                                  <a:ea typeface="Cambria Math" panose="02040503050406030204" pitchFamily="18" charset="0"/>
+                                </a:rPr>
+                                <m:t>𝜽</m:t>
+                              </m:r>
+                            </m:e>
+                          </m:acc>
+                          <m:r>
+                            <a:rPr lang="en-US" sz="2200" i="1">
+                              <a:latin typeface="Cambria Math" panose="02040503050406030204" pitchFamily="18" charset="0"/>
+                              <a:ea typeface="Cambria Math" panose="02040503050406030204" pitchFamily="18" charset="0"/>
+                            </a:rPr>
+                            <m:t>;</m:t>
+                          </m:r>
+                          <m:r>
+                            <a:rPr lang="en-US" sz="2200" b="1" i="1">
+                              <a:latin typeface="Cambria Math" panose="02040503050406030204" pitchFamily="18" charset="0"/>
+                              <a:ea typeface="Cambria Math" panose="02040503050406030204" pitchFamily="18" charset="0"/>
+                            </a:rPr>
+                            <m:t>𝒚</m:t>
+                          </m:r>
+                          <m:r>
+                            <a:rPr lang="en-US" sz="2200" i="1">
+                              <a:latin typeface="Cambria Math" panose="02040503050406030204" pitchFamily="18" charset="0"/>
+                              <a:ea typeface="Cambria Math" panose="02040503050406030204" pitchFamily="18" charset="0"/>
+                            </a:rPr>
+                            <m:t>|</m:t>
+                          </m:r>
+                          <m:r>
+                            <a:rPr lang="en-US" sz="2200" b="1" i="1">
+                              <a:latin typeface="Cambria Math" panose="02040503050406030204" pitchFamily="18" charset="0"/>
+                              <a:ea typeface="Cambria Math" panose="02040503050406030204" pitchFamily="18" charset="0"/>
+                            </a:rPr>
+                            <m:t>𝒙</m:t>
+                          </m:r>
+                        </m:e>
+                      </m:d>
+                      <m:r>
+                        <a:rPr lang="en-US" sz="2200" i="1">
+                          <a:latin typeface="Cambria Math" panose="02040503050406030204" pitchFamily="18" charset="0"/>
+                          <a:ea typeface="Cambria Math" panose="02040503050406030204" pitchFamily="18" charset="0"/>
+                        </a:rPr>
+                        <m:t>=</m:t>
+                      </m:r>
+                      <m:nary>
+                        <m:naryPr>
+                          <m:chr m:val="∏"/>
+                          <m:ctrlPr>
+                            <a:rPr lang="en-US" sz="2200" i="1">
+                              <a:latin typeface="Cambria Math" panose="02040503050406030204" pitchFamily="18" charset="0"/>
+                              <a:ea typeface="Cambria Math" panose="02040503050406030204" pitchFamily="18" charset="0"/>
+                            </a:rPr>
+                          </m:ctrlPr>
+                        </m:naryPr>
+                        <m:sub>
+                          <m:r>
+                            <m:rPr>
+                              <m:brk m:alnAt="23"/>
+                            </m:rPr>
+                            <a:rPr lang="en-US" sz="2200" i="1">
+                              <a:latin typeface="Cambria Math" panose="02040503050406030204" pitchFamily="18" charset="0"/>
+                              <a:ea typeface="Cambria Math" panose="02040503050406030204" pitchFamily="18" charset="0"/>
+                            </a:rPr>
+                            <m:t>𝑖</m:t>
+                          </m:r>
+                          <m:r>
+                            <a:rPr lang="en-US" sz="2200" i="1">
+                              <a:latin typeface="Cambria Math" panose="02040503050406030204" pitchFamily="18" charset="0"/>
+                              <a:ea typeface="Cambria Math" panose="02040503050406030204" pitchFamily="18" charset="0"/>
+                            </a:rPr>
+                            <m:t>=1</m:t>
+                          </m:r>
+                        </m:sub>
+                        <m:sup>
+                          <m:r>
+                            <a:rPr lang="en-US" sz="2200" i="1">
+                              <a:latin typeface="Cambria Math" panose="02040503050406030204" pitchFamily="18" charset="0"/>
+                              <a:ea typeface="Cambria Math" panose="02040503050406030204" pitchFamily="18" charset="0"/>
+                            </a:rPr>
+                            <m:t>𝑛</m:t>
+                          </m:r>
+                        </m:sup>
+                        <m:e>
+                          <m:r>
+                            <a:rPr lang="en-US" sz="2200" b="0" i="1" smtClean="0">
+                              <a:latin typeface="Cambria Math" panose="02040503050406030204" pitchFamily="18" charset="0"/>
+                              <a:ea typeface="Cambria Math" panose="02040503050406030204" pitchFamily="18" charset="0"/>
+                            </a:rPr>
+                            <m:t>𝑝</m:t>
+                          </m:r>
+                          <m:d>
+                            <m:dPr>
+                              <m:ctrlPr>
+                                <a:rPr lang="en-US" sz="2200" i="1">
+                                  <a:latin typeface="Cambria Math" panose="02040503050406030204" pitchFamily="18" charset="0"/>
+                                </a:rPr>
+                              </m:ctrlPr>
+                            </m:dPr>
+                            <m:e>
+                              <m:sSub>
+                                <m:sSubPr>
+                                  <m:ctrlPr>
+                                    <a:rPr lang="en-US" sz="2200" i="1">
+                                      <a:latin typeface="Cambria Math" panose="02040503050406030204" pitchFamily="18" charset="0"/>
+                                    </a:rPr>
+                                  </m:ctrlPr>
+                                </m:sSubPr>
+                                <m:e>
+                                  <m:r>
+                                    <a:rPr lang="en-US" sz="2200" i="1">
+                                      <a:latin typeface="Cambria Math" panose="02040503050406030204" pitchFamily="18" charset="0"/>
+                                    </a:rPr>
+                                    <m:t>𝑦</m:t>
+                                  </m:r>
+                                </m:e>
+                                <m:sub>
+                                  <m:r>
+                                    <a:rPr lang="en-US" sz="2200" i="1">
+                                      <a:latin typeface="Cambria Math" panose="02040503050406030204" pitchFamily="18" charset="0"/>
+                                    </a:rPr>
+                                    <m:t>𝑖</m:t>
+                                  </m:r>
+                                </m:sub>
+                              </m:sSub>
+                              <m:r>
+                                <a:rPr lang="en-US" sz="2200" i="1">
+                                  <a:latin typeface="Cambria Math" panose="02040503050406030204" pitchFamily="18" charset="0"/>
+                                </a:rPr>
+                                <m:t>|</m:t>
+                              </m:r>
+                              <m:sSub>
+                                <m:sSubPr>
+                                  <m:ctrlPr>
+                                    <a:rPr lang="en-US" sz="2200" b="1" i="1">
+                                      <a:latin typeface="Cambria Math" panose="02040503050406030204" pitchFamily="18" charset="0"/>
+                                    </a:rPr>
+                                  </m:ctrlPr>
+                                </m:sSubPr>
+                                <m:e>
+                                  <m:r>
+                                    <a:rPr lang="en-US" sz="2200" b="1" i="1">
+                                      <a:latin typeface="Cambria Math" panose="02040503050406030204" pitchFamily="18" charset="0"/>
+                                    </a:rPr>
+                                    <m:t>𝒙</m:t>
+                                  </m:r>
+                                </m:e>
+                                <m:sub>
+                                  <m:r>
+                                    <a:rPr lang="en-US" sz="2200" i="1">
+                                      <a:latin typeface="Cambria Math" panose="02040503050406030204" pitchFamily="18" charset="0"/>
+                                    </a:rPr>
+                                    <m:t>𝑖</m:t>
+                                  </m:r>
+                                </m:sub>
+                              </m:sSub>
+                              <m:r>
+                                <a:rPr lang="en-US" sz="2200" b="0" i="1">
+                                  <a:latin typeface="Cambria Math" panose="02040503050406030204" pitchFamily="18" charset="0"/>
+                                </a:rPr>
+                                <m:t>;</m:t>
+                              </m:r>
+                              <m:acc>
+                                <m:accPr>
+                                  <m:chr m:val="̂"/>
+                                  <m:ctrlPr>
+                                    <a:rPr lang="en-US" sz="2200" b="1" i="1" smtClean="0">
+                                      <a:latin typeface="Cambria Math" panose="02040503050406030204" pitchFamily="18" charset="0"/>
+                                      <a:ea typeface="Cambria Math" panose="02040503050406030204" pitchFamily="18" charset="0"/>
+                                    </a:rPr>
+                                  </m:ctrlPr>
+                                </m:accPr>
+                                <m:e>
+                                  <m:r>
+                                    <a:rPr lang="en-GB" sz="2200" b="1" i="1">
+                                      <a:latin typeface="Cambria Math" panose="02040503050406030204" pitchFamily="18" charset="0"/>
+                                      <a:ea typeface="Cambria Math" panose="02040503050406030204" pitchFamily="18" charset="0"/>
+                                    </a:rPr>
+                                    <m:t>𝜽</m:t>
+                                  </m:r>
+                                </m:e>
+                              </m:acc>
+                            </m:e>
+                          </m:d>
+                        </m:e>
+                      </m:nary>
+                    </m:oMath>
+                  </m:oMathPara>
+                </a14:m>
+                <a:endParaRPr lang="en-DE" sz="2200" dirty="0"/>
+              </a:p>
+              <a:p>
+                <a:pPr marL="0" indent="0">
+                  <a:buNone/>
+                </a:pPr>
+                <a:endParaRPr lang="en-DE" sz="2200" dirty="0"/>
+              </a:p>
+              <a:p>
+                <a:pPr marL="0" indent="0">
+                  <a:buNone/>
+                </a:pPr>
+                <a:r>
+                  <a:rPr lang="en-DE" sz="2200" dirty="0"/>
+                  <a:t>… to be maximized according to estimated model parameters </a:t>
+                </a:r>
+                <a14:m>
+                  <m:oMath xmlns:m="http://schemas.openxmlformats.org/officeDocument/2006/math">
+                    <m:acc>
+                      <m:accPr>
+                        <m:chr m:val="̂"/>
+                        <m:ctrlPr>
+                          <a:rPr lang="en-GB" sz="2200" b="1" i="1" smtClean="0">
+                            <a:latin typeface="Cambria Math" panose="02040503050406030204" pitchFamily="18" charset="0"/>
+                            <a:ea typeface="Cambria Math" panose="02040503050406030204" pitchFamily="18" charset="0"/>
+                          </a:rPr>
+                        </m:ctrlPr>
+                      </m:accPr>
+                      <m:e>
+                        <m:r>
+                          <a:rPr lang="en-GB" sz="2200" b="1" i="1">
+                            <a:latin typeface="Cambria Math" panose="02040503050406030204" pitchFamily="18" charset="0"/>
+                            <a:ea typeface="Cambria Math" panose="02040503050406030204" pitchFamily="18" charset="0"/>
+                          </a:rPr>
+                          <m:t>𝜽</m:t>
+                        </m:r>
+                      </m:e>
+                    </m:acc>
+                  </m:oMath>
+                </a14:m>
+                <a:endParaRPr lang="en-US" sz="2200" b="1" dirty="0">
+                  <a:ea typeface="Cambria Math" panose="02040503050406030204" pitchFamily="18" charset="0"/>
+                </a:endParaRPr>
+              </a:p>
+              <a:p>
+                <a:pPr marL="0" indent="0">
+                  <a:buNone/>
+                </a:pPr>
+                <a:r>
+                  <a:rPr lang="en-DE" sz="2200" dirty="0"/>
+                  <a:t>(known as maximum likelihood estimation)</a:t>
+                </a:r>
+              </a:p>
+            </p:txBody>
+          </p:sp>
+        </mc:Choice>
+        <mc:Fallback xmlns="">
+          <p:sp>
+            <p:nvSpPr>
+              <p:cNvPr id="3" name="Content Placeholder 2">
+                <a:extLst>
+                  <a:ext uri="{FF2B5EF4-FFF2-40B4-BE49-F238E27FC236}">
+                    <a16:creationId xmlns:a16="http://schemas.microsoft.com/office/drawing/2014/main" id="{A2FDDA55-280D-23EA-F172-A72AACD4FB80}"/>
+                  </a:ext>
+                </a:extLst>
+              </p:cNvPr>
+              <p:cNvSpPr>
+                <a:spLocks noGrp="1" noRot="1" noChangeAspect="1" noMove="1" noResize="1" noEditPoints="1" noAdjustHandles="1" noChangeArrowheads="1" noChangeShapeType="1" noTextEdit="1"/>
+              </p:cNvSpPr>
+              <p:nvPr>
+                <p:ph idx="1"/>
+              </p:nvPr>
+            </p:nvSpPr>
+            <p:spPr>
+              <a:blipFill>
+                <a:blip r:embed="rId2"/>
+                <a:stretch>
+                  <a:fillRect l="-724" t="-1744" b="-12791"/>
+                </a:stretch>
+              </a:blipFill>
+            </p:spPr>
+            <p:txBody>
+              <a:bodyPr/>
+              <a:lstStyle/>
+              <a:p>
+                <a:r>
+                  <a:rPr lang="en-DE">
+                    <a:noFill/>
+                  </a:rPr>
+                  <a:t> </a:t>
+                </a:r>
+              </a:p>
+            </p:txBody>
+          </p:sp>
+        </mc:Fallback>
+      </mc:AlternateContent>
+      <p:sp>
+        <p:nvSpPr>
+          <p:cNvPr id="4" name="Slide Number Placeholder 3">
+            <a:extLst>
+              <a:ext uri="{FF2B5EF4-FFF2-40B4-BE49-F238E27FC236}">
+                <a16:creationId xmlns:a16="http://schemas.microsoft.com/office/drawing/2014/main" id="{5E51884E-FC06-2625-8D8E-4C79602F8C36}"/>
               </a:ext>
             </a:extLst>
           </p:cNvPr>
@@ -17666,18 +18806,18 @@
           <a:bodyPr/>
           <a:lstStyle/>
           <a:p>
-            <a:fld id="{3D4C94FE-FF23-4504-88E9-14D481113291}" type="slidenum">
-              <a:rPr lang="en-GB" smtClean="0"/>
+            <a:fld id="{77E1BB0D-8AD4-A14C-8FD5-F1619D1A43A2}" type="slidenum">
+              <a:rPr lang="en-DE" smtClean="0"/>
               <a:t>9</a:t>
             </a:fld>
-            <a:endParaRPr lang="en-GB"/>
+            <a:endParaRPr lang="en-DE"/>
           </a:p>
         </p:txBody>
       </p:sp>
     </p:spTree>
     <p:extLst>
       <p:ext uri="{BB962C8B-B14F-4D97-AF65-F5344CB8AC3E}">
-        <p14:creationId xmlns:p14="http://schemas.microsoft.com/office/powerpoint/2010/main" val="505515844"/>
+        <p14:creationId xmlns:p14="http://schemas.microsoft.com/office/powerpoint/2010/main" val="923827092"/>
       </p:ext>
     </p:extLst>
   </p:cSld>

--- a/slides/4_statistical_inference.pptx
+++ b/slides/4_statistical_inference.pptx
@@ -6,31 +6,26 @@
     <p:sldMasterId id="2147483660" r:id="rId2"/>
   </p:sldMasterIdLst>
   <p:notesMasterIdLst>
-    <p:notesMasterId r:id="rId25"/>
+    <p:notesMasterId r:id="rId20"/>
   </p:notesMasterIdLst>
   <p:sldIdLst>
     <p:sldId id="256" r:id="rId3"/>
-    <p:sldId id="265" r:id="rId4"/>
-    <p:sldId id="678" r:id="rId5"/>
-    <p:sldId id="681" r:id="rId6"/>
-    <p:sldId id="682" r:id="rId7"/>
-    <p:sldId id="683" r:id="rId8"/>
-    <p:sldId id="684" r:id="rId9"/>
-    <p:sldId id="263" r:id="rId10"/>
-    <p:sldId id="662" r:id="rId11"/>
-    <p:sldId id="654" r:id="rId12"/>
-    <p:sldId id="264" r:id="rId13"/>
-    <p:sldId id="272" r:id="rId14"/>
-    <p:sldId id="686" r:id="rId15"/>
-    <p:sldId id="670" r:id="rId16"/>
-    <p:sldId id="669" r:id="rId17"/>
-    <p:sldId id="284" r:id="rId18"/>
-    <p:sldId id="633" r:id="rId19"/>
-    <p:sldId id="687" r:id="rId20"/>
-    <p:sldId id="688" r:id="rId21"/>
-    <p:sldId id="693" r:id="rId22"/>
-    <p:sldId id="694" r:id="rId23"/>
-    <p:sldId id="695" r:id="rId24"/>
+    <p:sldId id="678" r:id="rId4"/>
+    <p:sldId id="681" r:id="rId5"/>
+    <p:sldId id="682" r:id="rId6"/>
+    <p:sldId id="683" r:id="rId7"/>
+    <p:sldId id="684" r:id="rId8"/>
+    <p:sldId id="263" r:id="rId9"/>
+    <p:sldId id="662" r:id="rId10"/>
+    <p:sldId id="654" r:id="rId11"/>
+    <p:sldId id="264" r:id="rId12"/>
+    <p:sldId id="272" r:id="rId13"/>
+    <p:sldId id="686" r:id="rId14"/>
+    <p:sldId id="670" r:id="rId15"/>
+    <p:sldId id="669" r:id="rId16"/>
+    <p:sldId id="284" r:id="rId17"/>
+    <p:sldId id="633" r:id="rId18"/>
+    <p:sldId id="687" r:id="rId19"/>
   </p:sldIdLst>
   <p:sldSz cx="12192000" cy="6858000"/>
   <p:notesSz cx="6858000" cy="9144000"/>
@@ -219,7 +214,7 @@
           <a:p>
             <a:fld id="{FA7C66C9-5AC4-D143-AC41-EFC203E0D535}" type="datetimeFigureOut">
               <a:rPr lang="en-DE" smtClean="0"/>
-              <a:t>4/16/26</a:t>
+              <a:t>4/17/26</a:t>
             </a:fld>
             <a:endParaRPr lang="en-DE"/>
           </a:p>
@@ -636,7 +631,7 @@
           <a:p>
             <a:fld id="{79012DCE-6557-4F4C-9EF2-71954FC5C5C0}" type="datetime1">
               <a:rPr lang="de-DE" smtClean="0"/>
-              <a:t>16.04.26</a:t>
+              <a:t>17.04.26</a:t>
             </a:fld>
             <a:endParaRPr lang="en-DE"/>
           </a:p>
@@ -836,7 +831,7 @@
           <a:p>
             <a:fld id="{61E0504E-081E-2244-82EF-59857EECA44C}" type="datetime1">
               <a:rPr lang="de-DE" smtClean="0"/>
-              <a:t>16.04.26</a:t>
+              <a:t>17.04.26</a:t>
             </a:fld>
             <a:endParaRPr lang="en-DE"/>
           </a:p>
@@ -1046,7 +1041,7 @@
           <a:p>
             <a:fld id="{F05F15A8-F6C0-3340-9E29-5B7EE8A425EE}" type="datetime1">
               <a:rPr lang="de-DE" smtClean="0"/>
-              <a:t>16.04.26</a:t>
+              <a:t>17.04.26</a:t>
             </a:fld>
             <a:endParaRPr lang="en-DE"/>
           </a:p>
@@ -1268,7 +1263,7 @@
           <a:p>
             <a:fld id="{7128456D-5ACD-4673-BCE9-52505EC32CEF}" type="datetime1">
               <a:rPr lang="en-GB" smtClean="0"/>
-              <a:t>16/04/2026</a:t>
+              <a:t>17/04/2026</a:t>
             </a:fld>
             <a:endParaRPr lang="en-GB"/>
           </a:p>
@@ -1468,7 +1463,7 @@
           <a:p>
             <a:fld id="{0B763083-041D-491F-A9FE-D51D99E0B41E}" type="datetime1">
               <a:rPr lang="en-GB" smtClean="0"/>
-              <a:t>16/04/2026</a:t>
+              <a:t>17/04/2026</a:t>
             </a:fld>
             <a:endParaRPr lang="en-GB"/>
           </a:p>
@@ -1744,7 +1739,7 @@
           <a:p>
             <a:fld id="{409455E6-A1CA-4CB6-9964-88D5086DA5CA}" type="datetime1">
               <a:rPr lang="en-GB" smtClean="0"/>
-              <a:t>16/04/2026</a:t>
+              <a:t>17/04/2026</a:t>
             </a:fld>
             <a:endParaRPr lang="en-GB"/>
           </a:p>
@@ -2012,7 +2007,7 @@
           <a:p>
             <a:fld id="{FAD82E38-24C1-4A8F-B916-1E714FC129DD}" type="datetime1">
               <a:rPr lang="en-GB" smtClean="0"/>
-              <a:t>16/04/2026</a:t>
+              <a:t>17/04/2026</a:t>
             </a:fld>
             <a:endParaRPr lang="en-GB"/>
           </a:p>
@@ -2427,7 +2422,7 @@
           <a:p>
             <a:fld id="{BC17BCDC-BAA6-44B5-B642-6F28D623ABB1}" type="datetime1">
               <a:rPr lang="en-GB" smtClean="0"/>
-              <a:t>16/04/2026</a:t>
+              <a:t>17/04/2026</a:t>
             </a:fld>
             <a:endParaRPr lang="en-GB"/>
           </a:p>
@@ -2569,7 +2564,7 @@
           <a:p>
             <a:fld id="{01D4BEC3-2CF9-4B19-A0A5-E70A0675B677}" type="datetime1">
               <a:rPr lang="en-GB" smtClean="0"/>
-              <a:t>16/04/2026</a:t>
+              <a:t>17/04/2026</a:t>
             </a:fld>
             <a:endParaRPr lang="en-GB"/>
           </a:p>
@@ -2682,7 +2677,7 @@
           <a:p>
             <a:fld id="{98E28BFD-B06D-4A45-8453-724AC7BA29C5}" type="datetime1">
               <a:rPr lang="en-GB" smtClean="0"/>
-              <a:t>16/04/2026</a:t>
+              <a:t>17/04/2026</a:t>
             </a:fld>
             <a:endParaRPr lang="en-GB"/>
           </a:p>
@@ -2995,7 +2990,7 @@
           <a:p>
             <a:fld id="{A14D99B0-2926-4194-B668-6A0D6123824C}" type="datetime1">
               <a:rPr lang="en-GB" smtClean="0"/>
-              <a:t>16/04/2026</a:t>
+              <a:t>17/04/2026</a:t>
             </a:fld>
             <a:endParaRPr lang="en-GB"/>
           </a:p>
@@ -3195,7 +3190,7 @@
           <a:p>
             <a:fld id="{8CB0C701-1A57-C948-B28D-AF931FF78AF3}" type="datetime1">
               <a:rPr lang="de-DE" smtClean="0"/>
-              <a:t>16.04.26</a:t>
+              <a:t>17.04.26</a:t>
             </a:fld>
             <a:endParaRPr lang="en-DE"/>
           </a:p>
@@ -3484,7 +3479,7 @@
           <a:p>
             <a:fld id="{29F03426-21FD-40F4-9F0B-AD19F2317DCA}" type="datetime1">
               <a:rPr lang="en-GB" smtClean="0"/>
-              <a:t>16/04/2026</a:t>
+              <a:t>17/04/2026</a:t>
             </a:fld>
             <a:endParaRPr lang="en-GB"/>
           </a:p>
@@ -3684,7 +3679,7 @@
           <a:p>
             <a:fld id="{D99A2639-5270-4811-807B-89D4AE95E7ED}" type="datetime1">
               <a:rPr lang="en-GB" smtClean="0"/>
-              <a:t>16/04/2026</a:t>
+              <a:t>17/04/2026</a:t>
             </a:fld>
             <a:endParaRPr lang="en-GB"/>
           </a:p>
@@ -3894,7 +3889,7 @@
           <a:p>
             <a:fld id="{B552976C-D408-4E27-8D02-D7795F6D8A01}" type="datetime1">
               <a:rPr lang="en-GB" smtClean="0"/>
-              <a:t>16/04/2026</a:t>
+              <a:t>17/04/2026</a:t>
             </a:fld>
             <a:endParaRPr lang="en-GB"/>
           </a:p>
@@ -4170,7 +4165,7 @@
           <a:p>
             <a:fld id="{8FBF2D68-AC2E-EA4A-974C-16395F5BD9DD}" type="datetime1">
               <a:rPr lang="de-DE" smtClean="0"/>
-              <a:t>16.04.26</a:t>
+              <a:t>17.04.26</a:t>
             </a:fld>
             <a:endParaRPr lang="en-DE"/>
           </a:p>
@@ -4438,7 +4433,7 @@
           <a:p>
             <a:fld id="{CB7C9811-4ACB-234E-BFAA-6F05033E0D52}" type="datetime1">
               <a:rPr lang="de-DE" smtClean="0"/>
-              <a:t>16.04.26</a:t>
+              <a:t>17.04.26</a:t>
             </a:fld>
             <a:endParaRPr lang="en-DE"/>
           </a:p>
@@ -4853,7 +4848,7 @@
           <a:p>
             <a:fld id="{F98A557C-09A3-C548-BB01-1F0212DED143}" type="datetime1">
               <a:rPr lang="de-DE" smtClean="0"/>
-              <a:t>16.04.26</a:t>
+              <a:t>17.04.26</a:t>
             </a:fld>
             <a:endParaRPr lang="en-DE"/>
           </a:p>
@@ -4995,7 +4990,7 @@
           <a:p>
             <a:fld id="{60486379-B67D-864C-959F-C9FC3FCCE377}" type="datetime1">
               <a:rPr lang="de-DE" smtClean="0"/>
-              <a:t>16.04.26</a:t>
+              <a:t>17.04.26</a:t>
             </a:fld>
             <a:endParaRPr lang="en-DE"/>
           </a:p>
@@ -5108,7 +5103,7 @@
           <a:p>
             <a:fld id="{062DF66D-D36A-554E-ABAF-BAB3214E8E46}" type="datetime1">
               <a:rPr lang="de-DE" smtClean="0"/>
-              <a:t>16.04.26</a:t>
+              <a:t>17.04.26</a:t>
             </a:fld>
             <a:endParaRPr lang="en-DE"/>
           </a:p>
@@ -5421,7 +5416,7 @@
           <a:p>
             <a:fld id="{638488A7-13F1-C747-8421-8AD2AC70E301}" type="datetime1">
               <a:rPr lang="de-DE" smtClean="0"/>
-              <a:t>16.04.26</a:t>
+              <a:t>17.04.26</a:t>
             </a:fld>
             <a:endParaRPr lang="en-DE"/>
           </a:p>
@@ -5710,7 +5705,7 @@
           <a:p>
             <a:fld id="{2EDFD949-D71E-274F-984C-986551850ABF}" type="datetime1">
               <a:rPr lang="de-DE" smtClean="0"/>
-              <a:t>16.04.26</a:t>
+              <a:t>17.04.26</a:t>
             </a:fld>
             <a:endParaRPr lang="en-DE"/>
           </a:p>
@@ -5953,7 +5948,7 @@
           <a:p>
             <a:fld id="{2FAC0196-C149-3543-A854-7AE4E991F7BB}" type="datetime1">
               <a:rPr lang="de-DE" smtClean="0"/>
-              <a:t>16.04.26</a:t>
+              <a:t>17.04.26</a:t>
             </a:fld>
             <a:endParaRPr lang="en-DE"/>
           </a:p>
@@ -6524,7 +6519,7 @@
           <a:p>
             <a:fld id="{0369896D-5D36-4D31-A0CE-0C2BFB17B225}" type="datetime1">
               <a:rPr lang="en-GB" smtClean="0"/>
-              <a:t>16/04/2026</a:t>
+              <a:t>17/04/2026</a:t>
             </a:fld>
             <a:endParaRPr lang="en-GB"/>
           </a:p>
@@ -7014,1622 +7009,6 @@
 </file>
 
 <file path=ppt/slides/slide10.xml><?xml version="1.0" encoding="utf-8"?>
-<p:sld xmlns:a="http://schemas.openxmlformats.org/drawingml/2006/main" xmlns:r="http://schemas.openxmlformats.org/officeDocument/2006/relationships" xmlns:p="http://schemas.openxmlformats.org/presentationml/2006/main">
-  <p:cSld>
-    <p:spTree>
-      <p:nvGrpSpPr>
-        <p:cNvPr id="1" name=""/>
-        <p:cNvGrpSpPr/>
-        <p:nvPr/>
-      </p:nvGrpSpPr>
-      <p:grpSpPr>
-        <a:xfrm>
-          <a:off x="0" y="0"/>
-          <a:ext cx="0" cy="0"/>
-          <a:chOff x="0" y="0"/>
-          <a:chExt cx="0" cy="0"/>
-        </a:xfrm>
-      </p:grpSpPr>
-      <p:sp>
-        <p:nvSpPr>
-          <p:cNvPr id="2" name="Title 1">
-            <a:extLst>
-              <a:ext uri="{FF2B5EF4-FFF2-40B4-BE49-F238E27FC236}">
-                <a16:creationId xmlns:a16="http://schemas.microsoft.com/office/drawing/2014/main" id="{3B778DBC-7181-EA20-D228-B57BD1EB61BC}"/>
-              </a:ext>
-            </a:extLst>
-          </p:cNvPr>
-          <p:cNvSpPr>
-            <a:spLocks noGrp="1"/>
-          </p:cNvSpPr>
-          <p:nvPr>
-            <p:ph type="title"/>
-          </p:nvPr>
-        </p:nvSpPr>
-        <p:spPr/>
-        <p:txBody>
-          <a:bodyPr/>
-          <a:lstStyle/>
-          <a:p>
-            <a:r>
-              <a:rPr lang="en-DE" dirty="0"/>
-              <a:t>Negative Log-Likelihood</a:t>
-            </a:r>
-          </a:p>
-        </p:txBody>
-      </p:sp>
-      <mc:AlternateContent xmlns:mc="http://schemas.openxmlformats.org/markup-compatibility/2006" xmlns:a14="http://schemas.microsoft.com/office/drawing/2010/main">
-        <mc:Choice Requires="a14">
-          <p:sp>
-            <p:nvSpPr>
-              <p:cNvPr id="3" name="Content Placeholder 2">
-                <a:extLst>
-                  <a:ext uri="{FF2B5EF4-FFF2-40B4-BE49-F238E27FC236}">
-                    <a16:creationId xmlns:a16="http://schemas.microsoft.com/office/drawing/2014/main" id="{A1D50BE1-6E3C-96FF-14B6-FBB141E405D4}"/>
-                  </a:ext>
-                </a:extLst>
-              </p:cNvPr>
-              <p:cNvSpPr>
-                <a:spLocks noGrp="1"/>
-              </p:cNvSpPr>
-              <p:nvPr>
-                <p:ph idx="1"/>
-              </p:nvPr>
-            </p:nvSpPr>
-            <p:spPr/>
-            <p:txBody>
-              <a:bodyPr>
-                <a:normAutofit fontScale="85000" lnSpcReduction="10000"/>
-              </a:bodyPr>
-              <a:lstStyle/>
-              <a:p>
-                <a:pPr marL="0" indent="0">
-                  <a:buNone/>
-                </a:pPr>
-                <a:r>
-                  <a:rPr lang="en-GB" sz="2400" dirty="0"/>
-                  <a:t>logarithmic transformation of </a:t>
-                </a:r>
-                <a14:m>
-                  <m:oMath xmlns:m="http://schemas.openxmlformats.org/officeDocument/2006/math">
-                    <m:r>
-                      <a:rPr lang="en-GB" sz="2400" i="1">
-                        <a:latin typeface="Cambria Math" panose="02040503050406030204" pitchFamily="18" charset="0"/>
-                        <a:ea typeface="Cambria Math" panose="02040503050406030204" pitchFamily="18" charset="0"/>
-                      </a:rPr>
-                      <m:t>ℒ</m:t>
-                    </m:r>
-                  </m:oMath>
-                </a14:m>
-                <a:r>
-                  <a:rPr lang="en-GB" sz="2400" dirty="0">
-                    <a:sym typeface="Wingdings" pitchFamily="2" charset="2"/>
-                  </a:rPr>
-                  <a:t>: </a:t>
-                </a:r>
-                <a:r>
-                  <a:rPr lang="en-GB" sz="2400" dirty="0"/>
-                  <a:t>log-likelihood function</a:t>
-                </a:r>
-              </a:p>
-              <a:p>
-                <a:pPr marL="0" indent="0">
-                  <a:buNone/>
-                </a:pPr>
-                <a:endParaRPr lang="en-GB" sz="2400" dirty="0"/>
-              </a:p>
-              <a:p>
-                <a:pPr marL="0" indent="0">
-                  <a:buNone/>
-                </a:pPr>
-                <a14:m>
-                  <m:oMathPara xmlns:m="http://schemas.openxmlformats.org/officeDocument/2006/math">
-                    <m:oMathParaPr>
-                      <m:jc m:val="centerGroup"/>
-                    </m:oMathParaPr>
-                    <m:oMath xmlns:m="http://schemas.openxmlformats.org/officeDocument/2006/math">
-                      <m:r>
-                        <a:rPr lang="en-GB" sz="2400" i="1" smtClean="0">
-                          <a:latin typeface="Cambria Math" panose="02040503050406030204" pitchFamily="18" charset="0"/>
-                          <a:ea typeface="Cambria Math" panose="02040503050406030204" pitchFamily="18" charset="0"/>
-                        </a:rPr>
-                        <m:t>ℓ</m:t>
-                      </m:r>
-                      <m:d>
-                        <m:dPr>
-                          <m:ctrlPr>
-                            <a:rPr lang="en-GB" sz="2400" i="1" smtClean="0">
-                              <a:latin typeface="Cambria Math" panose="02040503050406030204" pitchFamily="18" charset="0"/>
-                              <a:ea typeface="Cambria Math" panose="02040503050406030204" pitchFamily="18" charset="0"/>
-                            </a:rPr>
-                          </m:ctrlPr>
-                        </m:dPr>
-                        <m:e>
-                          <m:acc>
-                            <m:accPr>
-                              <m:chr m:val="̂"/>
-                              <m:ctrlPr>
-                                <a:rPr lang="en-GB" sz="2400" b="1" i="1" smtClean="0">
-                                  <a:latin typeface="Cambria Math" panose="02040503050406030204" pitchFamily="18" charset="0"/>
-                                  <a:ea typeface="Cambria Math" panose="02040503050406030204" pitchFamily="18" charset="0"/>
-                                </a:rPr>
-                              </m:ctrlPr>
-                            </m:accPr>
-                            <m:e>
-                              <m:r>
-                                <a:rPr lang="en-GB" sz="2400" b="1" i="1">
-                                  <a:latin typeface="Cambria Math" panose="02040503050406030204" pitchFamily="18" charset="0"/>
-                                  <a:ea typeface="Cambria Math" panose="02040503050406030204" pitchFamily="18" charset="0"/>
-                                </a:rPr>
-                                <m:t>𝜽</m:t>
-                              </m:r>
-                            </m:e>
-                          </m:acc>
-                          <m:r>
-                            <a:rPr lang="en-US" sz="2400" i="1">
-                              <a:latin typeface="Cambria Math" panose="02040503050406030204" pitchFamily="18" charset="0"/>
-                              <a:ea typeface="Cambria Math" panose="02040503050406030204" pitchFamily="18" charset="0"/>
-                            </a:rPr>
-                            <m:t>;</m:t>
-                          </m:r>
-                          <m:r>
-                            <a:rPr lang="en-US" sz="2400" b="1" i="1">
-                              <a:latin typeface="Cambria Math" panose="02040503050406030204" pitchFamily="18" charset="0"/>
-                              <a:ea typeface="Cambria Math" panose="02040503050406030204" pitchFamily="18" charset="0"/>
-                            </a:rPr>
-                            <m:t>𝒚</m:t>
-                          </m:r>
-                          <m:r>
-                            <a:rPr lang="en-US" sz="2400" i="1">
-                              <a:latin typeface="Cambria Math" panose="02040503050406030204" pitchFamily="18" charset="0"/>
-                              <a:ea typeface="Cambria Math" panose="02040503050406030204" pitchFamily="18" charset="0"/>
-                            </a:rPr>
-                            <m:t>|</m:t>
-                          </m:r>
-                          <m:r>
-                            <a:rPr lang="en-US" sz="2400" b="1" i="1" smtClean="0">
-                              <a:latin typeface="Cambria Math" panose="02040503050406030204" pitchFamily="18" charset="0"/>
-                              <a:ea typeface="Cambria Math" panose="02040503050406030204" pitchFamily="18" charset="0"/>
-                            </a:rPr>
-                            <m:t>𝒙</m:t>
-                          </m:r>
-                        </m:e>
-                      </m:d>
-                      <m:r>
-                        <a:rPr lang="en-US" sz="2400" b="0" i="1" smtClean="0">
-                          <a:latin typeface="Cambria Math" panose="02040503050406030204" pitchFamily="18" charset="0"/>
-                          <a:ea typeface="Cambria Math" panose="02040503050406030204" pitchFamily="18" charset="0"/>
-                        </a:rPr>
-                        <m:t>=</m:t>
-                      </m:r>
-                      <m:r>
-                        <m:rPr>
-                          <m:sty m:val="p"/>
-                        </m:rPr>
-                        <a:rPr lang="en-US" sz="2400" b="0" i="0" smtClean="0">
-                          <a:latin typeface="Cambria Math" panose="02040503050406030204" pitchFamily="18" charset="0"/>
-                          <a:ea typeface="Cambria Math" panose="02040503050406030204" pitchFamily="18" charset="0"/>
-                        </a:rPr>
-                        <m:t>ln</m:t>
-                      </m:r>
-                      <m:d>
-                        <m:dPr>
-                          <m:ctrlPr>
-                            <a:rPr lang="en-US" sz="2400" b="0" i="1" smtClean="0">
-                              <a:latin typeface="Cambria Math" panose="02040503050406030204" pitchFamily="18" charset="0"/>
-                              <a:ea typeface="Cambria Math" panose="02040503050406030204" pitchFamily="18" charset="0"/>
-                            </a:rPr>
-                          </m:ctrlPr>
-                        </m:dPr>
-                        <m:e>
-                          <m:r>
-                            <a:rPr lang="en-GB" sz="2400" i="1">
-                              <a:latin typeface="Cambria Math" panose="02040503050406030204" pitchFamily="18" charset="0"/>
-                              <a:ea typeface="Cambria Math" panose="02040503050406030204" pitchFamily="18" charset="0"/>
-                            </a:rPr>
-                            <m:t>ℒ</m:t>
-                          </m:r>
-                          <m:d>
-                            <m:dPr>
-                              <m:ctrlPr>
-                                <a:rPr lang="en-GB" sz="2400" i="1">
-                                  <a:latin typeface="Cambria Math" panose="02040503050406030204" pitchFamily="18" charset="0"/>
-                                  <a:ea typeface="Cambria Math" panose="02040503050406030204" pitchFamily="18" charset="0"/>
-                                </a:rPr>
-                              </m:ctrlPr>
-                            </m:dPr>
-                            <m:e>
-                              <m:acc>
-                                <m:accPr>
-                                  <m:chr m:val="̂"/>
-                                  <m:ctrlPr>
-                                    <a:rPr lang="en-GB" sz="2400" i="1" smtClean="0">
-                                      <a:latin typeface="Cambria Math" panose="02040503050406030204" pitchFamily="18" charset="0"/>
-                                      <a:ea typeface="Cambria Math" panose="02040503050406030204" pitchFamily="18" charset="0"/>
-                                    </a:rPr>
-                                  </m:ctrlPr>
-                                </m:accPr>
-                                <m:e>
-                                  <m:r>
-                                    <a:rPr lang="en-GB" sz="2400" b="1" i="1">
-                                      <a:latin typeface="Cambria Math" panose="02040503050406030204" pitchFamily="18" charset="0"/>
-                                      <a:ea typeface="Cambria Math" panose="02040503050406030204" pitchFamily="18" charset="0"/>
-                                    </a:rPr>
-                                    <m:t>𝜽</m:t>
-                                  </m:r>
-                                </m:e>
-                              </m:acc>
-                              <m:r>
-                                <a:rPr lang="en-US" sz="2400" i="1">
-                                  <a:latin typeface="Cambria Math" panose="02040503050406030204" pitchFamily="18" charset="0"/>
-                                  <a:ea typeface="Cambria Math" panose="02040503050406030204" pitchFamily="18" charset="0"/>
-                                </a:rPr>
-                                <m:t>;</m:t>
-                              </m:r>
-                              <m:r>
-                                <a:rPr lang="en-US" sz="2400" b="1" i="1">
-                                  <a:latin typeface="Cambria Math" panose="02040503050406030204" pitchFamily="18" charset="0"/>
-                                  <a:ea typeface="Cambria Math" panose="02040503050406030204" pitchFamily="18" charset="0"/>
-                                </a:rPr>
-                                <m:t>𝒚</m:t>
-                              </m:r>
-                              <m:r>
-                                <a:rPr lang="en-US" sz="2400" i="1">
-                                  <a:latin typeface="Cambria Math" panose="02040503050406030204" pitchFamily="18" charset="0"/>
-                                  <a:ea typeface="Cambria Math" panose="02040503050406030204" pitchFamily="18" charset="0"/>
-                                </a:rPr>
-                                <m:t>|</m:t>
-                              </m:r>
-                              <m:r>
-                                <a:rPr lang="en-US" sz="2400" b="1" i="1">
-                                  <a:latin typeface="Cambria Math" panose="02040503050406030204" pitchFamily="18" charset="0"/>
-                                  <a:ea typeface="Cambria Math" panose="02040503050406030204" pitchFamily="18" charset="0"/>
-                                </a:rPr>
-                                <m:t>𝒙</m:t>
-                              </m:r>
-                            </m:e>
-                          </m:d>
-                        </m:e>
-                      </m:d>
-                      <m:r>
-                        <a:rPr lang="en-US" sz="2400" i="1">
-                          <a:latin typeface="Cambria Math" panose="02040503050406030204" pitchFamily="18" charset="0"/>
-                          <a:ea typeface="Cambria Math" panose="02040503050406030204" pitchFamily="18" charset="0"/>
-                        </a:rPr>
-                        <m:t>=</m:t>
-                      </m:r>
-                      <m:nary>
-                        <m:naryPr>
-                          <m:chr m:val="∑"/>
-                          <m:ctrlPr>
-                            <a:rPr lang="en-US" sz="2400" i="1" smtClean="0">
-                              <a:latin typeface="Cambria Math" panose="02040503050406030204" pitchFamily="18" charset="0"/>
-                              <a:ea typeface="Cambria Math" panose="02040503050406030204" pitchFamily="18" charset="0"/>
-                            </a:rPr>
-                          </m:ctrlPr>
-                        </m:naryPr>
-                        <m:sub>
-                          <m:r>
-                            <m:rPr>
-                              <m:brk m:alnAt="23"/>
-                            </m:rPr>
-                            <a:rPr lang="en-US" sz="2400" b="0" i="1" smtClean="0">
-                              <a:latin typeface="Cambria Math" panose="02040503050406030204" pitchFamily="18" charset="0"/>
-                              <a:ea typeface="Cambria Math" panose="02040503050406030204" pitchFamily="18" charset="0"/>
-                            </a:rPr>
-                            <m:t>𝑖</m:t>
-                          </m:r>
-                          <m:r>
-                            <a:rPr lang="en-US" sz="2400" b="0" i="1" smtClean="0">
-                              <a:latin typeface="Cambria Math" panose="02040503050406030204" pitchFamily="18" charset="0"/>
-                              <a:ea typeface="Cambria Math" panose="02040503050406030204" pitchFamily="18" charset="0"/>
-                            </a:rPr>
-                            <m:t>=1</m:t>
-                          </m:r>
-                        </m:sub>
-                        <m:sup>
-                          <m:r>
-                            <a:rPr lang="en-US" sz="2400" b="0" i="1" smtClean="0">
-                              <a:latin typeface="Cambria Math" panose="02040503050406030204" pitchFamily="18" charset="0"/>
-                              <a:ea typeface="Cambria Math" panose="02040503050406030204" pitchFamily="18" charset="0"/>
-                            </a:rPr>
-                            <m:t>𝑛</m:t>
-                          </m:r>
-                        </m:sup>
-                        <m:e>
-                          <m:func>
-                            <m:funcPr>
-                              <m:ctrlPr>
-                                <a:rPr lang="en-US" sz="2400" b="0" i="1" smtClean="0">
-                                  <a:latin typeface="Cambria Math" panose="02040503050406030204" pitchFamily="18" charset="0"/>
-                                  <a:ea typeface="Cambria Math" panose="02040503050406030204" pitchFamily="18" charset="0"/>
-                                </a:rPr>
-                              </m:ctrlPr>
-                            </m:funcPr>
-                            <m:fName>
-                              <m:r>
-                                <m:rPr>
-                                  <m:sty m:val="p"/>
-                                </m:rPr>
-                                <a:rPr lang="en-US" sz="2400" b="0" i="0" smtClean="0">
-                                  <a:latin typeface="Cambria Math" panose="02040503050406030204" pitchFamily="18" charset="0"/>
-                                  <a:ea typeface="Cambria Math" panose="02040503050406030204" pitchFamily="18" charset="0"/>
-                                </a:rPr>
-                                <m:t>ln</m:t>
-                              </m:r>
-                            </m:fName>
-                            <m:e>
-                              <m:d>
-                                <m:dPr>
-                                  <m:ctrlPr>
-                                    <a:rPr lang="en-US" sz="2400" i="1">
-                                      <a:latin typeface="Cambria Math" panose="02040503050406030204" pitchFamily="18" charset="0"/>
-                                      <a:ea typeface="Cambria Math" panose="02040503050406030204" pitchFamily="18" charset="0"/>
-                                    </a:rPr>
-                                  </m:ctrlPr>
-                                </m:dPr>
-                                <m:e>
-                                  <m:r>
-                                    <a:rPr lang="en-US" sz="2400" b="0" i="1" smtClean="0">
-                                      <a:latin typeface="Cambria Math" panose="02040503050406030204" pitchFamily="18" charset="0"/>
-                                    </a:rPr>
-                                    <m:t>𝑝</m:t>
-                                  </m:r>
-                                  <m:d>
-                                    <m:dPr>
-                                      <m:ctrlPr>
-                                        <a:rPr lang="en-US" sz="2400" i="1">
-                                          <a:latin typeface="Cambria Math" panose="02040503050406030204" pitchFamily="18" charset="0"/>
-                                        </a:rPr>
-                                      </m:ctrlPr>
-                                    </m:dPr>
-                                    <m:e>
-                                      <m:sSub>
-                                        <m:sSubPr>
-                                          <m:ctrlPr>
-                                            <a:rPr lang="en-US" sz="2400" i="1">
-                                              <a:latin typeface="Cambria Math" panose="02040503050406030204" pitchFamily="18" charset="0"/>
-                                            </a:rPr>
-                                          </m:ctrlPr>
-                                        </m:sSubPr>
-                                        <m:e>
-                                          <m:r>
-                                            <a:rPr lang="en-US" sz="2400" i="1">
-                                              <a:latin typeface="Cambria Math" panose="02040503050406030204" pitchFamily="18" charset="0"/>
-                                            </a:rPr>
-                                            <m:t>𝑦</m:t>
-                                          </m:r>
-                                        </m:e>
-                                        <m:sub>
-                                          <m:r>
-                                            <a:rPr lang="en-US" sz="2400" i="1">
-                                              <a:latin typeface="Cambria Math" panose="02040503050406030204" pitchFamily="18" charset="0"/>
-                                            </a:rPr>
-                                            <m:t>𝑖</m:t>
-                                          </m:r>
-                                        </m:sub>
-                                      </m:sSub>
-                                      <m:r>
-                                        <a:rPr lang="en-US" sz="2400" i="1">
-                                          <a:latin typeface="Cambria Math" panose="02040503050406030204" pitchFamily="18" charset="0"/>
-                                        </a:rPr>
-                                        <m:t>|</m:t>
-                                      </m:r>
-                                      <m:sSub>
-                                        <m:sSubPr>
-                                          <m:ctrlPr>
-                                            <a:rPr lang="en-US" sz="2400" b="1" i="1">
-                                              <a:latin typeface="Cambria Math" panose="02040503050406030204" pitchFamily="18" charset="0"/>
-                                            </a:rPr>
-                                          </m:ctrlPr>
-                                        </m:sSubPr>
-                                        <m:e>
-                                          <m:r>
-                                            <a:rPr lang="en-US" sz="2400" b="1" i="1">
-                                              <a:latin typeface="Cambria Math" panose="02040503050406030204" pitchFamily="18" charset="0"/>
-                                            </a:rPr>
-                                            <m:t>𝒙</m:t>
-                                          </m:r>
-                                        </m:e>
-                                        <m:sub>
-                                          <m:r>
-                                            <a:rPr lang="en-US" sz="2400" i="1">
-                                              <a:latin typeface="Cambria Math" panose="02040503050406030204" pitchFamily="18" charset="0"/>
-                                            </a:rPr>
-                                            <m:t>𝑖</m:t>
-                                          </m:r>
-                                        </m:sub>
-                                      </m:sSub>
-                                      <m:r>
-                                        <a:rPr lang="en-US" sz="2400" i="1">
-                                          <a:latin typeface="Cambria Math" panose="02040503050406030204" pitchFamily="18" charset="0"/>
-                                        </a:rPr>
-                                        <m:t>;</m:t>
-                                      </m:r>
-                                      <m:acc>
-                                        <m:accPr>
-                                          <m:chr m:val="̂"/>
-                                          <m:ctrlPr>
-                                            <a:rPr lang="en-US" sz="2400" b="1" i="1" smtClean="0">
-                                              <a:latin typeface="Cambria Math" panose="02040503050406030204" pitchFamily="18" charset="0"/>
-                                              <a:ea typeface="Cambria Math" panose="02040503050406030204" pitchFamily="18" charset="0"/>
-                                            </a:rPr>
-                                          </m:ctrlPr>
-                                        </m:accPr>
-                                        <m:e>
-                                          <m:r>
-                                            <a:rPr lang="en-GB" sz="2400" b="1" i="1">
-                                              <a:latin typeface="Cambria Math" panose="02040503050406030204" pitchFamily="18" charset="0"/>
-                                              <a:ea typeface="Cambria Math" panose="02040503050406030204" pitchFamily="18" charset="0"/>
-                                            </a:rPr>
-                                            <m:t>𝜽</m:t>
-                                          </m:r>
-                                        </m:e>
-                                      </m:acc>
-                                    </m:e>
-                                  </m:d>
-                                </m:e>
-                              </m:d>
-                            </m:e>
-                          </m:func>
-                        </m:e>
-                      </m:nary>
-                    </m:oMath>
-                  </m:oMathPara>
-                </a14:m>
-                <a:endParaRPr lang="en-GB" sz="2400" dirty="0"/>
-              </a:p>
-              <a:p>
-                <a:pPr marL="0" indent="0">
-                  <a:buNone/>
-                </a:pPr>
-                <a:endParaRPr lang="en-GB" sz="2400" dirty="0"/>
-              </a:p>
-              <a:p>
-                <a:r>
-                  <a:rPr lang="en-GB" sz="2400" dirty="0"/>
-                  <a:t>logarithm monotonic function </a:t>
-                </a:r>
-                <a:r>
-                  <a:rPr lang="en-GB" sz="2400" dirty="0">
-                    <a:sym typeface="Wingdings" pitchFamily="2" charset="2"/>
-                  </a:rPr>
-                  <a:t> maximum of </a:t>
-                </a:r>
-                <a14:m>
-                  <m:oMath xmlns:m="http://schemas.openxmlformats.org/officeDocument/2006/math">
-                    <m:r>
-                      <a:rPr lang="en-GB" sz="2400" i="1">
-                        <a:latin typeface="Cambria Math" panose="02040503050406030204" pitchFamily="18" charset="0"/>
-                        <a:ea typeface="Cambria Math" panose="02040503050406030204" pitchFamily="18" charset="0"/>
-                      </a:rPr>
-                      <m:t>ℓ</m:t>
-                    </m:r>
-                  </m:oMath>
-                </a14:m>
-                <a:r>
-                  <a:rPr lang="en-GB" sz="2400" dirty="0">
-                    <a:sym typeface="Wingdings" pitchFamily="2" charset="2"/>
-                  </a:rPr>
-                  <a:t> and </a:t>
-                </a:r>
-                <a14:m>
-                  <m:oMath xmlns:m="http://schemas.openxmlformats.org/officeDocument/2006/math">
-                    <m:r>
-                      <a:rPr lang="en-GB" sz="2400" i="1">
-                        <a:latin typeface="Cambria Math" panose="02040503050406030204" pitchFamily="18" charset="0"/>
-                        <a:ea typeface="Cambria Math" panose="02040503050406030204" pitchFamily="18" charset="0"/>
-                      </a:rPr>
-                      <m:t>ℒ</m:t>
-                    </m:r>
-                  </m:oMath>
-                </a14:m>
-                <a:r>
-                  <a:rPr lang="en-GB" sz="2400" dirty="0">
-                    <a:sym typeface="Wingdings" pitchFamily="2" charset="2"/>
-                  </a:rPr>
-                  <a:t> at same </a:t>
-                </a:r>
-                <a14:m>
-                  <m:oMath xmlns:m="http://schemas.openxmlformats.org/officeDocument/2006/math">
-                    <m:acc>
-                      <m:accPr>
-                        <m:chr m:val="̂"/>
-                        <m:ctrlPr>
-                          <a:rPr lang="en-GB" sz="2400" b="1" i="1" smtClean="0">
-                            <a:latin typeface="Cambria Math" panose="02040503050406030204" pitchFamily="18" charset="0"/>
-                            <a:ea typeface="Cambria Math" panose="02040503050406030204" pitchFamily="18" charset="0"/>
-                          </a:rPr>
-                        </m:ctrlPr>
-                      </m:accPr>
-                      <m:e>
-                        <m:r>
-                          <a:rPr lang="en-GB" sz="2400" b="1" i="1">
-                            <a:latin typeface="Cambria Math" panose="02040503050406030204" pitchFamily="18" charset="0"/>
-                            <a:ea typeface="Cambria Math" panose="02040503050406030204" pitchFamily="18" charset="0"/>
-                          </a:rPr>
-                          <m:t>𝜽</m:t>
-                        </m:r>
-                      </m:e>
-                    </m:acc>
-                  </m:oMath>
-                </a14:m>
-                <a:r>
-                  <a:rPr lang="en-GB" sz="2400" dirty="0"/>
-                  <a:t> values</a:t>
-                </a:r>
-              </a:p>
-              <a:p>
-                <a:r>
-                  <a:rPr lang="en-GB" sz="2400" dirty="0"/>
-                  <a:t>most probability distributions (e.g., exponential family) only logarithmically concave (important for optimization)</a:t>
-                </a:r>
-              </a:p>
-              <a:p>
-                <a:r>
-                  <a:rPr lang="en-GB" sz="2400" dirty="0"/>
-                  <a:t>sum computationally more convenient than product</a:t>
-                </a:r>
-              </a:p>
-              <a:p>
-                <a:pPr marL="0" indent="0">
-                  <a:buNone/>
-                </a:pPr>
-                <a:endParaRPr lang="en-GB" sz="2400" dirty="0"/>
-              </a:p>
-              <a:p>
-                <a:pPr marL="0" indent="0">
-                  <a:buNone/>
-                </a:pPr>
-                <a:r>
-                  <a:rPr lang="en-DE" sz="2400" dirty="0"/>
-                  <a:t>negative log-likelihood:</a:t>
-                </a:r>
-                <a:r>
-                  <a:rPr lang="en-DE" sz="2400" dirty="0">
-                    <a:sym typeface="Wingdings" pitchFamily="2" charset="2"/>
-                  </a:rPr>
-                  <a:t> minimization instead of maximization</a:t>
-                </a:r>
-              </a:p>
-              <a:p>
-                <a:pPr marL="0" indent="0">
-                  <a:buNone/>
-                </a:pPr>
-                <a14:m>
-                  <m:oMathPara xmlns:m="http://schemas.openxmlformats.org/officeDocument/2006/math">
-                    <m:oMathParaPr>
-                      <m:jc m:val="left"/>
-                    </m:oMathParaPr>
-                    <m:oMath xmlns:m="http://schemas.openxmlformats.org/officeDocument/2006/math">
-                      <m:sSub>
-                        <m:sSubPr>
-                          <m:ctrlPr>
-                            <a:rPr lang="en-US" sz="2400" b="0" i="1" smtClean="0">
-                              <a:latin typeface="Cambria Math" panose="02040503050406030204" pitchFamily="18" charset="0"/>
-                              <a:ea typeface="Cambria Math" panose="02040503050406030204" pitchFamily="18" charset="0"/>
-                            </a:rPr>
-                          </m:ctrlPr>
-                        </m:sSubPr>
-                        <m:e>
-                          <m:acc>
-                            <m:accPr>
-                              <m:chr m:val="̂"/>
-                              <m:ctrlPr>
-                                <a:rPr lang="en-US" sz="2400" b="0" i="1" smtClean="0">
-                                  <a:latin typeface="Cambria Math" panose="02040503050406030204" pitchFamily="18" charset="0"/>
-                                  <a:ea typeface="Cambria Math" panose="02040503050406030204" pitchFamily="18" charset="0"/>
-                                </a:rPr>
-                              </m:ctrlPr>
-                            </m:accPr>
-                            <m:e>
-                              <m:r>
-                                <a:rPr lang="en-GB" sz="2400" b="1" i="1">
-                                  <a:latin typeface="Cambria Math" panose="02040503050406030204" pitchFamily="18" charset="0"/>
-                                  <a:ea typeface="Cambria Math" panose="02040503050406030204" pitchFamily="18" charset="0"/>
-                                </a:rPr>
-                                <m:t>𝜽</m:t>
-                              </m:r>
-                            </m:e>
-                          </m:acc>
-                          <m:r>
-                            <a:rPr lang="en-US" sz="2400" b="0" i="1" smtClean="0">
-                              <a:latin typeface="Cambria Math" panose="02040503050406030204" pitchFamily="18" charset="0"/>
-                              <a:ea typeface="Cambria Math" panose="02040503050406030204" pitchFamily="18" charset="0"/>
-                            </a:rPr>
-                            <m:t>=</m:t>
-                          </m:r>
-                          <m:r>
-                            <m:rPr>
-                              <m:sty m:val="p"/>
-                            </m:rPr>
-                            <a:rPr lang="en-US" sz="2400" b="0" i="0" smtClean="0">
-                              <a:latin typeface="Cambria Math" panose="02040503050406030204" pitchFamily="18" charset="0"/>
-                              <a:ea typeface="Cambria Math" panose="02040503050406030204" pitchFamily="18" charset="0"/>
-                            </a:rPr>
-                            <m:t>argmax</m:t>
-                          </m:r>
-                        </m:e>
-                        <m:sub>
-                          <m:acc>
-                            <m:accPr>
-                              <m:chr m:val="̂"/>
-                              <m:ctrlPr>
-                                <a:rPr lang="en-US" sz="2400" b="0" i="1" smtClean="0">
-                                  <a:latin typeface="Cambria Math" panose="02040503050406030204" pitchFamily="18" charset="0"/>
-                                  <a:ea typeface="Cambria Math" panose="02040503050406030204" pitchFamily="18" charset="0"/>
-                                </a:rPr>
-                              </m:ctrlPr>
-                            </m:accPr>
-                            <m:e>
-                              <m:r>
-                                <a:rPr lang="en-GB" sz="2400" b="1" i="1">
-                                  <a:latin typeface="Cambria Math" panose="02040503050406030204" pitchFamily="18" charset="0"/>
-                                  <a:ea typeface="Cambria Math" panose="02040503050406030204" pitchFamily="18" charset="0"/>
-                                </a:rPr>
-                                <m:t>𝜽</m:t>
-                              </m:r>
-                            </m:e>
-                          </m:acc>
-                        </m:sub>
-                      </m:sSub>
-                      <m:r>
-                        <a:rPr lang="en-US" sz="2400" b="0" i="1" smtClean="0">
-                          <a:latin typeface="Cambria Math" panose="02040503050406030204" pitchFamily="18" charset="0"/>
-                          <a:ea typeface="Cambria Math" panose="02040503050406030204" pitchFamily="18" charset="0"/>
-                        </a:rPr>
-                        <m:t> </m:t>
-                      </m:r>
-                      <m:r>
-                        <a:rPr lang="en-GB" sz="2400" i="1">
-                          <a:latin typeface="Cambria Math" panose="02040503050406030204" pitchFamily="18" charset="0"/>
-                          <a:ea typeface="Cambria Math" panose="02040503050406030204" pitchFamily="18" charset="0"/>
-                        </a:rPr>
-                        <m:t>ℓ</m:t>
-                      </m:r>
-                      <m:d>
-                        <m:dPr>
-                          <m:ctrlPr>
-                            <a:rPr lang="en-GB" sz="2400" i="1">
-                              <a:latin typeface="Cambria Math" panose="02040503050406030204" pitchFamily="18" charset="0"/>
-                              <a:ea typeface="Cambria Math" panose="02040503050406030204" pitchFamily="18" charset="0"/>
-                            </a:rPr>
-                          </m:ctrlPr>
-                        </m:dPr>
-                        <m:e>
-                          <m:acc>
-                            <m:accPr>
-                              <m:chr m:val="̂"/>
-                              <m:ctrlPr>
-                                <a:rPr lang="en-GB" sz="2400" b="1" i="1" smtClean="0">
-                                  <a:latin typeface="Cambria Math" panose="02040503050406030204" pitchFamily="18" charset="0"/>
-                                  <a:ea typeface="Cambria Math" panose="02040503050406030204" pitchFamily="18" charset="0"/>
-                                </a:rPr>
-                              </m:ctrlPr>
-                            </m:accPr>
-                            <m:e>
-                              <m:r>
-                                <a:rPr lang="en-GB" sz="2400" b="1" i="1">
-                                  <a:latin typeface="Cambria Math" panose="02040503050406030204" pitchFamily="18" charset="0"/>
-                                  <a:ea typeface="Cambria Math" panose="02040503050406030204" pitchFamily="18" charset="0"/>
-                                </a:rPr>
-                                <m:t>𝜽</m:t>
-                              </m:r>
-                            </m:e>
-                          </m:acc>
-                          <m:r>
-                            <a:rPr lang="en-US" sz="2400" i="1">
-                              <a:latin typeface="Cambria Math" panose="02040503050406030204" pitchFamily="18" charset="0"/>
-                              <a:ea typeface="Cambria Math" panose="02040503050406030204" pitchFamily="18" charset="0"/>
-                            </a:rPr>
-                            <m:t>;</m:t>
-                          </m:r>
-                          <m:r>
-                            <a:rPr lang="en-US" sz="2400" b="1" i="1" smtClean="0">
-                              <a:latin typeface="Cambria Math" panose="02040503050406030204" pitchFamily="18" charset="0"/>
-                              <a:ea typeface="Cambria Math" panose="02040503050406030204" pitchFamily="18" charset="0"/>
-                            </a:rPr>
-                            <m:t>𝒚</m:t>
-                          </m:r>
-                          <m:r>
-                            <a:rPr lang="en-US" sz="2400" i="1" smtClean="0">
-                              <a:latin typeface="Cambria Math" panose="02040503050406030204" pitchFamily="18" charset="0"/>
-                              <a:ea typeface="Cambria Math" panose="02040503050406030204" pitchFamily="18" charset="0"/>
-                            </a:rPr>
-                            <m:t> </m:t>
-                          </m:r>
-                          <m:r>
-                            <a:rPr lang="en-US" sz="2400" i="1">
-                              <a:latin typeface="Cambria Math" panose="02040503050406030204" pitchFamily="18" charset="0"/>
-                              <a:ea typeface="Cambria Math" panose="02040503050406030204" pitchFamily="18" charset="0"/>
-                            </a:rPr>
-                            <m:t>|</m:t>
-                          </m:r>
-                          <m:r>
-                            <a:rPr lang="en-US" sz="2400" b="1" i="1" smtClean="0">
-                              <a:latin typeface="Cambria Math" panose="02040503050406030204" pitchFamily="18" charset="0"/>
-                              <a:ea typeface="Cambria Math" panose="02040503050406030204" pitchFamily="18" charset="0"/>
-                            </a:rPr>
-                            <m:t>𝒙</m:t>
-                          </m:r>
-                        </m:e>
-                      </m:d>
-                      <m:r>
-                        <a:rPr lang="en-US" sz="2400" b="0" i="0" smtClean="0">
-                          <a:latin typeface="Cambria Math" panose="02040503050406030204" pitchFamily="18" charset="0"/>
-                          <a:ea typeface="Cambria Math" panose="02040503050406030204" pitchFamily="18" charset="0"/>
-                        </a:rPr>
-                        <m:t>=</m:t>
-                      </m:r>
-                      <m:sSub>
-                        <m:sSubPr>
-                          <m:ctrlPr>
-                            <a:rPr lang="en-US" sz="2400" i="1">
-                              <a:latin typeface="Cambria Math" panose="02040503050406030204" pitchFamily="18" charset="0"/>
-                              <a:ea typeface="Cambria Math" panose="02040503050406030204" pitchFamily="18" charset="0"/>
-                            </a:rPr>
-                          </m:ctrlPr>
-                        </m:sSubPr>
-                        <m:e>
-                          <m:r>
-                            <m:rPr>
-                              <m:sty m:val="p"/>
-                            </m:rPr>
-                            <a:rPr lang="en-US" sz="2400">
-                              <a:latin typeface="Cambria Math" panose="02040503050406030204" pitchFamily="18" charset="0"/>
-                              <a:ea typeface="Cambria Math" panose="02040503050406030204" pitchFamily="18" charset="0"/>
-                            </a:rPr>
-                            <m:t>arg</m:t>
-                          </m:r>
-                          <m:r>
-                            <m:rPr>
-                              <m:sty m:val="p"/>
-                            </m:rPr>
-                            <a:rPr lang="en-US" sz="2400" b="0" i="0" smtClean="0">
-                              <a:latin typeface="Cambria Math" panose="02040503050406030204" pitchFamily="18" charset="0"/>
-                              <a:ea typeface="Cambria Math" panose="02040503050406030204" pitchFamily="18" charset="0"/>
-                            </a:rPr>
-                            <m:t>min</m:t>
-                          </m:r>
-                        </m:e>
-                        <m:sub>
-                          <m:acc>
-                            <m:accPr>
-                              <m:chr m:val="̂"/>
-                              <m:ctrlPr>
-                                <a:rPr lang="en-US" sz="2400" b="0" i="1" smtClean="0">
-                                  <a:latin typeface="Cambria Math" panose="02040503050406030204" pitchFamily="18" charset="0"/>
-                                  <a:ea typeface="Cambria Math" panose="02040503050406030204" pitchFamily="18" charset="0"/>
-                                </a:rPr>
-                              </m:ctrlPr>
-                            </m:accPr>
-                            <m:e>
-                              <m:r>
-                                <a:rPr lang="en-GB" sz="2400" b="1" i="1">
-                                  <a:latin typeface="Cambria Math" panose="02040503050406030204" pitchFamily="18" charset="0"/>
-                                  <a:ea typeface="Cambria Math" panose="02040503050406030204" pitchFamily="18" charset="0"/>
-                                </a:rPr>
-                                <m:t>𝜽</m:t>
-                              </m:r>
-                            </m:e>
-                          </m:acc>
-                        </m:sub>
-                      </m:sSub>
-                      <m:r>
-                        <a:rPr lang="en-US" sz="2400" b="0" i="1" smtClean="0">
-                          <a:latin typeface="Cambria Math" panose="02040503050406030204" pitchFamily="18" charset="0"/>
-                          <a:ea typeface="Cambria Math" panose="02040503050406030204" pitchFamily="18" charset="0"/>
-                        </a:rPr>
-                        <m:t> </m:t>
-                      </m:r>
-                      <m:d>
-                        <m:dPr>
-                          <m:ctrlPr>
-                            <a:rPr lang="en-US" sz="2400" b="0" i="1" smtClean="0">
-                              <a:latin typeface="Cambria Math" panose="02040503050406030204" pitchFamily="18" charset="0"/>
-                              <a:ea typeface="Cambria Math" panose="02040503050406030204" pitchFamily="18" charset="0"/>
-                            </a:rPr>
-                          </m:ctrlPr>
-                        </m:dPr>
-                        <m:e>
-                          <m:r>
-                            <a:rPr lang="en-US" sz="2400" b="0" i="1" smtClean="0">
-                              <a:latin typeface="Cambria Math" panose="02040503050406030204" pitchFamily="18" charset="0"/>
-                              <a:ea typeface="Cambria Math" panose="02040503050406030204" pitchFamily="18" charset="0"/>
-                            </a:rPr>
-                            <m:t>−</m:t>
-                          </m:r>
-                          <m:r>
-                            <a:rPr lang="en-GB" sz="2400" i="1">
-                              <a:latin typeface="Cambria Math" panose="02040503050406030204" pitchFamily="18" charset="0"/>
-                              <a:ea typeface="Cambria Math" panose="02040503050406030204" pitchFamily="18" charset="0"/>
-                            </a:rPr>
-                            <m:t>ℓ</m:t>
-                          </m:r>
-                          <m:d>
-                            <m:dPr>
-                              <m:ctrlPr>
-                                <a:rPr lang="en-GB" sz="2400" i="1">
-                                  <a:latin typeface="Cambria Math" panose="02040503050406030204" pitchFamily="18" charset="0"/>
-                                  <a:ea typeface="Cambria Math" panose="02040503050406030204" pitchFamily="18" charset="0"/>
-                                </a:rPr>
-                              </m:ctrlPr>
-                            </m:dPr>
-                            <m:e>
-                              <m:acc>
-                                <m:accPr>
-                                  <m:chr m:val="̂"/>
-                                  <m:ctrlPr>
-                                    <a:rPr lang="en-GB" sz="2400" b="0" i="1" smtClean="0">
-                                      <a:latin typeface="Cambria Math" panose="02040503050406030204" pitchFamily="18" charset="0"/>
-                                      <a:ea typeface="Cambria Math" panose="02040503050406030204" pitchFamily="18" charset="0"/>
-                                    </a:rPr>
-                                  </m:ctrlPr>
-                                </m:accPr>
-                                <m:e>
-                                  <m:r>
-                                    <a:rPr lang="en-GB" sz="2400" b="1" i="1">
-                                      <a:latin typeface="Cambria Math" panose="02040503050406030204" pitchFamily="18" charset="0"/>
-                                      <a:ea typeface="Cambria Math" panose="02040503050406030204" pitchFamily="18" charset="0"/>
-                                    </a:rPr>
-                                    <m:t>𝜽</m:t>
-                                  </m:r>
-                                </m:e>
-                              </m:acc>
-                              <m:r>
-                                <a:rPr lang="en-US" sz="2400" i="1">
-                                  <a:latin typeface="Cambria Math" panose="02040503050406030204" pitchFamily="18" charset="0"/>
-                                  <a:ea typeface="Cambria Math" panose="02040503050406030204" pitchFamily="18" charset="0"/>
-                                </a:rPr>
-                                <m:t>;</m:t>
-                              </m:r>
-                              <m:r>
-                                <a:rPr lang="en-US" sz="2400" b="1" i="1">
-                                  <a:latin typeface="Cambria Math" panose="02040503050406030204" pitchFamily="18" charset="0"/>
-                                  <a:ea typeface="Cambria Math" panose="02040503050406030204" pitchFamily="18" charset="0"/>
-                                </a:rPr>
-                                <m:t>𝒚</m:t>
-                              </m:r>
-                              <m:r>
-                                <a:rPr lang="en-US" sz="2400" i="1">
-                                  <a:latin typeface="Cambria Math" panose="02040503050406030204" pitchFamily="18" charset="0"/>
-                                  <a:ea typeface="Cambria Math" panose="02040503050406030204" pitchFamily="18" charset="0"/>
-                                </a:rPr>
-                                <m:t> |</m:t>
-                              </m:r>
-                              <m:r>
-                                <a:rPr lang="en-US" sz="2400" b="1" i="1">
-                                  <a:latin typeface="Cambria Math" panose="02040503050406030204" pitchFamily="18" charset="0"/>
-                                  <a:ea typeface="Cambria Math" panose="02040503050406030204" pitchFamily="18" charset="0"/>
-                                </a:rPr>
-                                <m:t>𝒙</m:t>
-                              </m:r>
-                            </m:e>
-                          </m:d>
-                        </m:e>
-                      </m:d>
-                    </m:oMath>
-                  </m:oMathPara>
-                </a14:m>
-                <a:endParaRPr lang="en-DE" sz="2400" dirty="0"/>
-              </a:p>
-            </p:txBody>
-          </p:sp>
-        </mc:Choice>
-        <mc:Fallback xmlns="">
-          <p:sp>
-            <p:nvSpPr>
-              <p:cNvPr id="3" name="Content Placeholder 2">
-                <a:extLst>
-                  <a:ext uri="{FF2B5EF4-FFF2-40B4-BE49-F238E27FC236}">
-                    <a16:creationId xmlns:a16="http://schemas.microsoft.com/office/drawing/2014/main" id="{A1D50BE1-6E3C-96FF-14B6-FBB141E405D4}"/>
-                  </a:ext>
-                </a:extLst>
-              </p:cNvPr>
-              <p:cNvSpPr>
-                <a:spLocks noGrp="1" noRot="1" noChangeAspect="1" noMove="1" noResize="1" noEditPoints="1" noAdjustHandles="1" noChangeArrowheads="1" noChangeShapeType="1" noTextEdit="1"/>
-              </p:cNvSpPr>
-              <p:nvPr>
-                <p:ph idx="1"/>
-              </p:nvPr>
-            </p:nvSpPr>
-            <p:spPr>
-              <a:blipFill>
-                <a:blip r:embed="rId2"/>
-                <a:stretch>
-                  <a:fillRect l="-724" t="-9884" b="-291"/>
-                </a:stretch>
-              </a:blipFill>
-            </p:spPr>
-            <p:txBody>
-              <a:bodyPr/>
-              <a:lstStyle/>
-              <a:p>
-                <a:r>
-                  <a:rPr lang="en-DE">
-                    <a:noFill/>
-                  </a:rPr>
-                  <a:t> </a:t>
-                </a:r>
-              </a:p>
-            </p:txBody>
-          </p:sp>
-        </mc:Fallback>
-      </mc:AlternateContent>
-      <p:sp>
-        <p:nvSpPr>
-          <p:cNvPr id="4" name="Slide Number Placeholder 3">
-            <a:extLst>
-              <a:ext uri="{FF2B5EF4-FFF2-40B4-BE49-F238E27FC236}">
-                <a16:creationId xmlns:a16="http://schemas.microsoft.com/office/drawing/2014/main" id="{D733ABB5-C09F-871F-F43B-E53B1C04D5F6}"/>
-              </a:ext>
-            </a:extLst>
-          </p:cNvPr>
-          <p:cNvSpPr>
-            <a:spLocks noGrp="1"/>
-          </p:cNvSpPr>
-          <p:nvPr>
-            <p:ph type="sldNum" sz="quarter" idx="12"/>
-          </p:nvPr>
-        </p:nvSpPr>
-        <p:spPr/>
-        <p:txBody>
-          <a:bodyPr/>
-          <a:lstStyle/>
-          <a:p>
-            <a:fld id="{77E1BB0D-8AD4-A14C-8FD5-F1619D1A43A2}" type="slidenum">
-              <a:rPr lang="en-DE" smtClean="0"/>
-              <a:t>10</a:t>
-            </a:fld>
-            <a:endParaRPr lang="en-DE"/>
-          </a:p>
-        </p:txBody>
-      </p:sp>
-      <mc:AlternateContent xmlns:mc="http://schemas.openxmlformats.org/markup-compatibility/2006" xmlns:a14="http://schemas.microsoft.com/office/drawing/2010/main">
-        <mc:Choice Requires="a14">
-          <p:sp>
-            <p:nvSpPr>
-              <p:cNvPr id="5" name="TextBox 4">
-                <a:extLst>
-                  <a:ext uri="{FF2B5EF4-FFF2-40B4-BE49-F238E27FC236}">
-                    <a16:creationId xmlns:a16="http://schemas.microsoft.com/office/drawing/2014/main" id="{EF247870-2EBE-384D-F1E4-36BA1902C127}"/>
-                  </a:ext>
-                </a:extLst>
-              </p:cNvPr>
-              <p:cNvSpPr txBox="1"/>
-              <p:nvPr/>
-            </p:nvSpPr>
-            <p:spPr>
-              <a:xfrm>
-                <a:off x="8610600" y="681037"/>
-                <a:ext cx="3390243" cy="1250855"/>
-              </a:xfrm>
-              <a:prstGeom prst="rect">
-                <a:avLst/>
-              </a:prstGeom>
-              <a:solidFill>
-                <a:schemeClr val="bg2"/>
-              </a:solidFill>
-              <a:ln>
-                <a:noFill/>
-              </a:ln>
-            </p:spPr>
-            <p:txBody>
-              <a:bodyPr wrap="square">
-                <a:spAutoFit/>
-              </a:bodyPr>
-              <a:lstStyle/>
-              <a:p>
-                <a:r>
-                  <a:rPr lang="en-GB" dirty="0"/>
-                  <a:t>m</a:t>
-                </a:r>
-                <a:r>
-                  <a:rPr lang="en-DE" dirty="0"/>
-                  <a:t>odel, e.g., for linear regression:</a:t>
-                </a:r>
-              </a:p>
-              <a:p>
-                <a:pPr/>
-                <a14:m>
-                  <m:oMathPara xmlns:m="http://schemas.openxmlformats.org/officeDocument/2006/math">
-                    <m:oMathParaPr>
-                      <m:jc m:val="centerGroup"/>
-                    </m:oMathParaPr>
-                    <m:oMath xmlns:m="http://schemas.openxmlformats.org/officeDocument/2006/math">
-                      <m:r>
-                        <a:rPr lang="en-US" b="0" i="1" smtClean="0">
-                          <a:latin typeface="Cambria Math" panose="02040503050406030204" pitchFamily="18" charset="0"/>
-                        </a:rPr>
-                        <m:t>𝑝</m:t>
-                      </m:r>
-                      <m:d>
-                        <m:dPr>
-                          <m:ctrlPr>
-                            <a:rPr lang="en-US" b="0" i="1" smtClean="0">
-                              <a:latin typeface="Cambria Math" panose="02040503050406030204" pitchFamily="18" charset="0"/>
-                            </a:rPr>
-                          </m:ctrlPr>
-                        </m:dPr>
-                        <m:e>
-                          <m:sSub>
-                            <m:sSubPr>
-                              <m:ctrlPr>
-                                <a:rPr lang="en-US" i="1">
-                                  <a:latin typeface="Cambria Math" panose="02040503050406030204" pitchFamily="18" charset="0"/>
-                                </a:rPr>
-                              </m:ctrlPr>
-                            </m:sSubPr>
-                            <m:e>
-                              <m:r>
-                                <a:rPr lang="en-US" i="1">
-                                  <a:latin typeface="Cambria Math" panose="02040503050406030204" pitchFamily="18" charset="0"/>
-                                </a:rPr>
-                                <m:t>𝑦</m:t>
-                              </m:r>
-                            </m:e>
-                            <m:sub>
-                              <m:r>
-                                <a:rPr lang="en-US" i="1">
-                                  <a:latin typeface="Cambria Math" panose="02040503050406030204" pitchFamily="18" charset="0"/>
-                                </a:rPr>
-                                <m:t>𝑖</m:t>
-                              </m:r>
-                            </m:sub>
-                          </m:sSub>
-                          <m:r>
-                            <a:rPr lang="en-US" b="0" i="1" smtClean="0">
-                              <a:latin typeface="Cambria Math" panose="02040503050406030204" pitchFamily="18" charset="0"/>
-                            </a:rPr>
-                            <m:t>|</m:t>
-                          </m:r>
-                          <m:sSub>
-                            <m:sSubPr>
-                              <m:ctrlPr>
-                                <a:rPr lang="en-US" b="1" i="1">
-                                  <a:latin typeface="Cambria Math" panose="02040503050406030204" pitchFamily="18" charset="0"/>
-                                </a:rPr>
-                              </m:ctrlPr>
-                            </m:sSubPr>
-                            <m:e>
-                              <m:r>
-                                <a:rPr lang="en-US" b="1" i="1">
-                                  <a:latin typeface="Cambria Math" panose="02040503050406030204" pitchFamily="18" charset="0"/>
-                                </a:rPr>
-                                <m:t>𝒙</m:t>
-                              </m:r>
-                            </m:e>
-                            <m:sub>
-                              <m:r>
-                                <a:rPr lang="en-US" i="1">
-                                  <a:latin typeface="Cambria Math" panose="02040503050406030204" pitchFamily="18" charset="0"/>
-                                </a:rPr>
-                                <m:t>𝑖</m:t>
-                              </m:r>
-                            </m:sub>
-                          </m:sSub>
-                        </m:e>
-                      </m:d>
-                      <m:r>
-                        <a:rPr lang="en-US" b="0" i="1" smtClean="0">
-                          <a:latin typeface="Cambria Math" panose="02040503050406030204" pitchFamily="18" charset="0"/>
-                        </a:rPr>
-                        <m:t>=</m:t>
-                      </m:r>
-                      <m:r>
-                        <a:rPr lang="en-US" b="0" i="1" smtClean="0">
-                          <a:latin typeface="Cambria Math" panose="02040503050406030204" pitchFamily="18" charset="0"/>
-                          <a:ea typeface="Cambria Math" panose="02040503050406030204" pitchFamily="18" charset="0"/>
-                        </a:rPr>
-                        <m:t>𝒩</m:t>
-                      </m:r>
-                      <m:d>
-                        <m:dPr>
-                          <m:ctrlPr>
-                            <a:rPr lang="en-US" b="0" i="1" smtClean="0">
-                              <a:latin typeface="Cambria Math" panose="02040503050406030204" pitchFamily="18" charset="0"/>
-                            </a:rPr>
-                          </m:ctrlPr>
-                        </m:dPr>
-                        <m:e>
-                          <m:r>
-                            <a:rPr lang="en-US" b="0" i="1" smtClean="0">
-                              <a:latin typeface="Cambria Math" panose="02040503050406030204" pitchFamily="18" charset="0"/>
-                            </a:rPr>
-                            <m:t>𝑦</m:t>
-                          </m:r>
-                          <m:r>
-                            <a:rPr lang="en-US" b="0" i="1" smtClean="0">
-                              <a:latin typeface="Cambria Math" panose="02040503050406030204" pitchFamily="18" charset="0"/>
-                            </a:rPr>
-                            <m:t>;</m:t>
-                          </m:r>
-                          <m:acc>
-                            <m:accPr>
-                              <m:chr m:val="̂"/>
-                              <m:ctrlPr>
-                                <a:rPr lang="en-US" i="1">
-                                  <a:latin typeface="Cambria Math" panose="02040503050406030204" pitchFamily="18" charset="0"/>
-                                  <a:ea typeface="Cambria Math" panose="02040503050406030204" pitchFamily="18" charset="0"/>
-                                </a:rPr>
-                              </m:ctrlPr>
-                            </m:accPr>
-                            <m:e>
-                              <m:r>
-                                <a:rPr lang="en-US" i="1">
-                                  <a:latin typeface="Cambria Math" panose="02040503050406030204" pitchFamily="18" charset="0"/>
-                                  <a:ea typeface="Cambria Math" panose="02040503050406030204" pitchFamily="18" charset="0"/>
-                                </a:rPr>
-                                <m:t>𝛼</m:t>
-                              </m:r>
-                            </m:e>
-                          </m:acc>
-                          <m:r>
-                            <a:rPr lang="en-US" i="1">
-                              <a:latin typeface="Cambria Math" panose="02040503050406030204" pitchFamily="18" charset="0"/>
-                              <a:ea typeface="Cambria Math" panose="02040503050406030204" pitchFamily="18" charset="0"/>
-                            </a:rPr>
-                            <m:t>+</m:t>
-                          </m:r>
-                          <m:sSub>
-                            <m:sSubPr>
-                              <m:ctrlPr>
-                                <a:rPr lang="en-US" b="1" i="1">
-                                  <a:latin typeface="Cambria Math" panose="02040503050406030204" pitchFamily="18" charset="0"/>
-                                </a:rPr>
-                              </m:ctrlPr>
-                            </m:sSubPr>
-                            <m:e>
-                              <m:r>
-                                <a:rPr lang="en-US" b="1" i="1">
-                                  <a:latin typeface="Cambria Math" panose="02040503050406030204" pitchFamily="18" charset="0"/>
-                                </a:rPr>
-                                <m:t>𝒙</m:t>
-                              </m:r>
-                            </m:e>
-                            <m:sub>
-                              <m:r>
-                                <a:rPr lang="en-US" i="1">
-                                  <a:latin typeface="Cambria Math" panose="02040503050406030204" pitchFamily="18" charset="0"/>
-                                </a:rPr>
-                                <m:t>𝑖</m:t>
-                              </m:r>
-                            </m:sub>
-                          </m:sSub>
-                          <m:r>
-                            <a:rPr lang="en-US" b="0" i="1" smtClean="0">
-                              <a:latin typeface="Cambria Math" panose="02040503050406030204" pitchFamily="18" charset="0"/>
-                            </a:rPr>
-                            <m:t> </m:t>
-                          </m:r>
-                          <m:acc>
-                            <m:accPr>
-                              <m:chr m:val="̂"/>
-                              <m:ctrlPr>
-                                <a:rPr lang="en-US" i="1">
-                                  <a:latin typeface="Cambria Math" panose="02040503050406030204" pitchFamily="18" charset="0"/>
-                                  <a:ea typeface="Cambria Math" panose="02040503050406030204" pitchFamily="18" charset="0"/>
-                                </a:rPr>
-                              </m:ctrlPr>
-                            </m:accPr>
-                            <m:e>
-                              <m:r>
-                                <a:rPr lang="en-US" b="1" i="1">
-                                  <a:latin typeface="Cambria Math" panose="02040503050406030204" pitchFamily="18" charset="0"/>
-                                  <a:ea typeface="Cambria Math" panose="02040503050406030204" pitchFamily="18" charset="0"/>
-                                </a:rPr>
-                                <m:t>𝜷</m:t>
-                              </m:r>
-                            </m:e>
-                          </m:acc>
-                          <m:r>
-                            <a:rPr lang="en-US" b="0" i="1" smtClean="0">
-                              <a:latin typeface="Cambria Math" panose="02040503050406030204" pitchFamily="18" charset="0"/>
-                              <a:ea typeface="Cambria Math" panose="02040503050406030204" pitchFamily="18" charset="0"/>
-                            </a:rPr>
-                            <m:t>,</m:t>
-                          </m:r>
-                          <m:sSup>
-                            <m:sSupPr>
-                              <m:ctrlPr>
-                                <a:rPr lang="en-US" b="0" i="1" smtClean="0">
-                                  <a:latin typeface="Cambria Math" panose="02040503050406030204" pitchFamily="18" charset="0"/>
-                                </a:rPr>
-                              </m:ctrlPr>
-                            </m:sSupPr>
-                            <m:e>
-                              <m:r>
-                                <a:rPr lang="en-US" b="0" i="1" smtClean="0">
-                                  <a:latin typeface="Cambria Math" panose="02040503050406030204" pitchFamily="18" charset="0"/>
-                                  <a:ea typeface="Cambria Math" panose="02040503050406030204" pitchFamily="18" charset="0"/>
-                                </a:rPr>
-                                <m:t>𝜎</m:t>
-                              </m:r>
-                            </m:e>
-                            <m:sup>
-                              <m:r>
-                                <a:rPr lang="en-US" b="0" i="1" smtClean="0">
-                                  <a:latin typeface="Cambria Math" panose="02040503050406030204" pitchFamily="18" charset="0"/>
-                                </a:rPr>
-                                <m:t>2</m:t>
-                              </m:r>
-                            </m:sup>
-                          </m:sSup>
-                        </m:e>
-                      </m:d>
-                    </m:oMath>
-                  </m:oMathPara>
-                </a14:m>
-                <a:endParaRPr lang="en-DE" dirty="0"/>
-              </a:p>
-              <a:p>
-                <a:pPr marL="285750" indent="-285750">
-                  <a:buFont typeface="Arial" panose="020B0604020202020204" pitchFamily="34" charset="0"/>
-                  <a:buChar char="•"/>
-                </a:pPr>
-                <a:r>
-                  <a:rPr lang="en-GB" dirty="0"/>
-                  <a:t>with </a:t>
-                </a:r>
-                <a14:m>
-                  <m:oMath xmlns:m="http://schemas.openxmlformats.org/officeDocument/2006/math">
-                    <m:r>
-                      <a:rPr lang="en-US" b="1" i="1">
-                        <a:latin typeface="Cambria Math" panose="02040503050406030204" pitchFamily="18" charset="0"/>
-                      </a:rPr>
-                      <m:t>𝒚</m:t>
-                    </m:r>
-                  </m:oMath>
-                </a14:m>
-                <a:r>
-                  <a:rPr lang="en-GB" dirty="0"/>
-                  <a:t>, </a:t>
-                </a:r>
-                <a14:m>
-                  <m:oMath xmlns:m="http://schemas.openxmlformats.org/officeDocument/2006/math">
-                    <m:r>
-                      <a:rPr lang="en-US" b="1" i="0" smtClean="0">
-                        <a:latin typeface="Cambria Math" panose="02040503050406030204" pitchFamily="18" charset="0"/>
-                      </a:rPr>
-                      <m:t>𝐗</m:t>
-                    </m:r>
-                  </m:oMath>
-                </a14:m>
-                <a:r>
-                  <a:rPr lang="en-GB" dirty="0"/>
-                  <a:t> g</a:t>
-                </a:r>
-                <a:r>
-                  <a:rPr lang="en-DE" dirty="0"/>
-                  <a:t>iven in training</a:t>
-                </a:r>
-              </a:p>
-              <a:p>
-                <a:pPr marL="285750" indent="-285750">
-                  <a:buFont typeface="Arial" panose="020B0604020202020204" pitchFamily="34" charset="0"/>
-                  <a:buChar char="•"/>
-                </a:pPr>
-                <a14:m>
-                  <m:oMath xmlns:m="http://schemas.openxmlformats.org/officeDocument/2006/math">
-                    <m:acc>
-                      <m:accPr>
-                        <m:chr m:val="̂"/>
-                        <m:ctrlPr>
-                          <a:rPr lang="en-GB" b="1" i="1" smtClean="0">
-                            <a:latin typeface="Cambria Math" panose="02040503050406030204" pitchFamily="18" charset="0"/>
-                            <a:ea typeface="Cambria Math" panose="02040503050406030204" pitchFamily="18" charset="0"/>
-                          </a:rPr>
-                        </m:ctrlPr>
-                      </m:accPr>
-                      <m:e>
-                        <m:r>
-                          <a:rPr lang="en-GB" b="1" i="1">
-                            <a:latin typeface="Cambria Math" panose="02040503050406030204" pitchFamily="18" charset="0"/>
-                            <a:ea typeface="Cambria Math" panose="02040503050406030204" pitchFamily="18" charset="0"/>
-                          </a:rPr>
-                          <m:t>𝜽</m:t>
-                        </m:r>
-                      </m:e>
-                    </m:acc>
-                    <m:r>
-                      <a:rPr lang="en-US" b="0" i="1" smtClean="0">
-                        <a:latin typeface="Cambria Math" panose="02040503050406030204" pitchFamily="18" charset="0"/>
-                        <a:ea typeface="Cambria Math" panose="02040503050406030204" pitchFamily="18" charset="0"/>
-                      </a:rPr>
-                      <m:t>=(</m:t>
-                    </m:r>
-                    <m:acc>
-                      <m:accPr>
-                        <m:chr m:val="̂"/>
-                        <m:ctrlPr>
-                          <a:rPr lang="en-US" b="0" i="1" smtClean="0">
-                            <a:latin typeface="Cambria Math" panose="02040503050406030204" pitchFamily="18" charset="0"/>
-                            <a:ea typeface="Cambria Math" panose="02040503050406030204" pitchFamily="18" charset="0"/>
-                          </a:rPr>
-                        </m:ctrlPr>
-                      </m:accPr>
-                      <m:e>
-                        <m:r>
-                          <a:rPr lang="en-US" i="1">
-                            <a:latin typeface="Cambria Math" panose="02040503050406030204" pitchFamily="18" charset="0"/>
-                            <a:ea typeface="Cambria Math" panose="02040503050406030204" pitchFamily="18" charset="0"/>
-                          </a:rPr>
-                          <m:t>𝛼</m:t>
-                        </m:r>
-                      </m:e>
-                    </m:acc>
-                    <m:r>
-                      <a:rPr lang="en-US" b="0" i="1" smtClean="0">
-                        <a:latin typeface="Cambria Math" panose="02040503050406030204" pitchFamily="18" charset="0"/>
-                        <a:ea typeface="Cambria Math" panose="02040503050406030204" pitchFamily="18" charset="0"/>
-                      </a:rPr>
-                      <m:t>,</m:t>
-                    </m:r>
-                    <m:acc>
-                      <m:accPr>
-                        <m:chr m:val="̂"/>
-                        <m:ctrlPr>
-                          <a:rPr lang="en-US" b="0" i="1" smtClean="0">
-                            <a:latin typeface="Cambria Math" panose="02040503050406030204" pitchFamily="18" charset="0"/>
-                            <a:ea typeface="Cambria Math" panose="02040503050406030204" pitchFamily="18" charset="0"/>
-                          </a:rPr>
-                        </m:ctrlPr>
-                      </m:accPr>
-                      <m:e>
-                        <m:r>
-                          <a:rPr lang="en-US" b="1" i="1">
-                            <a:latin typeface="Cambria Math" panose="02040503050406030204" pitchFamily="18" charset="0"/>
-                            <a:ea typeface="Cambria Math" panose="02040503050406030204" pitchFamily="18" charset="0"/>
-                          </a:rPr>
-                          <m:t>𝜷</m:t>
-                        </m:r>
-                      </m:e>
-                    </m:acc>
-                    <m:r>
-                      <a:rPr lang="en-US" b="0" i="0" smtClean="0">
-                        <a:latin typeface="Cambria Math" panose="02040503050406030204" pitchFamily="18" charset="0"/>
-                        <a:ea typeface="Cambria Math" panose="02040503050406030204" pitchFamily="18" charset="0"/>
-                      </a:rPr>
-                      <m:t>,</m:t>
-                    </m:r>
-                    <m:sSup>
-                      <m:sSupPr>
-                        <m:ctrlPr>
-                          <a:rPr lang="en-US" i="1">
-                            <a:latin typeface="Cambria Math" panose="02040503050406030204" pitchFamily="18" charset="0"/>
-                          </a:rPr>
-                        </m:ctrlPr>
-                      </m:sSupPr>
-                      <m:e>
-                        <m:acc>
-                          <m:accPr>
-                            <m:chr m:val="̂"/>
-                            <m:ctrlPr>
-                              <a:rPr lang="en-US" b="1" i="1" smtClean="0">
-                                <a:latin typeface="Cambria Math" panose="02040503050406030204" pitchFamily="18" charset="0"/>
-                                <a:ea typeface="Cambria Math" panose="02040503050406030204" pitchFamily="18" charset="0"/>
-                              </a:rPr>
-                            </m:ctrlPr>
-                          </m:accPr>
-                          <m:e>
-                            <m:r>
-                              <a:rPr lang="en-US" i="1">
-                                <a:latin typeface="Cambria Math" panose="02040503050406030204" pitchFamily="18" charset="0"/>
-                                <a:ea typeface="Cambria Math" panose="02040503050406030204" pitchFamily="18" charset="0"/>
-                              </a:rPr>
-                              <m:t>𝜎</m:t>
-                            </m:r>
-                          </m:e>
-                        </m:acc>
-                      </m:e>
-                      <m:sup>
-                        <m:r>
-                          <a:rPr lang="en-US" i="1">
-                            <a:latin typeface="Cambria Math" panose="02040503050406030204" pitchFamily="18" charset="0"/>
-                          </a:rPr>
-                          <m:t>2</m:t>
-                        </m:r>
-                      </m:sup>
-                    </m:sSup>
-                    <m:r>
-                      <a:rPr lang="en-US" b="0" i="1" smtClean="0">
-                        <a:latin typeface="Cambria Math" panose="02040503050406030204" pitchFamily="18" charset="0"/>
-                      </a:rPr>
-                      <m:t>)</m:t>
-                    </m:r>
-                  </m:oMath>
-                </a14:m>
-                <a:r>
-                  <a:rPr lang="en-DE" dirty="0"/>
-                  <a:t> to be estimated</a:t>
-                </a:r>
-              </a:p>
-            </p:txBody>
-          </p:sp>
-        </mc:Choice>
-        <mc:Fallback xmlns="">
-          <p:sp>
-            <p:nvSpPr>
-              <p:cNvPr id="5" name="TextBox 4">
-                <a:extLst>
-                  <a:ext uri="{FF2B5EF4-FFF2-40B4-BE49-F238E27FC236}">
-                    <a16:creationId xmlns:a16="http://schemas.microsoft.com/office/drawing/2014/main" id="{EF247870-2EBE-384D-F1E4-36BA1902C127}"/>
-                  </a:ext>
-                </a:extLst>
-              </p:cNvPr>
-              <p:cNvSpPr txBox="1">
-                <a:spLocks noRot="1" noChangeAspect="1" noMove="1" noResize="1" noEditPoints="1" noAdjustHandles="1" noChangeArrowheads="1" noChangeShapeType="1" noTextEdit="1"/>
-              </p:cNvSpPr>
-              <p:nvPr/>
-            </p:nvSpPr>
-            <p:spPr>
-              <a:xfrm>
-                <a:off x="8610600" y="681037"/>
-                <a:ext cx="3390243" cy="1250855"/>
-              </a:xfrm>
-              <a:prstGeom prst="rect">
-                <a:avLst/>
-              </a:prstGeom>
-              <a:blipFill>
-                <a:blip r:embed="rId3"/>
-                <a:stretch>
-                  <a:fillRect l="-1866" t="-2000" b="-7000"/>
-                </a:stretch>
-              </a:blipFill>
-              <a:ln>
-                <a:noFill/>
-              </a:ln>
-            </p:spPr>
-            <p:txBody>
-              <a:bodyPr/>
-              <a:lstStyle/>
-              <a:p>
-                <a:r>
-                  <a:rPr lang="en-DE">
-                    <a:noFill/>
-                  </a:rPr>
-                  <a:t> </a:t>
-                </a:r>
-              </a:p>
-            </p:txBody>
-          </p:sp>
-        </mc:Fallback>
-      </mc:AlternateContent>
-      <p:cxnSp>
-        <p:nvCxnSpPr>
-          <p:cNvPr id="7" name="Straight Arrow Connector 6">
-            <a:extLst>
-              <a:ext uri="{FF2B5EF4-FFF2-40B4-BE49-F238E27FC236}">
-                <a16:creationId xmlns:a16="http://schemas.microsoft.com/office/drawing/2014/main" id="{92BCCAE4-34C0-7788-FA9B-023B1837371A}"/>
-              </a:ext>
-            </a:extLst>
-          </p:cNvPr>
-          <p:cNvCxnSpPr>
-            <a:cxnSpLocks/>
-            <a:stCxn id="5" idx="1"/>
-          </p:cNvCxnSpPr>
-          <p:nvPr/>
-        </p:nvCxnSpPr>
-        <p:spPr>
-          <a:xfrm flipH="1">
-            <a:off x="7767145" y="1306465"/>
-            <a:ext cx="843455" cy="1373673"/>
-          </a:xfrm>
-          <a:prstGeom prst="straightConnector1">
-            <a:avLst/>
-          </a:prstGeom>
-          <a:ln>
-            <a:tailEnd type="triangle"/>
-          </a:ln>
-        </p:spPr>
-        <p:style>
-          <a:lnRef idx="1">
-            <a:schemeClr val="accent1"/>
-          </a:lnRef>
-          <a:fillRef idx="0">
-            <a:schemeClr val="accent1"/>
-          </a:fillRef>
-          <a:effectRef idx="0">
-            <a:schemeClr val="accent1"/>
-          </a:effectRef>
-          <a:fontRef idx="minor">
-            <a:schemeClr val="tx1"/>
-          </a:fontRef>
-        </p:style>
-      </p:cxnSp>
-      <p:sp>
-        <p:nvSpPr>
-          <p:cNvPr id="6" name="TextBox 5">
-            <a:extLst>
-              <a:ext uri="{FF2B5EF4-FFF2-40B4-BE49-F238E27FC236}">
-                <a16:creationId xmlns:a16="http://schemas.microsoft.com/office/drawing/2014/main" id="{36626CA9-DB03-94F8-2BE7-F9F356C1A3AA}"/>
-              </a:ext>
-            </a:extLst>
-          </p:cNvPr>
-          <p:cNvSpPr txBox="1"/>
-          <p:nvPr/>
-        </p:nvSpPr>
-        <p:spPr>
-          <a:xfrm>
-            <a:off x="4736758" y="6352143"/>
-            <a:ext cx="1881605" cy="369332"/>
-          </a:xfrm>
-          <a:prstGeom prst="rect">
-            <a:avLst/>
-          </a:prstGeom>
-          <a:noFill/>
-        </p:spPr>
-        <p:txBody>
-          <a:bodyPr wrap="none" rtlCol="0">
-            <a:spAutoFit/>
-          </a:bodyPr>
-          <a:lstStyle/>
-          <a:p>
-            <a:r>
-              <a:rPr lang="en-GB" dirty="0"/>
-              <a:t>objective function</a:t>
-            </a:r>
-          </a:p>
-        </p:txBody>
-      </p:sp>
-      <p:sp>
-        <p:nvSpPr>
-          <p:cNvPr id="8" name="Right Brace 7">
-            <a:extLst>
-              <a:ext uri="{FF2B5EF4-FFF2-40B4-BE49-F238E27FC236}">
-                <a16:creationId xmlns:a16="http://schemas.microsoft.com/office/drawing/2014/main" id="{A44FF520-3933-7B9D-E850-6817B769D990}"/>
-              </a:ext>
-            </a:extLst>
-          </p:cNvPr>
-          <p:cNvSpPr/>
-          <p:nvPr/>
-        </p:nvSpPr>
-        <p:spPr>
-          <a:xfrm rot="5400000">
-            <a:off x="5457502" y="5586047"/>
-            <a:ext cx="197837" cy="1342768"/>
-          </a:xfrm>
-          <a:prstGeom prst="rightBrace">
-            <a:avLst/>
-          </a:prstGeom>
-        </p:spPr>
-        <p:style>
-          <a:lnRef idx="1">
-            <a:schemeClr val="accent1"/>
-          </a:lnRef>
-          <a:fillRef idx="0">
-            <a:schemeClr val="accent1"/>
-          </a:fillRef>
-          <a:effectRef idx="0">
-            <a:schemeClr val="accent1"/>
-          </a:effectRef>
-          <a:fontRef idx="minor">
-            <a:schemeClr val="tx1"/>
-          </a:fontRef>
-        </p:style>
-        <p:txBody>
-          <a:bodyPr rtlCol="0" anchor="ctr"/>
-          <a:lstStyle/>
-          <a:p>
-            <a:pPr algn="ctr"/>
-            <a:endParaRPr lang="en-GB"/>
-          </a:p>
-        </p:txBody>
-      </p:sp>
-    </p:spTree>
-    <p:extLst>
-      <p:ext uri="{BB962C8B-B14F-4D97-AF65-F5344CB8AC3E}">
-        <p14:creationId xmlns:p14="http://schemas.microsoft.com/office/powerpoint/2010/main" val="1005939356"/>
-      </p:ext>
-    </p:extLst>
-  </p:cSld>
-  <p:clrMapOvr>
-    <a:masterClrMapping/>
-  </p:clrMapOvr>
-</p:sld>
-</file>
-
-<file path=ppt/slides/slide11.xml><?xml version="1.0" encoding="utf-8"?>
 <p:sld xmlns:a="http://schemas.openxmlformats.org/drawingml/2006/main" xmlns:r="http://schemas.openxmlformats.org/officeDocument/2006/relationships" xmlns:p="http://schemas.openxmlformats.org/presentationml/2006/main">
   <p:cSld>
     <p:spTree>
@@ -9587,7 +7966,7 @@
           <a:p>
             <a:fld id="{77E1BB0D-8AD4-A14C-8FD5-F1619D1A43A2}" type="slidenum">
               <a:rPr lang="en-DE" smtClean="0"/>
-              <a:t>11</a:t>
+              <a:t>10</a:t>
             </a:fld>
             <a:endParaRPr lang="en-DE"/>
           </a:p>
@@ -9916,7 +8295,7 @@
 </p:sld>
 </file>
 
-<file path=ppt/slides/slide12.xml><?xml version="1.0" encoding="utf-8"?>
+<file path=ppt/slides/slide11.xml><?xml version="1.0" encoding="utf-8"?>
 <p:sld xmlns:a="http://schemas.openxmlformats.org/drawingml/2006/main" xmlns:r="http://schemas.openxmlformats.org/officeDocument/2006/relationships" xmlns:p="http://schemas.openxmlformats.org/presentationml/2006/main">
   <p:cSld>
     <p:spTree>
@@ -11614,7 +9993,7 @@
           <a:p>
             <a:fld id="{77E1BB0D-8AD4-A14C-8FD5-F1619D1A43A2}" type="slidenum">
               <a:rPr lang="en-DE" smtClean="0"/>
-              <a:t>12</a:t>
+              <a:t>11</a:t>
             </a:fld>
             <a:endParaRPr lang="en-DE"/>
           </a:p>
@@ -12040,6 +10419,123 @@
 </p:sld>
 </file>
 
+<file path=ppt/slides/slide12.xml><?xml version="1.0" encoding="utf-8"?>
+<p:sld xmlns:a="http://schemas.openxmlformats.org/drawingml/2006/main" xmlns:r="http://schemas.openxmlformats.org/officeDocument/2006/relationships" xmlns:p="http://schemas.openxmlformats.org/presentationml/2006/main">
+  <p:cSld>
+    <p:spTree>
+      <p:nvGrpSpPr>
+        <p:cNvPr id="1" name=""/>
+        <p:cNvGrpSpPr/>
+        <p:nvPr/>
+      </p:nvGrpSpPr>
+      <p:grpSpPr>
+        <a:xfrm>
+          <a:off x="0" y="0"/>
+          <a:ext cx="0" cy="0"/>
+          <a:chOff x="0" y="0"/>
+          <a:chExt cx="0" cy="0"/>
+        </a:xfrm>
+      </p:grpSpPr>
+      <p:sp>
+        <p:nvSpPr>
+          <p:cNvPr id="2" name="Titel 1">
+            <a:extLst>
+              <a:ext uri="{FF2B5EF4-FFF2-40B4-BE49-F238E27FC236}">
+                <a16:creationId xmlns:a16="http://schemas.microsoft.com/office/drawing/2014/main" id="{0A5960BF-0696-F646-3D20-9C943273D5A6}"/>
+              </a:ext>
+            </a:extLst>
+          </p:cNvPr>
+          <p:cNvSpPr>
+            <a:spLocks noGrp="1"/>
+          </p:cNvSpPr>
+          <p:nvPr>
+            <p:ph type="title"/>
+          </p:nvPr>
+        </p:nvSpPr>
+        <p:spPr/>
+        <p:txBody>
+          <a:bodyPr/>
+          <a:lstStyle/>
+          <a:p>
+            <a:r>
+              <a:rPr lang="de-DE" dirty="0"/>
+              <a:t>Maximum A Posteriori (MAP) </a:t>
+            </a:r>
+            <a:r>
+              <a:rPr lang="de-DE" dirty="0" err="1"/>
+              <a:t>Estimation</a:t>
+            </a:r>
+            <a:endParaRPr lang="de-DE" dirty="0"/>
+          </a:p>
+        </p:txBody>
+      </p:sp>
+      <p:sp>
+        <p:nvSpPr>
+          <p:cNvPr id="3" name="Inhaltsplatzhalter 2">
+            <a:extLst>
+              <a:ext uri="{FF2B5EF4-FFF2-40B4-BE49-F238E27FC236}">
+                <a16:creationId xmlns:a16="http://schemas.microsoft.com/office/drawing/2014/main" id="{CD387CDE-B64C-E3C9-30E5-80EAB23FC9AF}"/>
+              </a:ext>
+            </a:extLst>
+          </p:cNvPr>
+          <p:cNvSpPr>
+            <a:spLocks noGrp="1"/>
+          </p:cNvSpPr>
+          <p:nvPr>
+            <p:ph idx="1"/>
+          </p:nvPr>
+        </p:nvSpPr>
+        <p:spPr/>
+        <p:txBody>
+          <a:bodyPr/>
+          <a:lstStyle/>
+          <a:p>
+            <a:endParaRPr lang="de-DE"/>
+          </a:p>
+        </p:txBody>
+      </p:sp>
+      <p:sp>
+        <p:nvSpPr>
+          <p:cNvPr id="4" name="Foliennummernplatzhalter 3">
+            <a:extLst>
+              <a:ext uri="{FF2B5EF4-FFF2-40B4-BE49-F238E27FC236}">
+                <a16:creationId xmlns:a16="http://schemas.microsoft.com/office/drawing/2014/main" id="{76ACAD2C-B2CC-ABCA-436B-383FF917D0F7}"/>
+              </a:ext>
+            </a:extLst>
+          </p:cNvPr>
+          <p:cNvSpPr>
+            <a:spLocks noGrp="1"/>
+          </p:cNvSpPr>
+          <p:nvPr>
+            <p:ph type="sldNum" sz="quarter" idx="12"/>
+          </p:nvPr>
+        </p:nvSpPr>
+        <p:spPr/>
+        <p:txBody>
+          <a:bodyPr/>
+          <a:lstStyle/>
+          <a:p>
+            <a:fld id="{3D4C94FE-FF23-4504-88E9-14D481113291}" type="slidenum">
+              <a:rPr lang="en-GB" smtClean="0"/>
+              <a:t>12</a:t>
+            </a:fld>
+            <a:endParaRPr lang="en-GB"/>
+          </a:p>
+        </p:txBody>
+      </p:sp>
+    </p:spTree>
+    <p:extLst>
+      <p:ext uri="{BB962C8B-B14F-4D97-AF65-F5344CB8AC3E}">
+        <p14:creationId xmlns:p14="http://schemas.microsoft.com/office/powerpoint/2010/main" val="204182399"/>
+      </p:ext>
+    </p:extLst>
+  </p:cSld>
+  <p:clrMapOvr>
+    <a:masterClrMapping/>
+  </p:clrMapOvr>
+</p:sld>
+</file>
+
 <file path=ppt/slides/slide13.xml><?xml version="1.0" encoding="utf-8"?>
 <p:sld xmlns:a="http://schemas.openxmlformats.org/drawingml/2006/main" xmlns:r="http://schemas.openxmlformats.org/officeDocument/2006/relationships" xmlns:p="http://schemas.openxmlformats.org/presentationml/2006/main">
   <p:cSld>
@@ -12059,10 +10555,10 @@
       </p:grpSpPr>
       <p:sp>
         <p:nvSpPr>
-          <p:cNvPr id="2" name="Titel 1">
-            <a:extLst>
-              <a:ext uri="{FF2B5EF4-FFF2-40B4-BE49-F238E27FC236}">
-                <a16:creationId xmlns:a16="http://schemas.microsoft.com/office/drawing/2014/main" id="{0A5960BF-0696-F646-3D20-9C943273D5A6}"/>
+          <p:cNvPr id="2" name="Title 1">
+            <a:extLst>
+              <a:ext uri="{FF2B5EF4-FFF2-40B4-BE49-F238E27FC236}">
+                <a16:creationId xmlns:a16="http://schemas.microsoft.com/office/drawing/2014/main" id="{0A76D083-3809-B3F2-5290-947907844F31}"/>
               </a:ext>
             </a:extLst>
           </p:cNvPr>
@@ -12079,48 +10575,18 @@
           <a:lstStyle/>
           <a:p>
             <a:r>
-              <a:rPr lang="de-DE" dirty="0"/>
-              <a:t>Maximum A Posteriori (MAP) </a:t>
-            </a:r>
-            <a:r>
-              <a:rPr lang="de-DE" dirty="0" err="1"/>
-              <a:t>Estimation</a:t>
-            </a:r>
-            <a:endParaRPr lang="de-DE" dirty="0"/>
+              <a:rPr lang="en-DE" dirty="0"/>
+              <a:t>Bayes Theorem</a:t>
+            </a:r>
           </a:p>
         </p:txBody>
       </p:sp>
       <p:sp>
         <p:nvSpPr>
-          <p:cNvPr id="3" name="Inhaltsplatzhalter 2">
-            <a:extLst>
-              <a:ext uri="{FF2B5EF4-FFF2-40B4-BE49-F238E27FC236}">
-                <a16:creationId xmlns:a16="http://schemas.microsoft.com/office/drawing/2014/main" id="{CD387CDE-B64C-E3C9-30E5-80EAB23FC9AF}"/>
-              </a:ext>
-            </a:extLst>
-          </p:cNvPr>
-          <p:cNvSpPr>
-            <a:spLocks noGrp="1"/>
-          </p:cNvSpPr>
-          <p:nvPr>
-            <p:ph idx="1"/>
-          </p:nvPr>
-        </p:nvSpPr>
-        <p:spPr/>
-        <p:txBody>
-          <a:bodyPr/>
-          <a:lstStyle/>
-          <a:p>
-            <a:endParaRPr lang="de-DE"/>
-          </a:p>
-        </p:txBody>
-      </p:sp>
-      <p:sp>
-        <p:nvSpPr>
-          <p:cNvPr id="4" name="Foliennummernplatzhalter 3">
-            <a:extLst>
-              <a:ext uri="{FF2B5EF4-FFF2-40B4-BE49-F238E27FC236}">
-                <a16:creationId xmlns:a16="http://schemas.microsoft.com/office/drawing/2014/main" id="{76ACAD2C-B2CC-ABCA-436B-383FF917D0F7}"/>
+          <p:cNvPr id="4" name="Slide Number Placeholder 3">
+            <a:extLst>
+              <a:ext uri="{FF2B5EF4-FFF2-40B4-BE49-F238E27FC236}">
+                <a16:creationId xmlns:a16="http://schemas.microsoft.com/office/drawing/2014/main" id="{AAE9EF95-A3CC-50C2-FC92-FF2E0B859AF0}"/>
               </a:ext>
             </a:extLst>
           </p:cNvPr>
@@ -12136,96 +10602,9 @@
           <a:bodyPr/>
           <a:lstStyle/>
           <a:p>
-            <a:fld id="{3D4C94FE-FF23-4504-88E9-14D481113291}" type="slidenum">
-              <a:rPr lang="en-GB" smtClean="0"/>
-              <a:t>13</a:t>
-            </a:fld>
-            <a:endParaRPr lang="en-GB"/>
-          </a:p>
-        </p:txBody>
-      </p:sp>
-    </p:spTree>
-    <p:extLst>
-      <p:ext uri="{BB962C8B-B14F-4D97-AF65-F5344CB8AC3E}">
-        <p14:creationId xmlns:p14="http://schemas.microsoft.com/office/powerpoint/2010/main" val="204182399"/>
-      </p:ext>
-    </p:extLst>
-  </p:cSld>
-  <p:clrMapOvr>
-    <a:masterClrMapping/>
-  </p:clrMapOvr>
-</p:sld>
-</file>
-
-<file path=ppt/slides/slide14.xml><?xml version="1.0" encoding="utf-8"?>
-<p:sld xmlns:a="http://schemas.openxmlformats.org/drawingml/2006/main" xmlns:r="http://schemas.openxmlformats.org/officeDocument/2006/relationships" xmlns:p="http://schemas.openxmlformats.org/presentationml/2006/main">
-  <p:cSld>
-    <p:spTree>
-      <p:nvGrpSpPr>
-        <p:cNvPr id="1" name=""/>
-        <p:cNvGrpSpPr/>
-        <p:nvPr/>
-      </p:nvGrpSpPr>
-      <p:grpSpPr>
-        <a:xfrm>
-          <a:off x="0" y="0"/>
-          <a:ext cx="0" cy="0"/>
-          <a:chOff x="0" y="0"/>
-          <a:chExt cx="0" cy="0"/>
-        </a:xfrm>
-      </p:grpSpPr>
-      <p:sp>
-        <p:nvSpPr>
-          <p:cNvPr id="2" name="Title 1">
-            <a:extLst>
-              <a:ext uri="{FF2B5EF4-FFF2-40B4-BE49-F238E27FC236}">
-                <a16:creationId xmlns:a16="http://schemas.microsoft.com/office/drawing/2014/main" id="{0A76D083-3809-B3F2-5290-947907844F31}"/>
-              </a:ext>
-            </a:extLst>
-          </p:cNvPr>
-          <p:cNvSpPr>
-            <a:spLocks noGrp="1"/>
-          </p:cNvSpPr>
-          <p:nvPr>
-            <p:ph type="title"/>
-          </p:nvPr>
-        </p:nvSpPr>
-        <p:spPr/>
-        <p:txBody>
-          <a:bodyPr/>
-          <a:lstStyle/>
-          <a:p>
-            <a:r>
-              <a:rPr lang="en-DE" dirty="0"/>
-              <a:t>Bayes Theorem</a:t>
-            </a:r>
-          </a:p>
-        </p:txBody>
-      </p:sp>
-      <p:sp>
-        <p:nvSpPr>
-          <p:cNvPr id="4" name="Slide Number Placeholder 3">
-            <a:extLst>
-              <a:ext uri="{FF2B5EF4-FFF2-40B4-BE49-F238E27FC236}">
-                <a16:creationId xmlns:a16="http://schemas.microsoft.com/office/drawing/2014/main" id="{AAE9EF95-A3CC-50C2-FC92-FF2E0B859AF0}"/>
-              </a:ext>
-            </a:extLst>
-          </p:cNvPr>
-          <p:cNvSpPr>
-            <a:spLocks noGrp="1"/>
-          </p:cNvSpPr>
-          <p:nvPr>
-            <p:ph type="sldNum" sz="quarter" idx="12"/>
-          </p:nvPr>
-        </p:nvSpPr>
-        <p:spPr/>
-        <p:txBody>
-          <a:bodyPr/>
-          <a:lstStyle/>
-          <a:p>
             <a:fld id="{77E1BB0D-8AD4-A14C-8FD5-F1619D1A43A2}" type="slidenum">
               <a:rPr lang="en-DE" smtClean="0"/>
-              <a:t>14</a:t>
+              <a:t>13</a:t>
             </a:fld>
             <a:endParaRPr lang="en-DE"/>
           </a:p>
@@ -13017,7 +11396,7 @@
 </p:sld>
 </file>
 
-<file path=ppt/slides/slide15.xml><?xml version="1.0" encoding="utf-8"?>
+<file path=ppt/slides/slide14.xml><?xml version="1.0" encoding="utf-8"?>
 <p:sld xmlns:a="http://schemas.openxmlformats.org/drawingml/2006/main" xmlns:r="http://schemas.openxmlformats.org/officeDocument/2006/relationships" xmlns:p="http://schemas.openxmlformats.org/presentationml/2006/main">
   <p:cSld>
     <p:spTree>
@@ -13085,7 +11464,7 @@
           <a:p>
             <a:fld id="{77E1BB0D-8AD4-A14C-8FD5-F1619D1A43A2}" type="slidenum">
               <a:rPr lang="en-DE" smtClean="0"/>
-              <a:t>15</a:t>
+              <a:t>14</a:t>
             </a:fld>
             <a:endParaRPr lang="en-DE"/>
           </a:p>
@@ -13985,7 +12364,7 @@
 </p:sld>
 </file>
 
-<file path=ppt/slides/slide16.xml><?xml version="1.0" encoding="utf-8"?>
+<file path=ppt/slides/slide15.xml><?xml version="1.0" encoding="utf-8"?>
 <p:sld xmlns:a="http://schemas.openxmlformats.org/drawingml/2006/main" xmlns:r="http://schemas.openxmlformats.org/officeDocument/2006/relationships" xmlns:p="http://schemas.openxmlformats.org/presentationml/2006/main">
   <p:cSld>
     <p:spTree>
@@ -14265,7 +12644,7 @@
           <a:p>
             <a:fld id="{77E1BB0D-8AD4-A14C-8FD5-F1619D1A43A2}" type="slidenum">
               <a:rPr lang="en-DE" smtClean="0"/>
-              <a:t>16</a:t>
+              <a:t>15</a:t>
             </a:fld>
             <a:endParaRPr lang="en-DE"/>
           </a:p>
@@ -14284,7 +12663,7 @@
 </p:sld>
 </file>
 
-<file path=ppt/slides/slide17.xml><?xml version="1.0" encoding="utf-8"?>
+<file path=ppt/slides/slide16.xml><?xml version="1.0" encoding="utf-8"?>
 <p:sld xmlns:a="http://schemas.openxmlformats.org/drawingml/2006/main" xmlns:r="http://schemas.openxmlformats.org/officeDocument/2006/relationships" xmlns:p="http://schemas.openxmlformats.org/presentationml/2006/main">
   <p:cSld>
     <p:spTree>
@@ -15465,7 +13844,7 @@
           <a:p>
             <a:fld id="{77E1BB0D-8AD4-A14C-8FD5-F1619D1A43A2}" type="slidenum">
               <a:rPr lang="en-DE" smtClean="0"/>
-              <a:t>17</a:t>
+              <a:t>16</a:t>
             </a:fld>
             <a:endParaRPr lang="en-DE"/>
           </a:p>
@@ -15800,7 +14179,7 @@
 </p:sld>
 </file>
 
-<file path=ppt/slides/slide18.xml><?xml version="1.0" encoding="utf-8"?>
+<file path=ppt/slides/slide17.xml><?xml version="1.0" encoding="utf-8"?>
 <p:sld xmlns:a="http://schemas.openxmlformats.org/drawingml/2006/main" xmlns:r="http://schemas.openxmlformats.org/officeDocument/2006/relationships" xmlns:p="http://schemas.openxmlformats.org/presentationml/2006/main">
   <p:cSld>
     <p:spTree>
@@ -15898,7 +14277,7 @@
           <a:p>
             <a:fld id="{3D4C94FE-FF23-4504-88E9-14D481113291}" type="slidenum">
               <a:rPr lang="en-GB" smtClean="0"/>
-              <a:t>18</a:t>
+              <a:t>17</a:t>
             </a:fld>
             <a:endParaRPr lang="en-GB"/>
           </a:p>
@@ -15908,126 +14287,6 @@
     <p:extLst>
       <p:ext uri="{BB962C8B-B14F-4D97-AF65-F5344CB8AC3E}">
         <p14:creationId xmlns:p14="http://schemas.microsoft.com/office/powerpoint/2010/main" val="680716918"/>
-      </p:ext>
-    </p:extLst>
-  </p:cSld>
-  <p:clrMapOvr>
-    <a:masterClrMapping/>
-  </p:clrMapOvr>
-</p:sld>
-</file>
-
-<file path=ppt/slides/slide19.xml><?xml version="1.0" encoding="utf-8"?>
-<p:sld xmlns:a="http://schemas.openxmlformats.org/drawingml/2006/main" xmlns:r="http://schemas.openxmlformats.org/officeDocument/2006/relationships" xmlns:p="http://schemas.openxmlformats.org/presentationml/2006/main">
-  <p:cSld>
-    <p:spTree>
-      <p:nvGrpSpPr>
-        <p:cNvPr id="1" name=""/>
-        <p:cNvGrpSpPr/>
-        <p:nvPr/>
-      </p:nvGrpSpPr>
-      <p:grpSpPr>
-        <a:xfrm>
-          <a:off x="0" y="0"/>
-          <a:ext cx="0" cy="0"/>
-          <a:chOff x="0" y="0"/>
-          <a:chExt cx="0" cy="0"/>
-        </a:xfrm>
-      </p:grpSpPr>
-      <p:sp>
-        <p:nvSpPr>
-          <p:cNvPr id="2" name="Titel 1">
-            <a:extLst>
-              <a:ext uri="{FF2B5EF4-FFF2-40B4-BE49-F238E27FC236}">
-                <a16:creationId xmlns:a16="http://schemas.microsoft.com/office/drawing/2014/main" id="{95D64CC6-3F21-81E7-D70C-086C5BA6B49A}"/>
-              </a:ext>
-            </a:extLst>
-          </p:cNvPr>
-          <p:cNvSpPr>
-            <a:spLocks noGrp="1"/>
-          </p:cNvSpPr>
-          <p:nvPr>
-            <p:ph type="title"/>
-          </p:nvPr>
-        </p:nvSpPr>
-        <p:spPr/>
-        <p:txBody>
-          <a:bodyPr/>
-          <a:lstStyle/>
-          <a:p>
-            <a:r>
-              <a:rPr lang="de-DE" dirty="0"/>
-              <a:t>Hypothesis </a:t>
-            </a:r>
-            <a:r>
-              <a:rPr lang="de-DE" dirty="0" err="1"/>
-              <a:t>Testing</a:t>
-            </a:r>
-            <a:r>
-              <a:rPr lang="de-DE" dirty="0"/>
-              <a:t> Framework</a:t>
-            </a:r>
-          </a:p>
-        </p:txBody>
-      </p:sp>
-      <p:sp>
-        <p:nvSpPr>
-          <p:cNvPr id="3" name="Inhaltsplatzhalter 2">
-            <a:extLst>
-              <a:ext uri="{FF2B5EF4-FFF2-40B4-BE49-F238E27FC236}">
-                <a16:creationId xmlns:a16="http://schemas.microsoft.com/office/drawing/2014/main" id="{E74D66D5-120C-0371-AE51-2920254EA102}"/>
-              </a:ext>
-            </a:extLst>
-          </p:cNvPr>
-          <p:cNvSpPr>
-            <a:spLocks noGrp="1"/>
-          </p:cNvSpPr>
-          <p:nvPr>
-            <p:ph idx="1"/>
-          </p:nvPr>
-        </p:nvSpPr>
-        <p:spPr/>
-        <p:txBody>
-          <a:bodyPr/>
-          <a:lstStyle/>
-          <a:p>
-            <a:endParaRPr lang="de-DE"/>
-          </a:p>
-        </p:txBody>
-      </p:sp>
-      <p:sp>
-        <p:nvSpPr>
-          <p:cNvPr id="4" name="Foliennummernplatzhalter 3">
-            <a:extLst>
-              <a:ext uri="{FF2B5EF4-FFF2-40B4-BE49-F238E27FC236}">
-                <a16:creationId xmlns:a16="http://schemas.microsoft.com/office/drawing/2014/main" id="{62ED5D70-8F36-C6E3-87D3-94815044E0A0}"/>
-              </a:ext>
-            </a:extLst>
-          </p:cNvPr>
-          <p:cNvSpPr>
-            <a:spLocks noGrp="1"/>
-          </p:cNvSpPr>
-          <p:nvPr>
-            <p:ph type="sldNum" sz="quarter" idx="12"/>
-          </p:nvPr>
-        </p:nvSpPr>
-        <p:spPr/>
-        <p:txBody>
-          <a:bodyPr/>
-          <a:lstStyle/>
-          <a:p>
-            <a:fld id="{3D4C94FE-FF23-4504-88E9-14D481113291}" type="slidenum">
-              <a:rPr lang="en-GB" smtClean="0"/>
-              <a:t>19</a:t>
-            </a:fld>
-            <a:endParaRPr lang="en-GB"/>
-          </a:p>
-        </p:txBody>
-      </p:sp>
-    </p:spTree>
-    <p:extLst>
-      <p:ext uri="{BB962C8B-B14F-4D97-AF65-F5344CB8AC3E}">
-        <p14:creationId xmlns:p14="http://schemas.microsoft.com/office/powerpoint/2010/main" val="4204881556"/>
       </p:ext>
     </p:extLst>
   </p:cSld>
@@ -16056,10 +14315,10 @@
       </p:grpSpPr>
       <p:sp>
         <p:nvSpPr>
-          <p:cNvPr id="4" name="Title 3">
-            <a:extLst>
-              <a:ext uri="{FF2B5EF4-FFF2-40B4-BE49-F238E27FC236}">
-                <a16:creationId xmlns:a16="http://schemas.microsoft.com/office/drawing/2014/main" id="{080AD447-446B-E09E-6F4A-522C1DBB462E}"/>
+          <p:cNvPr id="6" name="Titel 5">
+            <a:extLst>
+              <a:ext uri="{FF2B5EF4-FFF2-40B4-BE49-F238E27FC236}">
+                <a16:creationId xmlns:a16="http://schemas.microsoft.com/office/drawing/2014/main" id="{19F86A3F-863F-29A5-F8B5-213D6426891E}"/>
               </a:ext>
             </a:extLst>
           </p:cNvPr>
@@ -16076,128 +14335,14 @@
           <a:lstStyle/>
           <a:p>
             <a:r>
-              <a:rPr lang="en-GB" dirty="0"/>
-              <a:t>Course Schedule</a:t>
-            </a:r>
-          </a:p>
-        </p:txBody>
-      </p:sp>
-      <p:sp>
-        <p:nvSpPr>
-          <p:cNvPr id="6" name="Inhaltsplatzhalter 5">
-            <a:extLst>
-              <a:ext uri="{FF2B5EF4-FFF2-40B4-BE49-F238E27FC236}">
-                <a16:creationId xmlns:a16="http://schemas.microsoft.com/office/drawing/2014/main" id="{CF502483-E45D-7D7D-D169-ACA4F8327D26}"/>
-              </a:ext>
-            </a:extLst>
-          </p:cNvPr>
-          <p:cNvSpPr>
-            <a:spLocks noGrp="1"/>
-          </p:cNvSpPr>
-          <p:nvPr>
-            <p:ph sz="half" idx="1"/>
-          </p:nvPr>
-        </p:nvSpPr>
-        <p:spPr/>
-        <p:txBody>
-          <a:bodyPr>
-            <a:normAutofit lnSpcReduction="10000"/>
-          </a:bodyPr>
-          <a:lstStyle/>
-          <a:p>
-            <a:pPr marL="514350" indent="-514350">
-              <a:buFont typeface="+mj-lt"/>
-              <a:buAutoNum type="arabicPeriod"/>
-            </a:pPr>
+              <a:rPr lang="de-DE" dirty="0"/>
+              <a:t>Parameter </a:t>
+            </a:r>
             <a:r>
               <a:rPr lang="de-DE" dirty="0" err="1"/>
-              <a:t>Exploratory</a:t>
-            </a:r>
-            <a:r>
-              <a:rPr lang="de-DE" dirty="0"/>
-              <a:t> Data Analysis</a:t>
-            </a:r>
-          </a:p>
-          <a:p>
-            <a:pPr marL="514350" indent="-514350">
-              <a:buFont typeface="+mj-lt"/>
-              <a:buAutoNum type="arabicPeriod"/>
-            </a:pPr>
+              <a:t>Estimation</a:t>
+            </a:r>
             <a:endParaRPr lang="de-DE" dirty="0"/>
-          </a:p>
-          <a:p>
-            <a:pPr marL="514350" indent="-514350">
-              <a:buFont typeface="+mj-lt"/>
-              <a:buAutoNum type="arabicPeriod"/>
-            </a:pPr>
-            <a:r>
-              <a:rPr lang="de-DE" dirty="0"/>
-              <a:t>Clustering</a:t>
-            </a:r>
-          </a:p>
-          <a:p>
-            <a:pPr marL="514350" indent="-514350">
-              <a:buFont typeface="+mj-lt"/>
-              <a:buAutoNum type="arabicPeriod"/>
-            </a:pPr>
-            <a:endParaRPr lang="de-DE" dirty="0"/>
-          </a:p>
-          <a:p>
-            <a:pPr marL="514350" indent="-514350">
-              <a:buFont typeface="+mj-lt"/>
-              <a:buAutoNum type="arabicPeriod"/>
-            </a:pPr>
-            <a:r>
-              <a:rPr lang="de-DE" dirty="0" err="1"/>
-              <a:t>Probabilistic</a:t>
-            </a:r>
-            <a:r>
-              <a:rPr lang="de-DE" dirty="0"/>
-              <a:t> Models</a:t>
-            </a:r>
-          </a:p>
-          <a:p>
-            <a:pPr marL="514350" indent="-514350">
-              <a:buFont typeface="+mj-lt"/>
-              <a:buAutoNum type="arabicPeriod"/>
-            </a:pPr>
-            <a:endParaRPr lang="de-DE" dirty="0"/>
-          </a:p>
-          <a:p>
-            <a:pPr marL="514350" indent="-514350">
-              <a:buFont typeface="+mj-lt"/>
-              <a:buAutoNum type="arabicPeriod"/>
-            </a:pPr>
-            <a:r>
-              <a:rPr lang="de-DE" dirty="0"/>
-              <a:t>Statistical </a:t>
-            </a:r>
-            <a:r>
-              <a:rPr lang="de-DE" dirty="0" err="1"/>
-              <a:t>Inference</a:t>
-            </a:r>
-            <a:endParaRPr lang="de-DE" dirty="0"/>
-          </a:p>
-          <a:p>
-            <a:pPr marL="514350" indent="-514350">
-              <a:buFont typeface="+mj-lt"/>
-              <a:buAutoNum type="arabicPeriod"/>
-            </a:pPr>
-            <a:endParaRPr lang="de-DE" dirty="0"/>
-          </a:p>
-          <a:p>
-            <a:pPr marL="514350" indent="-514350">
-              <a:buFont typeface="+mj-lt"/>
-              <a:buAutoNum type="arabicPeriod"/>
-            </a:pPr>
-            <a:r>
-              <a:rPr lang="de-DE" dirty="0" err="1"/>
-              <a:t>Machine</a:t>
-            </a:r>
-            <a:r>
-              <a:rPr lang="de-DE" dirty="0"/>
-              <a:t> Learning</a:t>
-            </a:r>
           </a:p>
         </p:txBody>
       </p:sp>
@@ -16206,7 +14351,7 @@
           <p:cNvPr id="7" name="Inhaltsplatzhalter 6">
             <a:extLst>
               <a:ext uri="{FF2B5EF4-FFF2-40B4-BE49-F238E27FC236}">
-                <a16:creationId xmlns:a16="http://schemas.microsoft.com/office/drawing/2014/main" id="{B671907E-FFFA-73EF-8E7D-4AB4EBDD957B}"/>
+                <a16:creationId xmlns:a16="http://schemas.microsoft.com/office/drawing/2014/main" id="{812B5ABE-485E-EDC2-E965-111CD511541E}"/>
               </a:ext>
             </a:extLst>
           </p:cNvPr>
@@ -16214,102 +14359,66 @@
             <a:spLocks noGrp="1"/>
           </p:cNvSpPr>
           <p:nvPr>
-            <p:ph sz="half" idx="2"/>
+            <p:ph idx="1"/>
           </p:nvPr>
         </p:nvSpPr>
         <p:spPr/>
         <p:txBody>
-          <a:bodyPr>
-            <a:normAutofit lnSpcReduction="10000"/>
-          </a:bodyPr>
+          <a:bodyPr/>
           <a:lstStyle/>
           <a:p>
-            <a:pPr marL="514350" indent="-514350">
-              <a:buFont typeface="+mj-lt"/>
-              <a:buAutoNum type="arabicPeriod" startAt="6"/>
-            </a:pPr>
+            <a:r>
+              <a:rPr lang="de-DE" dirty="0" err="1"/>
+              <a:t>parameter</a:t>
+            </a:r>
             <a:r>
               <a:rPr lang="de-DE" dirty="0"/>
-              <a:t>Feature Engineering</a:t>
-            </a:r>
-          </a:p>
-          <a:p>
-            <a:pPr marL="514350" indent="-514350">
-              <a:buFont typeface="+mj-lt"/>
-              <a:buAutoNum type="arabicPeriod" startAt="6"/>
-            </a:pPr>
+              <a:t> </a:t>
+            </a:r>
+            <a:r>
+              <a:rPr lang="de-DE" dirty="0" err="1"/>
+              <a:t>estimation</a:t>
+            </a:r>
+            <a:r>
+              <a:rPr lang="de-DE" dirty="0"/>
+              <a:t>, least </a:t>
+            </a:r>
+            <a:r>
+              <a:rPr lang="de-DE" dirty="0" err="1"/>
+              <a:t>squares</a:t>
+            </a:r>
             <a:endParaRPr lang="de-DE" dirty="0"/>
           </a:p>
           <a:p>
-            <a:pPr marL="514350" indent="-514350">
-              <a:buFont typeface="+mj-lt"/>
-              <a:buAutoNum type="arabicPeriod" startAt="6"/>
-            </a:pPr>
             <a:r>
               <a:rPr lang="de-DE" dirty="0"/>
-              <a:t>Model Evaluation</a:t>
-            </a:r>
-          </a:p>
-          <a:p>
-            <a:pPr marL="514350" indent="-514350">
-              <a:buFont typeface="+mj-lt"/>
-              <a:buAutoNum type="arabicPeriod" startAt="6"/>
-            </a:pPr>
-            <a:endParaRPr lang="de-DE" dirty="0"/>
-          </a:p>
-          <a:p>
-            <a:pPr marL="514350" indent="-514350">
-              <a:buFont typeface="+mj-lt"/>
-              <a:buAutoNum type="arabicPeriod" startAt="6"/>
-            </a:pPr>
+              <a:t>maximum </a:t>
+            </a:r>
+            <a:r>
+              <a:rPr lang="de-DE" dirty="0" err="1"/>
+              <a:t>likelihood</a:t>
+            </a:r>
             <a:r>
               <a:rPr lang="de-DE" dirty="0"/>
-              <a:t>Deep Learning</a:t>
-            </a:r>
-          </a:p>
-          <a:p>
-            <a:pPr marL="514350" indent="-514350">
-              <a:buFont typeface="+mj-lt"/>
-              <a:buAutoNum type="arabicPeriod" startAt="6"/>
-            </a:pPr>
-            <a:endParaRPr lang="de-DE" dirty="0"/>
-          </a:p>
-          <a:p>
-            <a:pPr marL="514350" indent="-514350">
-              <a:buFont typeface="+mj-lt"/>
-              <a:buAutoNum type="arabicPeriod" startAt="6"/>
-            </a:pPr>
+              <a:t> </a:t>
+            </a:r>
+            <a:r>
+              <a:rPr lang="de-DE" dirty="0" err="1"/>
+              <a:t>method</a:t>
+            </a:r>
             <a:r>
               <a:rPr lang="de-DE" dirty="0"/>
-              <a:t>Time Series</a:t>
-            </a:r>
-          </a:p>
-          <a:p>
-            <a:pPr marL="514350" indent="-514350">
-              <a:buFont typeface="+mj-lt"/>
-              <a:buAutoNum type="arabicPeriod" startAt="6"/>
-            </a:pPr>
-            <a:endParaRPr lang="de-DE" dirty="0"/>
-          </a:p>
-          <a:p>
-            <a:pPr marL="514350" indent="-514350">
-              <a:buFont typeface="+mj-lt"/>
-              <a:buAutoNum type="arabicPeriod" startAt="6"/>
-            </a:pPr>
-            <a:r>
-              <a:rPr lang="de-DE" dirty="0" err="1"/>
-              <a:t>Causality</a:t>
-            </a:r>
-            <a:endParaRPr lang="de-DE" dirty="0"/>
+              <a:t>, MAP</a:t>
+            </a:r>
           </a:p>
         </p:txBody>
       </p:sp>
       <p:sp>
         <p:nvSpPr>
-          <p:cNvPr id="3" name="Slide Number Placeholder 2">
-            <a:extLst>
-              <a:ext uri="{FF2B5EF4-FFF2-40B4-BE49-F238E27FC236}">
-                <a16:creationId xmlns:a16="http://schemas.microsoft.com/office/drawing/2014/main" id="{A0664D44-83AC-6A7A-17E0-C1AE2ED18FF5}"/>
+          <p:cNvPr id="5" name="Foliennummernplatzhalter 4">
+            <a:extLst>
+              <a:ext uri="{FF2B5EF4-FFF2-40B4-BE49-F238E27FC236}">
+                <a16:creationId xmlns:a16="http://schemas.microsoft.com/office/drawing/2014/main" id="{88F3FC7B-F7BA-900D-038F-C269A44AFCE7}"/>
               </a:ext>
             </a:extLst>
           </p:cNvPr>
@@ -16325,380 +14434,18 @@
           <a:bodyPr/>
           <a:lstStyle/>
           <a:p>
-            <a:fld id="{08C366F5-AFAD-49CB-854A-9D9E238FCA13}" type="slidenum">
+            <a:fld id="{3D4C94FE-FF23-4504-88E9-14D481113291}" type="slidenum">
               <a:rPr lang="en-GB" smtClean="0"/>
               <a:t>2</a:t>
             </a:fld>
-            <a:endParaRPr lang="en-GB" dirty="0"/>
+            <a:endParaRPr lang="en-GB"/>
           </a:p>
         </p:txBody>
       </p:sp>
     </p:spTree>
     <p:extLst>
       <p:ext uri="{BB962C8B-B14F-4D97-AF65-F5344CB8AC3E}">
-        <p14:creationId xmlns:p14="http://schemas.microsoft.com/office/powerpoint/2010/main" val="310336692"/>
-      </p:ext>
-    </p:extLst>
-  </p:cSld>
-  <p:clrMapOvr>
-    <a:masterClrMapping/>
-  </p:clrMapOvr>
-</p:sld>
-</file>
-
-<file path=ppt/slides/slide20.xml><?xml version="1.0" encoding="utf-8"?>
-<p:sld xmlns:a="http://schemas.openxmlformats.org/drawingml/2006/main" xmlns:r="http://schemas.openxmlformats.org/officeDocument/2006/relationships" xmlns:p="http://schemas.openxmlformats.org/presentationml/2006/main">
-  <p:cSld>
-    <p:spTree>
-      <p:nvGrpSpPr>
-        <p:cNvPr id="1" name=""/>
-        <p:cNvGrpSpPr/>
-        <p:nvPr/>
-      </p:nvGrpSpPr>
-      <p:grpSpPr>
-        <a:xfrm>
-          <a:off x="0" y="0"/>
-          <a:ext cx="0" cy="0"/>
-          <a:chOff x="0" y="0"/>
-          <a:chExt cx="0" cy="0"/>
-        </a:xfrm>
-      </p:grpSpPr>
-      <p:sp>
-        <p:nvSpPr>
-          <p:cNvPr id="2" name="Titel 1">
-            <a:extLst>
-              <a:ext uri="{FF2B5EF4-FFF2-40B4-BE49-F238E27FC236}">
-                <a16:creationId xmlns:a16="http://schemas.microsoft.com/office/drawing/2014/main" id="{A2EF6B0E-748E-0880-8525-9D657C0759D8}"/>
-              </a:ext>
-            </a:extLst>
-          </p:cNvPr>
-          <p:cNvSpPr>
-            <a:spLocks noGrp="1"/>
-          </p:cNvSpPr>
-          <p:nvPr>
-            <p:ph type="title"/>
-          </p:nvPr>
-        </p:nvSpPr>
-        <p:spPr/>
-        <p:txBody>
-          <a:bodyPr/>
-          <a:lstStyle/>
-          <a:p>
-            <a:r>
-              <a:rPr lang="de-DE" dirty="0" err="1"/>
-              <a:t>Introduction</a:t>
-            </a:r>
-            <a:r>
-              <a:rPr lang="de-DE" dirty="0"/>
-              <a:t> </a:t>
-            </a:r>
-            <a:r>
-              <a:rPr lang="de-DE" dirty="0" err="1"/>
-              <a:t>to</a:t>
-            </a:r>
-            <a:r>
-              <a:rPr lang="de-DE" dirty="0"/>
-              <a:t> </a:t>
-            </a:r>
-            <a:r>
-              <a:rPr lang="de-DE" dirty="0" err="1"/>
-              <a:t>statsmodels</a:t>
-            </a:r>
-            <a:endParaRPr lang="de-DE" dirty="0"/>
-          </a:p>
-        </p:txBody>
-      </p:sp>
-      <p:sp>
-        <p:nvSpPr>
-          <p:cNvPr id="3" name="Inhaltsplatzhalter 2">
-            <a:extLst>
-              <a:ext uri="{FF2B5EF4-FFF2-40B4-BE49-F238E27FC236}">
-                <a16:creationId xmlns:a16="http://schemas.microsoft.com/office/drawing/2014/main" id="{B89C05E0-BB28-CDA4-FA7A-F3680EA2EE7F}"/>
-              </a:ext>
-            </a:extLst>
-          </p:cNvPr>
-          <p:cNvSpPr>
-            <a:spLocks noGrp="1"/>
-          </p:cNvSpPr>
-          <p:nvPr>
-            <p:ph idx="1"/>
-          </p:nvPr>
-        </p:nvSpPr>
-        <p:spPr/>
-        <p:txBody>
-          <a:bodyPr/>
-          <a:lstStyle/>
-          <a:p>
-            <a:endParaRPr lang="de-DE"/>
-          </a:p>
-        </p:txBody>
-      </p:sp>
-      <p:sp>
-        <p:nvSpPr>
-          <p:cNvPr id="4" name="Foliennummernplatzhalter 3">
-            <a:extLst>
-              <a:ext uri="{FF2B5EF4-FFF2-40B4-BE49-F238E27FC236}">
-                <a16:creationId xmlns:a16="http://schemas.microsoft.com/office/drawing/2014/main" id="{906482F9-135D-36BE-286D-CCF26BB398E9}"/>
-              </a:ext>
-            </a:extLst>
-          </p:cNvPr>
-          <p:cNvSpPr>
-            <a:spLocks noGrp="1"/>
-          </p:cNvSpPr>
-          <p:nvPr>
-            <p:ph type="sldNum" sz="quarter" idx="12"/>
-          </p:nvPr>
-        </p:nvSpPr>
-        <p:spPr/>
-        <p:txBody>
-          <a:bodyPr/>
-          <a:lstStyle/>
-          <a:p>
-            <a:fld id="{3D4C94FE-FF23-4504-88E9-14D481113291}" type="slidenum">
-              <a:rPr lang="en-GB" smtClean="0"/>
-              <a:t>20</a:t>
-            </a:fld>
-            <a:endParaRPr lang="en-GB"/>
-          </a:p>
-        </p:txBody>
-      </p:sp>
-    </p:spTree>
-    <p:extLst>
-      <p:ext uri="{BB962C8B-B14F-4D97-AF65-F5344CB8AC3E}">
-        <p14:creationId xmlns:p14="http://schemas.microsoft.com/office/powerpoint/2010/main" val="1072469410"/>
-      </p:ext>
-    </p:extLst>
-  </p:cSld>
-  <p:clrMapOvr>
-    <a:masterClrMapping/>
-  </p:clrMapOvr>
-</p:sld>
-</file>
-
-<file path=ppt/slides/slide21.xml><?xml version="1.0" encoding="utf-8"?>
-<p:sld xmlns:a="http://schemas.openxmlformats.org/drawingml/2006/main" xmlns:r="http://schemas.openxmlformats.org/officeDocument/2006/relationships" xmlns:p="http://schemas.openxmlformats.org/presentationml/2006/main">
-  <p:cSld>
-    <p:spTree>
-      <p:nvGrpSpPr>
-        <p:cNvPr id="1" name=""/>
-        <p:cNvGrpSpPr/>
-        <p:nvPr/>
-      </p:nvGrpSpPr>
-      <p:grpSpPr>
-        <a:xfrm>
-          <a:off x="0" y="0"/>
-          <a:ext cx="0" cy="0"/>
-          <a:chOff x="0" y="0"/>
-          <a:chExt cx="0" cy="0"/>
-        </a:xfrm>
-      </p:grpSpPr>
-      <p:sp>
-        <p:nvSpPr>
-          <p:cNvPr id="2" name="Titel 1">
-            <a:extLst>
-              <a:ext uri="{FF2B5EF4-FFF2-40B4-BE49-F238E27FC236}">
-                <a16:creationId xmlns:a16="http://schemas.microsoft.com/office/drawing/2014/main" id="{6B6DEDC3-EB7D-D99E-1932-637E0645F5AC}"/>
-              </a:ext>
-            </a:extLst>
-          </p:cNvPr>
-          <p:cNvSpPr>
-            <a:spLocks noGrp="1"/>
-          </p:cNvSpPr>
-          <p:nvPr>
-            <p:ph type="title"/>
-          </p:nvPr>
-        </p:nvSpPr>
-        <p:spPr/>
-        <p:txBody>
-          <a:bodyPr/>
-          <a:lstStyle/>
-          <a:p>
-            <a:r>
-              <a:rPr lang="de-DE" dirty="0"/>
-              <a:t>Linear Models in </a:t>
-            </a:r>
-            <a:r>
-              <a:rPr lang="de-DE" dirty="0" err="1"/>
-              <a:t>statsmodels</a:t>
-            </a:r>
-            <a:endParaRPr lang="de-DE" dirty="0"/>
-          </a:p>
-        </p:txBody>
-      </p:sp>
-      <p:sp>
-        <p:nvSpPr>
-          <p:cNvPr id="3" name="Inhaltsplatzhalter 2">
-            <a:extLst>
-              <a:ext uri="{FF2B5EF4-FFF2-40B4-BE49-F238E27FC236}">
-                <a16:creationId xmlns:a16="http://schemas.microsoft.com/office/drawing/2014/main" id="{09B787FA-9090-8915-5CE1-332A4B3F1C15}"/>
-              </a:ext>
-            </a:extLst>
-          </p:cNvPr>
-          <p:cNvSpPr>
-            <a:spLocks noGrp="1"/>
-          </p:cNvSpPr>
-          <p:nvPr>
-            <p:ph idx="1"/>
-          </p:nvPr>
-        </p:nvSpPr>
-        <p:spPr/>
-        <p:txBody>
-          <a:bodyPr/>
-          <a:lstStyle/>
-          <a:p>
-            <a:endParaRPr lang="de-DE"/>
-          </a:p>
-        </p:txBody>
-      </p:sp>
-      <p:sp>
-        <p:nvSpPr>
-          <p:cNvPr id="4" name="Foliennummernplatzhalter 3">
-            <a:extLst>
-              <a:ext uri="{FF2B5EF4-FFF2-40B4-BE49-F238E27FC236}">
-                <a16:creationId xmlns:a16="http://schemas.microsoft.com/office/drawing/2014/main" id="{511EF5CC-3BAC-B082-7191-A8A5B9D589B4}"/>
-              </a:ext>
-            </a:extLst>
-          </p:cNvPr>
-          <p:cNvSpPr>
-            <a:spLocks noGrp="1"/>
-          </p:cNvSpPr>
-          <p:nvPr>
-            <p:ph type="sldNum" sz="quarter" idx="12"/>
-          </p:nvPr>
-        </p:nvSpPr>
-        <p:spPr/>
-        <p:txBody>
-          <a:bodyPr/>
-          <a:lstStyle/>
-          <a:p>
-            <a:fld id="{3D4C94FE-FF23-4504-88E9-14D481113291}" type="slidenum">
-              <a:rPr lang="en-GB" smtClean="0"/>
-              <a:t>21</a:t>
-            </a:fld>
-            <a:endParaRPr lang="en-GB"/>
-          </a:p>
-        </p:txBody>
-      </p:sp>
-    </p:spTree>
-    <p:extLst>
-      <p:ext uri="{BB962C8B-B14F-4D97-AF65-F5344CB8AC3E}">
-        <p14:creationId xmlns:p14="http://schemas.microsoft.com/office/powerpoint/2010/main" val="40098425"/>
-      </p:ext>
-    </p:extLst>
-  </p:cSld>
-  <p:clrMapOvr>
-    <a:masterClrMapping/>
-  </p:clrMapOvr>
-</p:sld>
-</file>
-
-<file path=ppt/slides/slide22.xml><?xml version="1.0" encoding="utf-8"?>
-<p:sld xmlns:a="http://schemas.openxmlformats.org/drawingml/2006/main" xmlns:r="http://schemas.openxmlformats.org/officeDocument/2006/relationships" xmlns:p="http://schemas.openxmlformats.org/presentationml/2006/main">
-  <p:cSld>
-    <p:spTree>
-      <p:nvGrpSpPr>
-        <p:cNvPr id="1" name=""/>
-        <p:cNvGrpSpPr/>
-        <p:nvPr/>
-      </p:nvGrpSpPr>
-      <p:grpSpPr>
-        <a:xfrm>
-          <a:off x="0" y="0"/>
-          <a:ext cx="0" cy="0"/>
-          <a:chOff x="0" y="0"/>
-          <a:chExt cx="0" cy="0"/>
-        </a:xfrm>
-      </p:grpSpPr>
-      <p:sp>
-        <p:nvSpPr>
-          <p:cNvPr id="2" name="Titel 1">
-            <a:extLst>
-              <a:ext uri="{FF2B5EF4-FFF2-40B4-BE49-F238E27FC236}">
-                <a16:creationId xmlns:a16="http://schemas.microsoft.com/office/drawing/2014/main" id="{5EC9EB93-7610-B16A-1031-FB86BF1C6668}"/>
-              </a:ext>
-            </a:extLst>
-          </p:cNvPr>
-          <p:cNvSpPr>
-            <a:spLocks noGrp="1"/>
-          </p:cNvSpPr>
-          <p:nvPr>
-            <p:ph type="title"/>
-          </p:nvPr>
-        </p:nvSpPr>
-        <p:spPr/>
-        <p:txBody>
-          <a:bodyPr/>
-          <a:lstStyle/>
-          <a:p>
-            <a:r>
-              <a:rPr lang="de-DE" dirty="0" err="1"/>
-              <a:t>Interpreting</a:t>
-            </a:r>
-            <a:r>
-              <a:rPr lang="de-DE" dirty="0"/>
-              <a:t> Statistical Output</a:t>
-            </a:r>
-          </a:p>
-        </p:txBody>
-      </p:sp>
-      <p:sp>
-        <p:nvSpPr>
-          <p:cNvPr id="3" name="Inhaltsplatzhalter 2">
-            <a:extLst>
-              <a:ext uri="{FF2B5EF4-FFF2-40B4-BE49-F238E27FC236}">
-                <a16:creationId xmlns:a16="http://schemas.microsoft.com/office/drawing/2014/main" id="{5FE1F2CE-8B9C-967D-E3F5-EBDEC2697634}"/>
-              </a:ext>
-            </a:extLst>
-          </p:cNvPr>
-          <p:cNvSpPr>
-            <a:spLocks noGrp="1"/>
-          </p:cNvSpPr>
-          <p:nvPr>
-            <p:ph idx="1"/>
-          </p:nvPr>
-        </p:nvSpPr>
-        <p:spPr/>
-        <p:txBody>
-          <a:bodyPr/>
-          <a:lstStyle/>
-          <a:p>
-            <a:endParaRPr lang="de-DE"/>
-          </a:p>
-        </p:txBody>
-      </p:sp>
-      <p:sp>
-        <p:nvSpPr>
-          <p:cNvPr id="4" name="Foliennummernplatzhalter 3">
-            <a:extLst>
-              <a:ext uri="{FF2B5EF4-FFF2-40B4-BE49-F238E27FC236}">
-                <a16:creationId xmlns:a16="http://schemas.microsoft.com/office/drawing/2014/main" id="{E22B1CB0-D86C-BFCC-4CDA-7933DECECD9C}"/>
-              </a:ext>
-            </a:extLst>
-          </p:cNvPr>
-          <p:cNvSpPr>
-            <a:spLocks noGrp="1"/>
-          </p:cNvSpPr>
-          <p:nvPr>
-            <p:ph type="sldNum" sz="quarter" idx="12"/>
-          </p:nvPr>
-        </p:nvSpPr>
-        <p:spPr/>
-        <p:txBody>
-          <a:bodyPr/>
-          <a:lstStyle/>
-          <a:p>
-            <a:fld id="{3D4C94FE-FF23-4504-88E9-14D481113291}" type="slidenum">
-              <a:rPr lang="en-GB" smtClean="0"/>
-              <a:t>22</a:t>
-            </a:fld>
-            <a:endParaRPr lang="en-GB"/>
-          </a:p>
-        </p:txBody>
-      </p:sp>
-    </p:spTree>
-    <p:extLst>
-      <p:ext uri="{BB962C8B-B14F-4D97-AF65-F5344CB8AC3E}">
-        <p14:creationId xmlns:p14="http://schemas.microsoft.com/office/powerpoint/2010/main" val="836944446"/>
+        <p14:creationId xmlns:p14="http://schemas.microsoft.com/office/powerpoint/2010/main" val="930935563"/>
       </p:ext>
     </p:extLst>
   </p:cSld>
@@ -16727,10 +14474,10 @@
       </p:grpSpPr>
       <p:sp>
         <p:nvSpPr>
-          <p:cNvPr id="6" name="Titel 5">
-            <a:extLst>
-              <a:ext uri="{FF2B5EF4-FFF2-40B4-BE49-F238E27FC236}">
-                <a16:creationId xmlns:a16="http://schemas.microsoft.com/office/drawing/2014/main" id="{19F86A3F-863F-29A5-F8B5-213D6426891E}"/>
+          <p:cNvPr id="2" name="Titel 1">
+            <a:extLst>
+              <a:ext uri="{FF2B5EF4-FFF2-40B4-BE49-F238E27FC236}">
+                <a16:creationId xmlns:a16="http://schemas.microsoft.com/office/drawing/2014/main" id="{DA7E0819-F09F-219D-494D-C0676A4AFA48}"/>
               </a:ext>
             </a:extLst>
           </p:cNvPr>
@@ -16760,10 +14507,10 @@
       </p:sp>
       <p:sp>
         <p:nvSpPr>
-          <p:cNvPr id="7" name="Inhaltsplatzhalter 6">
-            <a:extLst>
-              <a:ext uri="{FF2B5EF4-FFF2-40B4-BE49-F238E27FC236}">
-                <a16:creationId xmlns:a16="http://schemas.microsoft.com/office/drawing/2014/main" id="{812B5ABE-485E-EDC2-E965-111CD511541E}"/>
+          <p:cNvPr id="3" name="Inhaltsplatzhalter 2">
+            <a:extLst>
+              <a:ext uri="{FF2B5EF4-FFF2-40B4-BE49-F238E27FC236}">
+                <a16:creationId xmlns:a16="http://schemas.microsoft.com/office/drawing/2014/main" id="{7E99F8A3-CB23-5AD0-E2C5-CA9C2CC58130}"/>
               </a:ext>
             </a:extLst>
           </p:cNvPr>
@@ -16780,68 +14527,19 @@
           <a:lstStyle/>
           <a:p>
             <a:r>
-              <a:rPr lang="de-DE" dirty="0" err="1"/>
-              <a:t>parameter</a:t>
-            </a:r>
-            <a:r>
               <a:rPr lang="de-DE" dirty="0"/>
-              <a:t> </a:t>
+              <a:t>Parameter </a:t>
             </a:r>
             <a:r>
               <a:rPr lang="de-DE" dirty="0" err="1"/>
               <a:t>estimation</a:t>
             </a:r>
-            <a:r>
-              <a:rPr lang="de-DE" dirty="0"/>
-              <a:t>, least </a:t>
-            </a:r>
+            <a:endParaRPr lang="de-DE" dirty="0"/>
+          </a:p>
+          <a:p>
             <a:r>
               <a:rPr lang="de-DE" dirty="0" err="1"/>
-              <a:t>squares</a:t>
-            </a:r>
-            <a:endParaRPr lang="de-DE" dirty="0"/>
-          </a:p>
-          <a:p>
-            <a:r>
-              <a:rPr lang="de-DE" dirty="0"/>
-              <a:t>maximum </a:t>
-            </a:r>
-            <a:r>
-              <a:rPr lang="de-DE" dirty="0" err="1"/>
-              <a:t>likelihood</a:t>
-            </a:r>
-            <a:r>
-              <a:rPr lang="de-DE" dirty="0"/>
-              <a:t> </a:t>
-            </a:r>
-            <a:r>
-              <a:rPr lang="de-DE" dirty="0" err="1"/>
-              <a:t>method</a:t>
-            </a:r>
-            <a:r>
-              <a:rPr lang="de-DE" dirty="0"/>
-              <a:t>, MAP</a:t>
-            </a:r>
-          </a:p>
-          <a:p>
-            <a:r>
-              <a:rPr lang="de-DE" dirty="0" err="1"/>
-              <a:t>hypothesis</a:t>
-            </a:r>
-            <a:r>
-              <a:rPr lang="de-DE" dirty="0"/>
-              <a:t> </a:t>
-            </a:r>
-            <a:r>
-              <a:rPr lang="de-DE" dirty="0" err="1"/>
-              <a:t>testing</a:t>
-            </a:r>
-            <a:endParaRPr lang="de-DE" dirty="0"/>
-          </a:p>
-          <a:p>
-            <a:r>
-              <a:rPr lang="de-DE" dirty="0" err="1"/>
-              <a:t>statsmodels</a:t>
+              <a:t>Testing</a:t>
             </a:r>
             <a:endParaRPr lang="de-DE" dirty="0"/>
           </a:p>
@@ -16849,10 +14547,10 @@
       </p:sp>
       <p:sp>
         <p:nvSpPr>
-          <p:cNvPr id="5" name="Foliennummernplatzhalter 4">
-            <a:extLst>
-              <a:ext uri="{FF2B5EF4-FFF2-40B4-BE49-F238E27FC236}">
-                <a16:creationId xmlns:a16="http://schemas.microsoft.com/office/drawing/2014/main" id="{88F3FC7B-F7BA-900D-038F-C269A44AFCE7}"/>
+          <p:cNvPr id="4" name="Foliennummernplatzhalter 3">
+            <a:extLst>
+              <a:ext uri="{FF2B5EF4-FFF2-40B4-BE49-F238E27FC236}">
+                <a16:creationId xmlns:a16="http://schemas.microsoft.com/office/drawing/2014/main" id="{2A5C04F6-8F49-62DE-9D9D-CAFE55D475FF}"/>
               </a:ext>
             </a:extLst>
           </p:cNvPr>
@@ -16879,7 +14577,7 @@
     </p:spTree>
     <p:extLst>
       <p:ext uri="{BB962C8B-B14F-4D97-AF65-F5344CB8AC3E}">
-        <p14:creationId xmlns:p14="http://schemas.microsoft.com/office/powerpoint/2010/main" val="930935563"/>
+        <p14:creationId xmlns:p14="http://schemas.microsoft.com/office/powerpoint/2010/main" val="1222257082"/>
       </p:ext>
     </p:extLst>
   </p:cSld>
@@ -16911,7 +14609,7 @@
           <p:cNvPr id="2" name="Titel 1">
             <a:extLst>
               <a:ext uri="{FF2B5EF4-FFF2-40B4-BE49-F238E27FC236}">
-                <a16:creationId xmlns:a16="http://schemas.microsoft.com/office/drawing/2014/main" id="{DA7E0819-F09F-219D-494D-C0676A4AFA48}"/>
+                <a16:creationId xmlns:a16="http://schemas.microsoft.com/office/drawing/2014/main" id="{D1BD2DB9-A134-FF7E-C8BA-64FE53A5B5E9}"/>
               </a:ext>
             </a:extLst>
           </p:cNvPr>
@@ -16929,7 +14627,7 @@
           <a:p>
             <a:r>
               <a:rPr lang="de-DE" dirty="0"/>
-              <a:t>Parameter </a:t>
+              <a:t>Least Squares </a:t>
             </a:r>
             <a:r>
               <a:rPr lang="de-DE" dirty="0" err="1"/>
@@ -16944,7 +14642,7 @@
           <p:cNvPr id="3" name="Inhaltsplatzhalter 2">
             <a:extLst>
               <a:ext uri="{FF2B5EF4-FFF2-40B4-BE49-F238E27FC236}">
-                <a16:creationId xmlns:a16="http://schemas.microsoft.com/office/drawing/2014/main" id="{7E99F8A3-CB23-5AD0-E2C5-CA9C2CC58130}"/>
+                <a16:creationId xmlns:a16="http://schemas.microsoft.com/office/drawing/2014/main" id="{E3FD89AB-9049-BF80-08EB-4562A5C98927}"/>
               </a:ext>
             </a:extLst>
           </p:cNvPr>
@@ -16969,7 +14667,7 @@
           <p:cNvPr id="4" name="Foliennummernplatzhalter 3">
             <a:extLst>
               <a:ext uri="{FF2B5EF4-FFF2-40B4-BE49-F238E27FC236}">
-                <a16:creationId xmlns:a16="http://schemas.microsoft.com/office/drawing/2014/main" id="{2A5C04F6-8F49-62DE-9D9D-CAFE55D475FF}"/>
+                <a16:creationId xmlns:a16="http://schemas.microsoft.com/office/drawing/2014/main" id="{56B8C9E3-A4A1-62CE-7490-26C9E0C788BF}"/>
               </a:ext>
             </a:extLst>
           </p:cNvPr>
@@ -16996,7 +14694,7 @@
     </p:spTree>
     <p:extLst>
       <p:ext uri="{BB962C8B-B14F-4D97-AF65-F5344CB8AC3E}">
-        <p14:creationId xmlns:p14="http://schemas.microsoft.com/office/powerpoint/2010/main" val="1222257082"/>
+        <p14:creationId xmlns:p14="http://schemas.microsoft.com/office/powerpoint/2010/main" val="116196653"/>
       </p:ext>
     </p:extLst>
   </p:cSld>
@@ -17028,7 +14726,7 @@
           <p:cNvPr id="2" name="Titel 1">
             <a:extLst>
               <a:ext uri="{FF2B5EF4-FFF2-40B4-BE49-F238E27FC236}">
-                <a16:creationId xmlns:a16="http://schemas.microsoft.com/office/drawing/2014/main" id="{D1BD2DB9-A134-FF7E-C8BA-64FE53A5B5E9}"/>
+                <a16:creationId xmlns:a16="http://schemas.microsoft.com/office/drawing/2014/main" id="{B3CFD234-B2B0-8F19-1D5F-C84B9BF984F1}"/>
               </a:ext>
             </a:extLst>
           </p:cNvPr>
@@ -17046,11 +14744,19 @@
           <a:p>
             <a:r>
               <a:rPr lang="de-DE" dirty="0"/>
-              <a:t>Least Squares </a:t>
+              <a:t>Loss </a:t>
             </a:r>
             <a:r>
               <a:rPr lang="de-DE" dirty="0" err="1"/>
-              <a:t>Estimation</a:t>
+              <a:t>Functions</a:t>
+            </a:r>
+            <a:r>
+              <a:rPr lang="de-DE" dirty="0"/>
+              <a:t> and </a:t>
+            </a:r>
+            <a:r>
+              <a:rPr lang="de-DE" dirty="0" err="1"/>
+              <a:t>Optimization</a:t>
             </a:r>
             <a:endParaRPr lang="de-DE" dirty="0"/>
           </a:p>
@@ -17061,7 +14767,7 @@
           <p:cNvPr id="3" name="Inhaltsplatzhalter 2">
             <a:extLst>
               <a:ext uri="{FF2B5EF4-FFF2-40B4-BE49-F238E27FC236}">
-                <a16:creationId xmlns:a16="http://schemas.microsoft.com/office/drawing/2014/main" id="{E3FD89AB-9049-BF80-08EB-4562A5C98927}"/>
+                <a16:creationId xmlns:a16="http://schemas.microsoft.com/office/drawing/2014/main" id="{B0FB1DE5-55FB-B039-D4C1-82720EF56059}"/>
               </a:ext>
             </a:extLst>
           </p:cNvPr>
@@ -17086,7 +14792,7 @@
           <p:cNvPr id="4" name="Foliennummernplatzhalter 3">
             <a:extLst>
               <a:ext uri="{FF2B5EF4-FFF2-40B4-BE49-F238E27FC236}">
-                <a16:creationId xmlns:a16="http://schemas.microsoft.com/office/drawing/2014/main" id="{56B8C9E3-A4A1-62CE-7490-26C9E0C788BF}"/>
+                <a16:creationId xmlns:a16="http://schemas.microsoft.com/office/drawing/2014/main" id="{14EBBF11-72D6-A819-6FEA-934A8EAAAE54}"/>
               </a:ext>
             </a:extLst>
           </p:cNvPr>
@@ -17113,7 +14819,7 @@
     </p:spTree>
     <p:extLst>
       <p:ext uri="{BB962C8B-B14F-4D97-AF65-F5344CB8AC3E}">
-        <p14:creationId xmlns:p14="http://schemas.microsoft.com/office/powerpoint/2010/main" val="116196653"/>
+        <p14:creationId xmlns:p14="http://schemas.microsoft.com/office/powerpoint/2010/main" val="211540913"/>
       </p:ext>
     </p:extLst>
   </p:cSld>
@@ -17145,7 +14851,7 @@
           <p:cNvPr id="2" name="Titel 1">
             <a:extLst>
               <a:ext uri="{FF2B5EF4-FFF2-40B4-BE49-F238E27FC236}">
-                <a16:creationId xmlns:a16="http://schemas.microsoft.com/office/drawing/2014/main" id="{B3CFD234-B2B0-8F19-1D5F-C84B9BF984F1}"/>
+                <a16:creationId xmlns:a16="http://schemas.microsoft.com/office/drawing/2014/main" id="{854D96D1-0DFD-CDA0-2D1A-1A4269EE635A}"/>
               </a:ext>
             </a:extLst>
           </p:cNvPr>
@@ -17163,21 +14869,24 @@
           <a:p>
             <a:r>
               <a:rPr lang="de-DE" dirty="0"/>
-              <a:t>Loss </a:t>
+              <a:t>Maximum </a:t>
             </a:r>
             <a:r>
               <a:rPr lang="de-DE" dirty="0" err="1"/>
-              <a:t>Functions</a:t>
+              <a:t>Likelihood</a:t>
             </a:r>
             <a:r>
               <a:rPr lang="de-DE" dirty="0"/>
-              <a:t> and </a:t>
+              <a:t> </a:t>
             </a:r>
             <a:r>
               <a:rPr lang="de-DE" dirty="0" err="1"/>
-              <a:t>Optimization</a:t>
-            </a:r>
-            <a:endParaRPr lang="de-DE" dirty="0"/>
+              <a:t>Estimation</a:t>
+            </a:r>
+            <a:r>
+              <a:rPr lang="de-DE" dirty="0"/>
+              <a:t> (MLE)</a:t>
+            </a:r>
           </a:p>
         </p:txBody>
       </p:sp>
@@ -17186,7 +14895,7 @@
           <p:cNvPr id="3" name="Inhaltsplatzhalter 2">
             <a:extLst>
               <a:ext uri="{FF2B5EF4-FFF2-40B4-BE49-F238E27FC236}">
-                <a16:creationId xmlns:a16="http://schemas.microsoft.com/office/drawing/2014/main" id="{B0FB1DE5-55FB-B039-D4C1-82720EF56059}"/>
+                <a16:creationId xmlns:a16="http://schemas.microsoft.com/office/drawing/2014/main" id="{1F956010-9C28-F9EE-4A46-5F8A3B30F4AC}"/>
               </a:ext>
             </a:extLst>
           </p:cNvPr>
@@ -17211,7 +14920,7 @@
           <p:cNvPr id="4" name="Foliennummernplatzhalter 3">
             <a:extLst>
               <a:ext uri="{FF2B5EF4-FFF2-40B4-BE49-F238E27FC236}">
-                <a16:creationId xmlns:a16="http://schemas.microsoft.com/office/drawing/2014/main" id="{14EBBF11-72D6-A819-6FEA-934A8EAAAE54}"/>
+                <a16:creationId xmlns:a16="http://schemas.microsoft.com/office/drawing/2014/main" id="{B07E4D77-FE8D-127B-EEEF-939F25A12A35}"/>
               </a:ext>
             </a:extLst>
           </p:cNvPr>
@@ -17230,134 +14939,6 @@
             <a:fld id="{3D4C94FE-FF23-4504-88E9-14D481113291}" type="slidenum">
               <a:rPr lang="en-GB" smtClean="0"/>
               <a:t>6</a:t>
-            </a:fld>
-            <a:endParaRPr lang="en-GB"/>
-          </a:p>
-        </p:txBody>
-      </p:sp>
-    </p:spTree>
-    <p:extLst>
-      <p:ext uri="{BB962C8B-B14F-4D97-AF65-F5344CB8AC3E}">
-        <p14:creationId xmlns:p14="http://schemas.microsoft.com/office/powerpoint/2010/main" val="211540913"/>
-      </p:ext>
-    </p:extLst>
-  </p:cSld>
-  <p:clrMapOvr>
-    <a:masterClrMapping/>
-  </p:clrMapOvr>
-</p:sld>
-</file>
-
-<file path=ppt/slides/slide7.xml><?xml version="1.0" encoding="utf-8"?>
-<p:sld xmlns:a="http://schemas.openxmlformats.org/drawingml/2006/main" xmlns:r="http://schemas.openxmlformats.org/officeDocument/2006/relationships" xmlns:p="http://schemas.openxmlformats.org/presentationml/2006/main">
-  <p:cSld>
-    <p:spTree>
-      <p:nvGrpSpPr>
-        <p:cNvPr id="1" name=""/>
-        <p:cNvGrpSpPr/>
-        <p:nvPr/>
-      </p:nvGrpSpPr>
-      <p:grpSpPr>
-        <a:xfrm>
-          <a:off x="0" y="0"/>
-          <a:ext cx="0" cy="0"/>
-          <a:chOff x="0" y="0"/>
-          <a:chExt cx="0" cy="0"/>
-        </a:xfrm>
-      </p:grpSpPr>
-      <p:sp>
-        <p:nvSpPr>
-          <p:cNvPr id="2" name="Titel 1">
-            <a:extLst>
-              <a:ext uri="{FF2B5EF4-FFF2-40B4-BE49-F238E27FC236}">
-                <a16:creationId xmlns:a16="http://schemas.microsoft.com/office/drawing/2014/main" id="{854D96D1-0DFD-CDA0-2D1A-1A4269EE635A}"/>
-              </a:ext>
-            </a:extLst>
-          </p:cNvPr>
-          <p:cNvSpPr>
-            <a:spLocks noGrp="1"/>
-          </p:cNvSpPr>
-          <p:nvPr>
-            <p:ph type="title"/>
-          </p:nvPr>
-        </p:nvSpPr>
-        <p:spPr/>
-        <p:txBody>
-          <a:bodyPr/>
-          <a:lstStyle/>
-          <a:p>
-            <a:r>
-              <a:rPr lang="de-DE" dirty="0"/>
-              <a:t>Maximum </a:t>
-            </a:r>
-            <a:r>
-              <a:rPr lang="de-DE" dirty="0" err="1"/>
-              <a:t>Likelihood</a:t>
-            </a:r>
-            <a:r>
-              <a:rPr lang="de-DE" dirty="0"/>
-              <a:t> </a:t>
-            </a:r>
-            <a:r>
-              <a:rPr lang="de-DE" dirty="0" err="1"/>
-              <a:t>Estimation</a:t>
-            </a:r>
-            <a:r>
-              <a:rPr lang="de-DE" dirty="0"/>
-              <a:t> (MLE)</a:t>
-            </a:r>
-          </a:p>
-        </p:txBody>
-      </p:sp>
-      <p:sp>
-        <p:nvSpPr>
-          <p:cNvPr id="3" name="Inhaltsplatzhalter 2">
-            <a:extLst>
-              <a:ext uri="{FF2B5EF4-FFF2-40B4-BE49-F238E27FC236}">
-                <a16:creationId xmlns:a16="http://schemas.microsoft.com/office/drawing/2014/main" id="{1F956010-9C28-F9EE-4A46-5F8A3B30F4AC}"/>
-              </a:ext>
-            </a:extLst>
-          </p:cNvPr>
-          <p:cNvSpPr>
-            <a:spLocks noGrp="1"/>
-          </p:cNvSpPr>
-          <p:nvPr>
-            <p:ph idx="1"/>
-          </p:nvPr>
-        </p:nvSpPr>
-        <p:spPr/>
-        <p:txBody>
-          <a:bodyPr/>
-          <a:lstStyle/>
-          <a:p>
-            <a:endParaRPr lang="de-DE"/>
-          </a:p>
-        </p:txBody>
-      </p:sp>
-      <p:sp>
-        <p:nvSpPr>
-          <p:cNvPr id="4" name="Foliennummernplatzhalter 3">
-            <a:extLst>
-              <a:ext uri="{FF2B5EF4-FFF2-40B4-BE49-F238E27FC236}">
-                <a16:creationId xmlns:a16="http://schemas.microsoft.com/office/drawing/2014/main" id="{B07E4D77-FE8D-127B-EEEF-939F25A12A35}"/>
-              </a:ext>
-            </a:extLst>
-          </p:cNvPr>
-          <p:cNvSpPr>
-            <a:spLocks noGrp="1"/>
-          </p:cNvSpPr>
-          <p:nvPr>
-            <p:ph type="sldNum" sz="quarter" idx="12"/>
-          </p:nvPr>
-        </p:nvSpPr>
-        <p:spPr/>
-        <p:txBody>
-          <a:bodyPr/>
-          <a:lstStyle/>
-          <a:p>
-            <a:fld id="{3D4C94FE-FF23-4504-88E9-14D481113291}" type="slidenum">
-              <a:rPr lang="en-GB" smtClean="0"/>
-              <a:t>7</a:t>
             </a:fld>
             <a:endParaRPr lang="en-GB"/>
           </a:p>
@@ -17376,7 +14957,7 @@
 </p:sld>
 </file>
 
-<file path=ppt/slides/slide8.xml><?xml version="1.0" encoding="utf-8"?>
+<file path=ppt/slides/slide7.xml><?xml version="1.0" encoding="utf-8"?>
 <p:sld xmlns:a="http://schemas.openxmlformats.org/drawingml/2006/main" xmlns:r="http://schemas.openxmlformats.org/officeDocument/2006/relationships" xmlns:p="http://schemas.openxmlformats.org/presentationml/2006/main">
   <p:cSld>
     <p:spTree>
@@ -17949,7 +15530,7 @@
           <a:p>
             <a:fld id="{77E1BB0D-8AD4-A14C-8FD5-F1619D1A43A2}" type="slidenum">
               <a:rPr lang="en-DE" smtClean="0"/>
-              <a:t>8</a:t>
+              <a:t>7</a:t>
             </a:fld>
             <a:endParaRPr lang="en-DE"/>
           </a:p>
@@ -17968,7 +15549,7 @@
 </p:sld>
 </file>
 
-<file path=ppt/slides/slide9.xml><?xml version="1.0" encoding="utf-8"?>
+<file path=ppt/slides/slide8.xml><?xml version="1.0" encoding="utf-8"?>
 <p:sld xmlns:a="http://schemas.openxmlformats.org/drawingml/2006/main" xmlns:r="http://schemas.openxmlformats.org/officeDocument/2006/relationships" xmlns:p="http://schemas.openxmlformats.org/presentationml/2006/main">
   <p:cSld>
     <p:spTree>
@@ -18808,7 +16389,7 @@
           <a:p>
             <a:fld id="{77E1BB0D-8AD4-A14C-8FD5-F1619D1A43A2}" type="slidenum">
               <a:rPr lang="en-DE" smtClean="0"/>
-              <a:t>9</a:t>
+              <a:t>8</a:t>
             </a:fld>
             <a:endParaRPr lang="en-DE"/>
           </a:p>
@@ -18818,6 +16399,1622 @@
     <p:extLst>
       <p:ext uri="{BB962C8B-B14F-4D97-AF65-F5344CB8AC3E}">
         <p14:creationId xmlns:p14="http://schemas.microsoft.com/office/powerpoint/2010/main" val="923827092"/>
+      </p:ext>
+    </p:extLst>
+  </p:cSld>
+  <p:clrMapOvr>
+    <a:masterClrMapping/>
+  </p:clrMapOvr>
+</p:sld>
+</file>
+
+<file path=ppt/slides/slide9.xml><?xml version="1.0" encoding="utf-8"?>
+<p:sld xmlns:a="http://schemas.openxmlformats.org/drawingml/2006/main" xmlns:r="http://schemas.openxmlformats.org/officeDocument/2006/relationships" xmlns:p="http://schemas.openxmlformats.org/presentationml/2006/main">
+  <p:cSld>
+    <p:spTree>
+      <p:nvGrpSpPr>
+        <p:cNvPr id="1" name=""/>
+        <p:cNvGrpSpPr/>
+        <p:nvPr/>
+      </p:nvGrpSpPr>
+      <p:grpSpPr>
+        <a:xfrm>
+          <a:off x="0" y="0"/>
+          <a:ext cx="0" cy="0"/>
+          <a:chOff x="0" y="0"/>
+          <a:chExt cx="0" cy="0"/>
+        </a:xfrm>
+      </p:grpSpPr>
+      <p:sp>
+        <p:nvSpPr>
+          <p:cNvPr id="2" name="Title 1">
+            <a:extLst>
+              <a:ext uri="{FF2B5EF4-FFF2-40B4-BE49-F238E27FC236}">
+                <a16:creationId xmlns:a16="http://schemas.microsoft.com/office/drawing/2014/main" id="{3B778DBC-7181-EA20-D228-B57BD1EB61BC}"/>
+              </a:ext>
+            </a:extLst>
+          </p:cNvPr>
+          <p:cNvSpPr>
+            <a:spLocks noGrp="1"/>
+          </p:cNvSpPr>
+          <p:nvPr>
+            <p:ph type="title"/>
+          </p:nvPr>
+        </p:nvSpPr>
+        <p:spPr/>
+        <p:txBody>
+          <a:bodyPr/>
+          <a:lstStyle/>
+          <a:p>
+            <a:r>
+              <a:rPr lang="en-DE" dirty="0"/>
+              <a:t>Negative Log-Likelihood</a:t>
+            </a:r>
+          </a:p>
+        </p:txBody>
+      </p:sp>
+      <mc:AlternateContent xmlns:mc="http://schemas.openxmlformats.org/markup-compatibility/2006" xmlns:a14="http://schemas.microsoft.com/office/drawing/2010/main">
+        <mc:Choice Requires="a14">
+          <p:sp>
+            <p:nvSpPr>
+              <p:cNvPr id="3" name="Content Placeholder 2">
+                <a:extLst>
+                  <a:ext uri="{FF2B5EF4-FFF2-40B4-BE49-F238E27FC236}">
+                    <a16:creationId xmlns:a16="http://schemas.microsoft.com/office/drawing/2014/main" id="{A1D50BE1-6E3C-96FF-14B6-FBB141E405D4}"/>
+                  </a:ext>
+                </a:extLst>
+              </p:cNvPr>
+              <p:cNvSpPr>
+                <a:spLocks noGrp="1"/>
+              </p:cNvSpPr>
+              <p:nvPr>
+                <p:ph idx="1"/>
+              </p:nvPr>
+            </p:nvSpPr>
+            <p:spPr/>
+            <p:txBody>
+              <a:bodyPr>
+                <a:normAutofit fontScale="85000" lnSpcReduction="10000"/>
+              </a:bodyPr>
+              <a:lstStyle/>
+              <a:p>
+                <a:pPr marL="0" indent="0">
+                  <a:buNone/>
+                </a:pPr>
+                <a:r>
+                  <a:rPr lang="en-GB" sz="2400" dirty="0"/>
+                  <a:t>logarithmic transformation of </a:t>
+                </a:r>
+                <a14:m>
+                  <m:oMath xmlns:m="http://schemas.openxmlformats.org/officeDocument/2006/math">
+                    <m:r>
+                      <a:rPr lang="en-GB" sz="2400" i="1">
+                        <a:latin typeface="Cambria Math" panose="02040503050406030204" pitchFamily="18" charset="0"/>
+                        <a:ea typeface="Cambria Math" panose="02040503050406030204" pitchFamily="18" charset="0"/>
+                      </a:rPr>
+                      <m:t>ℒ</m:t>
+                    </m:r>
+                  </m:oMath>
+                </a14:m>
+                <a:r>
+                  <a:rPr lang="en-GB" sz="2400" dirty="0">
+                    <a:sym typeface="Wingdings" pitchFamily="2" charset="2"/>
+                  </a:rPr>
+                  <a:t>: </a:t>
+                </a:r>
+                <a:r>
+                  <a:rPr lang="en-GB" sz="2400" dirty="0"/>
+                  <a:t>log-likelihood function</a:t>
+                </a:r>
+              </a:p>
+              <a:p>
+                <a:pPr marL="0" indent="0">
+                  <a:buNone/>
+                </a:pPr>
+                <a:endParaRPr lang="en-GB" sz="2400" dirty="0"/>
+              </a:p>
+              <a:p>
+                <a:pPr marL="0" indent="0">
+                  <a:buNone/>
+                </a:pPr>
+                <a14:m>
+                  <m:oMathPara xmlns:m="http://schemas.openxmlformats.org/officeDocument/2006/math">
+                    <m:oMathParaPr>
+                      <m:jc m:val="centerGroup"/>
+                    </m:oMathParaPr>
+                    <m:oMath xmlns:m="http://schemas.openxmlformats.org/officeDocument/2006/math">
+                      <m:r>
+                        <a:rPr lang="en-GB" sz="2400" i="1" smtClean="0">
+                          <a:latin typeface="Cambria Math" panose="02040503050406030204" pitchFamily="18" charset="0"/>
+                          <a:ea typeface="Cambria Math" panose="02040503050406030204" pitchFamily="18" charset="0"/>
+                        </a:rPr>
+                        <m:t>ℓ</m:t>
+                      </m:r>
+                      <m:d>
+                        <m:dPr>
+                          <m:ctrlPr>
+                            <a:rPr lang="en-GB" sz="2400" i="1" smtClean="0">
+                              <a:latin typeface="Cambria Math" panose="02040503050406030204" pitchFamily="18" charset="0"/>
+                              <a:ea typeface="Cambria Math" panose="02040503050406030204" pitchFamily="18" charset="0"/>
+                            </a:rPr>
+                          </m:ctrlPr>
+                        </m:dPr>
+                        <m:e>
+                          <m:acc>
+                            <m:accPr>
+                              <m:chr m:val="̂"/>
+                              <m:ctrlPr>
+                                <a:rPr lang="en-GB" sz="2400" b="1" i="1" smtClean="0">
+                                  <a:latin typeface="Cambria Math" panose="02040503050406030204" pitchFamily="18" charset="0"/>
+                                  <a:ea typeface="Cambria Math" panose="02040503050406030204" pitchFamily="18" charset="0"/>
+                                </a:rPr>
+                              </m:ctrlPr>
+                            </m:accPr>
+                            <m:e>
+                              <m:r>
+                                <a:rPr lang="en-GB" sz="2400" b="1" i="1">
+                                  <a:latin typeface="Cambria Math" panose="02040503050406030204" pitchFamily="18" charset="0"/>
+                                  <a:ea typeface="Cambria Math" panose="02040503050406030204" pitchFamily="18" charset="0"/>
+                                </a:rPr>
+                                <m:t>𝜽</m:t>
+                              </m:r>
+                            </m:e>
+                          </m:acc>
+                          <m:r>
+                            <a:rPr lang="en-US" sz="2400" i="1">
+                              <a:latin typeface="Cambria Math" panose="02040503050406030204" pitchFamily="18" charset="0"/>
+                              <a:ea typeface="Cambria Math" panose="02040503050406030204" pitchFamily="18" charset="0"/>
+                            </a:rPr>
+                            <m:t>;</m:t>
+                          </m:r>
+                          <m:r>
+                            <a:rPr lang="en-US" sz="2400" b="1" i="1">
+                              <a:latin typeface="Cambria Math" panose="02040503050406030204" pitchFamily="18" charset="0"/>
+                              <a:ea typeface="Cambria Math" panose="02040503050406030204" pitchFamily="18" charset="0"/>
+                            </a:rPr>
+                            <m:t>𝒚</m:t>
+                          </m:r>
+                          <m:r>
+                            <a:rPr lang="en-US" sz="2400" i="1">
+                              <a:latin typeface="Cambria Math" panose="02040503050406030204" pitchFamily="18" charset="0"/>
+                              <a:ea typeface="Cambria Math" panose="02040503050406030204" pitchFamily="18" charset="0"/>
+                            </a:rPr>
+                            <m:t>|</m:t>
+                          </m:r>
+                          <m:r>
+                            <a:rPr lang="en-US" sz="2400" b="1" i="1" smtClean="0">
+                              <a:latin typeface="Cambria Math" panose="02040503050406030204" pitchFamily="18" charset="0"/>
+                              <a:ea typeface="Cambria Math" panose="02040503050406030204" pitchFamily="18" charset="0"/>
+                            </a:rPr>
+                            <m:t>𝒙</m:t>
+                          </m:r>
+                        </m:e>
+                      </m:d>
+                      <m:r>
+                        <a:rPr lang="en-US" sz="2400" b="0" i="1" smtClean="0">
+                          <a:latin typeface="Cambria Math" panose="02040503050406030204" pitchFamily="18" charset="0"/>
+                          <a:ea typeface="Cambria Math" panose="02040503050406030204" pitchFamily="18" charset="0"/>
+                        </a:rPr>
+                        <m:t>=</m:t>
+                      </m:r>
+                      <m:r>
+                        <m:rPr>
+                          <m:sty m:val="p"/>
+                        </m:rPr>
+                        <a:rPr lang="en-US" sz="2400" b="0" i="0" smtClean="0">
+                          <a:latin typeface="Cambria Math" panose="02040503050406030204" pitchFamily="18" charset="0"/>
+                          <a:ea typeface="Cambria Math" panose="02040503050406030204" pitchFamily="18" charset="0"/>
+                        </a:rPr>
+                        <m:t>ln</m:t>
+                      </m:r>
+                      <m:d>
+                        <m:dPr>
+                          <m:ctrlPr>
+                            <a:rPr lang="en-US" sz="2400" b="0" i="1" smtClean="0">
+                              <a:latin typeface="Cambria Math" panose="02040503050406030204" pitchFamily="18" charset="0"/>
+                              <a:ea typeface="Cambria Math" panose="02040503050406030204" pitchFamily="18" charset="0"/>
+                            </a:rPr>
+                          </m:ctrlPr>
+                        </m:dPr>
+                        <m:e>
+                          <m:r>
+                            <a:rPr lang="en-GB" sz="2400" i="1">
+                              <a:latin typeface="Cambria Math" panose="02040503050406030204" pitchFamily="18" charset="0"/>
+                              <a:ea typeface="Cambria Math" panose="02040503050406030204" pitchFamily="18" charset="0"/>
+                            </a:rPr>
+                            <m:t>ℒ</m:t>
+                          </m:r>
+                          <m:d>
+                            <m:dPr>
+                              <m:ctrlPr>
+                                <a:rPr lang="en-GB" sz="2400" i="1">
+                                  <a:latin typeface="Cambria Math" panose="02040503050406030204" pitchFamily="18" charset="0"/>
+                                  <a:ea typeface="Cambria Math" panose="02040503050406030204" pitchFamily="18" charset="0"/>
+                                </a:rPr>
+                              </m:ctrlPr>
+                            </m:dPr>
+                            <m:e>
+                              <m:acc>
+                                <m:accPr>
+                                  <m:chr m:val="̂"/>
+                                  <m:ctrlPr>
+                                    <a:rPr lang="en-GB" sz="2400" i="1" smtClean="0">
+                                      <a:latin typeface="Cambria Math" panose="02040503050406030204" pitchFamily="18" charset="0"/>
+                                      <a:ea typeface="Cambria Math" panose="02040503050406030204" pitchFamily="18" charset="0"/>
+                                    </a:rPr>
+                                  </m:ctrlPr>
+                                </m:accPr>
+                                <m:e>
+                                  <m:r>
+                                    <a:rPr lang="en-GB" sz="2400" b="1" i="1">
+                                      <a:latin typeface="Cambria Math" panose="02040503050406030204" pitchFamily="18" charset="0"/>
+                                      <a:ea typeface="Cambria Math" panose="02040503050406030204" pitchFamily="18" charset="0"/>
+                                    </a:rPr>
+                                    <m:t>𝜽</m:t>
+                                  </m:r>
+                                </m:e>
+                              </m:acc>
+                              <m:r>
+                                <a:rPr lang="en-US" sz="2400" i="1">
+                                  <a:latin typeface="Cambria Math" panose="02040503050406030204" pitchFamily="18" charset="0"/>
+                                  <a:ea typeface="Cambria Math" panose="02040503050406030204" pitchFamily="18" charset="0"/>
+                                </a:rPr>
+                                <m:t>;</m:t>
+                              </m:r>
+                              <m:r>
+                                <a:rPr lang="en-US" sz="2400" b="1" i="1">
+                                  <a:latin typeface="Cambria Math" panose="02040503050406030204" pitchFamily="18" charset="0"/>
+                                  <a:ea typeface="Cambria Math" panose="02040503050406030204" pitchFamily="18" charset="0"/>
+                                </a:rPr>
+                                <m:t>𝒚</m:t>
+                              </m:r>
+                              <m:r>
+                                <a:rPr lang="en-US" sz="2400" i="1">
+                                  <a:latin typeface="Cambria Math" panose="02040503050406030204" pitchFamily="18" charset="0"/>
+                                  <a:ea typeface="Cambria Math" panose="02040503050406030204" pitchFamily="18" charset="0"/>
+                                </a:rPr>
+                                <m:t>|</m:t>
+                              </m:r>
+                              <m:r>
+                                <a:rPr lang="en-US" sz="2400" b="1" i="1">
+                                  <a:latin typeface="Cambria Math" panose="02040503050406030204" pitchFamily="18" charset="0"/>
+                                  <a:ea typeface="Cambria Math" panose="02040503050406030204" pitchFamily="18" charset="0"/>
+                                </a:rPr>
+                                <m:t>𝒙</m:t>
+                              </m:r>
+                            </m:e>
+                          </m:d>
+                        </m:e>
+                      </m:d>
+                      <m:r>
+                        <a:rPr lang="en-US" sz="2400" i="1">
+                          <a:latin typeface="Cambria Math" panose="02040503050406030204" pitchFamily="18" charset="0"/>
+                          <a:ea typeface="Cambria Math" panose="02040503050406030204" pitchFamily="18" charset="0"/>
+                        </a:rPr>
+                        <m:t>=</m:t>
+                      </m:r>
+                      <m:nary>
+                        <m:naryPr>
+                          <m:chr m:val="∑"/>
+                          <m:ctrlPr>
+                            <a:rPr lang="en-US" sz="2400" i="1" smtClean="0">
+                              <a:latin typeface="Cambria Math" panose="02040503050406030204" pitchFamily="18" charset="0"/>
+                              <a:ea typeface="Cambria Math" panose="02040503050406030204" pitchFamily="18" charset="0"/>
+                            </a:rPr>
+                          </m:ctrlPr>
+                        </m:naryPr>
+                        <m:sub>
+                          <m:r>
+                            <m:rPr>
+                              <m:brk m:alnAt="23"/>
+                            </m:rPr>
+                            <a:rPr lang="en-US" sz="2400" b="0" i="1" smtClean="0">
+                              <a:latin typeface="Cambria Math" panose="02040503050406030204" pitchFamily="18" charset="0"/>
+                              <a:ea typeface="Cambria Math" panose="02040503050406030204" pitchFamily="18" charset="0"/>
+                            </a:rPr>
+                            <m:t>𝑖</m:t>
+                          </m:r>
+                          <m:r>
+                            <a:rPr lang="en-US" sz="2400" b="0" i="1" smtClean="0">
+                              <a:latin typeface="Cambria Math" panose="02040503050406030204" pitchFamily="18" charset="0"/>
+                              <a:ea typeface="Cambria Math" panose="02040503050406030204" pitchFamily="18" charset="0"/>
+                            </a:rPr>
+                            <m:t>=1</m:t>
+                          </m:r>
+                        </m:sub>
+                        <m:sup>
+                          <m:r>
+                            <a:rPr lang="en-US" sz="2400" b="0" i="1" smtClean="0">
+                              <a:latin typeface="Cambria Math" panose="02040503050406030204" pitchFamily="18" charset="0"/>
+                              <a:ea typeface="Cambria Math" panose="02040503050406030204" pitchFamily="18" charset="0"/>
+                            </a:rPr>
+                            <m:t>𝑛</m:t>
+                          </m:r>
+                        </m:sup>
+                        <m:e>
+                          <m:func>
+                            <m:funcPr>
+                              <m:ctrlPr>
+                                <a:rPr lang="en-US" sz="2400" b="0" i="1" smtClean="0">
+                                  <a:latin typeface="Cambria Math" panose="02040503050406030204" pitchFamily="18" charset="0"/>
+                                  <a:ea typeface="Cambria Math" panose="02040503050406030204" pitchFamily="18" charset="0"/>
+                                </a:rPr>
+                              </m:ctrlPr>
+                            </m:funcPr>
+                            <m:fName>
+                              <m:r>
+                                <m:rPr>
+                                  <m:sty m:val="p"/>
+                                </m:rPr>
+                                <a:rPr lang="en-US" sz="2400" b="0" i="0" smtClean="0">
+                                  <a:latin typeface="Cambria Math" panose="02040503050406030204" pitchFamily="18" charset="0"/>
+                                  <a:ea typeface="Cambria Math" panose="02040503050406030204" pitchFamily="18" charset="0"/>
+                                </a:rPr>
+                                <m:t>ln</m:t>
+                              </m:r>
+                            </m:fName>
+                            <m:e>
+                              <m:d>
+                                <m:dPr>
+                                  <m:ctrlPr>
+                                    <a:rPr lang="en-US" sz="2400" i="1">
+                                      <a:latin typeface="Cambria Math" panose="02040503050406030204" pitchFamily="18" charset="0"/>
+                                      <a:ea typeface="Cambria Math" panose="02040503050406030204" pitchFamily="18" charset="0"/>
+                                    </a:rPr>
+                                  </m:ctrlPr>
+                                </m:dPr>
+                                <m:e>
+                                  <m:r>
+                                    <a:rPr lang="en-US" sz="2400" b="0" i="1" smtClean="0">
+                                      <a:latin typeface="Cambria Math" panose="02040503050406030204" pitchFamily="18" charset="0"/>
+                                    </a:rPr>
+                                    <m:t>𝑝</m:t>
+                                  </m:r>
+                                  <m:d>
+                                    <m:dPr>
+                                      <m:ctrlPr>
+                                        <a:rPr lang="en-US" sz="2400" i="1">
+                                          <a:latin typeface="Cambria Math" panose="02040503050406030204" pitchFamily="18" charset="0"/>
+                                        </a:rPr>
+                                      </m:ctrlPr>
+                                    </m:dPr>
+                                    <m:e>
+                                      <m:sSub>
+                                        <m:sSubPr>
+                                          <m:ctrlPr>
+                                            <a:rPr lang="en-US" sz="2400" i="1">
+                                              <a:latin typeface="Cambria Math" panose="02040503050406030204" pitchFamily="18" charset="0"/>
+                                            </a:rPr>
+                                          </m:ctrlPr>
+                                        </m:sSubPr>
+                                        <m:e>
+                                          <m:r>
+                                            <a:rPr lang="en-US" sz="2400" i="1">
+                                              <a:latin typeface="Cambria Math" panose="02040503050406030204" pitchFamily="18" charset="0"/>
+                                            </a:rPr>
+                                            <m:t>𝑦</m:t>
+                                          </m:r>
+                                        </m:e>
+                                        <m:sub>
+                                          <m:r>
+                                            <a:rPr lang="en-US" sz="2400" i="1">
+                                              <a:latin typeface="Cambria Math" panose="02040503050406030204" pitchFamily="18" charset="0"/>
+                                            </a:rPr>
+                                            <m:t>𝑖</m:t>
+                                          </m:r>
+                                        </m:sub>
+                                      </m:sSub>
+                                      <m:r>
+                                        <a:rPr lang="en-US" sz="2400" i="1">
+                                          <a:latin typeface="Cambria Math" panose="02040503050406030204" pitchFamily="18" charset="0"/>
+                                        </a:rPr>
+                                        <m:t>|</m:t>
+                                      </m:r>
+                                      <m:sSub>
+                                        <m:sSubPr>
+                                          <m:ctrlPr>
+                                            <a:rPr lang="en-US" sz="2400" b="1" i="1">
+                                              <a:latin typeface="Cambria Math" panose="02040503050406030204" pitchFamily="18" charset="0"/>
+                                            </a:rPr>
+                                          </m:ctrlPr>
+                                        </m:sSubPr>
+                                        <m:e>
+                                          <m:r>
+                                            <a:rPr lang="en-US" sz="2400" b="1" i="1">
+                                              <a:latin typeface="Cambria Math" panose="02040503050406030204" pitchFamily="18" charset="0"/>
+                                            </a:rPr>
+                                            <m:t>𝒙</m:t>
+                                          </m:r>
+                                        </m:e>
+                                        <m:sub>
+                                          <m:r>
+                                            <a:rPr lang="en-US" sz="2400" i="1">
+                                              <a:latin typeface="Cambria Math" panose="02040503050406030204" pitchFamily="18" charset="0"/>
+                                            </a:rPr>
+                                            <m:t>𝑖</m:t>
+                                          </m:r>
+                                        </m:sub>
+                                      </m:sSub>
+                                      <m:r>
+                                        <a:rPr lang="en-US" sz="2400" i="1">
+                                          <a:latin typeface="Cambria Math" panose="02040503050406030204" pitchFamily="18" charset="0"/>
+                                        </a:rPr>
+                                        <m:t>;</m:t>
+                                      </m:r>
+                                      <m:acc>
+                                        <m:accPr>
+                                          <m:chr m:val="̂"/>
+                                          <m:ctrlPr>
+                                            <a:rPr lang="en-US" sz="2400" b="1" i="1" smtClean="0">
+                                              <a:latin typeface="Cambria Math" panose="02040503050406030204" pitchFamily="18" charset="0"/>
+                                              <a:ea typeface="Cambria Math" panose="02040503050406030204" pitchFamily="18" charset="0"/>
+                                            </a:rPr>
+                                          </m:ctrlPr>
+                                        </m:accPr>
+                                        <m:e>
+                                          <m:r>
+                                            <a:rPr lang="en-GB" sz="2400" b="1" i="1">
+                                              <a:latin typeface="Cambria Math" panose="02040503050406030204" pitchFamily="18" charset="0"/>
+                                              <a:ea typeface="Cambria Math" panose="02040503050406030204" pitchFamily="18" charset="0"/>
+                                            </a:rPr>
+                                            <m:t>𝜽</m:t>
+                                          </m:r>
+                                        </m:e>
+                                      </m:acc>
+                                    </m:e>
+                                  </m:d>
+                                </m:e>
+                              </m:d>
+                            </m:e>
+                          </m:func>
+                        </m:e>
+                      </m:nary>
+                    </m:oMath>
+                  </m:oMathPara>
+                </a14:m>
+                <a:endParaRPr lang="en-GB" sz="2400" dirty="0"/>
+              </a:p>
+              <a:p>
+                <a:pPr marL="0" indent="0">
+                  <a:buNone/>
+                </a:pPr>
+                <a:endParaRPr lang="en-GB" sz="2400" dirty="0"/>
+              </a:p>
+              <a:p>
+                <a:r>
+                  <a:rPr lang="en-GB" sz="2400" dirty="0"/>
+                  <a:t>logarithm monotonic function </a:t>
+                </a:r>
+                <a:r>
+                  <a:rPr lang="en-GB" sz="2400" dirty="0">
+                    <a:sym typeface="Wingdings" pitchFamily="2" charset="2"/>
+                  </a:rPr>
+                  <a:t> maximum of </a:t>
+                </a:r>
+                <a14:m>
+                  <m:oMath xmlns:m="http://schemas.openxmlformats.org/officeDocument/2006/math">
+                    <m:r>
+                      <a:rPr lang="en-GB" sz="2400" i="1">
+                        <a:latin typeface="Cambria Math" panose="02040503050406030204" pitchFamily="18" charset="0"/>
+                        <a:ea typeface="Cambria Math" panose="02040503050406030204" pitchFamily="18" charset="0"/>
+                      </a:rPr>
+                      <m:t>ℓ</m:t>
+                    </m:r>
+                  </m:oMath>
+                </a14:m>
+                <a:r>
+                  <a:rPr lang="en-GB" sz="2400" dirty="0">
+                    <a:sym typeface="Wingdings" pitchFamily="2" charset="2"/>
+                  </a:rPr>
+                  <a:t> and </a:t>
+                </a:r>
+                <a14:m>
+                  <m:oMath xmlns:m="http://schemas.openxmlformats.org/officeDocument/2006/math">
+                    <m:r>
+                      <a:rPr lang="en-GB" sz="2400" i="1">
+                        <a:latin typeface="Cambria Math" panose="02040503050406030204" pitchFamily="18" charset="0"/>
+                        <a:ea typeface="Cambria Math" panose="02040503050406030204" pitchFamily="18" charset="0"/>
+                      </a:rPr>
+                      <m:t>ℒ</m:t>
+                    </m:r>
+                  </m:oMath>
+                </a14:m>
+                <a:r>
+                  <a:rPr lang="en-GB" sz="2400" dirty="0">
+                    <a:sym typeface="Wingdings" pitchFamily="2" charset="2"/>
+                  </a:rPr>
+                  <a:t> at same </a:t>
+                </a:r>
+                <a14:m>
+                  <m:oMath xmlns:m="http://schemas.openxmlformats.org/officeDocument/2006/math">
+                    <m:acc>
+                      <m:accPr>
+                        <m:chr m:val="̂"/>
+                        <m:ctrlPr>
+                          <a:rPr lang="en-GB" sz="2400" b="1" i="1" smtClean="0">
+                            <a:latin typeface="Cambria Math" panose="02040503050406030204" pitchFamily="18" charset="0"/>
+                            <a:ea typeface="Cambria Math" panose="02040503050406030204" pitchFamily="18" charset="0"/>
+                          </a:rPr>
+                        </m:ctrlPr>
+                      </m:accPr>
+                      <m:e>
+                        <m:r>
+                          <a:rPr lang="en-GB" sz="2400" b="1" i="1">
+                            <a:latin typeface="Cambria Math" panose="02040503050406030204" pitchFamily="18" charset="0"/>
+                            <a:ea typeface="Cambria Math" panose="02040503050406030204" pitchFamily="18" charset="0"/>
+                          </a:rPr>
+                          <m:t>𝜽</m:t>
+                        </m:r>
+                      </m:e>
+                    </m:acc>
+                  </m:oMath>
+                </a14:m>
+                <a:r>
+                  <a:rPr lang="en-GB" sz="2400" dirty="0"/>
+                  <a:t> values</a:t>
+                </a:r>
+              </a:p>
+              <a:p>
+                <a:r>
+                  <a:rPr lang="en-GB" sz="2400" dirty="0"/>
+                  <a:t>most probability distributions (e.g., exponential family) only logarithmically concave (important for optimization)</a:t>
+                </a:r>
+              </a:p>
+              <a:p>
+                <a:r>
+                  <a:rPr lang="en-GB" sz="2400" dirty="0"/>
+                  <a:t>sum computationally more convenient than product</a:t>
+                </a:r>
+              </a:p>
+              <a:p>
+                <a:pPr marL="0" indent="0">
+                  <a:buNone/>
+                </a:pPr>
+                <a:endParaRPr lang="en-GB" sz="2400" dirty="0"/>
+              </a:p>
+              <a:p>
+                <a:pPr marL="0" indent="0">
+                  <a:buNone/>
+                </a:pPr>
+                <a:r>
+                  <a:rPr lang="en-DE" sz="2400" dirty="0"/>
+                  <a:t>negative log-likelihood:</a:t>
+                </a:r>
+                <a:r>
+                  <a:rPr lang="en-DE" sz="2400" dirty="0">
+                    <a:sym typeface="Wingdings" pitchFamily="2" charset="2"/>
+                  </a:rPr>
+                  <a:t> minimization instead of maximization</a:t>
+                </a:r>
+              </a:p>
+              <a:p>
+                <a:pPr marL="0" indent="0">
+                  <a:buNone/>
+                </a:pPr>
+                <a14:m>
+                  <m:oMathPara xmlns:m="http://schemas.openxmlformats.org/officeDocument/2006/math">
+                    <m:oMathParaPr>
+                      <m:jc m:val="left"/>
+                    </m:oMathParaPr>
+                    <m:oMath xmlns:m="http://schemas.openxmlformats.org/officeDocument/2006/math">
+                      <m:sSub>
+                        <m:sSubPr>
+                          <m:ctrlPr>
+                            <a:rPr lang="en-US" sz="2400" b="0" i="1" smtClean="0">
+                              <a:latin typeface="Cambria Math" panose="02040503050406030204" pitchFamily="18" charset="0"/>
+                              <a:ea typeface="Cambria Math" panose="02040503050406030204" pitchFamily="18" charset="0"/>
+                            </a:rPr>
+                          </m:ctrlPr>
+                        </m:sSubPr>
+                        <m:e>
+                          <m:acc>
+                            <m:accPr>
+                              <m:chr m:val="̂"/>
+                              <m:ctrlPr>
+                                <a:rPr lang="en-US" sz="2400" b="0" i="1" smtClean="0">
+                                  <a:latin typeface="Cambria Math" panose="02040503050406030204" pitchFamily="18" charset="0"/>
+                                  <a:ea typeface="Cambria Math" panose="02040503050406030204" pitchFamily="18" charset="0"/>
+                                </a:rPr>
+                              </m:ctrlPr>
+                            </m:accPr>
+                            <m:e>
+                              <m:r>
+                                <a:rPr lang="en-GB" sz="2400" b="1" i="1">
+                                  <a:latin typeface="Cambria Math" panose="02040503050406030204" pitchFamily="18" charset="0"/>
+                                  <a:ea typeface="Cambria Math" panose="02040503050406030204" pitchFamily="18" charset="0"/>
+                                </a:rPr>
+                                <m:t>𝜽</m:t>
+                              </m:r>
+                            </m:e>
+                          </m:acc>
+                          <m:r>
+                            <a:rPr lang="en-US" sz="2400" b="0" i="1" smtClean="0">
+                              <a:latin typeface="Cambria Math" panose="02040503050406030204" pitchFamily="18" charset="0"/>
+                              <a:ea typeface="Cambria Math" panose="02040503050406030204" pitchFamily="18" charset="0"/>
+                            </a:rPr>
+                            <m:t>=</m:t>
+                          </m:r>
+                          <m:r>
+                            <m:rPr>
+                              <m:sty m:val="p"/>
+                            </m:rPr>
+                            <a:rPr lang="en-US" sz="2400" b="0" i="0" smtClean="0">
+                              <a:latin typeface="Cambria Math" panose="02040503050406030204" pitchFamily="18" charset="0"/>
+                              <a:ea typeface="Cambria Math" panose="02040503050406030204" pitchFamily="18" charset="0"/>
+                            </a:rPr>
+                            <m:t>argmax</m:t>
+                          </m:r>
+                        </m:e>
+                        <m:sub>
+                          <m:acc>
+                            <m:accPr>
+                              <m:chr m:val="̂"/>
+                              <m:ctrlPr>
+                                <a:rPr lang="en-US" sz="2400" b="0" i="1" smtClean="0">
+                                  <a:latin typeface="Cambria Math" panose="02040503050406030204" pitchFamily="18" charset="0"/>
+                                  <a:ea typeface="Cambria Math" panose="02040503050406030204" pitchFamily="18" charset="0"/>
+                                </a:rPr>
+                              </m:ctrlPr>
+                            </m:accPr>
+                            <m:e>
+                              <m:r>
+                                <a:rPr lang="en-GB" sz="2400" b="1" i="1">
+                                  <a:latin typeface="Cambria Math" panose="02040503050406030204" pitchFamily="18" charset="0"/>
+                                  <a:ea typeface="Cambria Math" panose="02040503050406030204" pitchFamily="18" charset="0"/>
+                                </a:rPr>
+                                <m:t>𝜽</m:t>
+                              </m:r>
+                            </m:e>
+                          </m:acc>
+                        </m:sub>
+                      </m:sSub>
+                      <m:r>
+                        <a:rPr lang="en-US" sz="2400" b="0" i="1" smtClean="0">
+                          <a:latin typeface="Cambria Math" panose="02040503050406030204" pitchFamily="18" charset="0"/>
+                          <a:ea typeface="Cambria Math" panose="02040503050406030204" pitchFamily="18" charset="0"/>
+                        </a:rPr>
+                        <m:t> </m:t>
+                      </m:r>
+                      <m:r>
+                        <a:rPr lang="en-GB" sz="2400" i="1">
+                          <a:latin typeface="Cambria Math" panose="02040503050406030204" pitchFamily="18" charset="0"/>
+                          <a:ea typeface="Cambria Math" panose="02040503050406030204" pitchFamily="18" charset="0"/>
+                        </a:rPr>
+                        <m:t>ℓ</m:t>
+                      </m:r>
+                      <m:d>
+                        <m:dPr>
+                          <m:ctrlPr>
+                            <a:rPr lang="en-GB" sz="2400" i="1">
+                              <a:latin typeface="Cambria Math" panose="02040503050406030204" pitchFamily="18" charset="0"/>
+                              <a:ea typeface="Cambria Math" panose="02040503050406030204" pitchFamily="18" charset="0"/>
+                            </a:rPr>
+                          </m:ctrlPr>
+                        </m:dPr>
+                        <m:e>
+                          <m:acc>
+                            <m:accPr>
+                              <m:chr m:val="̂"/>
+                              <m:ctrlPr>
+                                <a:rPr lang="en-GB" sz="2400" b="1" i="1" smtClean="0">
+                                  <a:latin typeface="Cambria Math" panose="02040503050406030204" pitchFamily="18" charset="0"/>
+                                  <a:ea typeface="Cambria Math" panose="02040503050406030204" pitchFamily="18" charset="0"/>
+                                </a:rPr>
+                              </m:ctrlPr>
+                            </m:accPr>
+                            <m:e>
+                              <m:r>
+                                <a:rPr lang="en-GB" sz="2400" b="1" i="1">
+                                  <a:latin typeface="Cambria Math" panose="02040503050406030204" pitchFamily="18" charset="0"/>
+                                  <a:ea typeface="Cambria Math" panose="02040503050406030204" pitchFamily="18" charset="0"/>
+                                </a:rPr>
+                                <m:t>𝜽</m:t>
+                              </m:r>
+                            </m:e>
+                          </m:acc>
+                          <m:r>
+                            <a:rPr lang="en-US" sz="2400" i="1">
+                              <a:latin typeface="Cambria Math" panose="02040503050406030204" pitchFamily="18" charset="0"/>
+                              <a:ea typeface="Cambria Math" panose="02040503050406030204" pitchFamily="18" charset="0"/>
+                            </a:rPr>
+                            <m:t>;</m:t>
+                          </m:r>
+                          <m:r>
+                            <a:rPr lang="en-US" sz="2400" b="1" i="1" smtClean="0">
+                              <a:latin typeface="Cambria Math" panose="02040503050406030204" pitchFamily="18" charset="0"/>
+                              <a:ea typeface="Cambria Math" panose="02040503050406030204" pitchFamily="18" charset="0"/>
+                            </a:rPr>
+                            <m:t>𝒚</m:t>
+                          </m:r>
+                          <m:r>
+                            <a:rPr lang="en-US" sz="2400" i="1" smtClean="0">
+                              <a:latin typeface="Cambria Math" panose="02040503050406030204" pitchFamily="18" charset="0"/>
+                              <a:ea typeface="Cambria Math" panose="02040503050406030204" pitchFamily="18" charset="0"/>
+                            </a:rPr>
+                            <m:t> </m:t>
+                          </m:r>
+                          <m:r>
+                            <a:rPr lang="en-US" sz="2400" i="1">
+                              <a:latin typeface="Cambria Math" panose="02040503050406030204" pitchFamily="18" charset="0"/>
+                              <a:ea typeface="Cambria Math" panose="02040503050406030204" pitchFamily="18" charset="0"/>
+                            </a:rPr>
+                            <m:t>|</m:t>
+                          </m:r>
+                          <m:r>
+                            <a:rPr lang="en-US" sz="2400" b="1" i="1" smtClean="0">
+                              <a:latin typeface="Cambria Math" panose="02040503050406030204" pitchFamily="18" charset="0"/>
+                              <a:ea typeface="Cambria Math" panose="02040503050406030204" pitchFamily="18" charset="0"/>
+                            </a:rPr>
+                            <m:t>𝒙</m:t>
+                          </m:r>
+                        </m:e>
+                      </m:d>
+                      <m:r>
+                        <a:rPr lang="en-US" sz="2400" b="0" i="0" smtClean="0">
+                          <a:latin typeface="Cambria Math" panose="02040503050406030204" pitchFamily="18" charset="0"/>
+                          <a:ea typeface="Cambria Math" panose="02040503050406030204" pitchFamily="18" charset="0"/>
+                        </a:rPr>
+                        <m:t>=</m:t>
+                      </m:r>
+                      <m:sSub>
+                        <m:sSubPr>
+                          <m:ctrlPr>
+                            <a:rPr lang="en-US" sz="2400" i="1">
+                              <a:latin typeface="Cambria Math" panose="02040503050406030204" pitchFamily="18" charset="0"/>
+                              <a:ea typeface="Cambria Math" panose="02040503050406030204" pitchFamily="18" charset="0"/>
+                            </a:rPr>
+                          </m:ctrlPr>
+                        </m:sSubPr>
+                        <m:e>
+                          <m:r>
+                            <m:rPr>
+                              <m:sty m:val="p"/>
+                            </m:rPr>
+                            <a:rPr lang="en-US" sz="2400">
+                              <a:latin typeface="Cambria Math" panose="02040503050406030204" pitchFamily="18" charset="0"/>
+                              <a:ea typeface="Cambria Math" panose="02040503050406030204" pitchFamily="18" charset="0"/>
+                            </a:rPr>
+                            <m:t>arg</m:t>
+                          </m:r>
+                          <m:r>
+                            <m:rPr>
+                              <m:sty m:val="p"/>
+                            </m:rPr>
+                            <a:rPr lang="en-US" sz="2400" b="0" i="0" smtClean="0">
+                              <a:latin typeface="Cambria Math" panose="02040503050406030204" pitchFamily="18" charset="0"/>
+                              <a:ea typeface="Cambria Math" panose="02040503050406030204" pitchFamily="18" charset="0"/>
+                            </a:rPr>
+                            <m:t>min</m:t>
+                          </m:r>
+                        </m:e>
+                        <m:sub>
+                          <m:acc>
+                            <m:accPr>
+                              <m:chr m:val="̂"/>
+                              <m:ctrlPr>
+                                <a:rPr lang="en-US" sz="2400" b="0" i="1" smtClean="0">
+                                  <a:latin typeface="Cambria Math" panose="02040503050406030204" pitchFamily="18" charset="0"/>
+                                  <a:ea typeface="Cambria Math" panose="02040503050406030204" pitchFamily="18" charset="0"/>
+                                </a:rPr>
+                              </m:ctrlPr>
+                            </m:accPr>
+                            <m:e>
+                              <m:r>
+                                <a:rPr lang="en-GB" sz="2400" b="1" i="1">
+                                  <a:latin typeface="Cambria Math" panose="02040503050406030204" pitchFamily="18" charset="0"/>
+                                  <a:ea typeface="Cambria Math" panose="02040503050406030204" pitchFamily="18" charset="0"/>
+                                </a:rPr>
+                                <m:t>𝜽</m:t>
+                              </m:r>
+                            </m:e>
+                          </m:acc>
+                        </m:sub>
+                      </m:sSub>
+                      <m:r>
+                        <a:rPr lang="en-US" sz="2400" b="0" i="1" smtClean="0">
+                          <a:latin typeface="Cambria Math" panose="02040503050406030204" pitchFamily="18" charset="0"/>
+                          <a:ea typeface="Cambria Math" panose="02040503050406030204" pitchFamily="18" charset="0"/>
+                        </a:rPr>
+                        <m:t> </m:t>
+                      </m:r>
+                      <m:d>
+                        <m:dPr>
+                          <m:ctrlPr>
+                            <a:rPr lang="en-US" sz="2400" b="0" i="1" smtClean="0">
+                              <a:latin typeface="Cambria Math" panose="02040503050406030204" pitchFamily="18" charset="0"/>
+                              <a:ea typeface="Cambria Math" panose="02040503050406030204" pitchFamily="18" charset="0"/>
+                            </a:rPr>
+                          </m:ctrlPr>
+                        </m:dPr>
+                        <m:e>
+                          <m:r>
+                            <a:rPr lang="en-US" sz="2400" b="0" i="1" smtClean="0">
+                              <a:latin typeface="Cambria Math" panose="02040503050406030204" pitchFamily="18" charset="0"/>
+                              <a:ea typeface="Cambria Math" panose="02040503050406030204" pitchFamily="18" charset="0"/>
+                            </a:rPr>
+                            <m:t>−</m:t>
+                          </m:r>
+                          <m:r>
+                            <a:rPr lang="en-GB" sz="2400" i="1">
+                              <a:latin typeface="Cambria Math" panose="02040503050406030204" pitchFamily="18" charset="0"/>
+                              <a:ea typeface="Cambria Math" panose="02040503050406030204" pitchFamily="18" charset="0"/>
+                            </a:rPr>
+                            <m:t>ℓ</m:t>
+                          </m:r>
+                          <m:d>
+                            <m:dPr>
+                              <m:ctrlPr>
+                                <a:rPr lang="en-GB" sz="2400" i="1">
+                                  <a:latin typeface="Cambria Math" panose="02040503050406030204" pitchFamily="18" charset="0"/>
+                                  <a:ea typeface="Cambria Math" panose="02040503050406030204" pitchFamily="18" charset="0"/>
+                                </a:rPr>
+                              </m:ctrlPr>
+                            </m:dPr>
+                            <m:e>
+                              <m:acc>
+                                <m:accPr>
+                                  <m:chr m:val="̂"/>
+                                  <m:ctrlPr>
+                                    <a:rPr lang="en-GB" sz="2400" b="0" i="1" smtClean="0">
+                                      <a:latin typeface="Cambria Math" panose="02040503050406030204" pitchFamily="18" charset="0"/>
+                                      <a:ea typeface="Cambria Math" panose="02040503050406030204" pitchFamily="18" charset="0"/>
+                                    </a:rPr>
+                                  </m:ctrlPr>
+                                </m:accPr>
+                                <m:e>
+                                  <m:r>
+                                    <a:rPr lang="en-GB" sz="2400" b="1" i="1">
+                                      <a:latin typeface="Cambria Math" panose="02040503050406030204" pitchFamily="18" charset="0"/>
+                                      <a:ea typeface="Cambria Math" panose="02040503050406030204" pitchFamily="18" charset="0"/>
+                                    </a:rPr>
+                                    <m:t>𝜽</m:t>
+                                  </m:r>
+                                </m:e>
+                              </m:acc>
+                              <m:r>
+                                <a:rPr lang="en-US" sz="2400" i="1">
+                                  <a:latin typeface="Cambria Math" panose="02040503050406030204" pitchFamily="18" charset="0"/>
+                                  <a:ea typeface="Cambria Math" panose="02040503050406030204" pitchFamily="18" charset="0"/>
+                                </a:rPr>
+                                <m:t>;</m:t>
+                              </m:r>
+                              <m:r>
+                                <a:rPr lang="en-US" sz="2400" b="1" i="1">
+                                  <a:latin typeface="Cambria Math" panose="02040503050406030204" pitchFamily="18" charset="0"/>
+                                  <a:ea typeface="Cambria Math" panose="02040503050406030204" pitchFamily="18" charset="0"/>
+                                </a:rPr>
+                                <m:t>𝒚</m:t>
+                              </m:r>
+                              <m:r>
+                                <a:rPr lang="en-US" sz="2400" i="1">
+                                  <a:latin typeface="Cambria Math" panose="02040503050406030204" pitchFamily="18" charset="0"/>
+                                  <a:ea typeface="Cambria Math" panose="02040503050406030204" pitchFamily="18" charset="0"/>
+                                </a:rPr>
+                                <m:t> |</m:t>
+                              </m:r>
+                              <m:r>
+                                <a:rPr lang="en-US" sz="2400" b="1" i="1">
+                                  <a:latin typeface="Cambria Math" panose="02040503050406030204" pitchFamily="18" charset="0"/>
+                                  <a:ea typeface="Cambria Math" panose="02040503050406030204" pitchFamily="18" charset="0"/>
+                                </a:rPr>
+                                <m:t>𝒙</m:t>
+                              </m:r>
+                            </m:e>
+                          </m:d>
+                        </m:e>
+                      </m:d>
+                    </m:oMath>
+                  </m:oMathPara>
+                </a14:m>
+                <a:endParaRPr lang="en-DE" sz="2400" dirty="0"/>
+              </a:p>
+            </p:txBody>
+          </p:sp>
+        </mc:Choice>
+        <mc:Fallback xmlns="">
+          <p:sp>
+            <p:nvSpPr>
+              <p:cNvPr id="3" name="Content Placeholder 2">
+                <a:extLst>
+                  <a:ext uri="{FF2B5EF4-FFF2-40B4-BE49-F238E27FC236}">
+                    <a16:creationId xmlns:a16="http://schemas.microsoft.com/office/drawing/2014/main" id="{A1D50BE1-6E3C-96FF-14B6-FBB141E405D4}"/>
+                  </a:ext>
+                </a:extLst>
+              </p:cNvPr>
+              <p:cNvSpPr>
+                <a:spLocks noGrp="1" noRot="1" noChangeAspect="1" noMove="1" noResize="1" noEditPoints="1" noAdjustHandles="1" noChangeArrowheads="1" noChangeShapeType="1" noTextEdit="1"/>
+              </p:cNvSpPr>
+              <p:nvPr>
+                <p:ph idx="1"/>
+              </p:nvPr>
+            </p:nvSpPr>
+            <p:spPr>
+              <a:blipFill>
+                <a:blip r:embed="rId2"/>
+                <a:stretch>
+                  <a:fillRect l="-724" t="-9884" b="-291"/>
+                </a:stretch>
+              </a:blipFill>
+            </p:spPr>
+            <p:txBody>
+              <a:bodyPr/>
+              <a:lstStyle/>
+              <a:p>
+                <a:r>
+                  <a:rPr lang="en-DE">
+                    <a:noFill/>
+                  </a:rPr>
+                  <a:t> </a:t>
+                </a:r>
+              </a:p>
+            </p:txBody>
+          </p:sp>
+        </mc:Fallback>
+      </mc:AlternateContent>
+      <p:sp>
+        <p:nvSpPr>
+          <p:cNvPr id="4" name="Slide Number Placeholder 3">
+            <a:extLst>
+              <a:ext uri="{FF2B5EF4-FFF2-40B4-BE49-F238E27FC236}">
+                <a16:creationId xmlns:a16="http://schemas.microsoft.com/office/drawing/2014/main" id="{D733ABB5-C09F-871F-F43B-E53B1C04D5F6}"/>
+              </a:ext>
+            </a:extLst>
+          </p:cNvPr>
+          <p:cNvSpPr>
+            <a:spLocks noGrp="1"/>
+          </p:cNvSpPr>
+          <p:nvPr>
+            <p:ph type="sldNum" sz="quarter" idx="12"/>
+          </p:nvPr>
+        </p:nvSpPr>
+        <p:spPr/>
+        <p:txBody>
+          <a:bodyPr/>
+          <a:lstStyle/>
+          <a:p>
+            <a:fld id="{77E1BB0D-8AD4-A14C-8FD5-F1619D1A43A2}" type="slidenum">
+              <a:rPr lang="en-DE" smtClean="0"/>
+              <a:t>9</a:t>
+            </a:fld>
+            <a:endParaRPr lang="en-DE"/>
+          </a:p>
+        </p:txBody>
+      </p:sp>
+      <mc:AlternateContent xmlns:mc="http://schemas.openxmlformats.org/markup-compatibility/2006" xmlns:a14="http://schemas.microsoft.com/office/drawing/2010/main">
+        <mc:Choice Requires="a14">
+          <p:sp>
+            <p:nvSpPr>
+              <p:cNvPr id="5" name="TextBox 4">
+                <a:extLst>
+                  <a:ext uri="{FF2B5EF4-FFF2-40B4-BE49-F238E27FC236}">
+                    <a16:creationId xmlns:a16="http://schemas.microsoft.com/office/drawing/2014/main" id="{EF247870-2EBE-384D-F1E4-36BA1902C127}"/>
+                  </a:ext>
+                </a:extLst>
+              </p:cNvPr>
+              <p:cNvSpPr txBox="1"/>
+              <p:nvPr/>
+            </p:nvSpPr>
+            <p:spPr>
+              <a:xfrm>
+                <a:off x="8610600" y="681037"/>
+                <a:ext cx="3390243" cy="1250855"/>
+              </a:xfrm>
+              <a:prstGeom prst="rect">
+                <a:avLst/>
+              </a:prstGeom>
+              <a:solidFill>
+                <a:schemeClr val="bg2"/>
+              </a:solidFill>
+              <a:ln>
+                <a:noFill/>
+              </a:ln>
+            </p:spPr>
+            <p:txBody>
+              <a:bodyPr wrap="square">
+                <a:spAutoFit/>
+              </a:bodyPr>
+              <a:lstStyle/>
+              <a:p>
+                <a:r>
+                  <a:rPr lang="en-GB" dirty="0"/>
+                  <a:t>m</a:t>
+                </a:r>
+                <a:r>
+                  <a:rPr lang="en-DE" dirty="0"/>
+                  <a:t>odel, e.g., for linear regression:</a:t>
+                </a:r>
+              </a:p>
+              <a:p>
+                <a:pPr/>
+                <a14:m>
+                  <m:oMathPara xmlns:m="http://schemas.openxmlformats.org/officeDocument/2006/math">
+                    <m:oMathParaPr>
+                      <m:jc m:val="centerGroup"/>
+                    </m:oMathParaPr>
+                    <m:oMath xmlns:m="http://schemas.openxmlformats.org/officeDocument/2006/math">
+                      <m:r>
+                        <a:rPr lang="en-US" b="0" i="1" smtClean="0">
+                          <a:latin typeface="Cambria Math" panose="02040503050406030204" pitchFamily="18" charset="0"/>
+                        </a:rPr>
+                        <m:t>𝑝</m:t>
+                      </m:r>
+                      <m:d>
+                        <m:dPr>
+                          <m:ctrlPr>
+                            <a:rPr lang="en-US" b="0" i="1" smtClean="0">
+                              <a:latin typeface="Cambria Math" panose="02040503050406030204" pitchFamily="18" charset="0"/>
+                            </a:rPr>
+                          </m:ctrlPr>
+                        </m:dPr>
+                        <m:e>
+                          <m:sSub>
+                            <m:sSubPr>
+                              <m:ctrlPr>
+                                <a:rPr lang="en-US" i="1">
+                                  <a:latin typeface="Cambria Math" panose="02040503050406030204" pitchFamily="18" charset="0"/>
+                                </a:rPr>
+                              </m:ctrlPr>
+                            </m:sSubPr>
+                            <m:e>
+                              <m:r>
+                                <a:rPr lang="en-US" i="1">
+                                  <a:latin typeface="Cambria Math" panose="02040503050406030204" pitchFamily="18" charset="0"/>
+                                </a:rPr>
+                                <m:t>𝑦</m:t>
+                              </m:r>
+                            </m:e>
+                            <m:sub>
+                              <m:r>
+                                <a:rPr lang="en-US" i="1">
+                                  <a:latin typeface="Cambria Math" panose="02040503050406030204" pitchFamily="18" charset="0"/>
+                                </a:rPr>
+                                <m:t>𝑖</m:t>
+                              </m:r>
+                            </m:sub>
+                          </m:sSub>
+                          <m:r>
+                            <a:rPr lang="en-US" b="0" i="1" smtClean="0">
+                              <a:latin typeface="Cambria Math" panose="02040503050406030204" pitchFamily="18" charset="0"/>
+                            </a:rPr>
+                            <m:t>|</m:t>
+                          </m:r>
+                          <m:sSub>
+                            <m:sSubPr>
+                              <m:ctrlPr>
+                                <a:rPr lang="en-US" b="1" i="1">
+                                  <a:latin typeface="Cambria Math" panose="02040503050406030204" pitchFamily="18" charset="0"/>
+                                </a:rPr>
+                              </m:ctrlPr>
+                            </m:sSubPr>
+                            <m:e>
+                              <m:r>
+                                <a:rPr lang="en-US" b="1" i="1">
+                                  <a:latin typeface="Cambria Math" panose="02040503050406030204" pitchFamily="18" charset="0"/>
+                                </a:rPr>
+                                <m:t>𝒙</m:t>
+                              </m:r>
+                            </m:e>
+                            <m:sub>
+                              <m:r>
+                                <a:rPr lang="en-US" i="1">
+                                  <a:latin typeface="Cambria Math" panose="02040503050406030204" pitchFamily="18" charset="0"/>
+                                </a:rPr>
+                                <m:t>𝑖</m:t>
+                              </m:r>
+                            </m:sub>
+                          </m:sSub>
+                        </m:e>
+                      </m:d>
+                      <m:r>
+                        <a:rPr lang="en-US" b="0" i="1" smtClean="0">
+                          <a:latin typeface="Cambria Math" panose="02040503050406030204" pitchFamily="18" charset="0"/>
+                        </a:rPr>
+                        <m:t>=</m:t>
+                      </m:r>
+                      <m:r>
+                        <a:rPr lang="en-US" b="0" i="1" smtClean="0">
+                          <a:latin typeface="Cambria Math" panose="02040503050406030204" pitchFamily="18" charset="0"/>
+                          <a:ea typeface="Cambria Math" panose="02040503050406030204" pitchFamily="18" charset="0"/>
+                        </a:rPr>
+                        <m:t>𝒩</m:t>
+                      </m:r>
+                      <m:d>
+                        <m:dPr>
+                          <m:ctrlPr>
+                            <a:rPr lang="en-US" b="0" i="1" smtClean="0">
+                              <a:latin typeface="Cambria Math" panose="02040503050406030204" pitchFamily="18" charset="0"/>
+                            </a:rPr>
+                          </m:ctrlPr>
+                        </m:dPr>
+                        <m:e>
+                          <m:r>
+                            <a:rPr lang="en-US" b="0" i="1" smtClean="0">
+                              <a:latin typeface="Cambria Math" panose="02040503050406030204" pitchFamily="18" charset="0"/>
+                            </a:rPr>
+                            <m:t>𝑦</m:t>
+                          </m:r>
+                          <m:r>
+                            <a:rPr lang="en-US" b="0" i="1" smtClean="0">
+                              <a:latin typeface="Cambria Math" panose="02040503050406030204" pitchFamily="18" charset="0"/>
+                            </a:rPr>
+                            <m:t>;</m:t>
+                          </m:r>
+                          <m:acc>
+                            <m:accPr>
+                              <m:chr m:val="̂"/>
+                              <m:ctrlPr>
+                                <a:rPr lang="en-US" i="1">
+                                  <a:latin typeface="Cambria Math" panose="02040503050406030204" pitchFamily="18" charset="0"/>
+                                  <a:ea typeface="Cambria Math" panose="02040503050406030204" pitchFamily="18" charset="0"/>
+                                </a:rPr>
+                              </m:ctrlPr>
+                            </m:accPr>
+                            <m:e>
+                              <m:r>
+                                <a:rPr lang="en-US" i="1">
+                                  <a:latin typeface="Cambria Math" panose="02040503050406030204" pitchFamily="18" charset="0"/>
+                                  <a:ea typeface="Cambria Math" panose="02040503050406030204" pitchFamily="18" charset="0"/>
+                                </a:rPr>
+                                <m:t>𝛼</m:t>
+                              </m:r>
+                            </m:e>
+                          </m:acc>
+                          <m:r>
+                            <a:rPr lang="en-US" i="1">
+                              <a:latin typeface="Cambria Math" panose="02040503050406030204" pitchFamily="18" charset="0"/>
+                              <a:ea typeface="Cambria Math" panose="02040503050406030204" pitchFamily="18" charset="0"/>
+                            </a:rPr>
+                            <m:t>+</m:t>
+                          </m:r>
+                          <m:sSub>
+                            <m:sSubPr>
+                              <m:ctrlPr>
+                                <a:rPr lang="en-US" b="1" i="1">
+                                  <a:latin typeface="Cambria Math" panose="02040503050406030204" pitchFamily="18" charset="0"/>
+                                </a:rPr>
+                              </m:ctrlPr>
+                            </m:sSubPr>
+                            <m:e>
+                              <m:r>
+                                <a:rPr lang="en-US" b="1" i="1">
+                                  <a:latin typeface="Cambria Math" panose="02040503050406030204" pitchFamily="18" charset="0"/>
+                                </a:rPr>
+                                <m:t>𝒙</m:t>
+                              </m:r>
+                            </m:e>
+                            <m:sub>
+                              <m:r>
+                                <a:rPr lang="en-US" i="1">
+                                  <a:latin typeface="Cambria Math" panose="02040503050406030204" pitchFamily="18" charset="0"/>
+                                </a:rPr>
+                                <m:t>𝑖</m:t>
+                              </m:r>
+                            </m:sub>
+                          </m:sSub>
+                          <m:r>
+                            <a:rPr lang="en-US" b="0" i="1" smtClean="0">
+                              <a:latin typeface="Cambria Math" panose="02040503050406030204" pitchFamily="18" charset="0"/>
+                            </a:rPr>
+                            <m:t> </m:t>
+                          </m:r>
+                          <m:acc>
+                            <m:accPr>
+                              <m:chr m:val="̂"/>
+                              <m:ctrlPr>
+                                <a:rPr lang="en-US" i="1">
+                                  <a:latin typeface="Cambria Math" panose="02040503050406030204" pitchFamily="18" charset="0"/>
+                                  <a:ea typeface="Cambria Math" panose="02040503050406030204" pitchFamily="18" charset="0"/>
+                                </a:rPr>
+                              </m:ctrlPr>
+                            </m:accPr>
+                            <m:e>
+                              <m:r>
+                                <a:rPr lang="en-US" b="1" i="1">
+                                  <a:latin typeface="Cambria Math" panose="02040503050406030204" pitchFamily="18" charset="0"/>
+                                  <a:ea typeface="Cambria Math" panose="02040503050406030204" pitchFamily="18" charset="0"/>
+                                </a:rPr>
+                                <m:t>𝜷</m:t>
+                              </m:r>
+                            </m:e>
+                          </m:acc>
+                          <m:r>
+                            <a:rPr lang="en-US" b="0" i="1" smtClean="0">
+                              <a:latin typeface="Cambria Math" panose="02040503050406030204" pitchFamily="18" charset="0"/>
+                              <a:ea typeface="Cambria Math" panose="02040503050406030204" pitchFamily="18" charset="0"/>
+                            </a:rPr>
+                            <m:t>,</m:t>
+                          </m:r>
+                          <m:sSup>
+                            <m:sSupPr>
+                              <m:ctrlPr>
+                                <a:rPr lang="en-US" b="0" i="1" smtClean="0">
+                                  <a:latin typeface="Cambria Math" panose="02040503050406030204" pitchFamily="18" charset="0"/>
+                                </a:rPr>
+                              </m:ctrlPr>
+                            </m:sSupPr>
+                            <m:e>
+                              <m:r>
+                                <a:rPr lang="en-US" b="0" i="1" smtClean="0">
+                                  <a:latin typeface="Cambria Math" panose="02040503050406030204" pitchFamily="18" charset="0"/>
+                                  <a:ea typeface="Cambria Math" panose="02040503050406030204" pitchFamily="18" charset="0"/>
+                                </a:rPr>
+                                <m:t>𝜎</m:t>
+                              </m:r>
+                            </m:e>
+                            <m:sup>
+                              <m:r>
+                                <a:rPr lang="en-US" b="0" i="1" smtClean="0">
+                                  <a:latin typeface="Cambria Math" panose="02040503050406030204" pitchFamily="18" charset="0"/>
+                                </a:rPr>
+                                <m:t>2</m:t>
+                              </m:r>
+                            </m:sup>
+                          </m:sSup>
+                        </m:e>
+                      </m:d>
+                    </m:oMath>
+                  </m:oMathPara>
+                </a14:m>
+                <a:endParaRPr lang="en-DE" dirty="0"/>
+              </a:p>
+              <a:p>
+                <a:pPr marL="285750" indent="-285750">
+                  <a:buFont typeface="Arial" panose="020B0604020202020204" pitchFamily="34" charset="0"/>
+                  <a:buChar char="•"/>
+                </a:pPr>
+                <a:r>
+                  <a:rPr lang="en-GB" dirty="0"/>
+                  <a:t>with </a:t>
+                </a:r>
+                <a14:m>
+                  <m:oMath xmlns:m="http://schemas.openxmlformats.org/officeDocument/2006/math">
+                    <m:r>
+                      <a:rPr lang="en-US" b="1" i="1">
+                        <a:latin typeface="Cambria Math" panose="02040503050406030204" pitchFamily="18" charset="0"/>
+                      </a:rPr>
+                      <m:t>𝒚</m:t>
+                    </m:r>
+                  </m:oMath>
+                </a14:m>
+                <a:r>
+                  <a:rPr lang="en-GB" dirty="0"/>
+                  <a:t>, </a:t>
+                </a:r>
+                <a14:m>
+                  <m:oMath xmlns:m="http://schemas.openxmlformats.org/officeDocument/2006/math">
+                    <m:r>
+                      <a:rPr lang="en-US" b="1" i="0" smtClean="0">
+                        <a:latin typeface="Cambria Math" panose="02040503050406030204" pitchFamily="18" charset="0"/>
+                      </a:rPr>
+                      <m:t>𝐗</m:t>
+                    </m:r>
+                  </m:oMath>
+                </a14:m>
+                <a:r>
+                  <a:rPr lang="en-GB" dirty="0"/>
+                  <a:t> g</a:t>
+                </a:r>
+                <a:r>
+                  <a:rPr lang="en-DE" dirty="0"/>
+                  <a:t>iven in training</a:t>
+                </a:r>
+              </a:p>
+              <a:p>
+                <a:pPr marL="285750" indent="-285750">
+                  <a:buFont typeface="Arial" panose="020B0604020202020204" pitchFamily="34" charset="0"/>
+                  <a:buChar char="•"/>
+                </a:pPr>
+                <a14:m>
+                  <m:oMath xmlns:m="http://schemas.openxmlformats.org/officeDocument/2006/math">
+                    <m:acc>
+                      <m:accPr>
+                        <m:chr m:val="̂"/>
+                        <m:ctrlPr>
+                          <a:rPr lang="en-GB" b="1" i="1" smtClean="0">
+                            <a:latin typeface="Cambria Math" panose="02040503050406030204" pitchFamily="18" charset="0"/>
+                            <a:ea typeface="Cambria Math" panose="02040503050406030204" pitchFamily="18" charset="0"/>
+                          </a:rPr>
+                        </m:ctrlPr>
+                      </m:accPr>
+                      <m:e>
+                        <m:r>
+                          <a:rPr lang="en-GB" b="1" i="1">
+                            <a:latin typeface="Cambria Math" panose="02040503050406030204" pitchFamily="18" charset="0"/>
+                            <a:ea typeface="Cambria Math" panose="02040503050406030204" pitchFamily="18" charset="0"/>
+                          </a:rPr>
+                          <m:t>𝜽</m:t>
+                        </m:r>
+                      </m:e>
+                    </m:acc>
+                    <m:r>
+                      <a:rPr lang="en-US" b="0" i="1" smtClean="0">
+                        <a:latin typeface="Cambria Math" panose="02040503050406030204" pitchFamily="18" charset="0"/>
+                        <a:ea typeface="Cambria Math" panose="02040503050406030204" pitchFamily="18" charset="0"/>
+                      </a:rPr>
+                      <m:t>=(</m:t>
+                    </m:r>
+                    <m:acc>
+                      <m:accPr>
+                        <m:chr m:val="̂"/>
+                        <m:ctrlPr>
+                          <a:rPr lang="en-US" b="0" i="1" smtClean="0">
+                            <a:latin typeface="Cambria Math" panose="02040503050406030204" pitchFamily="18" charset="0"/>
+                            <a:ea typeface="Cambria Math" panose="02040503050406030204" pitchFamily="18" charset="0"/>
+                          </a:rPr>
+                        </m:ctrlPr>
+                      </m:accPr>
+                      <m:e>
+                        <m:r>
+                          <a:rPr lang="en-US" i="1">
+                            <a:latin typeface="Cambria Math" panose="02040503050406030204" pitchFamily="18" charset="0"/>
+                            <a:ea typeface="Cambria Math" panose="02040503050406030204" pitchFamily="18" charset="0"/>
+                          </a:rPr>
+                          <m:t>𝛼</m:t>
+                        </m:r>
+                      </m:e>
+                    </m:acc>
+                    <m:r>
+                      <a:rPr lang="en-US" b="0" i="1" smtClean="0">
+                        <a:latin typeface="Cambria Math" panose="02040503050406030204" pitchFamily="18" charset="0"/>
+                        <a:ea typeface="Cambria Math" panose="02040503050406030204" pitchFamily="18" charset="0"/>
+                      </a:rPr>
+                      <m:t>,</m:t>
+                    </m:r>
+                    <m:acc>
+                      <m:accPr>
+                        <m:chr m:val="̂"/>
+                        <m:ctrlPr>
+                          <a:rPr lang="en-US" b="0" i="1" smtClean="0">
+                            <a:latin typeface="Cambria Math" panose="02040503050406030204" pitchFamily="18" charset="0"/>
+                            <a:ea typeface="Cambria Math" panose="02040503050406030204" pitchFamily="18" charset="0"/>
+                          </a:rPr>
+                        </m:ctrlPr>
+                      </m:accPr>
+                      <m:e>
+                        <m:r>
+                          <a:rPr lang="en-US" b="1" i="1">
+                            <a:latin typeface="Cambria Math" panose="02040503050406030204" pitchFamily="18" charset="0"/>
+                            <a:ea typeface="Cambria Math" panose="02040503050406030204" pitchFamily="18" charset="0"/>
+                          </a:rPr>
+                          <m:t>𝜷</m:t>
+                        </m:r>
+                      </m:e>
+                    </m:acc>
+                    <m:r>
+                      <a:rPr lang="en-US" b="0" i="0" smtClean="0">
+                        <a:latin typeface="Cambria Math" panose="02040503050406030204" pitchFamily="18" charset="0"/>
+                        <a:ea typeface="Cambria Math" panose="02040503050406030204" pitchFamily="18" charset="0"/>
+                      </a:rPr>
+                      <m:t>,</m:t>
+                    </m:r>
+                    <m:sSup>
+                      <m:sSupPr>
+                        <m:ctrlPr>
+                          <a:rPr lang="en-US" i="1">
+                            <a:latin typeface="Cambria Math" panose="02040503050406030204" pitchFamily="18" charset="0"/>
+                          </a:rPr>
+                        </m:ctrlPr>
+                      </m:sSupPr>
+                      <m:e>
+                        <m:acc>
+                          <m:accPr>
+                            <m:chr m:val="̂"/>
+                            <m:ctrlPr>
+                              <a:rPr lang="en-US" b="1" i="1" smtClean="0">
+                                <a:latin typeface="Cambria Math" panose="02040503050406030204" pitchFamily="18" charset="0"/>
+                                <a:ea typeface="Cambria Math" panose="02040503050406030204" pitchFamily="18" charset="0"/>
+                              </a:rPr>
+                            </m:ctrlPr>
+                          </m:accPr>
+                          <m:e>
+                            <m:r>
+                              <a:rPr lang="en-US" i="1">
+                                <a:latin typeface="Cambria Math" panose="02040503050406030204" pitchFamily="18" charset="0"/>
+                                <a:ea typeface="Cambria Math" panose="02040503050406030204" pitchFamily="18" charset="0"/>
+                              </a:rPr>
+                              <m:t>𝜎</m:t>
+                            </m:r>
+                          </m:e>
+                        </m:acc>
+                      </m:e>
+                      <m:sup>
+                        <m:r>
+                          <a:rPr lang="en-US" i="1">
+                            <a:latin typeface="Cambria Math" panose="02040503050406030204" pitchFamily="18" charset="0"/>
+                          </a:rPr>
+                          <m:t>2</m:t>
+                        </m:r>
+                      </m:sup>
+                    </m:sSup>
+                    <m:r>
+                      <a:rPr lang="en-US" b="0" i="1" smtClean="0">
+                        <a:latin typeface="Cambria Math" panose="02040503050406030204" pitchFamily="18" charset="0"/>
+                      </a:rPr>
+                      <m:t>)</m:t>
+                    </m:r>
+                  </m:oMath>
+                </a14:m>
+                <a:r>
+                  <a:rPr lang="en-DE" dirty="0"/>
+                  <a:t> to be estimated</a:t>
+                </a:r>
+              </a:p>
+            </p:txBody>
+          </p:sp>
+        </mc:Choice>
+        <mc:Fallback xmlns="">
+          <p:sp>
+            <p:nvSpPr>
+              <p:cNvPr id="5" name="TextBox 4">
+                <a:extLst>
+                  <a:ext uri="{FF2B5EF4-FFF2-40B4-BE49-F238E27FC236}">
+                    <a16:creationId xmlns:a16="http://schemas.microsoft.com/office/drawing/2014/main" id="{EF247870-2EBE-384D-F1E4-36BA1902C127}"/>
+                  </a:ext>
+                </a:extLst>
+              </p:cNvPr>
+              <p:cNvSpPr txBox="1">
+                <a:spLocks noRot="1" noChangeAspect="1" noMove="1" noResize="1" noEditPoints="1" noAdjustHandles="1" noChangeArrowheads="1" noChangeShapeType="1" noTextEdit="1"/>
+              </p:cNvSpPr>
+              <p:nvPr/>
+            </p:nvSpPr>
+            <p:spPr>
+              <a:xfrm>
+                <a:off x="8610600" y="681037"/>
+                <a:ext cx="3390243" cy="1250855"/>
+              </a:xfrm>
+              <a:prstGeom prst="rect">
+                <a:avLst/>
+              </a:prstGeom>
+              <a:blipFill>
+                <a:blip r:embed="rId3"/>
+                <a:stretch>
+                  <a:fillRect l="-1866" t="-2000" b="-7000"/>
+                </a:stretch>
+              </a:blipFill>
+              <a:ln>
+                <a:noFill/>
+              </a:ln>
+            </p:spPr>
+            <p:txBody>
+              <a:bodyPr/>
+              <a:lstStyle/>
+              <a:p>
+                <a:r>
+                  <a:rPr lang="en-DE">
+                    <a:noFill/>
+                  </a:rPr>
+                  <a:t> </a:t>
+                </a:r>
+              </a:p>
+            </p:txBody>
+          </p:sp>
+        </mc:Fallback>
+      </mc:AlternateContent>
+      <p:cxnSp>
+        <p:nvCxnSpPr>
+          <p:cNvPr id="7" name="Straight Arrow Connector 6">
+            <a:extLst>
+              <a:ext uri="{FF2B5EF4-FFF2-40B4-BE49-F238E27FC236}">
+                <a16:creationId xmlns:a16="http://schemas.microsoft.com/office/drawing/2014/main" id="{92BCCAE4-34C0-7788-FA9B-023B1837371A}"/>
+              </a:ext>
+            </a:extLst>
+          </p:cNvPr>
+          <p:cNvCxnSpPr>
+            <a:cxnSpLocks/>
+            <a:stCxn id="5" idx="1"/>
+          </p:cNvCxnSpPr>
+          <p:nvPr/>
+        </p:nvCxnSpPr>
+        <p:spPr>
+          <a:xfrm flipH="1">
+            <a:off x="7767145" y="1306465"/>
+            <a:ext cx="843455" cy="1373673"/>
+          </a:xfrm>
+          <a:prstGeom prst="straightConnector1">
+            <a:avLst/>
+          </a:prstGeom>
+          <a:ln>
+            <a:tailEnd type="triangle"/>
+          </a:ln>
+        </p:spPr>
+        <p:style>
+          <a:lnRef idx="1">
+            <a:schemeClr val="accent1"/>
+          </a:lnRef>
+          <a:fillRef idx="0">
+            <a:schemeClr val="accent1"/>
+          </a:fillRef>
+          <a:effectRef idx="0">
+            <a:schemeClr val="accent1"/>
+          </a:effectRef>
+          <a:fontRef idx="minor">
+            <a:schemeClr val="tx1"/>
+          </a:fontRef>
+        </p:style>
+      </p:cxnSp>
+      <p:sp>
+        <p:nvSpPr>
+          <p:cNvPr id="6" name="TextBox 5">
+            <a:extLst>
+              <a:ext uri="{FF2B5EF4-FFF2-40B4-BE49-F238E27FC236}">
+                <a16:creationId xmlns:a16="http://schemas.microsoft.com/office/drawing/2014/main" id="{36626CA9-DB03-94F8-2BE7-F9F356C1A3AA}"/>
+              </a:ext>
+            </a:extLst>
+          </p:cNvPr>
+          <p:cNvSpPr txBox="1"/>
+          <p:nvPr/>
+        </p:nvSpPr>
+        <p:spPr>
+          <a:xfrm>
+            <a:off x="4736758" y="6352143"/>
+            <a:ext cx="1881605" cy="369332"/>
+          </a:xfrm>
+          <a:prstGeom prst="rect">
+            <a:avLst/>
+          </a:prstGeom>
+          <a:noFill/>
+        </p:spPr>
+        <p:txBody>
+          <a:bodyPr wrap="none" rtlCol="0">
+            <a:spAutoFit/>
+          </a:bodyPr>
+          <a:lstStyle/>
+          <a:p>
+            <a:r>
+              <a:rPr lang="en-GB" dirty="0"/>
+              <a:t>objective function</a:t>
+            </a:r>
+          </a:p>
+        </p:txBody>
+      </p:sp>
+      <p:sp>
+        <p:nvSpPr>
+          <p:cNvPr id="8" name="Right Brace 7">
+            <a:extLst>
+              <a:ext uri="{FF2B5EF4-FFF2-40B4-BE49-F238E27FC236}">
+                <a16:creationId xmlns:a16="http://schemas.microsoft.com/office/drawing/2014/main" id="{A44FF520-3933-7B9D-E850-6817B769D990}"/>
+              </a:ext>
+            </a:extLst>
+          </p:cNvPr>
+          <p:cNvSpPr/>
+          <p:nvPr/>
+        </p:nvSpPr>
+        <p:spPr>
+          <a:xfrm rot="5400000">
+            <a:off x="5457502" y="5586047"/>
+            <a:ext cx="197837" cy="1342768"/>
+          </a:xfrm>
+          <a:prstGeom prst="rightBrace">
+            <a:avLst/>
+          </a:prstGeom>
+        </p:spPr>
+        <p:style>
+          <a:lnRef idx="1">
+            <a:schemeClr val="accent1"/>
+          </a:lnRef>
+          <a:fillRef idx="0">
+            <a:schemeClr val="accent1"/>
+          </a:fillRef>
+          <a:effectRef idx="0">
+            <a:schemeClr val="accent1"/>
+          </a:effectRef>
+          <a:fontRef idx="minor">
+            <a:schemeClr val="tx1"/>
+          </a:fontRef>
+        </p:style>
+        <p:txBody>
+          <a:bodyPr rtlCol="0" anchor="ctr"/>
+          <a:lstStyle/>
+          <a:p>
+            <a:pPr algn="ctr"/>
+            <a:endParaRPr lang="en-GB"/>
+          </a:p>
+        </p:txBody>
+      </p:sp>
+    </p:spTree>
+    <p:extLst>
+      <p:ext uri="{BB962C8B-B14F-4D97-AF65-F5344CB8AC3E}">
+        <p14:creationId xmlns:p14="http://schemas.microsoft.com/office/powerpoint/2010/main" val="1005939356"/>
       </p:ext>
     </p:extLst>
   </p:cSld>
